--- a/slides/week6.pptx
+++ b/slides/week6.pptx
@@ -5,18 +5,23 @@
     <p:sldMasterId id="2147483648" r:id="rId1"/>
   </p:sldMasterIdLst>
   <p:notesMasterIdLst>
-    <p:notesMasterId r:id="rId11"/>
+    <p:notesMasterId r:id="rId16"/>
   </p:notesMasterIdLst>
   <p:sldIdLst>
     <p:sldId id="256" r:id="rId2"/>
-    <p:sldId id="323" r:id="rId3"/>
-    <p:sldId id="325" r:id="rId4"/>
-    <p:sldId id="326" r:id="rId5"/>
-    <p:sldId id="327" r:id="rId6"/>
-    <p:sldId id="328" r:id="rId7"/>
-    <p:sldId id="329" r:id="rId8"/>
-    <p:sldId id="305" r:id="rId9"/>
-    <p:sldId id="320" r:id="rId10"/>
+    <p:sldId id="331" r:id="rId3"/>
+    <p:sldId id="323" r:id="rId4"/>
+    <p:sldId id="325" r:id="rId5"/>
+    <p:sldId id="326" r:id="rId6"/>
+    <p:sldId id="327" r:id="rId7"/>
+    <p:sldId id="328" r:id="rId8"/>
+    <p:sldId id="330" r:id="rId9"/>
+    <p:sldId id="329" r:id="rId10"/>
+    <p:sldId id="332" r:id="rId11"/>
+    <p:sldId id="333" r:id="rId12"/>
+    <p:sldId id="334" r:id="rId13"/>
+    <p:sldId id="305" r:id="rId14"/>
+    <p:sldId id="320" r:id="rId15"/>
   </p:sldIdLst>
   <p:sldSz cx="12192000" cy="6858000"/>
   <p:notesSz cx="6858000" cy="9144000"/>
@@ -580,7 +585,331 @@
 </p:notes>
 </file>
 
+<file path=ppt/notesSlides/notesSlide10.xml><?xml version="1.0" encoding="utf-8"?>
+<p:notes xmlns:a="http://schemas.openxmlformats.org/drawingml/2006/main" xmlns:r="http://schemas.openxmlformats.org/officeDocument/2006/relationships" xmlns:p="http://schemas.openxmlformats.org/presentationml/2006/main">
+  <p:cSld>
+    <p:spTree>
+      <p:nvGrpSpPr>
+        <p:cNvPr id="1" name="">
+          <a:extLst>
+            <a:ext uri="{FF2B5EF4-FFF2-40B4-BE49-F238E27FC236}">
+              <a16:creationId xmlns:a16="http://schemas.microsoft.com/office/drawing/2014/main" id="{7EB0E52A-AE9E-EF31-4847-15EA692A5E83}"/>
+            </a:ext>
+          </a:extLst>
+        </p:cNvPr>
+        <p:cNvGrpSpPr/>
+        <p:nvPr/>
+      </p:nvGrpSpPr>
+      <p:grpSpPr>
+        <a:xfrm>
+          <a:off x="0" y="0"/>
+          <a:ext cx="0" cy="0"/>
+          <a:chOff x="0" y="0"/>
+          <a:chExt cx="0" cy="0"/>
+        </a:xfrm>
+      </p:grpSpPr>
+      <p:sp>
+        <p:nvSpPr>
+          <p:cNvPr id="2" name="Segnaposto immagine diapositiva 1">
+            <a:extLst>
+              <a:ext uri="{FF2B5EF4-FFF2-40B4-BE49-F238E27FC236}">
+                <a16:creationId xmlns:a16="http://schemas.microsoft.com/office/drawing/2014/main" id="{93D7F543-3BA6-5432-8F7F-63BFB76AD3D8}"/>
+              </a:ext>
+            </a:extLst>
+          </p:cNvPr>
+          <p:cNvSpPr>
+            <a:spLocks noGrp="1" noRot="1" noChangeAspect="1"/>
+          </p:cNvSpPr>
+          <p:nvPr>
+            <p:ph type="sldImg"/>
+          </p:nvPr>
+        </p:nvSpPr>
+        <p:spPr/>
+      </p:sp>
+      <p:sp>
+        <p:nvSpPr>
+          <p:cNvPr id="3" name="Segnaposto note 2">
+            <a:extLst>
+              <a:ext uri="{FF2B5EF4-FFF2-40B4-BE49-F238E27FC236}">
+                <a16:creationId xmlns:a16="http://schemas.microsoft.com/office/drawing/2014/main" id="{E7432BF7-36A7-ED07-6245-B860036BA951}"/>
+              </a:ext>
+            </a:extLst>
+          </p:cNvPr>
+          <p:cNvSpPr>
+            <a:spLocks noGrp="1"/>
+          </p:cNvSpPr>
+          <p:nvPr>
+            <p:ph type="body" idx="1"/>
+          </p:nvPr>
+        </p:nvSpPr>
+        <p:spPr/>
+        <p:txBody>
+          <a:bodyPr/>
+          <a:lstStyle/>
+          <a:p>
+            <a:endParaRPr lang="it-IT" dirty="0"/>
+          </a:p>
+        </p:txBody>
+      </p:sp>
+      <p:sp>
+        <p:nvSpPr>
+          <p:cNvPr id="4" name="Segnaposto numero diapositiva 3">
+            <a:extLst>
+              <a:ext uri="{FF2B5EF4-FFF2-40B4-BE49-F238E27FC236}">
+                <a16:creationId xmlns:a16="http://schemas.microsoft.com/office/drawing/2014/main" id="{23DD010B-06B2-5CB6-74AD-2035CBDEACD3}"/>
+              </a:ext>
+            </a:extLst>
+          </p:cNvPr>
+          <p:cNvSpPr>
+            <a:spLocks noGrp="1"/>
+          </p:cNvSpPr>
+          <p:nvPr>
+            <p:ph type="sldNum" sz="quarter" idx="5"/>
+          </p:nvPr>
+        </p:nvSpPr>
+        <p:spPr/>
+        <p:txBody>
+          <a:bodyPr/>
+          <a:lstStyle/>
+          <a:p>
+            <a:fld id="{C205392F-55BF-4B8E-AF01-45F81C88C286}" type="slidenum">
+              <a:rPr lang="it-IT" smtClean="0"/>
+              <a:t>11</a:t>
+            </a:fld>
+            <a:endParaRPr lang="it-IT"/>
+          </a:p>
+        </p:txBody>
+      </p:sp>
+    </p:spTree>
+    <p:extLst>
+      <p:ext uri="{BB962C8B-B14F-4D97-AF65-F5344CB8AC3E}">
+        <p14:creationId xmlns:p14="http://schemas.microsoft.com/office/powerpoint/2010/main" val="2782922747"/>
+      </p:ext>
+    </p:extLst>
+  </p:cSld>
+  <p:clrMapOvr>
+    <a:masterClrMapping/>
+  </p:clrMapOvr>
+</p:notes>
+</file>
+
+<file path=ppt/notesSlides/notesSlide11.xml><?xml version="1.0" encoding="utf-8"?>
+<p:notes xmlns:a="http://schemas.openxmlformats.org/drawingml/2006/main" xmlns:r="http://schemas.openxmlformats.org/officeDocument/2006/relationships" xmlns:p="http://schemas.openxmlformats.org/presentationml/2006/main">
+  <p:cSld>
+    <p:spTree>
+      <p:nvGrpSpPr>
+        <p:cNvPr id="1" name="">
+          <a:extLst>
+            <a:ext uri="{FF2B5EF4-FFF2-40B4-BE49-F238E27FC236}">
+              <a16:creationId xmlns:a16="http://schemas.microsoft.com/office/drawing/2014/main" id="{CB7A7664-76DA-527F-81D4-3A5832891AE2}"/>
+            </a:ext>
+          </a:extLst>
+        </p:cNvPr>
+        <p:cNvGrpSpPr/>
+        <p:nvPr/>
+      </p:nvGrpSpPr>
+      <p:grpSpPr>
+        <a:xfrm>
+          <a:off x="0" y="0"/>
+          <a:ext cx="0" cy="0"/>
+          <a:chOff x="0" y="0"/>
+          <a:chExt cx="0" cy="0"/>
+        </a:xfrm>
+      </p:grpSpPr>
+      <p:sp>
+        <p:nvSpPr>
+          <p:cNvPr id="2" name="Segnaposto immagine diapositiva 1">
+            <a:extLst>
+              <a:ext uri="{FF2B5EF4-FFF2-40B4-BE49-F238E27FC236}">
+                <a16:creationId xmlns:a16="http://schemas.microsoft.com/office/drawing/2014/main" id="{C217D64F-85FA-9242-C1AF-0381CAAF9284}"/>
+              </a:ext>
+            </a:extLst>
+          </p:cNvPr>
+          <p:cNvSpPr>
+            <a:spLocks noGrp="1" noRot="1" noChangeAspect="1"/>
+          </p:cNvSpPr>
+          <p:nvPr>
+            <p:ph type="sldImg"/>
+          </p:nvPr>
+        </p:nvSpPr>
+        <p:spPr/>
+      </p:sp>
+      <p:sp>
+        <p:nvSpPr>
+          <p:cNvPr id="3" name="Segnaposto note 2">
+            <a:extLst>
+              <a:ext uri="{FF2B5EF4-FFF2-40B4-BE49-F238E27FC236}">
+                <a16:creationId xmlns:a16="http://schemas.microsoft.com/office/drawing/2014/main" id="{3582EF77-62AA-DF3D-ADFA-F2F6A46624DC}"/>
+              </a:ext>
+            </a:extLst>
+          </p:cNvPr>
+          <p:cNvSpPr>
+            <a:spLocks noGrp="1"/>
+          </p:cNvSpPr>
+          <p:nvPr>
+            <p:ph type="body" idx="1"/>
+          </p:nvPr>
+        </p:nvSpPr>
+        <p:spPr/>
+        <p:txBody>
+          <a:bodyPr/>
+          <a:lstStyle/>
+          <a:p>
+            <a:endParaRPr lang="it-IT" dirty="0"/>
+          </a:p>
+        </p:txBody>
+      </p:sp>
+      <p:sp>
+        <p:nvSpPr>
+          <p:cNvPr id="4" name="Segnaposto numero diapositiva 3">
+            <a:extLst>
+              <a:ext uri="{FF2B5EF4-FFF2-40B4-BE49-F238E27FC236}">
+                <a16:creationId xmlns:a16="http://schemas.microsoft.com/office/drawing/2014/main" id="{0D6F1AA2-50E2-9593-05D2-77611599C5C6}"/>
+              </a:ext>
+            </a:extLst>
+          </p:cNvPr>
+          <p:cNvSpPr>
+            <a:spLocks noGrp="1"/>
+          </p:cNvSpPr>
+          <p:nvPr>
+            <p:ph type="sldNum" sz="quarter" idx="5"/>
+          </p:nvPr>
+        </p:nvSpPr>
+        <p:spPr/>
+        <p:txBody>
+          <a:bodyPr/>
+          <a:lstStyle/>
+          <a:p>
+            <a:fld id="{C205392F-55BF-4B8E-AF01-45F81C88C286}" type="slidenum">
+              <a:rPr lang="it-IT" smtClean="0"/>
+              <a:t>12</a:t>
+            </a:fld>
+            <a:endParaRPr lang="it-IT"/>
+          </a:p>
+        </p:txBody>
+      </p:sp>
+    </p:spTree>
+    <p:extLst>
+      <p:ext uri="{BB962C8B-B14F-4D97-AF65-F5344CB8AC3E}">
+        <p14:creationId xmlns:p14="http://schemas.microsoft.com/office/powerpoint/2010/main" val="623642223"/>
+      </p:ext>
+    </p:extLst>
+  </p:cSld>
+  <p:clrMapOvr>
+    <a:masterClrMapping/>
+  </p:clrMapOvr>
+</p:notes>
+</file>
+
 <file path=ppt/notesSlides/notesSlide2.xml><?xml version="1.0" encoding="utf-8"?>
+<p:notes xmlns:a="http://schemas.openxmlformats.org/drawingml/2006/main" xmlns:r="http://schemas.openxmlformats.org/officeDocument/2006/relationships" xmlns:p="http://schemas.openxmlformats.org/presentationml/2006/main">
+  <p:cSld>
+    <p:spTree>
+      <p:nvGrpSpPr>
+        <p:cNvPr id="1" name="">
+          <a:extLst>
+            <a:ext uri="{FF2B5EF4-FFF2-40B4-BE49-F238E27FC236}">
+              <a16:creationId xmlns:a16="http://schemas.microsoft.com/office/drawing/2014/main" id="{62853D2B-C14B-C923-E666-2BE98336C7E9}"/>
+            </a:ext>
+          </a:extLst>
+        </p:cNvPr>
+        <p:cNvGrpSpPr/>
+        <p:nvPr/>
+      </p:nvGrpSpPr>
+      <p:grpSpPr>
+        <a:xfrm>
+          <a:off x="0" y="0"/>
+          <a:ext cx="0" cy="0"/>
+          <a:chOff x="0" y="0"/>
+          <a:chExt cx="0" cy="0"/>
+        </a:xfrm>
+      </p:grpSpPr>
+      <p:sp>
+        <p:nvSpPr>
+          <p:cNvPr id="2" name="Segnaposto immagine diapositiva 1">
+            <a:extLst>
+              <a:ext uri="{FF2B5EF4-FFF2-40B4-BE49-F238E27FC236}">
+                <a16:creationId xmlns:a16="http://schemas.microsoft.com/office/drawing/2014/main" id="{41E73501-4C4F-7EA7-F309-EC9432A82AE5}"/>
+              </a:ext>
+            </a:extLst>
+          </p:cNvPr>
+          <p:cNvSpPr>
+            <a:spLocks noGrp="1" noRot="1" noChangeAspect="1"/>
+          </p:cNvSpPr>
+          <p:nvPr>
+            <p:ph type="sldImg"/>
+          </p:nvPr>
+        </p:nvSpPr>
+        <p:spPr/>
+      </p:sp>
+      <p:sp>
+        <p:nvSpPr>
+          <p:cNvPr id="3" name="Segnaposto note 2">
+            <a:extLst>
+              <a:ext uri="{FF2B5EF4-FFF2-40B4-BE49-F238E27FC236}">
+                <a16:creationId xmlns:a16="http://schemas.microsoft.com/office/drawing/2014/main" id="{5102C8D8-9566-F6BA-2D4C-09E243EDED39}"/>
+              </a:ext>
+            </a:extLst>
+          </p:cNvPr>
+          <p:cNvSpPr>
+            <a:spLocks noGrp="1"/>
+          </p:cNvSpPr>
+          <p:nvPr>
+            <p:ph type="body" idx="1"/>
+          </p:nvPr>
+        </p:nvSpPr>
+        <p:spPr/>
+        <p:txBody>
+          <a:bodyPr/>
+          <a:lstStyle/>
+          <a:p>
+            <a:endParaRPr lang="it-IT" dirty="0"/>
+          </a:p>
+        </p:txBody>
+      </p:sp>
+      <p:sp>
+        <p:nvSpPr>
+          <p:cNvPr id="4" name="Segnaposto numero diapositiva 3">
+            <a:extLst>
+              <a:ext uri="{FF2B5EF4-FFF2-40B4-BE49-F238E27FC236}">
+                <a16:creationId xmlns:a16="http://schemas.microsoft.com/office/drawing/2014/main" id="{0A1D6B02-C167-B05C-9F5F-29D88237B72E}"/>
+              </a:ext>
+            </a:extLst>
+          </p:cNvPr>
+          <p:cNvSpPr>
+            <a:spLocks noGrp="1"/>
+          </p:cNvSpPr>
+          <p:nvPr>
+            <p:ph type="sldNum" sz="quarter" idx="5"/>
+          </p:nvPr>
+        </p:nvSpPr>
+        <p:spPr/>
+        <p:txBody>
+          <a:bodyPr/>
+          <a:lstStyle/>
+          <a:p>
+            <a:fld id="{C205392F-55BF-4B8E-AF01-45F81C88C286}" type="slidenum">
+              <a:rPr lang="it-IT" smtClean="0"/>
+              <a:t>3</a:t>
+            </a:fld>
+            <a:endParaRPr lang="it-IT"/>
+          </a:p>
+        </p:txBody>
+      </p:sp>
+    </p:spTree>
+    <p:extLst>
+      <p:ext uri="{BB962C8B-B14F-4D97-AF65-F5344CB8AC3E}">
+        <p14:creationId xmlns:p14="http://schemas.microsoft.com/office/powerpoint/2010/main" val="1306429062"/>
+      </p:ext>
+    </p:extLst>
+  </p:cSld>
+  <p:clrMapOvr>
+    <a:masterClrMapping/>
+  </p:clrMapOvr>
+</p:notes>
+</file>
+
+<file path=ppt/notesSlides/notesSlide3.xml><?xml version="1.0" encoding="utf-8"?>
 <p:notes xmlns:a="http://schemas.openxmlformats.org/drawingml/2006/main" xmlns:r="http://schemas.openxmlformats.org/officeDocument/2006/relationships" xmlns:p="http://schemas.openxmlformats.org/presentationml/2006/main">
   <p:cSld>
     <p:spTree>
@@ -669,7 +998,7 @@
           <a:p>
             <a:fld id="{C205392F-55BF-4B8E-AF01-45F81C88C286}" type="slidenum">
               <a:rPr lang="it-IT" smtClean="0"/>
-              <a:t>3</a:t>
+              <a:t>4</a:t>
             </a:fld>
             <a:endParaRPr lang="it-IT"/>
           </a:p>
@@ -688,7 +1017,7 @@
 </p:notes>
 </file>
 
-<file path=ppt/notesSlides/notesSlide3.xml><?xml version="1.0" encoding="utf-8"?>
+<file path=ppt/notesSlides/notesSlide4.xml><?xml version="1.0" encoding="utf-8"?>
 <p:notes xmlns:a="http://schemas.openxmlformats.org/drawingml/2006/main" xmlns:r="http://schemas.openxmlformats.org/officeDocument/2006/relationships" xmlns:p="http://schemas.openxmlformats.org/presentationml/2006/main">
   <p:cSld>
     <p:spTree>
@@ -777,7 +1106,7 @@
           <a:p>
             <a:fld id="{C205392F-55BF-4B8E-AF01-45F81C88C286}" type="slidenum">
               <a:rPr lang="it-IT" smtClean="0"/>
-              <a:t>4</a:t>
+              <a:t>5</a:t>
             </a:fld>
             <a:endParaRPr lang="it-IT"/>
           </a:p>
@@ -796,7 +1125,7 @@
 </p:notes>
 </file>
 
-<file path=ppt/notesSlides/notesSlide4.xml><?xml version="1.0" encoding="utf-8"?>
+<file path=ppt/notesSlides/notesSlide5.xml><?xml version="1.0" encoding="utf-8"?>
 <p:notes xmlns:a="http://schemas.openxmlformats.org/drawingml/2006/main" xmlns:r="http://schemas.openxmlformats.org/officeDocument/2006/relationships" xmlns:p="http://schemas.openxmlformats.org/presentationml/2006/main">
   <p:cSld>
     <p:spTree>
@@ -885,7 +1214,7 @@
           <a:p>
             <a:fld id="{C205392F-55BF-4B8E-AF01-45F81C88C286}" type="slidenum">
               <a:rPr lang="it-IT" smtClean="0"/>
-              <a:t>5</a:t>
+              <a:t>6</a:t>
             </a:fld>
             <a:endParaRPr lang="it-IT"/>
           </a:p>
@@ -904,7 +1233,7 @@
 </p:notes>
 </file>
 
-<file path=ppt/notesSlides/notesSlide5.xml><?xml version="1.0" encoding="utf-8"?>
+<file path=ppt/notesSlides/notesSlide6.xml><?xml version="1.0" encoding="utf-8"?>
 <p:notes xmlns:a="http://schemas.openxmlformats.org/drawingml/2006/main" xmlns:r="http://schemas.openxmlformats.org/officeDocument/2006/relationships" xmlns:p="http://schemas.openxmlformats.org/presentationml/2006/main">
   <p:cSld>
     <p:spTree>
@@ -993,7 +1322,7 @@
           <a:p>
             <a:fld id="{C205392F-55BF-4B8E-AF01-45F81C88C286}" type="slidenum">
               <a:rPr lang="it-IT" smtClean="0"/>
-              <a:t>6</a:t>
+              <a:t>7</a:t>
             </a:fld>
             <a:endParaRPr lang="it-IT"/>
           </a:p>
@@ -1012,7 +1341,115 @@
 </p:notes>
 </file>
 
-<file path=ppt/notesSlides/notesSlide6.xml><?xml version="1.0" encoding="utf-8"?>
+<file path=ppt/notesSlides/notesSlide7.xml><?xml version="1.0" encoding="utf-8"?>
+<p:notes xmlns:a="http://schemas.openxmlformats.org/drawingml/2006/main" xmlns:r="http://schemas.openxmlformats.org/officeDocument/2006/relationships" xmlns:p="http://schemas.openxmlformats.org/presentationml/2006/main">
+  <p:cSld>
+    <p:spTree>
+      <p:nvGrpSpPr>
+        <p:cNvPr id="1" name="">
+          <a:extLst>
+            <a:ext uri="{FF2B5EF4-FFF2-40B4-BE49-F238E27FC236}">
+              <a16:creationId xmlns:a16="http://schemas.microsoft.com/office/drawing/2014/main" id="{0A18CEFD-3625-4A57-44B6-A06030ED7153}"/>
+            </a:ext>
+          </a:extLst>
+        </p:cNvPr>
+        <p:cNvGrpSpPr/>
+        <p:nvPr/>
+      </p:nvGrpSpPr>
+      <p:grpSpPr>
+        <a:xfrm>
+          <a:off x="0" y="0"/>
+          <a:ext cx="0" cy="0"/>
+          <a:chOff x="0" y="0"/>
+          <a:chExt cx="0" cy="0"/>
+        </a:xfrm>
+      </p:grpSpPr>
+      <p:sp>
+        <p:nvSpPr>
+          <p:cNvPr id="2" name="Segnaposto immagine diapositiva 1">
+            <a:extLst>
+              <a:ext uri="{FF2B5EF4-FFF2-40B4-BE49-F238E27FC236}">
+                <a16:creationId xmlns:a16="http://schemas.microsoft.com/office/drawing/2014/main" id="{E3F783D5-00A2-701B-4675-FBE1EE77DF89}"/>
+              </a:ext>
+            </a:extLst>
+          </p:cNvPr>
+          <p:cNvSpPr>
+            <a:spLocks noGrp="1" noRot="1" noChangeAspect="1"/>
+          </p:cNvSpPr>
+          <p:nvPr>
+            <p:ph type="sldImg"/>
+          </p:nvPr>
+        </p:nvSpPr>
+        <p:spPr/>
+      </p:sp>
+      <p:sp>
+        <p:nvSpPr>
+          <p:cNvPr id="3" name="Segnaposto note 2">
+            <a:extLst>
+              <a:ext uri="{FF2B5EF4-FFF2-40B4-BE49-F238E27FC236}">
+                <a16:creationId xmlns:a16="http://schemas.microsoft.com/office/drawing/2014/main" id="{EC04BEAE-A21D-A6AE-4C23-6E8FB3EEB2D4}"/>
+              </a:ext>
+            </a:extLst>
+          </p:cNvPr>
+          <p:cNvSpPr>
+            <a:spLocks noGrp="1"/>
+          </p:cNvSpPr>
+          <p:nvPr>
+            <p:ph type="body" idx="1"/>
+          </p:nvPr>
+        </p:nvSpPr>
+        <p:spPr/>
+        <p:txBody>
+          <a:bodyPr/>
+          <a:lstStyle/>
+          <a:p>
+            <a:endParaRPr lang="it-IT" dirty="0"/>
+          </a:p>
+        </p:txBody>
+      </p:sp>
+      <p:sp>
+        <p:nvSpPr>
+          <p:cNvPr id="4" name="Segnaposto numero diapositiva 3">
+            <a:extLst>
+              <a:ext uri="{FF2B5EF4-FFF2-40B4-BE49-F238E27FC236}">
+                <a16:creationId xmlns:a16="http://schemas.microsoft.com/office/drawing/2014/main" id="{2B4606D3-88CC-590D-B1E4-51275CBEB68F}"/>
+              </a:ext>
+            </a:extLst>
+          </p:cNvPr>
+          <p:cNvSpPr>
+            <a:spLocks noGrp="1"/>
+          </p:cNvSpPr>
+          <p:nvPr>
+            <p:ph type="sldNum" sz="quarter" idx="5"/>
+          </p:nvPr>
+        </p:nvSpPr>
+        <p:spPr/>
+        <p:txBody>
+          <a:bodyPr/>
+          <a:lstStyle/>
+          <a:p>
+            <a:fld id="{C205392F-55BF-4B8E-AF01-45F81C88C286}" type="slidenum">
+              <a:rPr lang="it-IT" smtClean="0"/>
+              <a:t>8</a:t>
+            </a:fld>
+            <a:endParaRPr lang="it-IT"/>
+          </a:p>
+        </p:txBody>
+      </p:sp>
+    </p:spTree>
+    <p:extLst>
+      <p:ext uri="{BB962C8B-B14F-4D97-AF65-F5344CB8AC3E}">
+        <p14:creationId xmlns:p14="http://schemas.microsoft.com/office/powerpoint/2010/main" val="3273684201"/>
+      </p:ext>
+    </p:extLst>
+  </p:cSld>
+  <p:clrMapOvr>
+    <a:masterClrMapping/>
+  </p:clrMapOvr>
+</p:notes>
+</file>
+
+<file path=ppt/notesSlides/notesSlide8.xml><?xml version="1.0" encoding="utf-8"?>
 <p:notes xmlns:a="http://schemas.openxmlformats.org/drawingml/2006/main" xmlns:r="http://schemas.openxmlformats.org/officeDocument/2006/relationships" xmlns:p="http://schemas.openxmlformats.org/presentationml/2006/main">
   <p:cSld>
     <p:spTree>
@@ -1101,7 +1538,7 @@
           <a:p>
             <a:fld id="{C205392F-55BF-4B8E-AF01-45F81C88C286}" type="slidenum">
               <a:rPr lang="it-IT" smtClean="0"/>
-              <a:t>7</a:t>
+              <a:t>9</a:t>
             </a:fld>
             <a:endParaRPr lang="it-IT"/>
           </a:p>
@@ -1111,6 +1548,114 @@
     <p:extLst>
       <p:ext uri="{BB962C8B-B14F-4D97-AF65-F5344CB8AC3E}">
         <p14:creationId xmlns:p14="http://schemas.microsoft.com/office/powerpoint/2010/main" val="99702548"/>
+      </p:ext>
+    </p:extLst>
+  </p:cSld>
+  <p:clrMapOvr>
+    <a:masterClrMapping/>
+  </p:clrMapOvr>
+</p:notes>
+</file>
+
+<file path=ppt/notesSlides/notesSlide9.xml><?xml version="1.0" encoding="utf-8"?>
+<p:notes xmlns:a="http://schemas.openxmlformats.org/drawingml/2006/main" xmlns:r="http://schemas.openxmlformats.org/officeDocument/2006/relationships" xmlns:p="http://schemas.openxmlformats.org/presentationml/2006/main">
+  <p:cSld>
+    <p:spTree>
+      <p:nvGrpSpPr>
+        <p:cNvPr id="1" name="">
+          <a:extLst>
+            <a:ext uri="{FF2B5EF4-FFF2-40B4-BE49-F238E27FC236}">
+              <a16:creationId xmlns:a16="http://schemas.microsoft.com/office/drawing/2014/main" id="{C4540D25-D513-44E6-7201-AA2F52787AEB}"/>
+            </a:ext>
+          </a:extLst>
+        </p:cNvPr>
+        <p:cNvGrpSpPr/>
+        <p:nvPr/>
+      </p:nvGrpSpPr>
+      <p:grpSpPr>
+        <a:xfrm>
+          <a:off x="0" y="0"/>
+          <a:ext cx="0" cy="0"/>
+          <a:chOff x="0" y="0"/>
+          <a:chExt cx="0" cy="0"/>
+        </a:xfrm>
+      </p:grpSpPr>
+      <p:sp>
+        <p:nvSpPr>
+          <p:cNvPr id="2" name="Segnaposto immagine diapositiva 1">
+            <a:extLst>
+              <a:ext uri="{FF2B5EF4-FFF2-40B4-BE49-F238E27FC236}">
+                <a16:creationId xmlns:a16="http://schemas.microsoft.com/office/drawing/2014/main" id="{2D180756-B18C-1C03-AA8B-27F7CABB3CC3}"/>
+              </a:ext>
+            </a:extLst>
+          </p:cNvPr>
+          <p:cNvSpPr>
+            <a:spLocks noGrp="1" noRot="1" noChangeAspect="1"/>
+          </p:cNvSpPr>
+          <p:nvPr>
+            <p:ph type="sldImg"/>
+          </p:nvPr>
+        </p:nvSpPr>
+        <p:spPr/>
+      </p:sp>
+      <p:sp>
+        <p:nvSpPr>
+          <p:cNvPr id="3" name="Segnaposto note 2">
+            <a:extLst>
+              <a:ext uri="{FF2B5EF4-FFF2-40B4-BE49-F238E27FC236}">
+                <a16:creationId xmlns:a16="http://schemas.microsoft.com/office/drawing/2014/main" id="{A1B72458-411A-8938-C76F-621AFCB05808}"/>
+              </a:ext>
+            </a:extLst>
+          </p:cNvPr>
+          <p:cNvSpPr>
+            <a:spLocks noGrp="1"/>
+          </p:cNvSpPr>
+          <p:nvPr>
+            <p:ph type="body" idx="1"/>
+          </p:nvPr>
+        </p:nvSpPr>
+        <p:spPr/>
+        <p:txBody>
+          <a:bodyPr/>
+          <a:lstStyle/>
+          <a:p>
+            <a:endParaRPr lang="it-IT" dirty="0"/>
+          </a:p>
+        </p:txBody>
+      </p:sp>
+      <p:sp>
+        <p:nvSpPr>
+          <p:cNvPr id="4" name="Segnaposto numero diapositiva 3">
+            <a:extLst>
+              <a:ext uri="{FF2B5EF4-FFF2-40B4-BE49-F238E27FC236}">
+                <a16:creationId xmlns:a16="http://schemas.microsoft.com/office/drawing/2014/main" id="{57E5F338-8551-8690-4EB8-39371D39D93A}"/>
+              </a:ext>
+            </a:extLst>
+          </p:cNvPr>
+          <p:cNvSpPr>
+            <a:spLocks noGrp="1"/>
+          </p:cNvSpPr>
+          <p:nvPr>
+            <p:ph type="sldNum" sz="quarter" idx="5"/>
+          </p:nvPr>
+        </p:nvSpPr>
+        <p:spPr/>
+        <p:txBody>
+          <a:bodyPr/>
+          <a:lstStyle/>
+          <a:p>
+            <a:fld id="{C205392F-55BF-4B8E-AF01-45F81C88C286}" type="slidenum">
+              <a:rPr lang="it-IT" smtClean="0"/>
+              <a:t>10</a:t>
+            </a:fld>
+            <a:endParaRPr lang="it-IT"/>
+          </a:p>
+        </p:txBody>
+      </p:sp>
+    </p:spTree>
+    <p:extLst>
+      <p:ext uri="{BB962C8B-B14F-4D97-AF65-F5344CB8AC3E}">
+        <p14:creationId xmlns:p14="http://schemas.microsoft.com/office/powerpoint/2010/main" val="3219570642"/>
       </p:ext>
     </p:extLst>
   </p:cSld>
@@ -4471,6 +5016,2392 @@
 </p:sld>
 </file>
 
+<file path=ppt/slides/slide10.xml><?xml version="1.0" encoding="utf-8"?>
+<p:sld xmlns:a="http://schemas.openxmlformats.org/drawingml/2006/main" xmlns:r="http://schemas.openxmlformats.org/officeDocument/2006/relationships" xmlns:p="http://schemas.openxmlformats.org/presentationml/2006/main">
+  <p:cSld>
+    <p:spTree>
+      <p:nvGrpSpPr>
+        <p:cNvPr id="1" name="">
+          <a:extLst>
+            <a:ext uri="{FF2B5EF4-FFF2-40B4-BE49-F238E27FC236}">
+              <a16:creationId xmlns:a16="http://schemas.microsoft.com/office/drawing/2014/main" id="{D5CE3C09-0DC8-3009-33E3-87B2E233BB42}"/>
+            </a:ext>
+          </a:extLst>
+        </p:cNvPr>
+        <p:cNvGrpSpPr/>
+        <p:nvPr/>
+      </p:nvGrpSpPr>
+      <p:grpSpPr>
+        <a:xfrm>
+          <a:off x="0" y="0"/>
+          <a:ext cx="0" cy="0"/>
+          <a:chOff x="0" y="0"/>
+          <a:chExt cx="0" cy="0"/>
+        </a:xfrm>
+      </p:grpSpPr>
+      <p:sp>
+        <p:nvSpPr>
+          <p:cNvPr id="2" name="Titolo 1">
+            <a:extLst>
+              <a:ext uri="{FF2B5EF4-FFF2-40B4-BE49-F238E27FC236}">
+                <a16:creationId xmlns:a16="http://schemas.microsoft.com/office/drawing/2014/main" id="{22508424-E383-5F56-74A1-426E2D6B7DD8}"/>
+              </a:ext>
+            </a:extLst>
+          </p:cNvPr>
+          <p:cNvSpPr>
+            <a:spLocks noGrp="1"/>
+          </p:cNvSpPr>
+          <p:nvPr>
+            <p:ph type="title"/>
+          </p:nvPr>
+        </p:nvSpPr>
+        <p:spPr>
+          <a:xfrm>
+            <a:off x="38100" y="69651"/>
+            <a:ext cx="12114000" cy="1153094"/>
+          </a:xfrm>
+          <a:prstGeom prst="roundRect">
+            <a:avLst>
+              <a:gd name="adj" fmla="val 36459"/>
+            </a:avLst>
+          </a:prstGeom>
+          <a:noFill/>
+        </p:spPr>
+        <p:txBody>
+          <a:bodyPr>
+            <a:noAutofit/>
+          </a:bodyPr>
+          <a:lstStyle/>
+          <a:p>
+            <a:r>
+              <a:rPr lang="en-US" sz="3400" b="1" dirty="0">
+                <a:solidFill>
+                  <a:srgbClr val="002060"/>
+                </a:solidFill>
+              </a:rPr>
+              <a:t>	FIND THE CRYSTAL FOOTPRINT THROUGH SCATTERING</a:t>
+            </a:r>
+            <a:endParaRPr lang="it-IT" sz="3400" b="1" dirty="0">
+              <a:solidFill>
+                <a:srgbClr val="002060"/>
+              </a:solidFill>
+            </a:endParaRPr>
+          </a:p>
+        </p:txBody>
+      </p:sp>
+      <p:sp>
+        <p:nvSpPr>
+          <p:cNvPr id="4" name="Segnaposto data 3">
+            <a:extLst>
+              <a:ext uri="{FF2B5EF4-FFF2-40B4-BE49-F238E27FC236}">
+                <a16:creationId xmlns:a16="http://schemas.microsoft.com/office/drawing/2014/main" id="{7986E310-6487-3BCC-B312-1308E013A78E}"/>
+              </a:ext>
+            </a:extLst>
+          </p:cNvPr>
+          <p:cNvSpPr>
+            <a:spLocks noGrp="1"/>
+          </p:cNvSpPr>
+          <p:nvPr>
+            <p:ph type="dt" sz="half" idx="10"/>
+          </p:nvPr>
+        </p:nvSpPr>
+        <p:spPr>
+          <a:xfrm>
+            <a:off x="838200" y="6356349"/>
+            <a:ext cx="2743200" cy="432000"/>
+          </a:xfrm>
+        </p:spPr>
+        <p:txBody>
+          <a:bodyPr/>
+          <a:lstStyle/>
+          <a:p>
+            <a:r>
+              <a:rPr lang="it-IT" sz="1500" b="1" dirty="0">
+                <a:solidFill>
+                  <a:srgbClr val="002060"/>
+                </a:solidFill>
+              </a:rPr>
+              <a:t>August 2026</a:t>
+            </a:r>
+          </a:p>
+        </p:txBody>
+      </p:sp>
+      <p:sp>
+        <p:nvSpPr>
+          <p:cNvPr id="5" name="Segnaposto piè di pagina 4">
+            <a:extLst>
+              <a:ext uri="{FF2B5EF4-FFF2-40B4-BE49-F238E27FC236}">
+                <a16:creationId xmlns:a16="http://schemas.microsoft.com/office/drawing/2014/main" id="{EB514782-42DA-66E5-A47A-44458CB00D8A}"/>
+              </a:ext>
+            </a:extLst>
+          </p:cNvPr>
+          <p:cNvSpPr>
+            <a:spLocks noGrp="1"/>
+          </p:cNvSpPr>
+          <p:nvPr>
+            <p:ph type="ftr" sz="quarter" idx="11"/>
+          </p:nvPr>
+        </p:nvSpPr>
+        <p:spPr>
+          <a:xfrm>
+            <a:off x="0" y="6356349"/>
+            <a:ext cx="12192000" cy="432000"/>
+          </a:xfrm>
+        </p:spPr>
+        <p:txBody>
+          <a:bodyPr/>
+          <a:lstStyle/>
+          <a:p>
+            <a:r>
+              <a:rPr lang="it-IT" sz="1500" b="1" dirty="0">
+                <a:solidFill>
+                  <a:srgbClr val="002060"/>
+                </a:solidFill>
+              </a:rPr>
+              <a:t>Anna Sofia Moro</a:t>
+            </a:r>
+          </a:p>
+        </p:txBody>
+      </p:sp>
+      <p:sp>
+        <p:nvSpPr>
+          <p:cNvPr id="6" name="Segnaposto numero diapositiva 5">
+            <a:extLst>
+              <a:ext uri="{FF2B5EF4-FFF2-40B4-BE49-F238E27FC236}">
+                <a16:creationId xmlns:a16="http://schemas.microsoft.com/office/drawing/2014/main" id="{21FA40DA-00B0-1804-59BE-900DC2043CDF}"/>
+              </a:ext>
+            </a:extLst>
+          </p:cNvPr>
+          <p:cNvSpPr>
+            <a:spLocks noGrp="1"/>
+          </p:cNvSpPr>
+          <p:nvPr>
+            <p:ph type="sldNum" sz="quarter" idx="12"/>
+          </p:nvPr>
+        </p:nvSpPr>
+        <p:spPr>
+          <a:xfrm>
+            <a:off x="8610600" y="6356349"/>
+            <a:ext cx="2743200" cy="432000"/>
+          </a:xfrm>
+        </p:spPr>
+        <p:txBody>
+          <a:bodyPr/>
+          <a:lstStyle/>
+          <a:p>
+            <a:fld id="{0A318BD9-CA14-4A83-ACF0-03D5918EB402}" type="slidenum">
+              <a:rPr lang="it-IT" sz="1500" b="1" smtClean="0">
+                <a:solidFill>
+                  <a:srgbClr val="002060"/>
+                </a:solidFill>
+              </a:rPr>
+              <a:t>10</a:t>
+            </a:fld>
+            <a:endParaRPr lang="it-IT" sz="1500" b="1" dirty="0">
+              <a:solidFill>
+                <a:srgbClr val="002060"/>
+              </a:solidFill>
+            </a:endParaRPr>
+          </a:p>
+        </p:txBody>
+      </p:sp>
+      <p:cxnSp>
+        <p:nvCxnSpPr>
+          <p:cNvPr id="10" name="Connettore diritto 9">
+            <a:extLst>
+              <a:ext uri="{FF2B5EF4-FFF2-40B4-BE49-F238E27FC236}">
+                <a16:creationId xmlns:a16="http://schemas.microsoft.com/office/drawing/2014/main" id="{2F1D6763-6BDB-076C-3E05-79BD7773D0EE}"/>
+              </a:ext>
+            </a:extLst>
+          </p:cNvPr>
+          <p:cNvCxnSpPr>
+            <a:cxnSpLocks/>
+          </p:cNvCxnSpPr>
+          <p:nvPr/>
+        </p:nvCxnSpPr>
+        <p:spPr>
+          <a:xfrm>
+            <a:off x="696000" y="1155368"/>
+            <a:ext cx="10800000" cy="0"/>
+          </a:xfrm>
+          <a:prstGeom prst="line">
+            <a:avLst/>
+          </a:prstGeom>
+          <a:ln w="38100">
+            <a:solidFill>
+              <a:srgbClr val="002060"/>
+            </a:solidFill>
+          </a:ln>
+        </p:spPr>
+        <p:style>
+          <a:lnRef idx="2">
+            <a:schemeClr val="accent1"/>
+          </a:lnRef>
+          <a:fillRef idx="0">
+            <a:schemeClr val="accent1"/>
+          </a:fillRef>
+          <a:effectRef idx="1">
+            <a:schemeClr val="accent1"/>
+          </a:effectRef>
+          <a:fontRef idx="minor">
+            <a:schemeClr val="tx1"/>
+          </a:fontRef>
+        </p:style>
+      </p:cxnSp>
+      <p:sp>
+        <p:nvSpPr>
+          <p:cNvPr id="13" name="CasellaDiTesto 12">
+            <a:extLst>
+              <a:ext uri="{FF2B5EF4-FFF2-40B4-BE49-F238E27FC236}">
+                <a16:creationId xmlns:a16="http://schemas.microsoft.com/office/drawing/2014/main" id="{21F1C976-80DB-CA2B-2A3E-977E89CC73D8}"/>
+              </a:ext>
+            </a:extLst>
+          </p:cNvPr>
+          <p:cNvSpPr txBox="1"/>
+          <p:nvPr/>
+        </p:nvSpPr>
+        <p:spPr>
+          <a:xfrm>
+            <a:off x="3048886" y="3244334"/>
+            <a:ext cx="6097772" cy="369332"/>
+          </a:xfrm>
+          <a:prstGeom prst="rect">
+            <a:avLst/>
+          </a:prstGeom>
+          <a:noFill/>
+        </p:spPr>
+        <p:txBody>
+          <a:bodyPr wrap="square">
+            <a:spAutoFit/>
+          </a:bodyPr>
+          <a:lstStyle/>
+          <a:p>
+            <a:endParaRPr lang="it-IT" dirty="0"/>
+          </a:p>
+        </p:txBody>
+      </p:sp>
+      <p:sp>
+        <p:nvSpPr>
+          <p:cNvPr id="15" name="CasellaDiTesto 14">
+            <a:extLst>
+              <a:ext uri="{FF2B5EF4-FFF2-40B4-BE49-F238E27FC236}">
+                <a16:creationId xmlns:a16="http://schemas.microsoft.com/office/drawing/2014/main" id="{C52E67DA-AC45-E3C0-7C3D-F969D6525BC8}"/>
+              </a:ext>
+            </a:extLst>
+          </p:cNvPr>
+          <p:cNvSpPr txBox="1"/>
+          <p:nvPr/>
+        </p:nvSpPr>
+        <p:spPr>
+          <a:xfrm>
+            <a:off x="3048886" y="3244334"/>
+            <a:ext cx="6097772" cy="369332"/>
+          </a:xfrm>
+          <a:prstGeom prst="rect">
+            <a:avLst/>
+          </a:prstGeom>
+          <a:noFill/>
+        </p:spPr>
+        <p:txBody>
+          <a:bodyPr wrap="square">
+            <a:spAutoFit/>
+          </a:bodyPr>
+          <a:lstStyle/>
+          <a:p>
+            <a:endParaRPr lang="it-IT" dirty="0"/>
+          </a:p>
+        </p:txBody>
+      </p:sp>
+      <mc:AlternateContent xmlns:mc="http://schemas.openxmlformats.org/markup-compatibility/2006">
+        <mc:Choice xmlns:a14="http://schemas.microsoft.com/office/drawing/2010/main" Requires="a14">
+          <p:sp>
+            <p:nvSpPr>
+              <p:cNvPr id="8" name="Content Placeholder 7">
+                <a:extLst>
+                  <a:ext uri="{FF2B5EF4-FFF2-40B4-BE49-F238E27FC236}">
+                    <a16:creationId xmlns:a16="http://schemas.microsoft.com/office/drawing/2014/main" id="{AFF42F02-1EC7-5E16-152F-2C57ADF8DEA0}"/>
+                  </a:ext>
+                </a:extLst>
+              </p:cNvPr>
+              <p:cNvSpPr>
+                <a:spLocks noGrp="1"/>
+              </p:cNvSpPr>
+              <p:nvPr>
+                <p:ph idx="1"/>
+              </p:nvPr>
+            </p:nvSpPr>
+            <p:spPr/>
+            <p:txBody>
+              <a:bodyPr/>
+              <a:lstStyle/>
+              <a:p>
+                <a:r>
+                  <a:rPr lang="en-US" dirty="0"/>
+                  <a:t>Limitation of the previous method:</a:t>
+                </a:r>
+              </a:p>
+              <a:p>
+                <a:pPr lvl="1"/>
+                <a:r>
+                  <a:rPr lang="en-US" dirty="0"/>
+                  <a:t>Isolating channeled particles to map the crystal footprint only uses a fraction of the beam (</a:t>
+                </a:r>
+                <a14:m>
+                  <m:oMath xmlns:m="http://schemas.openxmlformats.org/officeDocument/2006/math">
+                    <m:r>
+                      <a:rPr lang="en-US" b="0" i="1" smtClean="0">
+                        <a:latin typeface="Cambria Math" panose="02040503050406030204" pitchFamily="18" charset="0"/>
+                      </a:rPr>
+                      <m:t>∼20%</m:t>
+                    </m:r>
+                  </m:oMath>
+                </a14:m>
+                <a:r>
+                  <a:rPr lang="en-US" dirty="0"/>
+                  <a:t>)</a:t>
+                </a:r>
+              </a:p>
+              <a:p>
+                <a:pPr lvl="1"/>
+                <a:r>
+                  <a:rPr lang="en-US" dirty="0"/>
+                  <a:t>Can introduce biases near the edges</a:t>
+                </a:r>
+              </a:p>
+              <a:p>
+                <a:endParaRPr lang="en-US" dirty="0"/>
+              </a:p>
+              <a:p>
+                <a:r>
+                  <a:rPr lang="en-US" dirty="0"/>
+                  <a:t>Using MCS:</a:t>
+                </a:r>
+              </a:p>
+              <a:p>
+                <a:pPr lvl="1"/>
+                <a:r>
+                  <a:rPr lang="en-US" dirty="0"/>
+                  <a:t>Every particle that traverses the crystal interacts with its atomic lattice, picking up extra angular deflection due to MCS</a:t>
+                </a:r>
+              </a:p>
+              <a:p>
+                <a:pPr lvl="1"/>
+                <a:r>
+                  <a:rPr lang="en-US" dirty="0"/>
+                  <a:t>Using 100% of the available beam statistics</a:t>
+                </a:r>
+                <a:endParaRPr lang="it-IT" dirty="0"/>
+              </a:p>
+            </p:txBody>
+          </p:sp>
+        </mc:Choice>
+        <mc:Fallback>
+          <p:sp>
+            <p:nvSpPr>
+              <p:cNvPr id="8" name="Content Placeholder 7">
+                <a:extLst>
+                  <a:ext uri="{FF2B5EF4-FFF2-40B4-BE49-F238E27FC236}">
+                    <a16:creationId xmlns:a16="http://schemas.microsoft.com/office/drawing/2014/main" id="{AFF42F02-1EC7-5E16-152F-2C57ADF8DEA0}"/>
+                  </a:ext>
+                </a:extLst>
+              </p:cNvPr>
+              <p:cNvSpPr>
+                <a:spLocks noGrp="1" noRot="1" noChangeAspect="1" noMove="1" noResize="1" noEditPoints="1" noAdjustHandles="1" noChangeArrowheads="1" noChangeShapeType="1" noTextEdit="1"/>
+              </p:cNvSpPr>
+              <p:nvPr>
+                <p:ph idx="1"/>
+              </p:nvPr>
+            </p:nvSpPr>
+            <p:spPr>
+              <a:blipFill>
+                <a:blip r:embed="rId3"/>
+                <a:stretch>
+                  <a:fillRect l="-1043" t="-2381"/>
+                </a:stretch>
+              </a:blipFill>
+            </p:spPr>
+            <p:txBody>
+              <a:bodyPr/>
+              <a:lstStyle/>
+              <a:p>
+                <a:r>
+                  <a:rPr lang="it-IT">
+                    <a:noFill/>
+                  </a:rPr>
+                  <a:t> </a:t>
+                </a:r>
+              </a:p>
+            </p:txBody>
+          </p:sp>
+        </mc:Fallback>
+      </mc:AlternateContent>
+    </p:spTree>
+    <p:extLst>
+      <p:ext uri="{BB962C8B-B14F-4D97-AF65-F5344CB8AC3E}">
+        <p14:creationId xmlns:p14="http://schemas.microsoft.com/office/powerpoint/2010/main" val="2172884936"/>
+      </p:ext>
+    </p:extLst>
+  </p:cSld>
+  <p:clrMapOvr>
+    <a:masterClrMapping/>
+  </p:clrMapOvr>
+</p:sld>
+</file>
+
+<file path=ppt/slides/slide11.xml><?xml version="1.0" encoding="utf-8"?>
+<p:sld xmlns:a="http://schemas.openxmlformats.org/drawingml/2006/main" xmlns:r="http://schemas.openxmlformats.org/officeDocument/2006/relationships" xmlns:p="http://schemas.openxmlformats.org/presentationml/2006/main">
+  <p:cSld>
+    <p:spTree>
+      <p:nvGrpSpPr>
+        <p:cNvPr id="1" name="">
+          <a:extLst>
+            <a:ext uri="{FF2B5EF4-FFF2-40B4-BE49-F238E27FC236}">
+              <a16:creationId xmlns:a16="http://schemas.microsoft.com/office/drawing/2014/main" id="{965D405C-6D45-8954-1444-BCD11467AB8E}"/>
+            </a:ext>
+          </a:extLst>
+        </p:cNvPr>
+        <p:cNvGrpSpPr/>
+        <p:nvPr/>
+      </p:nvGrpSpPr>
+      <p:grpSpPr>
+        <a:xfrm>
+          <a:off x="0" y="0"/>
+          <a:ext cx="0" cy="0"/>
+          <a:chOff x="0" y="0"/>
+          <a:chExt cx="0" cy="0"/>
+        </a:xfrm>
+      </p:grpSpPr>
+      <p:sp>
+        <p:nvSpPr>
+          <p:cNvPr id="2" name="Titolo 1">
+            <a:extLst>
+              <a:ext uri="{FF2B5EF4-FFF2-40B4-BE49-F238E27FC236}">
+                <a16:creationId xmlns:a16="http://schemas.microsoft.com/office/drawing/2014/main" id="{5B4FCCAC-F871-19BB-1DB9-A799D5A5DC44}"/>
+              </a:ext>
+            </a:extLst>
+          </p:cNvPr>
+          <p:cNvSpPr>
+            <a:spLocks noGrp="1"/>
+          </p:cNvSpPr>
+          <p:nvPr>
+            <p:ph type="title"/>
+          </p:nvPr>
+        </p:nvSpPr>
+        <p:spPr>
+          <a:xfrm>
+            <a:off x="38100" y="69651"/>
+            <a:ext cx="12114000" cy="1153094"/>
+          </a:xfrm>
+          <a:prstGeom prst="roundRect">
+            <a:avLst>
+              <a:gd name="adj" fmla="val 36459"/>
+            </a:avLst>
+          </a:prstGeom>
+          <a:noFill/>
+        </p:spPr>
+        <p:txBody>
+          <a:bodyPr>
+            <a:noAutofit/>
+          </a:bodyPr>
+          <a:lstStyle/>
+          <a:p>
+            <a:r>
+              <a:rPr lang="en-US" sz="3400" b="1" dirty="0">
+                <a:solidFill>
+                  <a:srgbClr val="002060"/>
+                </a:solidFill>
+              </a:rPr>
+              <a:t>	FIND THE CRYSTAL FOOTPRINT THROUGH SCATTERING</a:t>
+            </a:r>
+            <a:endParaRPr lang="it-IT" sz="3400" b="1" dirty="0">
+              <a:solidFill>
+                <a:srgbClr val="002060"/>
+              </a:solidFill>
+            </a:endParaRPr>
+          </a:p>
+        </p:txBody>
+      </p:sp>
+      <p:sp>
+        <p:nvSpPr>
+          <p:cNvPr id="4" name="Segnaposto data 3">
+            <a:extLst>
+              <a:ext uri="{FF2B5EF4-FFF2-40B4-BE49-F238E27FC236}">
+                <a16:creationId xmlns:a16="http://schemas.microsoft.com/office/drawing/2014/main" id="{91CEAF9E-BE3E-5C6D-7367-619BAD4C658A}"/>
+              </a:ext>
+            </a:extLst>
+          </p:cNvPr>
+          <p:cNvSpPr>
+            <a:spLocks noGrp="1"/>
+          </p:cNvSpPr>
+          <p:nvPr>
+            <p:ph type="dt" sz="half" idx="10"/>
+          </p:nvPr>
+        </p:nvSpPr>
+        <p:spPr>
+          <a:xfrm>
+            <a:off x="838200" y="6356349"/>
+            <a:ext cx="2743200" cy="432000"/>
+          </a:xfrm>
+        </p:spPr>
+        <p:txBody>
+          <a:bodyPr/>
+          <a:lstStyle/>
+          <a:p>
+            <a:r>
+              <a:rPr lang="it-IT" sz="1500" b="1" dirty="0">
+                <a:solidFill>
+                  <a:srgbClr val="002060"/>
+                </a:solidFill>
+              </a:rPr>
+              <a:t>August 2026</a:t>
+            </a:r>
+          </a:p>
+        </p:txBody>
+      </p:sp>
+      <p:sp>
+        <p:nvSpPr>
+          <p:cNvPr id="5" name="Segnaposto piè di pagina 4">
+            <a:extLst>
+              <a:ext uri="{FF2B5EF4-FFF2-40B4-BE49-F238E27FC236}">
+                <a16:creationId xmlns:a16="http://schemas.microsoft.com/office/drawing/2014/main" id="{AC82166C-D392-7820-4D24-6F7B5D294F92}"/>
+              </a:ext>
+            </a:extLst>
+          </p:cNvPr>
+          <p:cNvSpPr>
+            <a:spLocks noGrp="1"/>
+          </p:cNvSpPr>
+          <p:nvPr>
+            <p:ph type="ftr" sz="quarter" idx="11"/>
+          </p:nvPr>
+        </p:nvSpPr>
+        <p:spPr>
+          <a:xfrm>
+            <a:off x="0" y="6356349"/>
+            <a:ext cx="12192000" cy="432000"/>
+          </a:xfrm>
+        </p:spPr>
+        <p:txBody>
+          <a:bodyPr/>
+          <a:lstStyle/>
+          <a:p>
+            <a:r>
+              <a:rPr lang="it-IT" sz="1500" b="1" dirty="0">
+                <a:solidFill>
+                  <a:srgbClr val="002060"/>
+                </a:solidFill>
+              </a:rPr>
+              <a:t>Anna Sofia Moro</a:t>
+            </a:r>
+          </a:p>
+        </p:txBody>
+      </p:sp>
+      <p:sp>
+        <p:nvSpPr>
+          <p:cNvPr id="6" name="Segnaposto numero diapositiva 5">
+            <a:extLst>
+              <a:ext uri="{FF2B5EF4-FFF2-40B4-BE49-F238E27FC236}">
+                <a16:creationId xmlns:a16="http://schemas.microsoft.com/office/drawing/2014/main" id="{DC7A8A5C-343C-FAD2-1497-574FADFE10F9}"/>
+              </a:ext>
+            </a:extLst>
+          </p:cNvPr>
+          <p:cNvSpPr>
+            <a:spLocks noGrp="1"/>
+          </p:cNvSpPr>
+          <p:nvPr>
+            <p:ph type="sldNum" sz="quarter" idx="12"/>
+          </p:nvPr>
+        </p:nvSpPr>
+        <p:spPr>
+          <a:xfrm>
+            <a:off x="8610600" y="6356349"/>
+            <a:ext cx="2743200" cy="432000"/>
+          </a:xfrm>
+        </p:spPr>
+        <p:txBody>
+          <a:bodyPr/>
+          <a:lstStyle/>
+          <a:p>
+            <a:fld id="{0A318BD9-CA14-4A83-ACF0-03D5918EB402}" type="slidenum">
+              <a:rPr lang="it-IT" sz="1500" b="1" smtClean="0">
+                <a:solidFill>
+                  <a:srgbClr val="002060"/>
+                </a:solidFill>
+              </a:rPr>
+              <a:t>11</a:t>
+            </a:fld>
+            <a:endParaRPr lang="it-IT" sz="1500" b="1" dirty="0">
+              <a:solidFill>
+                <a:srgbClr val="002060"/>
+              </a:solidFill>
+            </a:endParaRPr>
+          </a:p>
+        </p:txBody>
+      </p:sp>
+      <p:cxnSp>
+        <p:nvCxnSpPr>
+          <p:cNvPr id="10" name="Connettore diritto 9">
+            <a:extLst>
+              <a:ext uri="{FF2B5EF4-FFF2-40B4-BE49-F238E27FC236}">
+                <a16:creationId xmlns:a16="http://schemas.microsoft.com/office/drawing/2014/main" id="{E18365AA-B1D1-C447-2B5F-C638FA62D1A2}"/>
+              </a:ext>
+            </a:extLst>
+          </p:cNvPr>
+          <p:cNvCxnSpPr>
+            <a:cxnSpLocks/>
+          </p:cNvCxnSpPr>
+          <p:nvPr/>
+        </p:nvCxnSpPr>
+        <p:spPr>
+          <a:xfrm>
+            <a:off x="696000" y="1155368"/>
+            <a:ext cx="10800000" cy="0"/>
+          </a:xfrm>
+          <a:prstGeom prst="line">
+            <a:avLst/>
+          </a:prstGeom>
+          <a:ln w="38100">
+            <a:solidFill>
+              <a:srgbClr val="002060"/>
+            </a:solidFill>
+          </a:ln>
+        </p:spPr>
+        <p:style>
+          <a:lnRef idx="2">
+            <a:schemeClr val="accent1"/>
+          </a:lnRef>
+          <a:fillRef idx="0">
+            <a:schemeClr val="accent1"/>
+          </a:fillRef>
+          <a:effectRef idx="1">
+            <a:schemeClr val="accent1"/>
+          </a:effectRef>
+          <a:fontRef idx="minor">
+            <a:schemeClr val="tx1"/>
+          </a:fontRef>
+        </p:style>
+      </p:cxnSp>
+      <p:sp>
+        <p:nvSpPr>
+          <p:cNvPr id="13" name="CasellaDiTesto 12">
+            <a:extLst>
+              <a:ext uri="{FF2B5EF4-FFF2-40B4-BE49-F238E27FC236}">
+                <a16:creationId xmlns:a16="http://schemas.microsoft.com/office/drawing/2014/main" id="{C2B0EE0E-5840-CBFD-FF67-2A244F06E9C2}"/>
+              </a:ext>
+            </a:extLst>
+          </p:cNvPr>
+          <p:cNvSpPr txBox="1"/>
+          <p:nvPr/>
+        </p:nvSpPr>
+        <p:spPr>
+          <a:xfrm>
+            <a:off x="3048886" y="3244334"/>
+            <a:ext cx="6097772" cy="369332"/>
+          </a:xfrm>
+          <a:prstGeom prst="rect">
+            <a:avLst/>
+          </a:prstGeom>
+          <a:noFill/>
+        </p:spPr>
+        <p:txBody>
+          <a:bodyPr wrap="square">
+            <a:spAutoFit/>
+          </a:bodyPr>
+          <a:lstStyle/>
+          <a:p>
+            <a:endParaRPr lang="it-IT" dirty="0"/>
+          </a:p>
+        </p:txBody>
+      </p:sp>
+      <p:sp>
+        <p:nvSpPr>
+          <p:cNvPr id="15" name="CasellaDiTesto 14">
+            <a:extLst>
+              <a:ext uri="{FF2B5EF4-FFF2-40B4-BE49-F238E27FC236}">
+                <a16:creationId xmlns:a16="http://schemas.microsoft.com/office/drawing/2014/main" id="{23DD62F0-621C-EEC0-7E76-C612357FE56A}"/>
+              </a:ext>
+            </a:extLst>
+          </p:cNvPr>
+          <p:cNvSpPr txBox="1"/>
+          <p:nvPr/>
+        </p:nvSpPr>
+        <p:spPr>
+          <a:xfrm>
+            <a:off x="3048886" y="3244334"/>
+            <a:ext cx="6097772" cy="369332"/>
+          </a:xfrm>
+          <a:prstGeom prst="rect">
+            <a:avLst/>
+          </a:prstGeom>
+          <a:noFill/>
+        </p:spPr>
+        <p:txBody>
+          <a:bodyPr wrap="square">
+            <a:spAutoFit/>
+          </a:bodyPr>
+          <a:lstStyle/>
+          <a:p>
+            <a:endParaRPr lang="it-IT" dirty="0"/>
+          </a:p>
+        </p:txBody>
+      </p:sp>
+      <mc:AlternateContent xmlns:mc="http://schemas.openxmlformats.org/markup-compatibility/2006">
+        <mc:Choice xmlns:a14="http://schemas.microsoft.com/office/drawing/2010/main" Requires="a14">
+          <p:sp>
+            <p:nvSpPr>
+              <p:cNvPr id="8" name="Content Placeholder 7">
+                <a:extLst>
+                  <a:ext uri="{FF2B5EF4-FFF2-40B4-BE49-F238E27FC236}">
+                    <a16:creationId xmlns:a16="http://schemas.microsoft.com/office/drawing/2014/main" id="{6086EA36-9CCD-FD6F-2F86-F0947A12806B}"/>
+                  </a:ext>
+                </a:extLst>
+              </p:cNvPr>
+              <p:cNvSpPr>
+                <a:spLocks noGrp="1"/>
+              </p:cNvSpPr>
+              <p:nvPr>
+                <p:ph idx="1"/>
+              </p:nvPr>
+            </p:nvSpPr>
+            <p:spPr>
+              <a:xfrm>
+                <a:off x="838200" y="1312438"/>
+                <a:ext cx="10515600" cy="4864525"/>
+              </a:xfrm>
+            </p:spPr>
+            <p:txBody>
+              <a:bodyPr>
+                <a:normAutofit/>
+              </a:bodyPr>
+              <a:lstStyle/>
+              <a:p>
+                <a:r>
+                  <a:rPr lang="en-US" sz="2400" dirty="0"/>
+                  <a:t>For each bin the angular distribution of the outgoing tracks </a:t>
+                </a:r>
+                <a14:m>
+                  <m:oMath xmlns:m="http://schemas.openxmlformats.org/officeDocument/2006/math">
+                    <m:r>
+                      <m:rPr>
+                        <m:sty m:val="p"/>
+                      </m:rPr>
+                      <a:rPr lang="en-US" sz="2400" b="0" i="0" smtClean="0">
+                        <a:latin typeface="Cambria Math" panose="02040503050406030204" pitchFamily="18" charset="0"/>
+                      </a:rPr>
+                      <m:t>Δ</m:t>
+                    </m:r>
+                    <m:sSub>
+                      <m:sSubPr>
+                        <m:ctrlPr>
+                          <a:rPr lang="en-US" sz="2400" b="0" i="1" smtClean="0">
+                            <a:latin typeface="Cambria Math" panose="02040503050406030204" pitchFamily="18" charset="0"/>
+                          </a:rPr>
+                        </m:ctrlPr>
+                      </m:sSubPr>
+                      <m:e>
+                        <m:r>
+                          <a:rPr lang="en-US" sz="2400" b="0" i="1" smtClean="0">
+                            <a:latin typeface="Cambria Math" panose="02040503050406030204" pitchFamily="18" charset="0"/>
+                          </a:rPr>
+                          <m:t>𝜃</m:t>
+                        </m:r>
+                      </m:e>
+                      <m:sub>
+                        <m:r>
+                          <a:rPr lang="en-US" sz="2400" b="0" i="1" smtClean="0">
+                            <a:latin typeface="Cambria Math" panose="02040503050406030204" pitchFamily="18" charset="0"/>
+                          </a:rPr>
+                          <m:t>𝑥</m:t>
+                        </m:r>
+                      </m:sub>
+                    </m:sSub>
+                  </m:oMath>
+                </a14:m>
+                <a:r>
+                  <a:rPr lang="it-IT" sz="2400" dirty="0"/>
+                  <a:t> is fitted with a Gaussian curve</a:t>
+                </a:r>
+              </a:p>
+              <a:p>
+                <a:r>
+                  <a:rPr lang="it-IT" sz="2400" dirty="0"/>
+                  <a:t>The extracted gaussian widths </a:t>
+                </a:r>
+                <a14:m>
+                  <m:oMath xmlns:m="http://schemas.openxmlformats.org/officeDocument/2006/math">
+                    <m:r>
+                      <a:rPr lang="en-US" sz="2400" b="0" i="1" smtClean="0">
+                        <a:latin typeface="Cambria Math" panose="02040503050406030204" pitchFamily="18" charset="0"/>
+                      </a:rPr>
+                      <m:t>𝜎</m:t>
+                    </m:r>
+                  </m:oMath>
+                </a14:m>
+                <a:r>
+                  <a:rPr lang="it-IT" sz="2400" dirty="0"/>
+                  <a:t> are plotted against the impact position</a:t>
+                </a:r>
+              </a:p>
+              <a:p>
+                <a:r>
+                  <a:rPr lang="it-IT" sz="2400" dirty="0"/>
+                  <a:t>The transition between the outside and inside regions is fitted using a Error function (Erf)</a:t>
+                </a:r>
+              </a:p>
+            </p:txBody>
+          </p:sp>
+        </mc:Choice>
+        <mc:Fallback>
+          <p:sp>
+            <p:nvSpPr>
+              <p:cNvPr id="8" name="Content Placeholder 7">
+                <a:extLst>
+                  <a:ext uri="{FF2B5EF4-FFF2-40B4-BE49-F238E27FC236}">
+                    <a16:creationId xmlns:a16="http://schemas.microsoft.com/office/drawing/2014/main" id="{6086EA36-9CCD-FD6F-2F86-F0947A12806B}"/>
+                  </a:ext>
+                </a:extLst>
+              </p:cNvPr>
+              <p:cNvSpPr>
+                <a:spLocks noGrp="1" noRot="1" noChangeAspect="1" noMove="1" noResize="1" noEditPoints="1" noAdjustHandles="1" noChangeArrowheads="1" noChangeShapeType="1" noTextEdit="1"/>
+              </p:cNvSpPr>
+              <p:nvPr>
+                <p:ph idx="1"/>
+              </p:nvPr>
+            </p:nvSpPr>
+            <p:spPr>
+              <a:xfrm>
+                <a:off x="838200" y="1312438"/>
+                <a:ext cx="10515600" cy="4864525"/>
+              </a:xfrm>
+              <a:blipFill>
+                <a:blip r:embed="rId3"/>
+                <a:stretch>
+                  <a:fillRect l="-812" t="-1629" r="-870"/>
+                </a:stretch>
+              </a:blipFill>
+            </p:spPr>
+            <p:txBody>
+              <a:bodyPr/>
+              <a:lstStyle/>
+              <a:p>
+                <a:r>
+                  <a:rPr lang="it-IT">
+                    <a:noFill/>
+                  </a:rPr>
+                  <a:t> </a:t>
+                </a:r>
+              </a:p>
+            </p:txBody>
+          </p:sp>
+        </mc:Fallback>
+      </mc:AlternateContent>
+      <p:pic>
+        <p:nvPicPr>
+          <p:cNvPr id="7" name="Picture 6">
+            <a:extLst>
+              <a:ext uri="{FF2B5EF4-FFF2-40B4-BE49-F238E27FC236}">
+                <a16:creationId xmlns:a16="http://schemas.microsoft.com/office/drawing/2014/main" id="{AB431E9E-C74E-05B8-41A3-42262D2D8526}"/>
+              </a:ext>
+            </a:extLst>
+          </p:cNvPr>
+          <p:cNvPicPr>
+            <a:picLocks noChangeAspect="1"/>
+          </p:cNvPicPr>
+          <p:nvPr/>
+        </p:nvPicPr>
+        <p:blipFill>
+          <a:blip r:embed="rId4">
+            <a:extLst>
+              <a:ext uri="{28A0092B-C50C-407E-A947-70E740481C1C}">
+                <a14:useLocalDpi xmlns:a14="http://schemas.microsoft.com/office/drawing/2010/main" val="0"/>
+              </a:ext>
+            </a:extLst>
+          </a:blip>
+          <a:srcRect t="6396"/>
+          <a:stretch>
+            <a:fillRect/>
+          </a:stretch>
+        </p:blipFill>
+        <p:spPr>
+          <a:xfrm>
+            <a:off x="6815570" y="3341082"/>
+            <a:ext cx="4501923" cy="3015267"/>
+          </a:xfrm>
+          <a:prstGeom prst="rect">
+            <a:avLst/>
+          </a:prstGeom>
+        </p:spPr>
+      </p:pic>
+      <p:pic>
+        <p:nvPicPr>
+          <p:cNvPr id="11" name="Picture 10">
+            <a:extLst>
+              <a:ext uri="{FF2B5EF4-FFF2-40B4-BE49-F238E27FC236}">
+                <a16:creationId xmlns:a16="http://schemas.microsoft.com/office/drawing/2014/main" id="{079D28AD-20B1-4AF9-15AE-F5E4998B8015}"/>
+              </a:ext>
+            </a:extLst>
+          </p:cNvPr>
+          <p:cNvPicPr>
+            <a:picLocks noChangeAspect="1"/>
+          </p:cNvPicPr>
+          <p:nvPr/>
+        </p:nvPicPr>
+        <p:blipFill>
+          <a:blip r:embed="rId5">
+            <a:extLst>
+              <a:ext uri="{28A0092B-C50C-407E-A947-70E740481C1C}">
+                <a14:useLocalDpi xmlns:a14="http://schemas.microsoft.com/office/drawing/2010/main" val="0"/>
+              </a:ext>
+            </a:extLst>
+          </a:blip>
+          <a:srcRect t="5355"/>
+          <a:stretch>
+            <a:fillRect/>
+          </a:stretch>
+        </p:blipFill>
+        <p:spPr>
+          <a:xfrm>
+            <a:off x="1531437" y="3341082"/>
+            <a:ext cx="4320000" cy="2925574"/>
+          </a:xfrm>
+          <a:prstGeom prst="rect">
+            <a:avLst/>
+          </a:prstGeom>
+        </p:spPr>
+      </p:pic>
+      <p:sp>
+        <p:nvSpPr>
+          <p:cNvPr id="12" name="Rectangle: Rounded Corners 11">
+            <a:extLst>
+              <a:ext uri="{FF2B5EF4-FFF2-40B4-BE49-F238E27FC236}">
+                <a16:creationId xmlns:a16="http://schemas.microsoft.com/office/drawing/2014/main" id="{9D9C38B2-29CB-9342-E615-7E96DC8F48A2}"/>
+              </a:ext>
+            </a:extLst>
+          </p:cNvPr>
+          <p:cNvSpPr/>
+          <p:nvPr/>
+        </p:nvSpPr>
+        <p:spPr>
+          <a:xfrm>
+            <a:off x="4436076" y="4411362"/>
+            <a:ext cx="1504987" cy="593124"/>
+          </a:xfrm>
+          <a:prstGeom prst="roundRect">
+            <a:avLst/>
+          </a:prstGeom>
+          <a:solidFill>
+            <a:schemeClr val="bg1"/>
+          </a:solidFill>
+          <a:ln w="38100">
+            <a:solidFill>
+              <a:srgbClr val="FFC000"/>
+            </a:solidFill>
+          </a:ln>
+        </p:spPr>
+        <p:style>
+          <a:lnRef idx="2">
+            <a:schemeClr val="accent1">
+              <a:shade val="15000"/>
+            </a:schemeClr>
+          </a:lnRef>
+          <a:fillRef idx="1">
+            <a:schemeClr val="accent1"/>
+          </a:fillRef>
+          <a:effectRef idx="0">
+            <a:schemeClr val="accent1"/>
+          </a:effectRef>
+          <a:fontRef idx="minor">
+            <a:schemeClr val="lt1"/>
+          </a:fontRef>
+        </p:style>
+        <p:txBody>
+          <a:bodyPr rtlCol="0" anchor="ctr"/>
+          <a:lstStyle/>
+          <a:p>
+            <a:pPr algn="ctr"/>
+            <a:r>
+              <a:rPr lang="en-US" sz="2000" dirty="0">
+                <a:solidFill>
+                  <a:schemeClr val="tx1"/>
+                </a:solidFill>
+              </a:rPr>
+              <a:t>OUTSIDE</a:t>
+            </a:r>
+            <a:endParaRPr lang="it-IT" sz="2000" dirty="0">
+              <a:solidFill>
+                <a:schemeClr val="tx1"/>
+              </a:solidFill>
+            </a:endParaRPr>
+          </a:p>
+        </p:txBody>
+      </p:sp>
+      <p:sp>
+        <p:nvSpPr>
+          <p:cNvPr id="16" name="Rectangle: Rounded Corners 15">
+            <a:extLst>
+              <a:ext uri="{FF2B5EF4-FFF2-40B4-BE49-F238E27FC236}">
+                <a16:creationId xmlns:a16="http://schemas.microsoft.com/office/drawing/2014/main" id="{AD36F4BE-A80C-E642-02E1-5246DAF049E6}"/>
+              </a:ext>
+            </a:extLst>
+          </p:cNvPr>
+          <p:cNvSpPr/>
+          <p:nvPr/>
+        </p:nvSpPr>
+        <p:spPr>
+          <a:xfrm>
+            <a:off x="10330879" y="4411362"/>
+            <a:ext cx="1504987" cy="593124"/>
+          </a:xfrm>
+          <a:prstGeom prst="roundRect">
+            <a:avLst/>
+          </a:prstGeom>
+          <a:solidFill>
+            <a:schemeClr val="bg1"/>
+          </a:solidFill>
+          <a:ln w="38100">
+            <a:solidFill>
+              <a:srgbClr val="FFC000"/>
+            </a:solidFill>
+          </a:ln>
+        </p:spPr>
+        <p:style>
+          <a:lnRef idx="2">
+            <a:schemeClr val="accent1">
+              <a:shade val="15000"/>
+            </a:schemeClr>
+          </a:lnRef>
+          <a:fillRef idx="1">
+            <a:schemeClr val="accent1"/>
+          </a:fillRef>
+          <a:effectRef idx="0">
+            <a:schemeClr val="accent1"/>
+          </a:effectRef>
+          <a:fontRef idx="minor">
+            <a:schemeClr val="lt1"/>
+          </a:fontRef>
+        </p:style>
+        <p:txBody>
+          <a:bodyPr rtlCol="0" anchor="ctr"/>
+          <a:lstStyle/>
+          <a:p>
+            <a:pPr algn="ctr"/>
+            <a:r>
+              <a:rPr lang="en-US" sz="2000" dirty="0">
+                <a:solidFill>
+                  <a:schemeClr val="tx1"/>
+                </a:solidFill>
+              </a:rPr>
+              <a:t>INSIDE</a:t>
+            </a:r>
+            <a:endParaRPr lang="it-IT" sz="2000" dirty="0">
+              <a:solidFill>
+                <a:schemeClr val="tx1"/>
+              </a:solidFill>
+            </a:endParaRPr>
+          </a:p>
+        </p:txBody>
+      </p:sp>
+    </p:spTree>
+    <p:extLst>
+      <p:ext uri="{BB962C8B-B14F-4D97-AF65-F5344CB8AC3E}">
+        <p14:creationId xmlns:p14="http://schemas.microsoft.com/office/powerpoint/2010/main" val="1571421055"/>
+      </p:ext>
+    </p:extLst>
+  </p:cSld>
+  <p:clrMapOvr>
+    <a:masterClrMapping/>
+  </p:clrMapOvr>
+</p:sld>
+</file>
+
+<file path=ppt/slides/slide12.xml><?xml version="1.0" encoding="utf-8"?>
+<p:sld xmlns:a="http://schemas.openxmlformats.org/drawingml/2006/main" xmlns:r="http://schemas.openxmlformats.org/officeDocument/2006/relationships" xmlns:p="http://schemas.openxmlformats.org/presentationml/2006/main">
+  <p:cSld>
+    <p:spTree>
+      <p:nvGrpSpPr>
+        <p:cNvPr id="1" name="">
+          <a:extLst>
+            <a:ext uri="{FF2B5EF4-FFF2-40B4-BE49-F238E27FC236}">
+              <a16:creationId xmlns:a16="http://schemas.microsoft.com/office/drawing/2014/main" id="{DE37A32D-8FC5-0D92-3505-A21082727900}"/>
+            </a:ext>
+          </a:extLst>
+        </p:cNvPr>
+        <p:cNvGrpSpPr/>
+        <p:nvPr/>
+      </p:nvGrpSpPr>
+      <p:grpSpPr>
+        <a:xfrm>
+          <a:off x="0" y="0"/>
+          <a:ext cx="0" cy="0"/>
+          <a:chOff x="0" y="0"/>
+          <a:chExt cx="0" cy="0"/>
+        </a:xfrm>
+      </p:grpSpPr>
+      <p:sp>
+        <p:nvSpPr>
+          <p:cNvPr id="2" name="Titolo 1">
+            <a:extLst>
+              <a:ext uri="{FF2B5EF4-FFF2-40B4-BE49-F238E27FC236}">
+                <a16:creationId xmlns:a16="http://schemas.microsoft.com/office/drawing/2014/main" id="{14353289-9AD8-440E-3B9A-5505DEB2B083}"/>
+              </a:ext>
+            </a:extLst>
+          </p:cNvPr>
+          <p:cNvSpPr>
+            <a:spLocks noGrp="1"/>
+          </p:cNvSpPr>
+          <p:nvPr>
+            <p:ph type="title"/>
+          </p:nvPr>
+        </p:nvSpPr>
+        <p:spPr>
+          <a:xfrm>
+            <a:off x="38100" y="69651"/>
+            <a:ext cx="12114000" cy="1153094"/>
+          </a:xfrm>
+          <a:prstGeom prst="roundRect">
+            <a:avLst>
+              <a:gd name="adj" fmla="val 36459"/>
+            </a:avLst>
+          </a:prstGeom>
+          <a:noFill/>
+        </p:spPr>
+        <p:txBody>
+          <a:bodyPr>
+            <a:noAutofit/>
+          </a:bodyPr>
+          <a:lstStyle/>
+          <a:p>
+            <a:r>
+              <a:rPr lang="en-US" sz="3400" b="1" dirty="0">
+                <a:solidFill>
+                  <a:srgbClr val="002060"/>
+                </a:solidFill>
+              </a:rPr>
+              <a:t>	FIND THE CRYSTAL FOOTPRINT THROUGH SCATTERING</a:t>
+            </a:r>
+            <a:endParaRPr lang="it-IT" sz="3400" b="1" dirty="0">
+              <a:solidFill>
+                <a:srgbClr val="002060"/>
+              </a:solidFill>
+            </a:endParaRPr>
+          </a:p>
+        </p:txBody>
+      </p:sp>
+      <p:sp>
+        <p:nvSpPr>
+          <p:cNvPr id="4" name="Segnaposto data 3">
+            <a:extLst>
+              <a:ext uri="{FF2B5EF4-FFF2-40B4-BE49-F238E27FC236}">
+                <a16:creationId xmlns:a16="http://schemas.microsoft.com/office/drawing/2014/main" id="{5DDE659F-8F35-A966-2CD7-4D988A771723}"/>
+              </a:ext>
+            </a:extLst>
+          </p:cNvPr>
+          <p:cNvSpPr>
+            <a:spLocks noGrp="1"/>
+          </p:cNvSpPr>
+          <p:nvPr>
+            <p:ph type="dt" sz="half" idx="10"/>
+          </p:nvPr>
+        </p:nvSpPr>
+        <p:spPr>
+          <a:xfrm>
+            <a:off x="838200" y="6356349"/>
+            <a:ext cx="2743200" cy="432000"/>
+          </a:xfrm>
+        </p:spPr>
+        <p:txBody>
+          <a:bodyPr/>
+          <a:lstStyle/>
+          <a:p>
+            <a:r>
+              <a:rPr lang="it-IT" sz="1500" b="1" dirty="0">
+                <a:solidFill>
+                  <a:srgbClr val="002060"/>
+                </a:solidFill>
+              </a:rPr>
+              <a:t>August 2026</a:t>
+            </a:r>
+          </a:p>
+        </p:txBody>
+      </p:sp>
+      <p:sp>
+        <p:nvSpPr>
+          <p:cNvPr id="5" name="Segnaposto piè di pagina 4">
+            <a:extLst>
+              <a:ext uri="{FF2B5EF4-FFF2-40B4-BE49-F238E27FC236}">
+                <a16:creationId xmlns:a16="http://schemas.microsoft.com/office/drawing/2014/main" id="{7D36E6FC-21F1-EE10-F936-6E7D303DE7CE}"/>
+              </a:ext>
+            </a:extLst>
+          </p:cNvPr>
+          <p:cNvSpPr>
+            <a:spLocks noGrp="1"/>
+          </p:cNvSpPr>
+          <p:nvPr>
+            <p:ph type="ftr" sz="quarter" idx="11"/>
+          </p:nvPr>
+        </p:nvSpPr>
+        <p:spPr>
+          <a:xfrm>
+            <a:off x="0" y="6356349"/>
+            <a:ext cx="12192000" cy="432000"/>
+          </a:xfrm>
+        </p:spPr>
+        <p:txBody>
+          <a:bodyPr/>
+          <a:lstStyle/>
+          <a:p>
+            <a:r>
+              <a:rPr lang="it-IT" sz="1500" b="1" dirty="0">
+                <a:solidFill>
+                  <a:srgbClr val="002060"/>
+                </a:solidFill>
+              </a:rPr>
+              <a:t>Anna Sofia Moro</a:t>
+            </a:r>
+          </a:p>
+        </p:txBody>
+      </p:sp>
+      <p:sp>
+        <p:nvSpPr>
+          <p:cNvPr id="6" name="Segnaposto numero diapositiva 5">
+            <a:extLst>
+              <a:ext uri="{FF2B5EF4-FFF2-40B4-BE49-F238E27FC236}">
+                <a16:creationId xmlns:a16="http://schemas.microsoft.com/office/drawing/2014/main" id="{03956885-FDA0-D03A-7CA8-19E0EC4F712F}"/>
+              </a:ext>
+            </a:extLst>
+          </p:cNvPr>
+          <p:cNvSpPr>
+            <a:spLocks noGrp="1"/>
+          </p:cNvSpPr>
+          <p:nvPr>
+            <p:ph type="sldNum" sz="quarter" idx="12"/>
+          </p:nvPr>
+        </p:nvSpPr>
+        <p:spPr>
+          <a:xfrm>
+            <a:off x="8610600" y="6356349"/>
+            <a:ext cx="2743200" cy="432000"/>
+          </a:xfrm>
+        </p:spPr>
+        <p:txBody>
+          <a:bodyPr/>
+          <a:lstStyle/>
+          <a:p>
+            <a:fld id="{0A318BD9-CA14-4A83-ACF0-03D5918EB402}" type="slidenum">
+              <a:rPr lang="it-IT" sz="1500" b="1" smtClean="0">
+                <a:solidFill>
+                  <a:srgbClr val="002060"/>
+                </a:solidFill>
+              </a:rPr>
+              <a:t>12</a:t>
+            </a:fld>
+            <a:endParaRPr lang="it-IT" sz="1500" b="1" dirty="0">
+              <a:solidFill>
+                <a:srgbClr val="002060"/>
+              </a:solidFill>
+            </a:endParaRPr>
+          </a:p>
+        </p:txBody>
+      </p:sp>
+      <p:cxnSp>
+        <p:nvCxnSpPr>
+          <p:cNvPr id="10" name="Connettore diritto 9">
+            <a:extLst>
+              <a:ext uri="{FF2B5EF4-FFF2-40B4-BE49-F238E27FC236}">
+                <a16:creationId xmlns:a16="http://schemas.microsoft.com/office/drawing/2014/main" id="{B485EEFC-A8DC-F8C5-14AF-14F7F3E81BF6}"/>
+              </a:ext>
+            </a:extLst>
+          </p:cNvPr>
+          <p:cNvCxnSpPr>
+            <a:cxnSpLocks/>
+          </p:cNvCxnSpPr>
+          <p:nvPr/>
+        </p:nvCxnSpPr>
+        <p:spPr>
+          <a:xfrm>
+            <a:off x="696000" y="1155368"/>
+            <a:ext cx="10800000" cy="0"/>
+          </a:xfrm>
+          <a:prstGeom prst="line">
+            <a:avLst/>
+          </a:prstGeom>
+          <a:ln w="38100">
+            <a:solidFill>
+              <a:srgbClr val="002060"/>
+            </a:solidFill>
+          </a:ln>
+        </p:spPr>
+        <p:style>
+          <a:lnRef idx="2">
+            <a:schemeClr val="accent1"/>
+          </a:lnRef>
+          <a:fillRef idx="0">
+            <a:schemeClr val="accent1"/>
+          </a:fillRef>
+          <a:effectRef idx="1">
+            <a:schemeClr val="accent1"/>
+          </a:effectRef>
+          <a:fontRef idx="minor">
+            <a:schemeClr val="tx1"/>
+          </a:fontRef>
+        </p:style>
+      </p:cxnSp>
+      <p:sp>
+        <p:nvSpPr>
+          <p:cNvPr id="13" name="CasellaDiTesto 12">
+            <a:extLst>
+              <a:ext uri="{FF2B5EF4-FFF2-40B4-BE49-F238E27FC236}">
+                <a16:creationId xmlns:a16="http://schemas.microsoft.com/office/drawing/2014/main" id="{09BEE80B-6033-01E9-AEA5-3E75E472FC4F}"/>
+              </a:ext>
+            </a:extLst>
+          </p:cNvPr>
+          <p:cNvSpPr txBox="1"/>
+          <p:nvPr/>
+        </p:nvSpPr>
+        <p:spPr>
+          <a:xfrm>
+            <a:off x="3048886" y="3244334"/>
+            <a:ext cx="6097772" cy="369332"/>
+          </a:xfrm>
+          <a:prstGeom prst="rect">
+            <a:avLst/>
+          </a:prstGeom>
+          <a:noFill/>
+        </p:spPr>
+        <p:txBody>
+          <a:bodyPr wrap="square">
+            <a:spAutoFit/>
+          </a:bodyPr>
+          <a:lstStyle/>
+          <a:p>
+            <a:endParaRPr lang="it-IT" dirty="0"/>
+          </a:p>
+        </p:txBody>
+      </p:sp>
+      <p:sp>
+        <p:nvSpPr>
+          <p:cNvPr id="15" name="CasellaDiTesto 14">
+            <a:extLst>
+              <a:ext uri="{FF2B5EF4-FFF2-40B4-BE49-F238E27FC236}">
+                <a16:creationId xmlns:a16="http://schemas.microsoft.com/office/drawing/2014/main" id="{6D01C0A9-8B4B-EB8F-A538-388A89B20FE7}"/>
+              </a:ext>
+            </a:extLst>
+          </p:cNvPr>
+          <p:cNvSpPr txBox="1"/>
+          <p:nvPr/>
+        </p:nvSpPr>
+        <p:spPr>
+          <a:xfrm>
+            <a:off x="3048886" y="3244334"/>
+            <a:ext cx="6097772" cy="369332"/>
+          </a:xfrm>
+          <a:prstGeom prst="rect">
+            <a:avLst/>
+          </a:prstGeom>
+          <a:noFill/>
+        </p:spPr>
+        <p:txBody>
+          <a:bodyPr wrap="square">
+            <a:spAutoFit/>
+          </a:bodyPr>
+          <a:lstStyle/>
+          <a:p>
+            <a:endParaRPr lang="it-IT" dirty="0"/>
+          </a:p>
+        </p:txBody>
+      </p:sp>
+      <p:pic>
+        <p:nvPicPr>
+          <p:cNvPr id="9" name="Content Placeholder 8">
+            <a:extLst>
+              <a:ext uri="{FF2B5EF4-FFF2-40B4-BE49-F238E27FC236}">
+                <a16:creationId xmlns:a16="http://schemas.microsoft.com/office/drawing/2014/main" id="{CB96617C-F915-8A03-9469-0E7F7F511DC3}"/>
+              </a:ext>
+            </a:extLst>
+          </p:cNvPr>
+          <p:cNvPicPr>
+            <a:picLocks noGrp="1" noChangeAspect="1"/>
+          </p:cNvPicPr>
+          <p:nvPr>
+            <p:ph idx="1"/>
+          </p:nvPr>
+        </p:nvPicPr>
+        <p:blipFill>
+          <a:blip r:embed="rId3">
+            <a:extLst>
+              <a:ext uri="{28A0092B-C50C-407E-A947-70E740481C1C}">
+                <a14:useLocalDpi xmlns:a14="http://schemas.microsoft.com/office/drawing/2010/main" val="0"/>
+              </a:ext>
+            </a:extLst>
+          </a:blip>
+          <a:stretch>
+            <a:fillRect/>
+          </a:stretch>
+        </p:blipFill>
+        <p:spPr>
+          <a:xfrm>
+            <a:off x="2271165" y="1312863"/>
+            <a:ext cx="7649670" cy="4864100"/>
+          </a:xfrm>
+          <a:prstGeom prst="rect">
+            <a:avLst/>
+          </a:prstGeom>
+        </p:spPr>
+      </p:pic>
+      <p:pic>
+        <p:nvPicPr>
+          <p:cNvPr id="7" name="Picture 6">
+            <a:extLst>
+              <a:ext uri="{FF2B5EF4-FFF2-40B4-BE49-F238E27FC236}">
+                <a16:creationId xmlns:a16="http://schemas.microsoft.com/office/drawing/2014/main" id="{75056139-0729-303B-C7A2-C103BD4EB36F}"/>
+              </a:ext>
+            </a:extLst>
+          </p:cNvPr>
+          <p:cNvPicPr>
+            <a:picLocks noChangeAspect="1"/>
+          </p:cNvPicPr>
+          <p:nvPr/>
+        </p:nvPicPr>
+        <p:blipFill>
+          <a:blip r:embed="rId4">
+            <a:extLst>
+              <a:ext uri="{28A0092B-C50C-407E-A947-70E740481C1C}">
+                <a14:useLocalDpi xmlns:a14="http://schemas.microsoft.com/office/drawing/2010/main" val="0"/>
+              </a:ext>
+            </a:extLst>
+          </a:blip>
+          <a:srcRect t="6396"/>
+          <a:stretch>
+            <a:fillRect/>
+          </a:stretch>
+        </p:blipFill>
+        <p:spPr>
+          <a:xfrm>
+            <a:off x="7928946" y="1451083"/>
+            <a:ext cx="2687477" cy="1800000"/>
+          </a:xfrm>
+          <a:prstGeom prst="rect">
+            <a:avLst/>
+          </a:prstGeom>
+          <a:ln w="38100">
+            <a:solidFill>
+              <a:srgbClr val="FFC000"/>
+            </a:solidFill>
+          </a:ln>
+        </p:spPr>
+      </p:pic>
+      <p:pic>
+        <p:nvPicPr>
+          <p:cNvPr id="11" name="Picture 10">
+            <a:extLst>
+              <a:ext uri="{FF2B5EF4-FFF2-40B4-BE49-F238E27FC236}">
+                <a16:creationId xmlns:a16="http://schemas.microsoft.com/office/drawing/2014/main" id="{6CB6A3EB-6E0A-3054-C38C-F7C527E94C7A}"/>
+              </a:ext>
+            </a:extLst>
+          </p:cNvPr>
+          <p:cNvPicPr>
+            <a:picLocks noChangeAspect="1"/>
+          </p:cNvPicPr>
+          <p:nvPr/>
+        </p:nvPicPr>
+        <p:blipFill>
+          <a:blip r:embed="rId5">
+            <a:extLst>
+              <a:ext uri="{28A0092B-C50C-407E-A947-70E740481C1C}">
+                <a14:useLocalDpi xmlns:a14="http://schemas.microsoft.com/office/drawing/2010/main" val="0"/>
+              </a:ext>
+            </a:extLst>
+          </a:blip>
+          <a:srcRect t="5355"/>
+          <a:stretch>
+            <a:fillRect/>
+          </a:stretch>
+        </p:blipFill>
+        <p:spPr>
+          <a:xfrm>
+            <a:off x="9272684" y="4466656"/>
+            <a:ext cx="2657940" cy="1800000"/>
+          </a:xfrm>
+          <a:prstGeom prst="rect">
+            <a:avLst/>
+          </a:prstGeom>
+          <a:ln w="38100">
+            <a:solidFill>
+              <a:srgbClr val="FFC000"/>
+            </a:solidFill>
+          </a:ln>
+        </p:spPr>
+      </p:pic>
+      <p:sp>
+        <p:nvSpPr>
+          <p:cNvPr id="12" name="Rectangle: Rounded Corners 11">
+            <a:extLst>
+              <a:ext uri="{FF2B5EF4-FFF2-40B4-BE49-F238E27FC236}">
+                <a16:creationId xmlns:a16="http://schemas.microsoft.com/office/drawing/2014/main" id="{10C0185F-512B-741C-9B82-3151193FC7CF}"/>
+              </a:ext>
+            </a:extLst>
+          </p:cNvPr>
+          <p:cNvSpPr/>
+          <p:nvPr/>
+        </p:nvSpPr>
+        <p:spPr>
+          <a:xfrm>
+            <a:off x="10601306" y="3873532"/>
+            <a:ext cx="1504987" cy="593124"/>
+          </a:xfrm>
+          <a:prstGeom prst="roundRect">
+            <a:avLst/>
+          </a:prstGeom>
+          <a:solidFill>
+            <a:schemeClr val="bg1"/>
+          </a:solidFill>
+          <a:ln w="38100">
+            <a:solidFill>
+              <a:srgbClr val="FFC000"/>
+            </a:solidFill>
+          </a:ln>
+        </p:spPr>
+        <p:style>
+          <a:lnRef idx="2">
+            <a:schemeClr val="accent1">
+              <a:shade val="15000"/>
+            </a:schemeClr>
+          </a:lnRef>
+          <a:fillRef idx="1">
+            <a:schemeClr val="accent1"/>
+          </a:fillRef>
+          <a:effectRef idx="0">
+            <a:schemeClr val="accent1"/>
+          </a:effectRef>
+          <a:fontRef idx="minor">
+            <a:schemeClr val="lt1"/>
+          </a:fontRef>
+        </p:style>
+        <p:txBody>
+          <a:bodyPr rtlCol="0" anchor="ctr"/>
+          <a:lstStyle/>
+          <a:p>
+            <a:pPr algn="ctr"/>
+            <a:r>
+              <a:rPr lang="en-US" sz="2000" dirty="0">
+                <a:solidFill>
+                  <a:schemeClr val="tx1"/>
+                </a:solidFill>
+              </a:rPr>
+              <a:t>OUTSIDE</a:t>
+            </a:r>
+            <a:endParaRPr lang="it-IT" sz="2000" dirty="0">
+              <a:solidFill>
+                <a:schemeClr val="tx1"/>
+              </a:solidFill>
+            </a:endParaRPr>
+          </a:p>
+        </p:txBody>
+      </p:sp>
+      <p:sp>
+        <p:nvSpPr>
+          <p:cNvPr id="16" name="Rectangle: Rounded Corners 15">
+            <a:extLst>
+              <a:ext uri="{FF2B5EF4-FFF2-40B4-BE49-F238E27FC236}">
+                <a16:creationId xmlns:a16="http://schemas.microsoft.com/office/drawing/2014/main" id="{2522C0AE-61F4-F6C4-A902-7D9FEAE91874}"/>
+              </a:ext>
+            </a:extLst>
+          </p:cNvPr>
+          <p:cNvSpPr/>
+          <p:nvPr/>
+        </p:nvSpPr>
+        <p:spPr>
+          <a:xfrm>
+            <a:off x="9875624" y="1845194"/>
+            <a:ext cx="1504987" cy="593124"/>
+          </a:xfrm>
+          <a:prstGeom prst="roundRect">
+            <a:avLst/>
+          </a:prstGeom>
+          <a:solidFill>
+            <a:schemeClr val="bg1"/>
+          </a:solidFill>
+          <a:ln w="38100">
+            <a:solidFill>
+              <a:srgbClr val="FFC000"/>
+            </a:solidFill>
+          </a:ln>
+        </p:spPr>
+        <p:style>
+          <a:lnRef idx="2">
+            <a:schemeClr val="accent1">
+              <a:shade val="15000"/>
+            </a:schemeClr>
+          </a:lnRef>
+          <a:fillRef idx="1">
+            <a:schemeClr val="accent1"/>
+          </a:fillRef>
+          <a:effectRef idx="0">
+            <a:schemeClr val="accent1"/>
+          </a:effectRef>
+          <a:fontRef idx="minor">
+            <a:schemeClr val="lt1"/>
+          </a:fontRef>
+        </p:style>
+        <p:txBody>
+          <a:bodyPr rtlCol="0" anchor="ctr"/>
+          <a:lstStyle/>
+          <a:p>
+            <a:pPr algn="ctr"/>
+            <a:r>
+              <a:rPr lang="en-US" sz="2000" dirty="0">
+                <a:solidFill>
+                  <a:schemeClr val="tx1"/>
+                </a:solidFill>
+              </a:rPr>
+              <a:t>INSIDE</a:t>
+            </a:r>
+            <a:endParaRPr lang="it-IT" sz="2000" dirty="0">
+              <a:solidFill>
+                <a:schemeClr val="tx1"/>
+              </a:solidFill>
+            </a:endParaRPr>
+          </a:p>
+        </p:txBody>
+      </p:sp>
+      <p:cxnSp>
+        <p:nvCxnSpPr>
+          <p:cNvPr id="17" name="Straight Arrow Connector 16">
+            <a:extLst>
+              <a:ext uri="{FF2B5EF4-FFF2-40B4-BE49-F238E27FC236}">
+                <a16:creationId xmlns:a16="http://schemas.microsoft.com/office/drawing/2014/main" id="{33A8177B-3AB5-4C1C-E0D3-2DFD72119160}"/>
+              </a:ext>
+            </a:extLst>
+          </p:cNvPr>
+          <p:cNvCxnSpPr>
+            <a:cxnSpLocks/>
+          </p:cNvCxnSpPr>
+          <p:nvPr/>
+        </p:nvCxnSpPr>
+        <p:spPr>
+          <a:xfrm flipH="1" flipV="1">
+            <a:off x="6426200" y="2282677"/>
+            <a:ext cx="1502746" cy="155641"/>
+          </a:xfrm>
+          <a:prstGeom prst="straightConnector1">
+            <a:avLst/>
+          </a:prstGeom>
+          <a:ln w="38100">
+            <a:solidFill>
+              <a:srgbClr val="FFC000"/>
+            </a:solidFill>
+            <a:tailEnd type="triangle"/>
+          </a:ln>
+        </p:spPr>
+        <p:style>
+          <a:lnRef idx="2">
+            <a:schemeClr val="accent1"/>
+          </a:lnRef>
+          <a:fillRef idx="0">
+            <a:schemeClr val="accent1"/>
+          </a:fillRef>
+          <a:effectRef idx="1">
+            <a:schemeClr val="accent1"/>
+          </a:effectRef>
+          <a:fontRef idx="minor">
+            <a:schemeClr val="tx1"/>
+          </a:fontRef>
+        </p:style>
+      </p:cxnSp>
+      <p:cxnSp>
+        <p:nvCxnSpPr>
+          <p:cNvPr id="19" name="Straight Arrow Connector 18">
+            <a:extLst>
+              <a:ext uri="{FF2B5EF4-FFF2-40B4-BE49-F238E27FC236}">
+                <a16:creationId xmlns:a16="http://schemas.microsoft.com/office/drawing/2014/main" id="{1F1607AC-B76D-07BC-F0E7-528BBEAFDA51}"/>
+              </a:ext>
+            </a:extLst>
+          </p:cNvPr>
+          <p:cNvCxnSpPr>
+            <a:cxnSpLocks/>
+          </p:cNvCxnSpPr>
+          <p:nvPr/>
+        </p:nvCxnSpPr>
+        <p:spPr>
+          <a:xfrm flipH="1" flipV="1">
+            <a:off x="7806088" y="5406917"/>
+            <a:ext cx="1466596" cy="279591"/>
+          </a:xfrm>
+          <a:prstGeom prst="straightConnector1">
+            <a:avLst/>
+          </a:prstGeom>
+          <a:ln w="38100">
+            <a:solidFill>
+              <a:srgbClr val="FFC000"/>
+            </a:solidFill>
+            <a:tailEnd type="triangle"/>
+          </a:ln>
+        </p:spPr>
+        <p:style>
+          <a:lnRef idx="2">
+            <a:schemeClr val="accent1"/>
+          </a:lnRef>
+          <a:fillRef idx="0">
+            <a:schemeClr val="accent1"/>
+          </a:fillRef>
+          <a:effectRef idx="1">
+            <a:schemeClr val="accent1"/>
+          </a:effectRef>
+          <a:fontRef idx="minor">
+            <a:schemeClr val="tx1"/>
+          </a:fontRef>
+        </p:style>
+      </p:cxnSp>
+    </p:spTree>
+    <p:extLst>
+      <p:ext uri="{BB962C8B-B14F-4D97-AF65-F5344CB8AC3E}">
+        <p14:creationId xmlns:p14="http://schemas.microsoft.com/office/powerpoint/2010/main" val="1074140417"/>
+      </p:ext>
+    </p:extLst>
+  </p:cSld>
+  <p:clrMapOvr>
+    <a:masterClrMapping/>
+  </p:clrMapOvr>
+</p:sld>
+</file>
+
+<file path=ppt/slides/slide13.xml><?xml version="1.0" encoding="utf-8"?>
+<p:sld xmlns:a="http://schemas.openxmlformats.org/drawingml/2006/main" xmlns:r="http://schemas.openxmlformats.org/officeDocument/2006/relationships" xmlns:p="http://schemas.openxmlformats.org/presentationml/2006/main">
+  <p:cSld>
+    <p:spTree>
+      <p:nvGrpSpPr>
+        <p:cNvPr id="1" name="">
+          <a:extLst>
+            <a:ext uri="{FF2B5EF4-FFF2-40B4-BE49-F238E27FC236}">
+              <a16:creationId xmlns:a16="http://schemas.microsoft.com/office/drawing/2014/main" id="{5DAC6EFF-B9B4-605B-23DF-EDC01FF419F6}"/>
+            </a:ext>
+          </a:extLst>
+        </p:cNvPr>
+        <p:cNvGrpSpPr/>
+        <p:nvPr/>
+      </p:nvGrpSpPr>
+      <p:grpSpPr>
+        <a:xfrm>
+          <a:off x="0" y="0"/>
+          <a:ext cx="0" cy="0"/>
+          <a:chOff x="0" y="0"/>
+          <a:chExt cx="0" cy="0"/>
+        </a:xfrm>
+      </p:grpSpPr>
+      <p:sp>
+        <p:nvSpPr>
+          <p:cNvPr id="2" name="Titolo 1">
+            <a:extLst>
+              <a:ext uri="{FF2B5EF4-FFF2-40B4-BE49-F238E27FC236}">
+                <a16:creationId xmlns:a16="http://schemas.microsoft.com/office/drawing/2014/main" id="{B5797431-BBE5-CB25-093B-D04D3DF2F194}"/>
+              </a:ext>
+            </a:extLst>
+          </p:cNvPr>
+          <p:cNvSpPr>
+            <a:spLocks noGrp="1"/>
+          </p:cNvSpPr>
+          <p:nvPr>
+            <p:ph type="title"/>
+          </p:nvPr>
+        </p:nvSpPr>
+        <p:spPr>
+          <a:xfrm>
+            <a:off x="38100" y="69651"/>
+            <a:ext cx="12114000" cy="1153094"/>
+          </a:xfrm>
+          <a:prstGeom prst="roundRect">
+            <a:avLst>
+              <a:gd name="adj" fmla="val 36459"/>
+            </a:avLst>
+          </a:prstGeom>
+          <a:noFill/>
+        </p:spPr>
+        <p:txBody>
+          <a:bodyPr>
+            <a:normAutofit/>
+          </a:bodyPr>
+          <a:lstStyle/>
+          <a:p>
+            <a:r>
+              <a:rPr lang="it-IT" b="1" dirty="0">
+                <a:solidFill>
+                  <a:srgbClr val="002060"/>
+                </a:solidFill>
+              </a:rPr>
+              <a:t>	BACKUP SLIDES</a:t>
+            </a:r>
+          </a:p>
+        </p:txBody>
+      </p:sp>
+      <p:sp>
+        <p:nvSpPr>
+          <p:cNvPr id="4" name="Segnaposto data 3">
+            <a:extLst>
+              <a:ext uri="{FF2B5EF4-FFF2-40B4-BE49-F238E27FC236}">
+                <a16:creationId xmlns:a16="http://schemas.microsoft.com/office/drawing/2014/main" id="{EB987156-1AA3-606D-F960-F5521BB0A14D}"/>
+              </a:ext>
+            </a:extLst>
+          </p:cNvPr>
+          <p:cNvSpPr>
+            <a:spLocks noGrp="1"/>
+          </p:cNvSpPr>
+          <p:nvPr>
+            <p:ph type="dt" sz="half" idx="10"/>
+          </p:nvPr>
+        </p:nvSpPr>
+        <p:spPr>
+          <a:xfrm>
+            <a:off x="838200" y="6356349"/>
+            <a:ext cx="2743200" cy="432000"/>
+          </a:xfrm>
+        </p:spPr>
+        <p:txBody>
+          <a:bodyPr/>
+          <a:lstStyle/>
+          <a:p>
+            <a:r>
+              <a:rPr lang="it-IT" sz="1500" b="1" dirty="0">
+                <a:solidFill>
+                  <a:srgbClr val="002060"/>
+                </a:solidFill>
+              </a:rPr>
+              <a:t>August 2026</a:t>
+            </a:r>
+          </a:p>
+        </p:txBody>
+      </p:sp>
+      <p:sp>
+        <p:nvSpPr>
+          <p:cNvPr id="5" name="Segnaposto piè di pagina 4">
+            <a:extLst>
+              <a:ext uri="{FF2B5EF4-FFF2-40B4-BE49-F238E27FC236}">
+                <a16:creationId xmlns:a16="http://schemas.microsoft.com/office/drawing/2014/main" id="{789376CE-2672-8B5F-17F8-C7FABE69F6E5}"/>
+              </a:ext>
+            </a:extLst>
+          </p:cNvPr>
+          <p:cNvSpPr>
+            <a:spLocks noGrp="1"/>
+          </p:cNvSpPr>
+          <p:nvPr>
+            <p:ph type="ftr" sz="quarter" idx="11"/>
+          </p:nvPr>
+        </p:nvSpPr>
+        <p:spPr>
+          <a:xfrm>
+            <a:off x="0" y="6356349"/>
+            <a:ext cx="12192000" cy="432000"/>
+          </a:xfrm>
+        </p:spPr>
+        <p:txBody>
+          <a:bodyPr/>
+          <a:lstStyle/>
+          <a:p>
+            <a:r>
+              <a:rPr lang="it-IT" sz="1500" b="1" dirty="0">
+                <a:solidFill>
+                  <a:srgbClr val="002060"/>
+                </a:solidFill>
+              </a:rPr>
+              <a:t>Anna Sofia Moro</a:t>
+            </a:r>
+          </a:p>
+        </p:txBody>
+      </p:sp>
+      <p:sp>
+        <p:nvSpPr>
+          <p:cNvPr id="6" name="Segnaposto numero diapositiva 5">
+            <a:extLst>
+              <a:ext uri="{FF2B5EF4-FFF2-40B4-BE49-F238E27FC236}">
+                <a16:creationId xmlns:a16="http://schemas.microsoft.com/office/drawing/2014/main" id="{F518D8F0-CFAD-5A22-0C45-35621E72D2EB}"/>
+              </a:ext>
+            </a:extLst>
+          </p:cNvPr>
+          <p:cNvSpPr>
+            <a:spLocks noGrp="1"/>
+          </p:cNvSpPr>
+          <p:nvPr>
+            <p:ph type="sldNum" sz="quarter" idx="12"/>
+          </p:nvPr>
+        </p:nvSpPr>
+        <p:spPr>
+          <a:xfrm>
+            <a:off x="8610600" y="6356349"/>
+            <a:ext cx="2743200" cy="432000"/>
+          </a:xfrm>
+        </p:spPr>
+        <p:txBody>
+          <a:bodyPr/>
+          <a:lstStyle/>
+          <a:p>
+            <a:fld id="{0A318BD9-CA14-4A83-ACF0-03D5918EB402}" type="slidenum">
+              <a:rPr lang="it-IT" sz="1500" b="1" smtClean="0">
+                <a:solidFill>
+                  <a:srgbClr val="002060"/>
+                </a:solidFill>
+              </a:rPr>
+              <a:t>13</a:t>
+            </a:fld>
+            <a:endParaRPr lang="it-IT" sz="1500" b="1" dirty="0">
+              <a:solidFill>
+                <a:srgbClr val="002060"/>
+              </a:solidFill>
+            </a:endParaRPr>
+          </a:p>
+        </p:txBody>
+      </p:sp>
+      <p:cxnSp>
+        <p:nvCxnSpPr>
+          <p:cNvPr id="10" name="Connettore diritto 9">
+            <a:extLst>
+              <a:ext uri="{FF2B5EF4-FFF2-40B4-BE49-F238E27FC236}">
+                <a16:creationId xmlns:a16="http://schemas.microsoft.com/office/drawing/2014/main" id="{19CCD89B-D23E-B601-CB0F-35F735A548A8}"/>
+              </a:ext>
+            </a:extLst>
+          </p:cNvPr>
+          <p:cNvCxnSpPr>
+            <a:cxnSpLocks/>
+          </p:cNvCxnSpPr>
+          <p:nvPr/>
+        </p:nvCxnSpPr>
+        <p:spPr>
+          <a:xfrm>
+            <a:off x="696000" y="1155368"/>
+            <a:ext cx="10800000" cy="0"/>
+          </a:xfrm>
+          <a:prstGeom prst="line">
+            <a:avLst/>
+          </a:prstGeom>
+          <a:ln w="38100">
+            <a:solidFill>
+              <a:srgbClr val="002060"/>
+            </a:solidFill>
+          </a:ln>
+        </p:spPr>
+        <p:style>
+          <a:lnRef idx="2">
+            <a:schemeClr val="accent1"/>
+          </a:lnRef>
+          <a:fillRef idx="0">
+            <a:schemeClr val="accent1"/>
+          </a:fillRef>
+          <a:effectRef idx="1">
+            <a:schemeClr val="accent1"/>
+          </a:effectRef>
+          <a:fontRef idx="minor">
+            <a:schemeClr val="tx1"/>
+          </a:fontRef>
+        </p:style>
+      </p:cxnSp>
+      <p:sp>
+        <p:nvSpPr>
+          <p:cNvPr id="13" name="CasellaDiTesto 12">
+            <a:extLst>
+              <a:ext uri="{FF2B5EF4-FFF2-40B4-BE49-F238E27FC236}">
+                <a16:creationId xmlns:a16="http://schemas.microsoft.com/office/drawing/2014/main" id="{4868D235-E176-E7CA-EEBD-17788382E362}"/>
+              </a:ext>
+            </a:extLst>
+          </p:cNvPr>
+          <p:cNvSpPr txBox="1"/>
+          <p:nvPr/>
+        </p:nvSpPr>
+        <p:spPr>
+          <a:xfrm>
+            <a:off x="3048886" y="3244334"/>
+            <a:ext cx="6097772" cy="369332"/>
+          </a:xfrm>
+          <a:prstGeom prst="rect">
+            <a:avLst/>
+          </a:prstGeom>
+          <a:noFill/>
+        </p:spPr>
+        <p:txBody>
+          <a:bodyPr wrap="square">
+            <a:spAutoFit/>
+          </a:bodyPr>
+          <a:lstStyle/>
+          <a:p>
+            <a:endParaRPr lang="it-IT" dirty="0"/>
+          </a:p>
+        </p:txBody>
+      </p:sp>
+      <p:sp>
+        <p:nvSpPr>
+          <p:cNvPr id="15" name="CasellaDiTesto 14">
+            <a:extLst>
+              <a:ext uri="{FF2B5EF4-FFF2-40B4-BE49-F238E27FC236}">
+                <a16:creationId xmlns:a16="http://schemas.microsoft.com/office/drawing/2014/main" id="{BB2D0B5E-0AD3-1AC2-900A-351764AC43C1}"/>
+              </a:ext>
+            </a:extLst>
+          </p:cNvPr>
+          <p:cNvSpPr txBox="1"/>
+          <p:nvPr/>
+        </p:nvSpPr>
+        <p:spPr>
+          <a:xfrm>
+            <a:off x="3048886" y="3244334"/>
+            <a:ext cx="6097772" cy="369332"/>
+          </a:xfrm>
+          <a:prstGeom prst="rect">
+            <a:avLst/>
+          </a:prstGeom>
+          <a:noFill/>
+        </p:spPr>
+        <p:txBody>
+          <a:bodyPr wrap="square">
+            <a:spAutoFit/>
+          </a:bodyPr>
+          <a:lstStyle/>
+          <a:p>
+            <a:endParaRPr lang="it-IT" dirty="0"/>
+          </a:p>
+        </p:txBody>
+      </p:sp>
+    </p:spTree>
+    <p:extLst>
+      <p:ext uri="{BB962C8B-B14F-4D97-AF65-F5344CB8AC3E}">
+        <p14:creationId xmlns:p14="http://schemas.microsoft.com/office/powerpoint/2010/main" val="463478691"/>
+      </p:ext>
+    </p:extLst>
+  </p:cSld>
+  <p:clrMapOvr>
+    <a:masterClrMapping/>
+  </p:clrMapOvr>
+</p:sld>
+</file>
+
+<file path=ppt/slides/slide14.xml><?xml version="1.0" encoding="utf-8"?>
+<p:sld xmlns:a="http://schemas.openxmlformats.org/drawingml/2006/main" xmlns:r="http://schemas.openxmlformats.org/officeDocument/2006/relationships" xmlns:p="http://schemas.openxmlformats.org/presentationml/2006/main">
+  <p:cSld>
+    <p:spTree>
+      <p:nvGrpSpPr>
+        <p:cNvPr id="1" name="">
+          <a:extLst>
+            <a:ext uri="{FF2B5EF4-FFF2-40B4-BE49-F238E27FC236}">
+              <a16:creationId xmlns:a16="http://schemas.microsoft.com/office/drawing/2014/main" id="{E91418D0-178A-C93A-FF92-79CB238846E6}"/>
+            </a:ext>
+          </a:extLst>
+        </p:cNvPr>
+        <p:cNvGrpSpPr/>
+        <p:nvPr/>
+      </p:nvGrpSpPr>
+      <p:grpSpPr>
+        <a:xfrm>
+          <a:off x="0" y="0"/>
+          <a:ext cx="0" cy="0"/>
+          <a:chOff x="0" y="0"/>
+          <a:chExt cx="0" cy="0"/>
+        </a:xfrm>
+      </p:grpSpPr>
+      <p:sp>
+        <p:nvSpPr>
+          <p:cNvPr id="2" name="Titolo 1">
+            <a:extLst>
+              <a:ext uri="{FF2B5EF4-FFF2-40B4-BE49-F238E27FC236}">
+                <a16:creationId xmlns:a16="http://schemas.microsoft.com/office/drawing/2014/main" id="{F189A4B7-4387-2BB7-3C48-46DB195146ED}"/>
+              </a:ext>
+            </a:extLst>
+          </p:cNvPr>
+          <p:cNvSpPr>
+            <a:spLocks noGrp="1"/>
+          </p:cNvSpPr>
+          <p:nvPr>
+            <p:ph type="title"/>
+          </p:nvPr>
+        </p:nvSpPr>
+        <p:spPr>
+          <a:xfrm>
+            <a:off x="38100" y="69651"/>
+            <a:ext cx="12114000" cy="1153094"/>
+          </a:xfrm>
+          <a:prstGeom prst="roundRect">
+            <a:avLst>
+              <a:gd name="adj" fmla="val 36459"/>
+            </a:avLst>
+          </a:prstGeom>
+          <a:noFill/>
+        </p:spPr>
+        <p:txBody>
+          <a:bodyPr>
+            <a:normAutofit/>
+          </a:bodyPr>
+          <a:lstStyle/>
+          <a:p>
+            <a:r>
+              <a:rPr lang="it-IT" b="1" dirty="0">
+                <a:solidFill>
+                  <a:srgbClr val="002060"/>
+                </a:solidFill>
+              </a:rPr>
+              <a:t>	BACKUP SLIDES: SCHEMATIC LAYOUT</a:t>
+            </a:r>
+          </a:p>
+        </p:txBody>
+      </p:sp>
+      <p:sp>
+        <p:nvSpPr>
+          <p:cNvPr id="4" name="Segnaposto data 3">
+            <a:extLst>
+              <a:ext uri="{FF2B5EF4-FFF2-40B4-BE49-F238E27FC236}">
+                <a16:creationId xmlns:a16="http://schemas.microsoft.com/office/drawing/2014/main" id="{AEDBFB0E-FB82-3C32-FE20-89DEF3428F91}"/>
+              </a:ext>
+            </a:extLst>
+          </p:cNvPr>
+          <p:cNvSpPr>
+            <a:spLocks noGrp="1"/>
+          </p:cNvSpPr>
+          <p:nvPr>
+            <p:ph type="dt" sz="half" idx="10"/>
+          </p:nvPr>
+        </p:nvSpPr>
+        <p:spPr>
+          <a:xfrm>
+            <a:off x="838200" y="6356349"/>
+            <a:ext cx="2743200" cy="432000"/>
+          </a:xfrm>
+        </p:spPr>
+        <p:txBody>
+          <a:bodyPr/>
+          <a:lstStyle/>
+          <a:p>
+            <a:r>
+              <a:rPr lang="it-IT" sz="1500" b="1" dirty="0">
+                <a:solidFill>
+                  <a:srgbClr val="002060"/>
+                </a:solidFill>
+              </a:rPr>
+              <a:t>August 2026</a:t>
+            </a:r>
+          </a:p>
+        </p:txBody>
+      </p:sp>
+      <p:sp>
+        <p:nvSpPr>
+          <p:cNvPr id="5" name="Segnaposto piè di pagina 4">
+            <a:extLst>
+              <a:ext uri="{FF2B5EF4-FFF2-40B4-BE49-F238E27FC236}">
+                <a16:creationId xmlns:a16="http://schemas.microsoft.com/office/drawing/2014/main" id="{2DDDD74D-1EB9-2D22-F8E3-99411AEADCFE}"/>
+              </a:ext>
+            </a:extLst>
+          </p:cNvPr>
+          <p:cNvSpPr>
+            <a:spLocks noGrp="1"/>
+          </p:cNvSpPr>
+          <p:nvPr>
+            <p:ph type="ftr" sz="quarter" idx="11"/>
+          </p:nvPr>
+        </p:nvSpPr>
+        <p:spPr>
+          <a:xfrm>
+            <a:off x="0" y="6356349"/>
+            <a:ext cx="12192000" cy="432000"/>
+          </a:xfrm>
+        </p:spPr>
+        <p:txBody>
+          <a:bodyPr/>
+          <a:lstStyle/>
+          <a:p>
+            <a:r>
+              <a:rPr lang="it-IT" sz="1500" b="1" dirty="0">
+                <a:solidFill>
+                  <a:srgbClr val="002060"/>
+                </a:solidFill>
+              </a:rPr>
+              <a:t>Anna Sofia Moro</a:t>
+            </a:r>
+          </a:p>
+        </p:txBody>
+      </p:sp>
+      <p:sp>
+        <p:nvSpPr>
+          <p:cNvPr id="6" name="Segnaposto numero diapositiva 5">
+            <a:extLst>
+              <a:ext uri="{FF2B5EF4-FFF2-40B4-BE49-F238E27FC236}">
+                <a16:creationId xmlns:a16="http://schemas.microsoft.com/office/drawing/2014/main" id="{97F57EDD-504C-8703-B373-775040D94582}"/>
+              </a:ext>
+            </a:extLst>
+          </p:cNvPr>
+          <p:cNvSpPr>
+            <a:spLocks noGrp="1"/>
+          </p:cNvSpPr>
+          <p:nvPr>
+            <p:ph type="sldNum" sz="quarter" idx="12"/>
+          </p:nvPr>
+        </p:nvSpPr>
+        <p:spPr>
+          <a:xfrm>
+            <a:off x="8610600" y="6356349"/>
+            <a:ext cx="2743200" cy="432000"/>
+          </a:xfrm>
+        </p:spPr>
+        <p:txBody>
+          <a:bodyPr/>
+          <a:lstStyle/>
+          <a:p>
+            <a:fld id="{0A318BD9-CA14-4A83-ACF0-03D5918EB402}" type="slidenum">
+              <a:rPr lang="it-IT" sz="1500" b="1" smtClean="0">
+                <a:solidFill>
+                  <a:srgbClr val="002060"/>
+                </a:solidFill>
+              </a:rPr>
+              <a:t>14</a:t>
+            </a:fld>
+            <a:endParaRPr lang="it-IT" sz="1500" b="1" dirty="0">
+              <a:solidFill>
+                <a:srgbClr val="002060"/>
+              </a:solidFill>
+            </a:endParaRPr>
+          </a:p>
+        </p:txBody>
+      </p:sp>
+      <p:cxnSp>
+        <p:nvCxnSpPr>
+          <p:cNvPr id="10" name="Connettore diritto 9">
+            <a:extLst>
+              <a:ext uri="{FF2B5EF4-FFF2-40B4-BE49-F238E27FC236}">
+                <a16:creationId xmlns:a16="http://schemas.microsoft.com/office/drawing/2014/main" id="{DA8C001C-29B0-3295-646E-77D6416186F8}"/>
+              </a:ext>
+            </a:extLst>
+          </p:cNvPr>
+          <p:cNvCxnSpPr>
+            <a:cxnSpLocks/>
+          </p:cNvCxnSpPr>
+          <p:nvPr/>
+        </p:nvCxnSpPr>
+        <p:spPr>
+          <a:xfrm>
+            <a:off x="696000" y="1155368"/>
+            <a:ext cx="10800000" cy="0"/>
+          </a:xfrm>
+          <a:prstGeom prst="line">
+            <a:avLst/>
+          </a:prstGeom>
+          <a:ln w="38100">
+            <a:solidFill>
+              <a:srgbClr val="002060"/>
+            </a:solidFill>
+          </a:ln>
+        </p:spPr>
+        <p:style>
+          <a:lnRef idx="2">
+            <a:schemeClr val="accent1"/>
+          </a:lnRef>
+          <a:fillRef idx="0">
+            <a:schemeClr val="accent1"/>
+          </a:fillRef>
+          <a:effectRef idx="1">
+            <a:schemeClr val="accent1"/>
+          </a:effectRef>
+          <a:fontRef idx="minor">
+            <a:schemeClr val="tx1"/>
+          </a:fontRef>
+        </p:style>
+      </p:cxnSp>
+      <p:sp>
+        <p:nvSpPr>
+          <p:cNvPr id="13" name="CasellaDiTesto 12">
+            <a:extLst>
+              <a:ext uri="{FF2B5EF4-FFF2-40B4-BE49-F238E27FC236}">
+                <a16:creationId xmlns:a16="http://schemas.microsoft.com/office/drawing/2014/main" id="{FE83A5A8-9F52-79AB-6097-3ED9E0DA104E}"/>
+              </a:ext>
+            </a:extLst>
+          </p:cNvPr>
+          <p:cNvSpPr txBox="1"/>
+          <p:nvPr/>
+        </p:nvSpPr>
+        <p:spPr>
+          <a:xfrm>
+            <a:off x="3048886" y="3244334"/>
+            <a:ext cx="6097772" cy="369332"/>
+          </a:xfrm>
+          <a:prstGeom prst="rect">
+            <a:avLst/>
+          </a:prstGeom>
+          <a:noFill/>
+        </p:spPr>
+        <p:txBody>
+          <a:bodyPr wrap="square">
+            <a:spAutoFit/>
+          </a:bodyPr>
+          <a:lstStyle/>
+          <a:p>
+            <a:endParaRPr lang="it-IT" dirty="0"/>
+          </a:p>
+        </p:txBody>
+      </p:sp>
+      <p:sp>
+        <p:nvSpPr>
+          <p:cNvPr id="15" name="CasellaDiTesto 14">
+            <a:extLst>
+              <a:ext uri="{FF2B5EF4-FFF2-40B4-BE49-F238E27FC236}">
+                <a16:creationId xmlns:a16="http://schemas.microsoft.com/office/drawing/2014/main" id="{D9D0E9B7-7CD4-2769-C5D2-C454E014F2EC}"/>
+              </a:ext>
+            </a:extLst>
+          </p:cNvPr>
+          <p:cNvSpPr txBox="1"/>
+          <p:nvPr/>
+        </p:nvSpPr>
+        <p:spPr>
+          <a:xfrm>
+            <a:off x="3048886" y="3244334"/>
+            <a:ext cx="6097772" cy="369332"/>
+          </a:xfrm>
+          <a:prstGeom prst="rect">
+            <a:avLst/>
+          </a:prstGeom>
+          <a:noFill/>
+        </p:spPr>
+        <p:txBody>
+          <a:bodyPr wrap="square">
+            <a:spAutoFit/>
+          </a:bodyPr>
+          <a:lstStyle/>
+          <a:p>
+            <a:endParaRPr lang="it-IT" dirty="0"/>
+          </a:p>
+        </p:txBody>
+      </p:sp>
+      <p:pic>
+        <p:nvPicPr>
+          <p:cNvPr id="8" name="Immagine 7">
+            <a:extLst>
+              <a:ext uri="{FF2B5EF4-FFF2-40B4-BE49-F238E27FC236}">
+                <a16:creationId xmlns:a16="http://schemas.microsoft.com/office/drawing/2014/main" id="{DD1CB2A6-1166-CF2E-28FE-9AF384B5B3E6}"/>
+              </a:ext>
+            </a:extLst>
+          </p:cNvPr>
+          <p:cNvPicPr>
+            <a:picLocks noChangeAspect="1"/>
+          </p:cNvPicPr>
+          <p:nvPr/>
+        </p:nvPicPr>
+        <p:blipFill>
+          <a:blip r:embed="rId2"/>
+          <a:stretch>
+            <a:fillRect/>
+          </a:stretch>
+        </p:blipFill>
+        <p:spPr>
+          <a:xfrm>
+            <a:off x="443309" y="1545256"/>
+            <a:ext cx="11303581" cy="4705592"/>
+          </a:xfrm>
+          <a:prstGeom prst="rect">
+            <a:avLst/>
+          </a:prstGeom>
+        </p:spPr>
+      </p:pic>
+    </p:spTree>
+    <p:extLst>
+      <p:ext uri="{BB962C8B-B14F-4D97-AF65-F5344CB8AC3E}">
+        <p14:creationId xmlns:p14="http://schemas.microsoft.com/office/powerpoint/2010/main" val="382366125"/>
+      </p:ext>
+    </p:extLst>
+  </p:cSld>
+  <p:clrMapOvr>
+    <a:masterClrMapping/>
+  </p:clrMapOvr>
+</p:sld>
+</file>
+
 <file path=ppt/slides/slide2.xml><?xml version="1.0" encoding="utf-8"?>
 <p:sld xmlns:a="http://schemas.openxmlformats.org/drawingml/2006/main" xmlns:r="http://schemas.openxmlformats.org/officeDocument/2006/relationships" xmlns:p="http://schemas.openxmlformats.org/presentationml/2006/main">
   <p:cSld>
@@ -4529,6 +7460,1843 @@
           <a:lstStyle/>
           <a:p>
             <a:r>
+              <a:rPr lang="it-IT" b="1" dirty="0">
+                <a:solidFill>
+                  <a:srgbClr val="002060"/>
+                </a:solidFill>
+              </a:rPr>
+              <a:t>	PREVIOUS RESULTS</a:t>
+            </a:r>
+          </a:p>
+        </p:txBody>
+      </p:sp>
+      <p:sp>
+        <p:nvSpPr>
+          <p:cNvPr id="4" name="Segnaposto data 3">
+            <a:extLst>
+              <a:ext uri="{FF2B5EF4-FFF2-40B4-BE49-F238E27FC236}">
+                <a16:creationId xmlns:a16="http://schemas.microsoft.com/office/drawing/2014/main" id="{8DED9B23-6341-6217-27A2-9458D68E2882}"/>
+              </a:ext>
+            </a:extLst>
+          </p:cNvPr>
+          <p:cNvSpPr>
+            <a:spLocks noGrp="1"/>
+          </p:cNvSpPr>
+          <p:nvPr>
+            <p:ph type="dt" sz="half" idx="10"/>
+          </p:nvPr>
+        </p:nvSpPr>
+        <p:spPr>
+          <a:xfrm>
+            <a:off x="838200" y="6356349"/>
+            <a:ext cx="2743200" cy="432000"/>
+          </a:xfrm>
+        </p:spPr>
+        <p:txBody>
+          <a:bodyPr/>
+          <a:lstStyle/>
+          <a:p>
+            <a:r>
+              <a:rPr lang="it-IT" sz="1500" b="1" dirty="0">
+                <a:solidFill>
+                  <a:srgbClr val="002060"/>
+                </a:solidFill>
+              </a:rPr>
+              <a:t>July 2026</a:t>
+            </a:r>
+          </a:p>
+        </p:txBody>
+      </p:sp>
+      <p:sp>
+        <p:nvSpPr>
+          <p:cNvPr id="5" name="Segnaposto piè di pagina 4">
+            <a:extLst>
+              <a:ext uri="{FF2B5EF4-FFF2-40B4-BE49-F238E27FC236}">
+                <a16:creationId xmlns:a16="http://schemas.microsoft.com/office/drawing/2014/main" id="{16628363-9935-E4B6-77DD-A483B2C3DA56}"/>
+              </a:ext>
+            </a:extLst>
+          </p:cNvPr>
+          <p:cNvSpPr>
+            <a:spLocks noGrp="1"/>
+          </p:cNvSpPr>
+          <p:nvPr>
+            <p:ph type="ftr" sz="quarter" idx="11"/>
+          </p:nvPr>
+        </p:nvSpPr>
+        <p:spPr>
+          <a:xfrm>
+            <a:off x="0" y="6356349"/>
+            <a:ext cx="12192000" cy="432000"/>
+          </a:xfrm>
+        </p:spPr>
+        <p:txBody>
+          <a:bodyPr/>
+          <a:lstStyle/>
+          <a:p>
+            <a:r>
+              <a:rPr lang="it-IT" sz="1500" b="1" dirty="0">
+                <a:solidFill>
+                  <a:srgbClr val="002060"/>
+                </a:solidFill>
+              </a:rPr>
+              <a:t>Anna Sofia Moro</a:t>
+            </a:r>
+          </a:p>
+        </p:txBody>
+      </p:sp>
+      <p:sp>
+        <p:nvSpPr>
+          <p:cNvPr id="6" name="Segnaposto numero diapositiva 5">
+            <a:extLst>
+              <a:ext uri="{FF2B5EF4-FFF2-40B4-BE49-F238E27FC236}">
+                <a16:creationId xmlns:a16="http://schemas.microsoft.com/office/drawing/2014/main" id="{B7F505CC-6018-7E71-413B-1016AEE17659}"/>
+              </a:ext>
+            </a:extLst>
+          </p:cNvPr>
+          <p:cNvSpPr>
+            <a:spLocks noGrp="1"/>
+          </p:cNvSpPr>
+          <p:nvPr>
+            <p:ph type="sldNum" sz="quarter" idx="12"/>
+          </p:nvPr>
+        </p:nvSpPr>
+        <p:spPr>
+          <a:xfrm>
+            <a:off x="8610600" y="6356349"/>
+            <a:ext cx="2743200" cy="432000"/>
+          </a:xfrm>
+        </p:spPr>
+        <p:txBody>
+          <a:bodyPr/>
+          <a:lstStyle/>
+          <a:p>
+            <a:fld id="{0A318BD9-CA14-4A83-ACF0-03D5918EB402}" type="slidenum">
+              <a:rPr lang="it-IT" sz="1500" b="1" smtClean="0">
+                <a:solidFill>
+                  <a:srgbClr val="002060"/>
+                </a:solidFill>
+              </a:rPr>
+              <a:t>2</a:t>
+            </a:fld>
+            <a:endParaRPr lang="it-IT" sz="1500" b="1" dirty="0">
+              <a:solidFill>
+                <a:srgbClr val="002060"/>
+              </a:solidFill>
+            </a:endParaRPr>
+          </a:p>
+        </p:txBody>
+      </p:sp>
+      <p:cxnSp>
+        <p:nvCxnSpPr>
+          <p:cNvPr id="10" name="Connettore diritto 9">
+            <a:extLst>
+              <a:ext uri="{FF2B5EF4-FFF2-40B4-BE49-F238E27FC236}">
+                <a16:creationId xmlns:a16="http://schemas.microsoft.com/office/drawing/2014/main" id="{E8019FF7-6D4B-2DBF-09E8-CC4A5508A71A}"/>
+              </a:ext>
+            </a:extLst>
+          </p:cNvPr>
+          <p:cNvCxnSpPr>
+            <a:cxnSpLocks/>
+          </p:cNvCxnSpPr>
+          <p:nvPr/>
+        </p:nvCxnSpPr>
+        <p:spPr>
+          <a:xfrm>
+            <a:off x="696000" y="1155368"/>
+            <a:ext cx="10800000" cy="0"/>
+          </a:xfrm>
+          <a:prstGeom prst="line">
+            <a:avLst/>
+          </a:prstGeom>
+          <a:ln w="38100">
+            <a:solidFill>
+              <a:srgbClr val="002060"/>
+            </a:solidFill>
+          </a:ln>
+        </p:spPr>
+        <p:style>
+          <a:lnRef idx="2">
+            <a:schemeClr val="accent1"/>
+          </a:lnRef>
+          <a:fillRef idx="0">
+            <a:schemeClr val="accent1"/>
+          </a:fillRef>
+          <a:effectRef idx="1">
+            <a:schemeClr val="accent1"/>
+          </a:effectRef>
+          <a:fontRef idx="minor">
+            <a:schemeClr val="tx1"/>
+          </a:fontRef>
+        </p:style>
+      </p:cxnSp>
+      <p:sp>
+        <p:nvSpPr>
+          <p:cNvPr id="13" name="CasellaDiTesto 12">
+            <a:extLst>
+              <a:ext uri="{FF2B5EF4-FFF2-40B4-BE49-F238E27FC236}">
+                <a16:creationId xmlns:a16="http://schemas.microsoft.com/office/drawing/2014/main" id="{2A1B56BD-FD0F-1F4B-BB59-5AFD665E3673}"/>
+              </a:ext>
+            </a:extLst>
+          </p:cNvPr>
+          <p:cNvSpPr txBox="1"/>
+          <p:nvPr/>
+        </p:nvSpPr>
+        <p:spPr>
+          <a:xfrm>
+            <a:off x="3048886" y="3244334"/>
+            <a:ext cx="6097772" cy="369332"/>
+          </a:xfrm>
+          <a:prstGeom prst="rect">
+            <a:avLst/>
+          </a:prstGeom>
+          <a:noFill/>
+        </p:spPr>
+        <p:txBody>
+          <a:bodyPr wrap="square">
+            <a:spAutoFit/>
+          </a:bodyPr>
+          <a:lstStyle/>
+          <a:p>
+            <a:endParaRPr lang="it-IT" dirty="0"/>
+          </a:p>
+        </p:txBody>
+      </p:sp>
+      <p:sp>
+        <p:nvSpPr>
+          <p:cNvPr id="15" name="CasellaDiTesto 14">
+            <a:extLst>
+              <a:ext uri="{FF2B5EF4-FFF2-40B4-BE49-F238E27FC236}">
+                <a16:creationId xmlns:a16="http://schemas.microsoft.com/office/drawing/2014/main" id="{C62BAA7C-A2B4-88F1-D5D2-96BF5F09E297}"/>
+              </a:ext>
+            </a:extLst>
+          </p:cNvPr>
+          <p:cNvSpPr txBox="1"/>
+          <p:nvPr/>
+        </p:nvSpPr>
+        <p:spPr>
+          <a:xfrm>
+            <a:off x="3048886" y="3244334"/>
+            <a:ext cx="6097772" cy="369332"/>
+          </a:xfrm>
+          <a:prstGeom prst="rect">
+            <a:avLst/>
+          </a:prstGeom>
+          <a:noFill/>
+        </p:spPr>
+        <p:txBody>
+          <a:bodyPr wrap="square">
+            <a:spAutoFit/>
+          </a:bodyPr>
+          <a:lstStyle/>
+          <a:p>
+            <a:endParaRPr lang="it-IT" dirty="0"/>
+          </a:p>
+        </p:txBody>
+      </p:sp>
+      <mc:AlternateContent xmlns:mc="http://schemas.openxmlformats.org/markup-compatibility/2006">
+        <mc:Choice xmlns:a14="http://schemas.microsoft.com/office/drawing/2010/main" Requires="a14">
+          <p:graphicFrame>
+            <p:nvGraphicFramePr>
+              <p:cNvPr id="11" name="Segnaposto contenuto 10">
+                <a:extLst>
+                  <a:ext uri="{FF2B5EF4-FFF2-40B4-BE49-F238E27FC236}">
+                    <a16:creationId xmlns:a16="http://schemas.microsoft.com/office/drawing/2014/main" id="{64ACAFC3-799E-8B06-CC81-4AD4B1D9346E}"/>
+                  </a:ext>
+                </a:extLst>
+              </p:cNvPr>
+              <p:cNvGraphicFramePr>
+                <a:graphicFrameLocks noGrp="1"/>
+              </p:cNvGraphicFramePr>
+              <p:nvPr>
+                <p:ph idx="1"/>
+                <p:extLst>
+                  <p:ext uri="{D42A27DB-BD31-4B8C-83A1-F6EECF244321}">
+                    <p14:modId xmlns:p14="http://schemas.microsoft.com/office/powerpoint/2010/main" val="76894076"/>
+                  </p:ext>
+                </p:extLst>
+              </p:nvPr>
+            </p:nvGraphicFramePr>
+            <p:xfrm>
+              <a:off x="1658656" y="2441956"/>
+              <a:ext cx="8872888" cy="1974088"/>
+            </p:xfrm>
+            <a:graphic>
+              <a:graphicData uri="http://schemas.openxmlformats.org/drawingml/2006/table">
+                <a:tbl>
+                  <a:tblPr firstRow="1" bandRow="1">
+                    <a:tableStyleId>{5940675A-B579-460E-94D1-54222C63F5DA}</a:tableStyleId>
+                  </a:tblPr>
+                  <a:tblGrid>
+                    <a:gridCol w="2103120">
+                      <a:extLst>
+                        <a:ext uri="{9D8B030D-6E8A-4147-A177-3AD203B41FA5}">
+                          <a16:colId xmlns:a16="http://schemas.microsoft.com/office/drawing/2014/main" val="3834650750"/>
+                        </a:ext>
+                      </a:extLst>
+                    </a:gridCol>
+                    <a:gridCol w="2358189">
+                      <a:extLst>
+                        <a:ext uri="{9D8B030D-6E8A-4147-A177-3AD203B41FA5}">
+                          <a16:colId xmlns:a16="http://schemas.microsoft.com/office/drawing/2014/main" val="1022820918"/>
+                        </a:ext>
+                      </a:extLst>
+                    </a:gridCol>
+                    <a:gridCol w="2159446">
+                      <a:extLst>
+                        <a:ext uri="{9D8B030D-6E8A-4147-A177-3AD203B41FA5}">
+                          <a16:colId xmlns:a16="http://schemas.microsoft.com/office/drawing/2014/main" val="2020566626"/>
+                        </a:ext>
+                      </a:extLst>
+                    </a:gridCol>
+                    <a:gridCol w="2252133">
+                      <a:extLst>
+                        <a:ext uri="{9D8B030D-6E8A-4147-A177-3AD203B41FA5}">
+                          <a16:colId xmlns:a16="http://schemas.microsoft.com/office/drawing/2014/main" val="199116097"/>
+                        </a:ext>
+                      </a:extLst>
+                    </a:gridCol>
+                  </a:tblGrid>
+                  <a:tr h="370840">
+                    <a:tc>
+                      <a:txBody>
+                        <a:bodyPr/>
+                        <a:lstStyle/>
+                        <a:p>
+                          <a:pPr algn="ctr"/>
+                          <a:endParaRPr lang="it-IT" sz="2400" dirty="0"/>
+                        </a:p>
+                      </a:txBody>
+                      <a:tcPr anchor="ctr">
+                        <a:lnL w="12700" cap="flat" cmpd="sng" algn="ctr">
+                          <a:noFill/>
+                          <a:prstDash val="solid"/>
+                          <a:round/>
+                          <a:headEnd type="none" w="med" len="med"/>
+                          <a:tailEnd type="none" w="med" len="med"/>
+                        </a:lnL>
+                        <a:lnR w="28575" cap="flat" cmpd="sng" algn="ctr">
+                          <a:solidFill>
+                            <a:schemeClr val="tx1"/>
+                          </a:solidFill>
+                          <a:prstDash val="solid"/>
+                          <a:round/>
+                          <a:headEnd type="none" w="med" len="med"/>
+                          <a:tailEnd type="none" w="med" len="med"/>
+                        </a:lnR>
+                        <a:lnT w="12700" cap="flat" cmpd="sng" algn="ctr">
+                          <a:noFill/>
+                          <a:prstDash val="solid"/>
+                          <a:round/>
+                          <a:headEnd type="none" w="med" len="med"/>
+                          <a:tailEnd type="none" w="med" len="med"/>
+                        </a:lnT>
+                        <a:lnB w="28575" cap="flat" cmpd="sng" algn="ctr">
+                          <a:solidFill>
+                            <a:schemeClr val="tx1"/>
+                          </a:solidFill>
+                          <a:prstDash val="solid"/>
+                          <a:round/>
+                          <a:headEnd type="none" w="med" len="med"/>
+                          <a:tailEnd type="none" w="med" len="med"/>
+                        </a:lnB>
+                      </a:tcPr>
+                    </a:tc>
+                    <a:tc>
+                      <a:txBody>
+                        <a:bodyPr/>
+                        <a:lstStyle/>
+                        <a:p>
+                          <a:pPr algn="ctr"/>
+                          <a14:m>
+                            <m:oMathPara xmlns:m="http://schemas.openxmlformats.org/officeDocument/2006/math">
+                              <m:oMath>
+                                <m:sSub>
+                                  <m:sSubPr>
+                                    <m:ctrlPr>
+                                      <a:rPr lang="it-IT" sz="2400" b="1" i="1" smtClean="0">
+                                        <a:latin typeface="Cambria Math" panose="02040503050406030204" pitchFamily="18" charset="0"/>
+                                      </a:rPr>
+                                    </m:ctrlPr>
+                                  </m:sSubPr>
+                                  <m:e>
+                                    <m:r>
+                                      <a:rPr lang="it-IT" sz="2400" b="1" i="1" smtClean="0">
+                                        <a:latin typeface="Cambria Math" panose="02040503050406030204" pitchFamily="18" charset="0"/>
+                                      </a:rPr>
+                                      <m:t>𝝉</m:t>
+                                    </m:r>
+                                  </m:e>
+                                  <m:sub>
+                                    <m:r>
+                                      <a:rPr lang="it-IT" sz="2400" b="1" i="1" smtClean="0">
+                                        <a:latin typeface="Cambria Math" panose="02040503050406030204" pitchFamily="18" charset="0"/>
+                                      </a:rPr>
+                                      <m:t>𝒚</m:t>
+                                    </m:r>
+                                  </m:sub>
+                                </m:sSub>
+                                <m:r>
+                                  <a:rPr lang="it-IT" sz="2400" b="1" i="1" smtClean="0">
+                                    <a:latin typeface="Cambria Math" panose="02040503050406030204" pitchFamily="18" charset="0"/>
+                                  </a:rPr>
+                                  <m:t> [</m:t>
+                                </m:r>
+                                <m:r>
+                                  <a:rPr lang="it-IT" sz="2400" b="1" i="1" smtClean="0">
+                                    <a:latin typeface="Cambria Math" panose="02040503050406030204" pitchFamily="18" charset="0"/>
+                                  </a:rPr>
+                                  <m:t>𝝁</m:t>
+                                </m:r>
+                                <m:r>
+                                  <a:rPr lang="it-IT" sz="2400" b="1" i="0" smtClean="0">
+                                    <a:latin typeface="Cambria Math" panose="02040503050406030204" pitchFamily="18" charset="0"/>
+                                  </a:rPr>
+                                  <m:t>𝐫𝐚𝐝</m:t>
+                                </m:r>
+                                <m:r>
+                                  <a:rPr lang="it-IT" sz="2400" b="1" i="0" smtClean="0">
+                                    <a:latin typeface="Cambria Math" panose="02040503050406030204" pitchFamily="18" charset="0"/>
+                                  </a:rPr>
+                                  <m:t>/</m:t>
+                                </m:r>
+                                <m:r>
+                                  <a:rPr lang="it-IT" sz="2400" b="1" i="0" smtClean="0">
+                                    <a:latin typeface="Cambria Math" panose="02040503050406030204" pitchFamily="18" charset="0"/>
+                                  </a:rPr>
+                                  <m:t>𝐦𝐦</m:t>
+                                </m:r>
+                                <m:r>
+                                  <a:rPr lang="it-IT" sz="2400" b="1" i="1" smtClean="0">
+                                    <a:latin typeface="Cambria Math" panose="02040503050406030204" pitchFamily="18" charset="0"/>
+                                  </a:rPr>
+                                  <m:t>]</m:t>
+                                </m:r>
+                              </m:oMath>
+                            </m:oMathPara>
+                          </a14:m>
+                          <a:endParaRPr lang="it-IT" sz="2400" b="1" dirty="0"/>
+                        </a:p>
+                      </a:txBody>
+                      <a:tcPr anchor="ctr">
+                        <a:lnL w="28575" cap="flat" cmpd="sng" algn="ctr">
+                          <a:solidFill>
+                            <a:schemeClr val="tx1"/>
+                          </a:solidFill>
+                          <a:prstDash val="solid"/>
+                          <a:round/>
+                          <a:headEnd type="none" w="med" len="med"/>
+                          <a:tailEnd type="none" w="med" len="med"/>
+                        </a:lnL>
+                        <a:lnT w="12700" cap="flat" cmpd="sng" algn="ctr">
+                          <a:noFill/>
+                          <a:prstDash val="solid"/>
+                          <a:round/>
+                          <a:headEnd type="none" w="med" len="med"/>
+                          <a:tailEnd type="none" w="med" len="med"/>
+                        </a:lnT>
+                        <a:lnB w="28575" cap="flat" cmpd="sng" algn="ctr">
+                          <a:solidFill>
+                            <a:schemeClr val="tx1"/>
+                          </a:solidFill>
+                          <a:prstDash val="solid"/>
+                          <a:round/>
+                          <a:headEnd type="none" w="med" len="med"/>
+                          <a:tailEnd type="none" w="med" len="med"/>
+                        </a:lnB>
+                      </a:tcPr>
+                    </a:tc>
+                    <a:tc>
+                      <a:txBody>
+                        <a:bodyPr/>
+                        <a:lstStyle/>
+                        <a:p>
+                          <a:pPr algn="ctr"/>
+                          <a14:m>
+                            <m:oMath xmlns:m="http://schemas.openxmlformats.org/officeDocument/2006/math">
+                              <m:sSub>
+                                <m:sSubPr>
+                                  <m:ctrlPr>
+                                    <a:rPr lang="it-IT" sz="2400" b="1" i="1" smtClean="0">
+                                      <a:latin typeface="Cambria Math" panose="02040503050406030204" pitchFamily="18" charset="0"/>
+                                    </a:rPr>
+                                  </m:ctrlPr>
+                                </m:sSubPr>
+                                <m:e>
+                                  <m:r>
+                                    <a:rPr lang="it-IT" sz="2400" b="1" i="1" smtClean="0">
+                                      <a:latin typeface="Cambria Math" panose="02040503050406030204" pitchFamily="18" charset="0"/>
+                                    </a:rPr>
+                                    <m:t>𝜽</m:t>
+                                  </m:r>
+                                </m:e>
+                                <m:sub>
+                                  <m:r>
+                                    <a:rPr lang="it-IT" sz="2400" b="1" i="1" smtClean="0">
+                                      <a:latin typeface="Cambria Math" panose="02040503050406030204" pitchFamily="18" charset="0"/>
+                                    </a:rPr>
+                                    <m:t>𝒃</m:t>
+                                  </m:r>
+                                </m:sub>
+                              </m:sSub>
+                              <m:r>
+                                <a:rPr lang="it-IT" sz="2400" b="1" i="1" smtClean="0">
+                                  <a:latin typeface="Cambria Math" panose="02040503050406030204" pitchFamily="18" charset="0"/>
+                                </a:rPr>
+                                <m:t> [</m:t>
+                              </m:r>
+                              <m:r>
+                                <a:rPr lang="it-IT" sz="2400" b="1" i="1" smtClean="0">
+                                  <a:latin typeface="Cambria Math" panose="02040503050406030204" pitchFamily="18" charset="0"/>
+                                </a:rPr>
+                                <m:t>𝝁</m:t>
+                              </m:r>
+                              <m:r>
+                                <a:rPr lang="it-IT" sz="2400" b="1" i="0" smtClean="0">
+                                  <a:latin typeface="Cambria Math" panose="02040503050406030204" pitchFamily="18" charset="0"/>
+                                </a:rPr>
+                                <m:t>𝐫𝐚𝐝</m:t>
+                              </m:r>
+                              <m:r>
+                                <a:rPr lang="it-IT" sz="2400" b="1" i="1" smtClean="0">
+                                  <a:latin typeface="Cambria Math" panose="02040503050406030204" pitchFamily="18" charset="0"/>
+                                </a:rPr>
+                                <m:t>]</m:t>
+                              </m:r>
+                            </m:oMath>
+                          </a14:m>
+                          <a:r>
+                            <a:rPr lang="it-IT" sz="2400" b="1" dirty="0"/>
+                            <a:t> </a:t>
+                          </a:r>
+                        </a:p>
+                      </a:txBody>
+                      <a:tcPr anchor="ctr">
+                        <a:lnT w="12700" cap="flat" cmpd="sng" algn="ctr">
+                          <a:noFill/>
+                          <a:prstDash val="solid"/>
+                          <a:round/>
+                          <a:headEnd type="none" w="med" len="med"/>
+                          <a:tailEnd type="none" w="med" len="med"/>
+                        </a:lnT>
+                        <a:lnB w="28575" cap="flat" cmpd="sng" algn="ctr">
+                          <a:solidFill>
+                            <a:schemeClr val="tx1"/>
+                          </a:solidFill>
+                          <a:prstDash val="solid"/>
+                          <a:round/>
+                          <a:headEnd type="none" w="med" len="med"/>
+                          <a:tailEnd type="none" w="med" len="med"/>
+                        </a:lnB>
+                      </a:tcPr>
+                    </a:tc>
+                    <a:tc>
+                      <a:txBody>
+                        <a:bodyPr/>
+                        <a:lstStyle/>
+                        <a:p>
+                          <a:pPr algn="ctr"/>
+                          <a14:m>
+                            <m:oMathPara xmlns:m="http://schemas.openxmlformats.org/officeDocument/2006/math">
+                              <m:oMath>
+                                <m:sSub>
+                                  <m:sSubPr>
+                                    <m:ctrlPr>
+                                      <a:rPr lang="it-IT" sz="2400" b="1" i="1" smtClean="0">
+                                        <a:latin typeface="Cambria Math" panose="02040503050406030204" pitchFamily="18" charset="0"/>
+                                      </a:rPr>
+                                    </m:ctrlPr>
+                                  </m:sSubPr>
+                                  <m:e>
+                                    <m:r>
+                                      <a:rPr lang="it-IT" sz="2400" b="1" i="1" smtClean="0">
+                                        <a:latin typeface="Cambria Math" panose="02040503050406030204" pitchFamily="18" charset="0"/>
+                                      </a:rPr>
+                                      <m:t>𝝐</m:t>
+                                    </m:r>
+                                  </m:e>
+                                  <m:sub>
+                                    <m:r>
+                                      <a:rPr lang="it-IT" sz="2400" b="1" i="1" smtClean="0">
+                                        <a:latin typeface="Cambria Math" panose="02040503050406030204" pitchFamily="18" charset="0"/>
+                                      </a:rPr>
+                                      <m:t>𝒄𝒉</m:t>
+                                    </m:r>
+                                  </m:sub>
+                                </m:sSub>
+                                <m:r>
+                                  <a:rPr lang="it-IT" sz="2400" b="1" i="1" smtClean="0">
+                                    <a:latin typeface="Cambria Math" panose="02040503050406030204" pitchFamily="18" charset="0"/>
+                                  </a:rPr>
+                                  <m:t> [%]</m:t>
+                                </m:r>
+                              </m:oMath>
+                            </m:oMathPara>
+                          </a14:m>
+                          <a:endParaRPr lang="it-IT" sz="2400" b="1" dirty="0"/>
+                        </a:p>
+                      </a:txBody>
+                      <a:tcPr anchor="ctr">
+                        <a:lnR w="12700" cap="flat" cmpd="sng" algn="ctr">
+                          <a:noFill/>
+                          <a:prstDash val="solid"/>
+                          <a:round/>
+                          <a:headEnd type="none" w="med" len="med"/>
+                          <a:tailEnd type="none" w="med" len="med"/>
+                        </a:lnR>
+                        <a:lnT w="12700" cap="flat" cmpd="sng" algn="ctr">
+                          <a:noFill/>
+                          <a:prstDash val="solid"/>
+                          <a:round/>
+                          <a:headEnd type="none" w="med" len="med"/>
+                          <a:tailEnd type="none" w="med" len="med"/>
+                        </a:lnT>
+                        <a:lnB w="28575" cap="flat" cmpd="sng" algn="ctr">
+                          <a:solidFill>
+                            <a:schemeClr val="tx1"/>
+                          </a:solidFill>
+                          <a:prstDash val="solid"/>
+                          <a:round/>
+                          <a:headEnd type="none" w="med" len="med"/>
+                          <a:tailEnd type="none" w="med" len="med"/>
+                        </a:lnB>
+                      </a:tcPr>
+                    </a:tc>
+                    <a:extLst>
+                      <a:ext uri="{0D108BD9-81ED-4DB2-BD59-A6C34878D82A}">
+                        <a16:rowId xmlns:a16="http://schemas.microsoft.com/office/drawing/2014/main" val="2436405646"/>
+                      </a:ext>
+                    </a:extLst>
+                  </a:tr>
+                  <a:tr h="741680">
+                    <a:tc>
+                      <a:txBody>
+                        <a:bodyPr/>
+                        <a:lstStyle/>
+                        <a:p>
+                          <a:pPr algn="ctr"/>
+                          <a:r>
+                            <a:rPr lang="it-IT" sz="2400" dirty="0"/>
+                            <a:t>Long </a:t>
+                          </a:r>
+                          <a:r>
+                            <a:rPr lang="it-IT" sz="2400" dirty="0" err="1"/>
+                            <a:t>crystal</a:t>
+                          </a:r>
+                          <a:r>
+                            <a:rPr lang="it-IT" sz="2400" dirty="0"/>
+                            <a:t> 1</a:t>
+                          </a:r>
+                        </a:p>
+                      </a:txBody>
+                      <a:tcPr anchor="ctr">
+                        <a:lnL w="12700" cap="flat" cmpd="sng" algn="ctr">
+                          <a:noFill/>
+                          <a:prstDash val="solid"/>
+                          <a:round/>
+                          <a:headEnd type="none" w="med" len="med"/>
+                          <a:tailEnd type="none" w="med" len="med"/>
+                        </a:lnL>
+                        <a:lnR w="28575" cap="flat" cmpd="sng" algn="ctr">
+                          <a:solidFill>
+                            <a:schemeClr val="tx1"/>
+                          </a:solidFill>
+                          <a:prstDash val="solid"/>
+                          <a:round/>
+                          <a:headEnd type="none" w="med" len="med"/>
+                          <a:tailEnd type="none" w="med" len="med"/>
+                        </a:lnR>
+                        <a:lnT w="28575" cap="flat" cmpd="sng" algn="ctr">
+                          <a:solidFill>
+                            <a:schemeClr val="tx1"/>
+                          </a:solidFill>
+                          <a:prstDash val="solid"/>
+                          <a:round/>
+                          <a:headEnd type="none" w="med" len="med"/>
+                          <a:tailEnd type="none" w="med" len="med"/>
+                        </a:lnT>
+                        <a:lnB w="28575" cap="flat" cmpd="sng" algn="ctr">
+                          <a:solidFill>
+                            <a:schemeClr val="tx1"/>
+                          </a:solidFill>
+                          <a:prstDash val="solid"/>
+                          <a:round/>
+                          <a:headEnd type="none" w="med" len="med"/>
+                          <a:tailEnd type="none" w="med" len="med"/>
+                        </a:lnB>
+                      </a:tcPr>
+                    </a:tc>
+                    <a:tc>
+                      <a:txBody>
+                        <a:bodyPr/>
+                        <a:lstStyle/>
+                        <a:p>
+                          <a:pPr algn="ctr"/>
+                          <a14:m>
+                            <m:oMathPara xmlns:m="http://schemas.openxmlformats.org/officeDocument/2006/math">
+                              <m:oMath>
+                                <m:r>
+                                  <a:rPr lang="it-IT" sz="2400" b="0" i="1" smtClean="0">
+                                    <a:latin typeface="Cambria Math" panose="02040503050406030204" pitchFamily="18" charset="0"/>
+                                  </a:rPr>
+                                  <m:t>5.98±0.03</m:t>
+                                </m:r>
+                              </m:oMath>
+                            </m:oMathPara>
+                          </a14:m>
+                          <a:endParaRPr lang="it-IT" sz="2400" b="0" dirty="0"/>
+                        </a:p>
+                      </a:txBody>
+                      <a:tcPr anchor="ctr">
+                        <a:lnL w="28575" cap="flat" cmpd="sng" algn="ctr">
+                          <a:solidFill>
+                            <a:schemeClr val="tx1"/>
+                          </a:solidFill>
+                          <a:prstDash val="solid"/>
+                          <a:round/>
+                          <a:headEnd type="none" w="med" len="med"/>
+                          <a:tailEnd type="none" w="med" len="med"/>
+                        </a:lnL>
+                        <a:lnT w="28575" cap="flat" cmpd="sng" algn="ctr">
+                          <a:solidFill>
+                            <a:schemeClr val="tx1"/>
+                          </a:solidFill>
+                          <a:prstDash val="solid"/>
+                          <a:round/>
+                          <a:headEnd type="none" w="med" len="med"/>
+                          <a:tailEnd type="none" w="med" len="med"/>
+                        </a:lnT>
+                        <a:lnB w="28575" cap="flat" cmpd="sng" algn="ctr">
+                          <a:solidFill>
+                            <a:schemeClr val="tx1"/>
+                          </a:solidFill>
+                          <a:prstDash val="solid"/>
+                          <a:round/>
+                          <a:headEnd type="none" w="med" len="med"/>
+                          <a:tailEnd type="none" w="med" len="med"/>
+                        </a:lnB>
+                      </a:tcPr>
+                    </a:tc>
+                    <a:tc>
+                      <a:txBody>
+                        <a:bodyPr/>
+                        <a:lstStyle/>
+                        <a:p>
+                          <a:pPr algn="ctr"/>
+                          <a14:m>
+                            <m:oMathPara xmlns:m="http://schemas.openxmlformats.org/officeDocument/2006/math">
+                              <m:oMath>
+                                <m:r>
+                                  <a:rPr lang="it-IT" sz="2400" b="0" i="1" smtClean="0">
+                                    <a:latin typeface="Cambria Math" panose="02040503050406030204" pitchFamily="18" charset="0"/>
+                                  </a:rPr>
+                                  <m:t>6008.4±0.1</m:t>
+                                </m:r>
+                              </m:oMath>
+                            </m:oMathPara>
+                          </a14:m>
+                          <a:endParaRPr lang="it-IT" sz="2400" i="0" dirty="0"/>
+                        </a:p>
+                      </a:txBody>
+                      <a:tcPr anchor="ctr">
+                        <a:lnT w="28575" cap="flat" cmpd="sng" algn="ctr">
+                          <a:solidFill>
+                            <a:schemeClr val="tx1"/>
+                          </a:solidFill>
+                          <a:prstDash val="solid"/>
+                          <a:round/>
+                          <a:headEnd type="none" w="med" len="med"/>
+                          <a:tailEnd type="none" w="med" len="med"/>
+                        </a:lnT>
+                        <a:lnB w="28575" cap="flat" cmpd="sng" algn="ctr">
+                          <a:solidFill>
+                            <a:schemeClr val="tx1"/>
+                          </a:solidFill>
+                          <a:prstDash val="solid"/>
+                          <a:round/>
+                          <a:headEnd type="none" w="med" len="med"/>
+                          <a:tailEnd type="none" w="med" len="med"/>
+                        </a:lnB>
+                      </a:tcPr>
+                    </a:tc>
+                    <a:tc>
+                      <a:txBody>
+                        <a:bodyPr/>
+                        <a:lstStyle/>
+                        <a:p>
+                          <a:pPr algn="ctr"/>
+                          <a14:m>
+                            <m:oMathPara xmlns:m="http://schemas.openxmlformats.org/officeDocument/2006/math">
+                              <m:oMath>
+                                <m:r>
+                                  <a:rPr lang="it-IT" sz="2400" b="0" i="1" smtClean="0">
+                                    <a:latin typeface="Cambria Math" panose="02040503050406030204" pitchFamily="18" charset="0"/>
+                                  </a:rPr>
+                                  <m:t>19.4±0.01</m:t>
+                                </m:r>
+                              </m:oMath>
+                            </m:oMathPara>
+                          </a14:m>
+                          <a:endParaRPr lang="it-IT" sz="2400" dirty="0"/>
+                        </a:p>
+                      </a:txBody>
+                      <a:tcPr anchor="ctr">
+                        <a:lnR w="12700" cap="flat" cmpd="sng" algn="ctr">
+                          <a:noFill/>
+                          <a:prstDash val="solid"/>
+                          <a:round/>
+                          <a:headEnd type="none" w="med" len="med"/>
+                          <a:tailEnd type="none" w="med" len="med"/>
+                        </a:lnR>
+                        <a:lnT w="28575" cap="flat" cmpd="sng" algn="ctr">
+                          <a:solidFill>
+                            <a:schemeClr val="tx1"/>
+                          </a:solidFill>
+                          <a:prstDash val="solid"/>
+                          <a:round/>
+                          <a:headEnd type="none" w="med" len="med"/>
+                          <a:tailEnd type="none" w="med" len="med"/>
+                        </a:lnT>
+                        <a:lnB w="28575" cap="flat" cmpd="sng" algn="ctr">
+                          <a:solidFill>
+                            <a:schemeClr val="tx1"/>
+                          </a:solidFill>
+                          <a:prstDash val="solid"/>
+                          <a:round/>
+                          <a:headEnd type="none" w="med" len="med"/>
+                          <a:tailEnd type="none" w="med" len="med"/>
+                        </a:lnB>
+                      </a:tcPr>
+                    </a:tc>
+                    <a:extLst>
+                      <a:ext uri="{0D108BD9-81ED-4DB2-BD59-A6C34878D82A}">
+                        <a16:rowId xmlns:a16="http://schemas.microsoft.com/office/drawing/2014/main" val="1529356210"/>
+                      </a:ext>
+                    </a:extLst>
+                  </a:tr>
+                  <a:tr h="741680">
+                    <a:tc>
+                      <a:txBody>
+                        <a:bodyPr/>
+                        <a:lstStyle/>
+                        <a:p>
+                          <a:pPr algn="ctr"/>
+                          <a:r>
+                            <a:rPr lang="it-IT" sz="2400" dirty="0"/>
+                            <a:t>Long </a:t>
+                          </a:r>
+                          <a:r>
+                            <a:rPr lang="it-IT" sz="2400" dirty="0" err="1"/>
+                            <a:t>crystal</a:t>
+                          </a:r>
+                          <a:r>
+                            <a:rPr lang="it-IT" sz="2400" dirty="0"/>
+                            <a:t> 2</a:t>
+                          </a:r>
+                        </a:p>
+                      </a:txBody>
+                      <a:tcPr anchor="ctr">
+                        <a:lnL w="12700" cap="flat" cmpd="sng" algn="ctr">
+                          <a:noFill/>
+                          <a:prstDash val="solid"/>
+                          <a:round/>
+                          <a:headEnd type="none" w="med" len="med"/>
+                          <a:tailEnd type="none" w="med" len="med"/>
+                        </a:lnL>
+                        <a:lnR w="28575" cap="flat" cmpd="sng" algn="ctr">
+                          <a:solidFill>
+                            <a:schemeClr val="tx1"/>
+                          </a:solidFill>
+                          <a:prstDash val="solid"/>
+                          <a:round/>
+                          <a:headEnd type="none" w="med" len="med"/>
+                          <a:tailEnd type="none" w="med" len="med"/>
+                        </a:lnR>
+                        <a:lnT w="28575" cap="flat" cmpd="sng" algn="ctr">
+                          <a:solidFill>
+                            <a:schemeClr val="tx1"/>
+                          </a:solidFill>
+                          <a:prstDash val="solid"/>
+                          <a:round/>
+                          <a:headEnd type="none" w="med" len="med"/>
+                          <a:tailEnd type="none" w="med" len="med"/>
+                        </a:lnT>
+                        <a:lnB w="12700" cap="flat" cmpd="sng" algn="ctr">
+                          <a:noFill/>
+                          <a:prstDash val="solid"/>
+                          <a:round/>
+                          <a:headEnd type="none" w="med" len="med"/>
+                          <a:tailEnd type="none" w="med" len="med"/>
+                        </a:lnB>
+                      </a:tcPr>
+                    </a:tc>
+                    <a:tc>
+                      <a:txBody>
+                        <a:bodyPr/>
+                        <a:lstStyle/>
+                        <a:p>
+                          <a:pPr marL="0" marR="0" lvl="0" indent="0" algn="ctr" defTabSz="914400" rtl="0" eaLnBrk="1" fontAlgn="auto" latinLnBrk="0" hangingPunct="1">
+                            <a:lnSpc>
+                              <a:spcPct val="100000"/>
+                            </a:lnSpc>
+                            <a:spcBef>
+                              <a:spcPts val="0"/>
+                            </a:spcBef>
+                            <a:spcAft>
+                              <a:spcPts val="0"/>
+                            </a:spcAft>
+                            <a:buClrTx/>
+                            <a:buSzTx/>
+                            <a:buFontTx/>
+                            <a:buNone/>
+                            <a:tabLst/>
+                            <a:defRPr/>
+                          </a:pPr>
+                          <a14:m>
+                            <m:oMathPara xmlns:m="http://schemas.openxmlformats.org/officeDocument/2006/math">
+                              <m:oMath>
+                                <m:r>
+                                  <a:rPr kumimoji="0" lang="it-IT" sz="2400" b="0" i="1" u="none" strike="noStrike" kern="1200" cap="none" spc="0" normalizeH="0" baseline="0" noProof="0" smtClean="0">
+                                    <a:ln>
+                                      <a:noFill/>
+                                    </a:ln>
+                                    <a:solidFill>
+                                      <a:prstClr val="black"/>
+                                    </a:solidFill>
+                                    <a:effectLst/>
+                                    <a:uLnTx/>
+                                    <a:uFillTx/>
+                                    <a:latin typeface="Cambria Math" panose="02040503050406030204" pitchFamily="18" charset="0"/>
+                                    <a:ea typeface="+mn-ea"/>
+                                    <a:cs typeface="+mn-cs"/>
+                                  </a:rPr>
+                                  <m:t>3.77±0.01</m:t>
+                                </m:r>
+                              </m:oMath>
+                            </m:oMathPara>
+                          </a14:m>
+                          <a:endParaRPr kumimoji="0" lang="it-IT" sz="2400" b="0" i="0" u="none" strike="noStrike" kern="1200" cap="none" spc="0" normalizeH="0" baseline="0" noProof="0" dirty="0">
+                            <a:ln>
+                              <a:noFill/>
+                            </a:ln>
+                            <a:solidFill>
+                              <a:prstClr val="black"/>
+                            </a:solidFill>
+                            <a:effectLst/>
+                            <a:uLnTx/>
+                            <a:uFillTx/>
+                            <a:latin typeface="Aptos" panose="02110004020202020204"/>
+                            <a:ea typeface="+mn-ea"/>
+                            <a:cs typeface="+mn-cs"/>
+                          </a:endParaRPr>
+                        </a:p>
+                      </a:txBody>
+                      <a:tcPr anchor="ctr">
+                        <a:lnL w="28575" cap="flat" cmpd="sng" algn="ctr">
+                          <a:solidFill>
+                            <a:schemeClr val="tx1"/>
+                          </a:solidFill>
+                          <a:prstDash val="solid"/>
+                          <a:round/>
+                          <a:headEnd type="none" w="med" len="med"/>
+                          <a:tailEnd type="none" w="med" len="med"/>
+                        </a:lnL>
+                        <a:lnT w="28575" cap="flat" cmpd="sng" algn="ctr">
+                          <a:solidFill>
+                            <a:schemeClr val="tx1"/>
+                          </a:solidFill>
+                          <a:prstDash val="solid"/>
+                          <a:round/>
+                          <a:headEnd type="none" w="med" len="med"/>
+                          <a:tailEnd type="none" w="med" len="med"/>
+                        </a:lnT>
+                        <a:lnB w="12700" cap="flat" cmpd="sng" algn="ctr">
+                          <a:noFill/>
+                          <a:prstDash val="solid"/>
+                          <a:round/>
+                          <a:headEnd type="none" w="med" len="med"/>
+                          <a:tailEnd type="none" w="med" len="med"/>
+                        </a:lnB>
+                      </a:tcPr>
+                    </a:tc>
+                    <a:tc>
+                      <a:txBody>
+                        <a:bodyPr/>
+                        <a:lstStyle/>
+                        <a:p>
+                          <a:pPr marL="0" marR="0" lvl="0" indent="0" algn="ctr" defTabSz="914400" rtl="0" eaLnBrk="1" fontAlgn="auto" latinLnBrk="0" hangingPunct="1">
+                            <a:lnSpc>
+                              <a:spcPct val="100000"/>
+                            </a:lnSpc>
+                            <a:spcBef>
+                              <a:spcPts val="0"/>
+                            </a:spcBef>
+                            <a:spcAft>
+                              <a:spcPts val="0"/>
+                            </a:spcAft>
+                            <a:buClrTx/>
+                            <a:buSzTx/>
+                            <a:buFontTx/>
+                            <a:buNone/>
+                            <a:tabLst/>
+                            <a:defRPr/>
+                          </a:pPr>
+                          <a14:m>
+                            <m:oMathPara xmlns:m="http://schemas.openxmlformats.org/officeDocument/2006/math">
+                              <m:oMath>
+                                <m:r>
+                                  <a:rPr kumimoji="0" lang="it-IT" sz="2400" b="0" i="1" u="none" strike="noStrike" kern="1200" cap="none" spc="0" normalizeH="0" baseline="0" noProof="0" smtClean="0">
+                                    <a:ln>
+                                      <a:noFill/>
+                                    </a:ln>
+                                    <a:solidFill>
+                                      <a:prstClr val="black"/>
+                                    </a:solidFill>
+                                    <a:effectLst/>
+                                    <a:uLnTx/>
+                                    <a:uFillTx/>
+                                    <a:latin typeface="Cambria Math" panose="02040503050406030204" pitchFamily="18" charset="0"/>
+                                    <a:ea typeface="+mn-ea"/>
+                                    <a:cs typeface="+mn-cs"/>
+                                  </a:rPr>
+                                  <m:t>6122.3±0.2</m:t>
+                                </m:r>
+                              </m:oMath>
+                            </m:oMathPara>
+                          </a14:m>
+                          <a:endParaRPr kumimoji="0" lang="it-IT" sz="2400" b="0" i="0" u="none" strike="noStrike" kern="1200" cap="none" spc="0" normalizeH="0" baseline="0" noProof="0" dirty="0">
+                            <a:ln>
+                              <a:noFill/>
+                            </a:ln>
+                            <a:solidFill>
+                              <a:prstClr val="black"/>
+                            </a:solidFill>
+                            <a:effectLst/>
+                            <a:uLnTx/>
+                            <a:uFillTx/>
+                            <a:latin typeface="Aptos" panose="02110004020202020204"/>
+                            <a:ea typeface="+mn-ea"/>
+                            <a:cs typeface="+mn-cs"/>
+                          </a:endParaRPr>
+                        </a:p>
+                      </a:txBody>
+                      <a:tcPr anchor="ctr">
+                        <a:lnT w="28575" cap="flat" cmpd="sng" algn="ctr">
+                          <a:solidFill>
+                            <a:schemeClr val="tx1"/>
+                          </a:solidFill>
+                          <a:prstDash val="solid"/>
+                          <a:round/>
+                          <a:headEnd type="none" w="med" len="med"/>
+                          <a:tailEnd type="none" w="med" len="med"/>
+                        </a:lnT>
+                        <a:lnB w="12700" cap="flat" cmpd="sng" algn="ctr">
+                          <a:noFill/>
+                          <a:prstDash val="solid"/>
+                          <a:round/>
+                          <a:headEnd type="none" w="med" len="med"/>
+                          <a:tailEnd type="none" w="med" len="med"/>
+                        </a:lnB>
+                      </a:tcPr>
+                    </a:tc>
+                    <a:tc>
+                      <a:txBody>
+                        <a:bodyPr/>
+                        <a:lstStyle/>
+                        <a:p>
+                          <a:pPr marL="0" marR="0" lvl="0" indent="0" algn="ctr" defTabSz="914400" rtl="0" eaLnBrk="1" fontAlgn="auto" latinLnBrk="0" hangingPunct="1">
+                            <a:lnSpc>
+                              <a:spcPct val="100000"/>
+                            </a:lnSpc>
+                            <a:spcBef>
+                              <a:spcPts val="0"/>
+                            </a:spcBef>
+                            <a:spcAft>
+                              <a:spcPts val="0"/>
+                            </a:spcAft>
+                            <a:buClrTx/>
+                            <a:buSzTx/>
+                            <a:buFontTx/>
+                            <a:buNone/>
+                            <a:tabLst/>
+                            <a:defRPr/>
+                          </a:pPr>
+                          <a14:m>
+                            <m:oMathPara xmlns:m="http://schemas.openxmlformats.org/officeDocument/2006/math">
+                              <m:oMath>
+                                <m:r>
+                                  <a:rPr kumimoji="0" lang="it-IT" sz="2400" b="0" i="1" u="none" strike="noStrike" kern="1200" cap="none" spc="0" normalizeH="0" baseline="0" noProof="0" smtClean="0">
+                                    <a:ln>
+                                      <a:noFill/>
+                                    </a:ln>
+                                    <a:solidFill>
+                                      <a:prstClr val="black"/>
+                                    </a:solidFill>
+                                    <a:effectLst/>
+                                    <a:uLnTx/>
+                                    <a:uFillTx/>
+                                    <a:latin typeface="Cambria Math" panose="02040503050406030204" pitchFamily="18" charset="0"/>
+                                    <a:ea typeface="+mn-ea"/>
+                                    <a:cs typeface="+mn-cs"/>
+                                  </a:rPr>
+                                  <m:t>18.</m:t>
+                                </m:r>
+                                <m:r>
+                                  <a:rPr kumimoji="0" lang="en-US" sz="2400" b="0" i="1" u="none" strike="noStrike" kern="1200" cap="none" spc="0" normalizeH="0" baseline="0" noProof="0" smtClean="0">
+                                    <a:ln>
+                                      <a:noFill/>
+                                    </a:ln>
+                                    <a:solidFill>
+                                      <a:prstClr val="black"/>
+                                    </a:solidFill>
+                                    <a:effectLst/>
+                                    <a:uLnTx/>
+                                    <a:uFillTx/>
+                                    <a:latin typeface="Cambria Math" panose="02040503050406030204" pitchFamily="18" charset="0"/>
+                                    <a:ea typeface="+mn-ea"/>
+                                    <a:cs typeface="+mn-cs"/>
+                                  </a:rPr>
+                                  <m:t>3</m:t>
+                                </m:r>
+                                <m:r>
+                                  <a:rPr kumimoji="0" lang="it-IT" sz="2400" b="0" i="1" u="none" strike="noStrike" kern="1200" cap="none" spc="0" normalizeH="0" baseline="0" noProof="0" smtClean="0">
+                                    <a:ln>
+                                      <a:noFill/>
+                                    </a:ln>
+                                    <a:solidFill>
+                                      <a:prstClr val="black"/>
+                                    </a:solidFill>
+                                    <a:effectLst/>
+                                    <a:uLnTx/>
+                                    <a:uFillTx/>
+                                    <a:latin typeface="Cambria Math" panose="02040503050406030204" pitchFamily="18" charset="0"/>
+                                    <a:ea typeface="+mn-ea"/>
+                                    <a:cs typeface="+mn-cs"/>
+                                  </a:rPr>
+                                  <m:t>±0.01</m:t>
+                                </m:r>
+                              </m:oMath>
+                            </m:oMathPara>
+                          </a14:m>
+                          <a:endParaRPr kumimoji="0" lang="it-IT" sz="2400" b="0" i="0" u="none" strike="noStrike" kern="1200" cap="none" spc="0" normalizeH="0" baseline="0" noProof="0" dirty="0">
+                            <a:ln>
+                              <a:noFill/>
+                            </a:ln>
+                            <a:solidFill>
+                              <a:prstClr val="black"/>
+                            </a:solidFill>
+                            <a:effectLst/>
+                            <a:uLnTx/>
+                            <a:uFillTx/>
+                            <a:latin typeface="Aptos" panose="02110004020202020204"/>
+                            <a:ea typeface="+mn-ea"/>
+                            <a:cs typeface="+mn-cs"/>
+                          </a:endParaRPr>
+                        </a:p>
+                      </a:txBody>
+                      <a:tcPr anchor="ctr">
+                        <a:lnR w="12700" cap="flat" cmpd="sng" algn="ctr">
+                          <a:noFill/>
+                          <a:prstDash val="solid"/>
+                          <a:round/>
+                          <a:headEnd type="none" w="med" len="med"/>
+                          <a:tailEnd type="none" w="med" len="med"/>
+                        </a:lnR>
+                        <a:lnT w="28575" cap="flat" cmpd="sng" algn="ctr">
+                          <a:solidFill>
+                            <a:schemeClr val="tx1"/>
+                          </a:solidFill>
+                          <a:prstDash val="solid"/>
+                          <a:round/>
+                          <a:headEnd type="none" w="med" len="med"/>
+                          <a:tailEnd type="none" w="med" len="med"/>
+                        </a:lnT>
+                        <a:lnB w="12700" cap="flat" cmpd="sng" algn="ctr">
+                          <a:noFill/>
+                          <a:prstDash val="solid"/>
+                          <a:round/>
+                          <a:headEnd type="none" w="med" len="med"/>
+                          <a:tailEnd type="none" w="med" len="med"/>
+                        </a:lnB>
+                      </a:tcPr>
+                    </a:tc>
+                    <a:extLst>
+                      <a:ext uri="{0D108BD9-81ED-4DB2-BD59-A6C34878D82A}">
+                        <a16:rowId xmlns:a16="http://schemas.microsoft.com/office/drawing/2014/main" val="3544524089"/>
+                      </a:ext>
+                    </a:extLst>
+                  </a:tr>
+                </a:tbl>
+              </a:graphicData>
+            </a:graphic>
+          </p:graphicFrame>
+        </mc:Choice>
+        <mc:Fallback>
+          <p:graphicFrame>
+            <p:nvGraphicFramePr>
+              <p:cNvPr id="11" name="Segnaposto contenuto 10">
+                <a:extLst>
+                  <a:ext uri="{FF2B5EF4-FFF2-40B4-BE49-F238E27FC236}">
+                    <a16:creationId xmlns:a16="http://schemas.microsoft.com/office/drawing/2014/main" id="{64ACAFC3-799E-8B06-CC81-4AD4B1D9346E}"/>
+                  </a:ext>
+                </a:extLst>
+              </p:cNvPr>
+              <p:cNvGraphicFramePr>
+                <a:graphicFrameLocks noGrp="1"/>
+              </p:cNvGraphicFramePr>
+              <p:nvPr>
+                <p:ph idx="1"/>
+                <p:extLst>
+                  <p:ext uri="{D42A27DB-BD31-4B8C-83A1-F6EECF244321}">
+                    <p14:modId xmlns:p14="http://schemas.microsoft.com/office/powerpoint/2010/main" val="76894076"/>
+                  </p:ext>
+                </p:extLst>
+              </p:nvPr>
+            </p:nvGraphicFramePr>
+            <p:xfrm>
+              <a:off x="1658656" y="2441956"/>
+              <a:ext cx="8872888" cy="1974088"/>
+            </p:xfrm>
+            <a:graphic>
+              <a:graphicData uri="http://schemas.openxmlformats.org/drawingml/2006/table">
+                <a:tbl>
+                  <a:tblPr firstRow="1" bandRow="1">
+                    <a:tableStyleId>{5940675A-B579-460E-94D1-54222C63F5DA}</a:tableStyleId>
+                  </a:tblPr>
+                  <a:tblGrid>
+                    <a:gridCol w="2103120">
+                      <a:extLst>
+                        <a:ext uri="{9D8B030D-6E8A-4147-A177-3AD203B41FA5}">
+                          <a16:colId xmlns:a16="http://schemas.microsoft.com/office/drawing/2014/main" val="3834650750"/>
+                        </a:ext>
+                      </a:extLst>
+                    </a:gridCol>
+                    <a:gridCol w="2358189">
+                      <a:extLst>
+                        <a:ext uri="{9D8B030D-6E8A-4147-A177-3AD203B41FA5}">
+                          <a16:colId xmlns:a16="http://schemas.microsoft.com/office/drawing/2014/main" val="1022820918"/>
+                        </a:ext>
+                      </a:extLst>
+                    </a:gridCol>
+                    <a:gridCol w="2159446">
+                      <a:extLst>
+                        <a:ext uri="{9D8B030D-6E8A-4147-A177-3AD203B41FA5}">
+                          <a16:colId xmlns:a16="http://schemas.microsoft.com/office/drawing/2014/main" val="2020566626"/>
+                        </a:ext>
+                      </a:extLst>
+                    </a:gridCol>
+                    <a:gridCol w="2252133">
+                      <a:extLst>
+                        <a:ext uri="{9D8B030D-6E8A-4147-A177-3AD203B41FA5}">
+                          <a16:colId xmlns:a16="http://schemas.microsoft.com/office/drawing/2014/main" val="199116097"/>
+                        </a:ext>
+                      </a:extLst>
+                    </a:gridCol>
+                  </a:tblGrid>
+                  <a:tr h="490728">
+                    <a:tc>
+                      <a:txBody>
+                        <a:bodyPr/>
+                        <a:lstStyle/>
+                        <a:p>
+                          <a:pPr algn="ctr"/>
+                          <a:endParaRPr lang="it-IT" sz="2400" dirty="0"/>
+                        </a:p>
+                      </a:txBody>
+                      <a:tcPr anchor="ctr">
+                        <a:lnL w="12700" cap="flat" cmpd="sng" algn="ctr">
+                          <a:noFill/>
+                          <a:prstDash val="solid"/>
+                          <a:round/>
+                          <a:headEnd type="none" w="med" len="med"/>
+                          <a:tailEnd type="none" w="med" len="med"/>
+                        </a:lnL>
+                        <a:lnR w="28575" cap="flat" cmpd="sng" algn="ctr">
+                          <a:solidFill>
+                            <a:schemeClr val="tx1"/>
+                          </a:solidFill>
+                          <a:prstDash val="solid"/>
+                          <a:round/>
+                          <a:headEnd type="none" w="med" len="med"/>
+                          <a:tailEnd type="none" w="med" len="med"/>
+                        </a:lnR>
+                        <a:lnT w="12700" cap="flat" cmpd="sng" algn="ctr">
+                          <a:noFill/>
+                          <a:prstDash val="solid"/>
+                          <a:round/>
+                          <a:headEnd type="none" w="med" len="med"/>
+                          <a:tailEnd type="none" w="med" len="med"/>
+                        </a:lnT>
+                        <a:lnB w="28575" cap="flat" cmpd="sng" algn="ctr">
+                          <a:solidFill>
+                            <a:schemeClr val="tx1"/>
+                          </a:solidFill>
+                          <a:prstDash val="solid"/>
+                          <a:round/>
+                          <a:headEnd type="none" w="med" len="med"/>
+                          <a:tailEnd type="none" w="med" len="med"/>
+                        </a:lnB>
+                      </a:tcPr>
+                    </a:tc>
+                    <a:tc>
+                      <a:txBody>
+                        <a:bodyPr/>
+                        <a:lstStyle/>
+                        <a:p>
+                          <a:endParaRPr lang="it-IT"/>
+                        </a:p>
+                      </a:txBody>
+                      <a:tcPr anchor="ctr">
+                        <a:lnL w="28575" cap="flat" cmpd="sng" algn="ctr">
+                          <a:solidFill>
+                            <a:schemeClr val="tx1"/>
+                          </a:solidFill>
+                          <a:prstDash val="solid"/>
+                          <a:round/>
+                          <a:headEnd type="none" w="med" len="med"/>
+                          <a:tailEnd type="none" w="med" len="med"/>
+                        </a:lnL>
+                        <a:lnT w="12700" cap="flat" cmpd="sng" algn="ctr">
+                          <a:noFill/>
+                          <a:prstDash val="solid"/>
+                          <a:round/>
+                          <a:headEnd type="none" w="med" len="med"/>
+                          <a:tailEnd type="none" w="med" len="med"/>
+                        </a:lnT>
+                        <a:lnB w="28575" cap="flat" cmpd="sng" algn="ctr">
+                          <a:solidFill>
+                            <a:schemeClr val="tx1"/>
+                          </a:solidFill>
+                          <a:prstDash val="solid"/>
+                          <a:round/>
+                          <a:headEnd type="none" w="med" len="med"/>
+                          <a:tailEnd type="none" w="med" len="med"/>
+                        </a:lnB>
+                        <a:blipFill>
+                          <a:blip r:embed="rId3"/>
+                          <a:stretch>
+                            <a:fillRect l="-89147" r="-187597" b="-303704"/>
+                          </a:stretch>
+                        </a:blipFill>
+                      </a:tcPr>
+                    </a:tc>
+                    <a:tc>
+                      <a:txBody>
+                        <a:bodyPr/>
+                        <a:lstStyle/>
+                        <a:p>
+                          <a:endParaRPr lang="it-IT"/>
+                        </a:p>
+                      </a:txBody>
+                      <a:tcPr anchor="ctr">
+                        <a:lnT w="12700" cap="flat" cmpd="sng" algn="ctr">
+                          <a:noFill/>
+                          <a:prstDash val="solid"/>
+                          <a:round/>
+                          <a:headEnd type="none" w="med" len="med"/>
+                          <a:tailEnd type="none" w="med" len="med"/>
+                        </a:lnT>
+                        <a:lnB w="28575" cap="flat" cmpd="sng" algn="ctr">
+                          <a:solidFill>
+                            <a:schemeClr val="tx1"/>
+                          </a:solidFill>
+                          <a:prstDash val="solid"/>
+                          <a:round/>
+                          <a:headEnd type="none" w="med" len="med"/>
+                          <a:tailEnd type="none" w="med" len="med"/>
+                        </a:lnB>
+                        <a:blipFill>
+                          <a:blip r:embed="rId3"/>
+                          <a:stretch>
+                            <a:fillRect l="-206780" r="-105085" b="-303704"/>
+                          </a:stretch>
+                        </a:blipFill>
+                      </a:tcPr>
+                    </a:tc>
+                    <a:tc>
+                      <a:txBody>
+                        <a:bodyPr/>
+                        <a:lstStyle/>
+                        <a:p>
+                          <a:endParaRPr lang="it-IT"/>
+                        </a:p>
+                      </a:txBody>
+                      <a:tcPr anchor="ctr">
+                        <a:lnR w="12700" cap="flat" cmpd="sng" algn="ctr">
+                          <a:noFill/>
+                          <a:prstDash val="solid"/>
+                          <a:round/>
+                          <a:headEnd type="none" w="med" len="med"/>
+                          <a:tailEnd type="none" w="med" len="med"/>
+                        </a:lnR>
+                        <a:lnT w="12700" cap="flat" cmpd="sng" algn="ctr">
+                          <a:noFill/>
+                          <a:prstDash val="solid"/>
+                          <a:round/>
+                          <a:headEnd type="none" w="med" len="med"/>
+                          <a:tailEnd type="none" w="med" len="med"/>
+                        </a:lnT>
+                        <a:lnB w="28575" cap="flat" cmpd="sng" algn="ctr">
+                          <a:solidFill>
+                            <a:schemeClr val="tx1"/>
+                          </a:solidFill>
+                          <a:prstDash val="solid"/>
+                          <a:round/>
+                          <a:headEnd type="none" w="med" len="med"/>
+                          <a:tailEnd type="none" w="med" len="med"/>
+                        </a:lnB>
+                        <a:blipFill>
+                          <a:blip r:embed="rId3"/>
+                          <a:stretch>
+                            <a:fillRect l="-293514" r="-541" b="-303704"/>
+                          </a:stretch>
+                        </a:blipFill>
+                      </a:tcPr>
+                    </a:tc>
+                    <a:extLst>
+                      <a:ext uri="{0D108BD9-81ED-4DB2-BD59-A6C34878D82A}">
+                        <a16:rowId xmlns:a16="http://schemas.microsoft.com/office/drawing/2014/main" val="2436405646"/>
+                      </a:ext>
+                    </a:extLst>
+                  </a:tr>
+                  <a:tr h="741680">
+                    <a:tc>
+                      <a:txBody>
+                        <a:bodyPr/>
+                        <a:lstStyle/>
+                        <a:p>
+                          <a:pPr algn="ctr"/>
+                          <a:r>
+                            <a:rPr lang="it-IT" sz="2400" dirty="0"/>
+                            <a:t>Long </a:t>
+                          </a:r>
+                          <a:r>
+                            <a:rPr lang="it-IT" sz="2400" dirty="0" err="1"/>
+                            <a:t>crystal</a:t>
+                          </a:r>
+                          <a:r>
+                            <a:rPr lang="it-IT" sz="2400" dirty="0"/>
+                            <a:t> 1</a:t>
+                          </a:r>
+                        </a:p>
+                      </a:txBody>
+                      <a:tcPr anchor="ctr">
+                        <a:lnL w="12700" cap="flat" cmpd="sng" algn="ctr">
+                          <a:noFill/>
+                          <a:prstDash val="solid"/>
+                          <a:round/>
+                          <a:headEnd type="none" w="med" len="med"/>
+                          <a:tailEnd type="none" w="med" len="med"/>
+                        </a:lnL>
+                        <a:lnR w="28575" cap="flat" cmpd="sng" algn="ctr">
+                          <a:solidFill>
+                            <a:schemeClr val="tx1"/>
+                          </a:solidFill>
+                          <a:prstDash val="solid"/>
+                          <a:round/>
+                          <a:headEnd type="none" w="med" len="med"/>
+                          <a:tailEnd type="none" w="med" len="med"/>
+                        </a:lnR>
+                        <a:lnT w="28575" cap="flat" cmpd="sng" algn="ctr">
+                          <a:solidFill>
+                            <a:schemeClr val="tx1"/>
+                          </a:solidFill>
+                          <a:prstDash val="solid"/>
+                          <a:round/>
+                          <a:headEnd type="none" w="med" len="med"/>
+                          <a:tailEnd type="none" w="med" len="med"/>
+                        </a:lnT>
+                        <a:lnB w="28575" cap="flat" cmpd="sng" algn="ctr">
+                          <a:solidFill>
+                            <a:schemeClr val="tx1"/>
+                          </a:solidFill>
+                          <a:prstDash val="solid"/>
+                          <a:round/>
+                          <a:headEnd type="none" w="med" len="med"/>
+                          <a:tailEnd type="none" w="med" len="med"/>
+                        </a:lnB>
+                      </a:tcPr>
+                    </a:tc>
+                    <a:tc>
+                      <a:txBody>
+                        <a:bodyPr/>
+                        <a:lstStyle/>
+                        <a:p>
+                          <a:endParaRPr lang="it-IT"/>
+                        </a:p>
+                      </a:txBody>
+                      <a:tcPr anchor="ctr">
+                        <a:lnL w="28575" cap="flat" cmpd="sng" algn="ctr">
+                          <a:solidFill>
+                            <a:schemeClr val="tx1"/>
+                          </a:solidFill>
+                          <a:prstDash val="solid"/>
+                          <a:round/>
+                          <a:headEnd type="none" w="med" len="med"/>
+                          <a:tailEnd type="none" w="med" len="med"/>
+                        </a:lnL>
+                        <a:lnT w="28575" cap="flat" cmpd="sng" algn="ctr">
+                          <a:solidFill>
+                            <a:schemeClr val="tx1"/>
+                          </a:solidFill>
+                          <a:prstDash val="solid"/>
+                          <a:round/>
+                          <a:headEnd type="none" w="med" len="med"/>
+                          <a:tailEnd type="none" w="med" len="med"/>
+                        </a:lnT>
+                        <a:lnB w="28575" cap="flat" cmpd="sng" algn="ctr">
+                          <a:solidFill>
+                            <a:schemeClr val="tx1"/>
+                          </a:solidFill>
+                          <a:prstDash val="solid"/>
+                          <a:round/>
+                          <a:headEnd type="none" w="med" len="med"/>
+                          <a:tailEnd type="none" w="med" len="med"/>
+                        </a:lnB>
+                        <a:blipFill>
+                          <a:blip r:embed="rId3"/>
+                          <a:stretch>
+                            <a:fillRect l="-89147" t="-66393" r="-187597" b="-101639"/>
+                          </a:stretch>
+                        </a:blipFill>
+                      </a:tcPr>
+                    </a:tc>
+                    <a:tc>
+                      <a:txBody>
+                        <a:bodyPr/>
+                        <a:lstStyle/>
+                        <a:p>
+                          <a:endParaRPr lang="it-IT"/>
+                        </a:p>
+                      </a:txBody>
+                      <a:tcPr anchor="ctr">
+                        <a:lnT w="28575" cap="flat" cmpd="sng" algn="ctr">
+                          <a:solidFill>
+                            <a:schemeClr val="tx1"/>
+                          </a:solidFill>
+                          <a:prstDash val="solid"/>
+                          <a:round/>
+                          <a:headEnd type="none" w="med" len="med"/>
+                          <a:tailEnd type="none" w="med" len="med"/>
+                        </a:lnT>
+                        <a:lnB w="28575" cap="flat" cmpd="sng" algn="ctr">
+                          <a:solidFill>
+                            <a:schemeClr val="tx1"/>
+                          </a:solidFill>
+                          <a:prstDash val="solid"/>
+                          <a:round/>
+                          <a:headEnd type="none" w="med" len="med"/>
+                          <a:tailEnd type="none" w="med" len="med"/>
+                        </a:lnB>
+                        <a:blipFill>
+                          <a:blip r:embed="rId3"/>
+                          <a:stretch>
+                            <a:fillRect l="-206780" t="-66393" r="-105085" b="-101639"/>
+                          </a:stretch>
+                        </a:blipFill>
+                      </a:tcPr>
+                    </a:tc>
+                    <a:tc>
+                      <a:txBody>
+                        <a:bodyPr/>
+                        <a:lstStyle/>
+                        <a:p>
+                          <a:endParaRPr lang="it-IT"/>
+                        </a:p>
+                      </a:txBody>
+                      <a:tcPr anchor="ctr">
+                        <a:lnR w="12700" cap="flat" cmpd="sng" algn="ctr">
+                          <a:noFill/>
+                          <a:prstDash val="solid"/>
+                          <a:round/>
+                          <a:headEnd type="none" w="med" len="med"/>
+                          <a:tailEnd type="none" w="med" len="med"/>
+                        </a:lnR>
+                        <a:lnT w="28575" cap="flat" cmpd="sng" algn="ctr">
+                          <a:solidFill>
+                            <a:schemeClr val="tx1"/>
+                          </a:solidFill>
+                          <a:prstDash val="solid"/>
+                          <a:round/>
+                          <a:headEnd type="none" w="med" len="med"/>
+                          <a:tailEnd type="none" w="med" len="med"/>
+                        </a:lnT>
+                        <a:lnB w="28575" cap="flat" cmpd="sng" algn="ctr">
+                          <a:solidFill>
+                            <a:schemeClr val="tx1"/>
+                          </a:solidFill>
+                          <a:prstDash val="solid"/>
+                          <a:round/>
+                          <a:headEnd type="none" w="med" len="med"/>
+                          <a:tailEnd type="none" w="med" len="med"/>
+                        </a:lnB>
+                        <a:blipFill>
+                          <a:blip r:embed="rId3"/>
+                          <a:stretch>
+                            <a:fillRect l="-293514" t="-66393" r="-541" b="-101639"/>
+                          </a:stretch>
+                        </a:blipFill>
+                      </a:tcPr>
+                    </a:tc>
+                    <a:extLst>
+                      <a:ext uri="{0D108BD9-81ED-4DB2-BD59-A6C34878D82A}">
+                        <a16:rowId xmlns:a16="http://schemas.microsoft.com/office/drawing/2014/main" val="1529356210"/>
+                      </a:ext>
+                    </a:extLst>
+                  </a:tr>
+                  <a:tr h="741680">
+                    <a:tc>
+                      <a:txBody>
+                        <a:bodyPr/>
+                        <a:lstStyle/>
+                        <a:p>
+                          <a:pPr algn="ctr"/>
+                          <a:r>
+                            <a:rPr lang="it-IT" sz="2400" dirty="0"/>
+                            <a:t>Long </a:t>
+                          </a:r>
+                          <a:r>
+                            <a:rPr lang="it-IT" sz="2400" dirty="0" err="1"/>
+                            <a:t>crystal</a:t>
+                          </a:r>
+                          <a:r>
+                            <a:rPr lang="it-IT" sz="2400" dirty="0"/>
+                            <a:t> 2</a:t>
+                          </a:r>
+                        </a:p>
+                      </a:txBody>
+                      <a:tcPr anchor="ctr">
+                        <a:lnL w="12700" cap="flat" cmpd="sng" algn="ctr">
+                          <a:noFill/>
+                          <a:prstDash val="solid"/>
+                          <a:round/>
+                          <a:headEnd type="none" w="med" len="med"/>
+                          <a:tailEnd type="none" w="med" len="med"/>
+                        </a:lnL>
+                        <a:lnR w="28575" cap="flat" cmpd="sng" algn="ctr">
+                          <a:solidFill>
+                            <a:schemeClr val="tx1"/>
+                          </a:solidFill>
+                          <a:prstDash val="solid"/>
+                          <a:round/>
+                          <a:headEnd type="none" w="med" len="med"/>
+                          <a:tailEnd type="none" w="med" len="med"/>
+                        </a:lnR>
+                        <a:lnT w="28575" cap="flat" cmpd="sng" algn="ctr">
+                          <a:solidFill>
+                            <a:schemeClr val="tx1"/>
+                          </a:solidFill>
+                          <a:prstDash val="solid"/>
+                          <a:round/>
+                          <a:headEnd type="none" w="med" len="med"/>
+                          <a:tailEnd type="none" w="med" len="med"/>
+                        </a:lnT>
+                        <a:lnB w="12700" cap="flat" cmpd="sng" algn="ctr">
+                          <a:noFill/>
+                          <a:prstDash val="solid"/>
+                          <a:round/>
+                          <a:headEnd type="none" w="med" len="med"/>
+                          <a:tailEnd type="none" w="med" len="med"/>
+                        </a:lnB>
+                      </a:tcPr>
+                    </a:tc>
+                    <a:tc>
+                      <a:txBody>
+                        <a:bodyPr/>
+                        <a:lstStyle/>
+                        <a:p>
+                          <a:endParaRPr lang="it-IT"/>
+                        </a:p>
+                      </a:txBody>
+                      <a:tcPr anchor="ctr">
+                        <a:lnL w="28575" cap="flat" cmpd="sng" algn="ctr">
+                          <a:solidFill>
+                            <a:schemeClr val="tx1"/>
+                          </a:solidFill>
+                          <a:prstDash val="solid"/>
+                          <a:round/>
+                          <a:headEnd type="none" w="med" len="med"/>
+                          <a:tailEnd type="none" w="med" len="med"/>
+                        </a:lnL>
+                        <a:lnT w="28575" cap="flat" cmpd="sng" algn="ctr">
+                          <a:solidFill>
+                            <a:schemeClr val="tx1"/>
+                          </a:solidFill>
+                          <a:prstDash val="solid"/>
+                          <a:round/>
+                          <a:headEnd type="none" w="med" len="med"/>
+                          <a:tailEnd type="none" w="med" len="med"/>
+                        </a:lnT>
+                        <a:lnB w="12700" cap="flat" cmpd="sng" algn="ctr">
+                          <a:noFill/>
+                          <a:prstDash val="solid"/>
+                          <a:round/>
+                          <a:headEnd type="none" w="med" len="med"/>
+                          <a:tailEnd type="none" w="med" len="med"/>
+                        </a:lnB>
+                        <a:blipFill>
+                          <a:blip r:embed="rId3"/>
+                          <a:stretch>
+                            <a:fillRect l="-89147" t="-166393" r="-187597" b="-1639"/>
+                          </a:stretch>
+                        </a:blipFill>
+                      </a:tcPr>
+                    </a:tc>
+                    <a:tc>
+                      <a:txBody>
+                        <a:bodyPr/>
+                        <a:lstStyle/>
+                        <a:p>
+                          <a:endParaRPr lang="it-IT"/>
+                        </a:p>
+                      </a:txBody>
+                      <a:tcPr anchor="ctr">
+                        <a:lnT w="28575" cap="flat" cmpd="sng" algn="ctr">
+                          <a:solidFill>
+                            <a:schemeClr val="tx1"/>
+                          </a:solidFill>
+                          <a:prstDash val="solid"/>
+                          <a:round/>
+                          <a:headEnd type="none" w="med" len="med"/>
+                          <a:tailEnd type="none" w="med" len="med"/>
+                        </a:lnT>
+                        <a:lnB w="12700" cap="flat" cmpd="sng" algn="ctr">
+                          <a:noFill/>
+                          <a:prstDash val="solid"/>
+                          <a:round/>
+                          <a:headEnd type="none" w="med" len="med"/>
+                          <a:tailEnd type="none" w="med" len="med"/>
+                        </a:lnB>
+                        <a:blipFill>
+                          <a:blip r:embed="rId3"/>
+                          <a:stretch>
+                            <a:fillRect l="-206780" t="-166393" r="-105085" b="-1639"/>
+                          </a:stretch>
+                        </a:blipFill>
+                      </a:tcPr>
+                    </a:tc>
+                    <a:tc>
+                      <a:txBody>
+                        <a:bodyPr/>
+                        <a:lstStyle/>
+                        <a:p>
+                          <a:endParaRPr lang="it-IT"/>
+                        </a:p>
+                      </a:txBody>
+                      <a:tcPr anchor="ctr">
+                        <a:lnR w="12700" cap="flat" cmpd="sng" algn="ctr">
+                          <a:noFill/>
+                          <a:prstDash val="solid"/>
+                          <a:round/>
+                          <a:headEnd type="none" w="med" len="med"/>
+                          <a:tailEnd type="none" w="med" len="med"/>
+                        </a:lnR>
+                        <a:lnT w="28575" cap="flat" cmpd="sng" algn="ctr">
+                          <a:solidFill>
+                            <a:schemeClr val="tx1"/>
+                          </a:solidFill>
+                          <a:prstDash val="solid"/>
+                          <a:round/>
+                          <a:headEnd type="none" w="med" len="med"/>
+                          <a:tailEnd type="none" w="med" len="med"/>
+                        </a:lnT>
+                        <a:lnB w="12700" cap="flat" cmpd="sng" algn="ctr">
+                          <a:noFill/>
+                          <a:prstDash val="solid"/>
+                          <a:round/>
+                          <a:headEnd type="none" w="med" len="med"/>
+                          <a:tailEnd type="none" w="med" len="med"/>
+                        </a:lnB>
+                        <a:blipFill>
+                          <a:blip r:embed="rId3"/>
+                          <a:stretch>
+                            <a:fillRect l="-293514" t="-166393" r="-541" b="-1639"/>
+                          </a:stretch>
+                        </a:blipFill>
+                      </a:tcPr>
+                    </a:tc>
+                    <a:extLst>
+                      <a:ext uri="{0D108BD9-81ED-4DB2-BD59-A6C34878D82A}">
+                        <a16:rowId xmlns:a16="http://schemas.microsoft.com/office/drawing/2014/main" val="3544524089"/>
+                      </a:ext>
+                    </a:extLst>
+                  </a:tr>
+                </a:tbl>
+              </a:graphicData>
+            </a:graphic>
+          </p:graphicFrame>
+        </mc:Fallback>
+      </mc:AlternateContent>
+    </p:spTree>
+    <p:extLst>
+      <p:ext uri="{BB962C8B-B14F-4D97-AF65-F5344CB8AC3E}">
+        <p14:creationId xmlns:p14="http://schemas.microsoft.com/office/powerpoint/2010/main" val="2956971435"/>
+      </p:ext>
+    </p:extLst>
+  </p:cSld>
+  <p:clrMapOvr>
+    <a:masterClrMapping/>
+  </p:clrMapOvr>
+</p:sld>
+</file>
+
+<file path=ppt/slides/slide3.xml><?xml version="1.0" encoding="utf-8"?>
+<p:sld xmlns:a="http://schemas.openxmlformats.org/drawingml/2006/main" xmlns:r="http://schemas.openxmlformats.org/officeDocument/2006/relationships" xmlns:p="http://schemas.openxmlformats.org/presentationml/2006/main">
+  <p:cSld>
+    <p:spTree>
+      <p:nvGrpSpPr>
+        <p:cNvPr id="1" name="">
+          <a:extLst>
+            <a:ext uri="{FF2B5EF4-FFF2-40B4-BE49-F238E27FC236}">
+              <a16:creationId xmlns:a16="http://schemas.microsoft.com/office/drawing/2014/main" id="{6D2D15EE-E0CD-DBB8-0557-41AFA45E17F4}"/>
+            </a:ext>
+          </a:extLst>
+        </p:cNvPr>
+        <p:cNvGrpSpPr/>
+        <p:nvPr/>
+      </p:nvGrpSpPr>
+      <p:grpSpPr>
+        <a:xfrm>
+          <a:off x="0" y="0"/>
+          <a:ext cx="0" cy="0"/>
+          <a:chOff x="0" y="0"/>
+          <a:chExt cx="0" cy="0"/>
+        </a:xfrm>
+      </p:grpSpPr>
+      <p:sp>
+        <p:nvSpPr>
+          <p:cNvPr id="2" name="Titolo 1">
+            <a:extLst>
+              <a:ext uri="{FF2B5EF4-FFF2-40B4-BE49-F238E27FC236}">
+                <a16:creationId xmlns:a16="http://schemas.microsoft.com/office/drawing/2014/main" id="{2A4CADC3-A97E-6CE9-A43A-682A34F02C75}"/>
+              </a:ext>
+            </a:extLst>
+          </p:cNvPr>
+          <p:cNvSpPr>
+            <a:spLocks noGrp="1"/>
+          </p:cNvSpPr>
+          <p:nvPr>
+            <p:ph type="title"/>
+          </p:nvPr>
+        </p:nvSpPr>
+        <p:spPr>
+          <a:xfrm>
+            <a:off x="38100" y="69651"/>
+            <a:ext cx="12114000" cy="1153094"/>
+          </a:xfrm>
+          <a:prstGeom prst="roundRect">
+            <a:avLst>
+              <a:gd name="adj" fmla="val 36459"/>
+            </a:avLst>
+          </a:prstGeom>
+          <a:noFill/>
+        </p:spPr>
+        <p:txBody>
+          <a:bodyPr>
+            <a:normAutofit/>
+          </a:bodyPr>
+          <a:lstStyle/>
+          <a:p>
+            <a:r>
               <a:rPr lang="en-US" b="1" dirty="0">
                 <a:solidFill>
                   <a:srgbClr val="002060"/>
@@ -4653,7 +9421,7 @@
                   <a:srgbClr val="002060"/>
                 </a:solidFill>
               </a:rPr>
-              <a:t>2</a:t>
+              <a:t>3</a:t>
             </a:fld>
             <a:endParaRPr lang="it-IT" sz="1500" b="1" dirty="0">
               <a:solidFill>
@@ -4818,9 +9586,6 @@
                   <a:rPr lang="en-US" dirty="0"/>
                   <a:t>Binomial fluctuation of the particle count</a:t>
                 </a:r>
-              </a:p>
-              <a:p>
-                <a:pPr lvl="1"/>
                 <a:endParaRPr lang="it-IT" dirty="0"/>
               </a:p>
               <a:p>
@@ -5011,7 +9776,7 @@
 </p:sld>
 </file>
 
-<file path=ppt/slides/slide3.xml><?xml version="1.0" encoding="utf-8"?>
+<file path=ppt/slides/slide4.xml><?xml version="1.0" encoding="utf-8"?>
 <p:sld xmlns:a="http://schemas.openxmlformats.org/drawingml/2006/main" xmlns:r="http://schemas.openxmlformats.org/officeDocument/2006/relationships" xmlns:p="http://schemas.openxmlformats.org/presentationml/2006/main">
   <p:cSld>
     <p:spTree>
@@ -5190,7 +9955,7 @@
                   <a:srgbClr val="002060"/>
                 </a:solidFill>
               </a:rPr>
-              <a:t>3</a:t>
+              <a:t>4</a:t>
             </a:fld>
             <a:endParaRPr lang="it-IT" sz="1500" b="1" dirty="0">
               <a:solidFill>
@@ -6198,7 +10963,7 @@
 </p:sld>
 </file>
 
-<file path=ppt/slides/slide4.xml><?xml version="1.0" encoding="utf-8"?>
+<file path=ppt/slides/slide5.xml><?xml version="1.0" encoding="utf-8"?>
 <p:sld xmlns:a="http://schemas.openxmlformats.org/drawingml/2006/main" xmlns:r="http://schemas.openxmlformats.org/officeDocument/2006/relationships" xmlns:p="http://schemas.openxmlformats.org/presentationml/2006/main">
   <p:cSld>
     <p:spTree>
@@ -6377,7 +11142,7 @@
                   <a:srgbClr val="002060"/>
                 </a:solidFill>
               </a:rPr>
-              <a:t>4</a:t>
+              <a:t>5</a:t>
             </a:fld>
             <a:endParaRPr lang="it-IT" sz="1500" b="1" dirty="0">
               <a:solidFill>
@@ -6898,7 +11663,7 @@
 </p:sld>
 </file>
 
-<file path=ppt/slides/slide5.xml><?xml version="1.0" encoding="utf-8"?>
+<file path=ppt/slides/slide6.xml><?xml version="1.0" encoding="utf-8"?>
 <p:sld xmlns:a="http://schemas.openxmlformats.org/drawingml/2006/main" xmlns:r="http://schemas.openxmlformats.org/officeDocument/2006/relationships" xmlns:p="http://schemas.openxmlformats.org/presentationml/2006/main">
   <p:cSld>
     <p:spTree>
@@ -7077,7 +11842,7 @@
                   <a:srgbClr val="002060"/>
                 </a:solidFill>
               </a:rPr>
-              <a:t>5</a:t>
+              <a:t>6</a:t>
             </a:fld>
             <a:endParaRPr lang="it-IT" sz="1500" b="1" dirty="0">
               <a:solidFill>
@@ -7378,7 +12143,7 @@
 </p:sld>
 </file>
 
-<file path=ppt/slides/slide6.xml><?xml version="1.0" encoding="utf-8"?>
+<file path=ppt/slides/slide7.xml><?xml version="1.0" encoding="utf-8"?>
 <p:sld xmlns:a="http://schemas.openxmlformats.org/drawingml/2006/main" xmlns:r="http://schemas.openxmlformats.org/officeDocument/2006/relationships" xmlns:p="http://schemas.openxmlformats.org/presentationml/2006/main">
   <p:cSld>
     <p:spTree>
@@ -7557,7 +12322,7 @@
                   <a:srgbClr val="002060"/>
                 </a:solidFill>
               </a:rPr>
-              <a:t>6</a:t>
+              <a:t>7</a:t>
             </a:fld>
             <a:endParaRPr lang="it-IT" sz="1500" b="1" dirty="0">
               <a:solidFill>
@@ -7695,7 +12460,7 @@
             <p:spPr>
               <a:xfrm>
                 <a:off x="838200" y="1569308"/>
-                <a:ext cx="10515600" cy="4607655"/>
+                <a:ext cx="10515600" cy="1697795"/>
               </a:xfrm>
             </p:spPr>
             <p:txBody>
@@ -7755,6 +12520,12 @@
                   <a:t> conforming the absence of human bias.</a:t>
                 </a:r>
               </a:p>
+              <a:p>
+                <a:endParaRPr lang="it-IT" sz="2700" dirty="0"/>
+              </a:p>
+              <a:p>
+                <a:endParaRPr lang="it-IT" sz="2700" dirty="0"/>
+              </a:p>
             </p:txBody>
           </p:sp>
         </mc:Choice>
@@ -7778,12 +12549,12 @@
             <p:spPr>
               <a:xfrm>
                 <a:off x="838200" y="1569308"/>
-                <a:ext cx="10515600" cy="4607655"/>
+                <a:ext cx="10515600" cy="1697795"/>
               </a:xfrm>
               <a:blipFill>
                 <a:blip r:embed="rId3"/>
                 <a:stretch>
-                  <a:fillRect l="-986" t="-1852" r="-638"/>
+                  <a:fillRect l="-986" t="-5018" r="-638"/>
                 </a:stretch>
               </a:blipFill>
             </p:spPr>
@@ -7815,7 +12586,7 @@
 </p:sld>
 </file>
 
-<file path=ppt/slides/slide7.xml><?xml version="1.0" encoding="utf-8"?>
+<file path=ppt/slides/slide8.xml><?xml version="1.0" encoding="utf-8"?>
 <p:sld xmlns:a="http://schemas.openxmlformats.org/drawingml/2006/main" xmlns:r="http://schemas.openxmlformats.org/officeDocument/2006/relationships" xmlns:p="http://schemas.openxmlformats.org/presentationml/2006/main">
   <p:cSld>
     <p:spTree>
@@ -7823,7 +12594,7 @@
         <p:cNvPr id="1" name="">
           <a:extLst>
             <a:ext uri="{FF2B5EF4-FFF2-40B4-BE49-F238E27FC236}">
-              <a16:creationId xmlns:a16="http://schemas.microsoft.com/office/drawing/2014/main" id="{7840B46C-CB04-A669-DCD8-79B27194AB78}"/>
+              <a16:creationId xmlns:a16="http://schemas.microsoft.com/office/drawing/2014/main" id="{46BD8535-28B2-ECF9-91F0-9A2E50792648}"/>
             </a:ext>
           </a:extLst>
         </p:cNvPr>
@@ -7843,7 +12614,7 @@
           <p:cNvPr id="2" name="Titolo 1">
             <a:extLst>
               <a:ext uri="{FF2B5EF4-FFF2-40B4-BE49-F238E27FC236}">
-                <a16:creationId xmlns:a16="http://schemas.microsoft.com/office/drawing/2014/main" id="{C82B6C87-0667-ACAA-0C5E-705621AD0FBD}"/>
+                <a16:creationId xmlns:a16="http://schemas.microsoft.com/office/drawing/2014/main" id="{3E6147BD-F855-ACBA-B7FF-A0E4ED07AC7D}"/>
               </a:ext>
             </a:extLst>
           </p:cNvPr>
@@ -7878,7 +12649,7 @@
                   <a:srgbClr val="002060"/>
                 </a:solidFill>
               </a:rPr>
-              <a:t>	ERROR BUDGET SUMMARY</a:t>
+              <a:t>	SYSTEMATIC ERRORS: SELECTION</a:t>
             </a:r>
             <a:endParaRPr lang="it-IT" b="1" dirty="0">
               <a:solidFill>
@@ -7893,7 +12664,7 @@
           <p:cNvPr id="4" name="Segnaposto data 3">
             <a:extLst>
               <a:ext uri="{FF2B5EF4-FFF2-40B4-BE49-F238E27FC236}">
-                <a16:creationId xmlns:a16="http://schemas.microsoft.com/office/drawing/2014/main" id="{A1DBDCF2-37CB-FAF6-C3FD-5C41CF82B1C5}"/>
+                <a16:creationId xmlns:a16="http://schemas.microsoft.com/office/drawing/2014/main" id="{D9694A12-6790-D3D8-9E24-038F7349850C}"/>
               </a:ext>
             </a:extLst>
           </p:cNvPr>
@@ -7930,7 +12701,7 @@
           <p:cNvPr id="5" name="Segnaposto piè di pagina 4">
             <a:extLst>
               <a:ext uri="{FF2B5EF4-FFF2-40B4-BE49-F238E27FC236}">
-                <a16:creationId xmlns:a16="http://schemas.microsoft.com/office/drawing/2014/main" id="{483D81E9-3B04-D7D7-65F8-E57FF8ACC0D0}"/>
+                <a16:creationId xmlns:a16="http://schemas.microsoft.com/office/drawing/2014/main" id="{F88BB740-78E1-95DF-996A-9C54779994DA}"/>
               </a:ext>
             </a:extLst>
           </p:cNvPr>
@@ -7967,7 +12738,7 @@
           <p:cNvPr id="6" name="Segnaposto numero diapositiva 5">
             <a:extLst>
               <a:ext uri="{FF2B5EF4-FFF2-40B4-BE49-F238E27FC236}">
-                <a16:creationId xmlns:a16="http://schemas.microsoft.com/office/drawing/2014/main" id="{0629A6F0-A6EA-975B-E3FB-7C09AFEAB081}"/>
+                <a16:creationId xmlns:a16="http://schemas.microsoft.com/office/drawing/2014/main" id="{70669032-132A-AC4F-227F-05D02AC90C65}"/>
               </a:ext>
             </a:extLst>
           </p:cNvPr>
@@ -7994,7 +12765,7 @@
                   <a:srgbClr val="002060"/>
                 </a:solidFill>
               </a:rPr>
-              <a:t>7</a:t>
+              <a:t>8</a:t>
             </a:fld>
             <a:endParaRPr lang="it-IT" sz="1500" b="1" dirty="0">
               <a:solidFill>
@@ -8009,7 +12780,7 @@
           <p:cNvPr id="10" name="Connettore diritto 9">
             <a:extLst>
               <a:ext uri="{FF2B5EF4-FFF2-40B4-BE49-F238E27FC236}">
-                <a16:creationId xmlns:a16="http://schemas.microsoft.com/office/drawing/2014/main" id="{82B3B89A-C5EB-0030-0C66-AD5A9388B1D8}"/>
+                <a16:creationId xmlns:a16="http://schemas.microsoft.com/office/drawing/2014/main" id="{8E4AE61E-C466-A447-9510-0ABD1161A907}"/>
               </a:ext>
             </a:extLst>
           </p:cNvPr>
@@ -8052,7 +12823,7 @@
           <p:cNvPr id="13" name="CasellaDiTesto 12">
             <a:extLst>
               <a:ext uri="{FF2B5EF4-FFF2-40B4-BE49-F238E27FC236}">
-                <a16:creationId xmlns:a16="http://schemas.microsoft.com/office/drawing/2014/main" id="{4CD60147-F30B-15C0-29C5-A4A47A952057}"/>
+                <a16:creationId xmlns:a16="http://schemas.microsoft.com/office/drawing/2014/main" id="{33C43751-3C26-9F58-824D-5B2E44086B1C}"/>
               </a:ext>
             </a:extLst>
           </p:cNvPr>
@@ -8084,7 +12855,7 @@
           <p:cNvPr id="15" name="CasellaDiTesto 14">
             <a:extLst>
               <a:ext uri="{FF2B5EF4-FFF2-40B4-BE49-F238E27FC236}">
-                <a16:creationId xmlns:a16="http://schemas.microsoft.com/office/drawing/2014/main" id="{E738A61A-2D9D-384D-F5AC-5D118EF846A9}"/>
+                <a16:creationId xmlns:a16="http://schemas.microsoft.com/office/drawing/2014/main" id="{4C94614F-6B44-2F3C-B460-89DCA62C45DF}"/>
               </a:ext>
             </a:extLst>
           </p:cNvPr>
@@ -8111,6 +12882,513 @@
           </a:p>
         </p:txBody>
       </p:sp>
+      <mc:AlternateContent xmlns:mc="http://schemas.openxmlformats.org/markup-compatibility/2006">
+        <mc:Choice xmlns:a14="http://schemas.microsoft.com/office/drawing/2010/main" Requires="a14">
+          <p:sp>
+            <p:nvSpPr>
+              <p:cNvPr id="7" name="Content Placeholder 6">
+                <a:extLst>
+                  <a:ext uri="{FF2B5EF4-FFF2-40B4-BE49-F238E27FC236}">
+                    <a16:creationId xmlns:a16="http://schemas.microsoft.com/office/drawing/2014/main" id="{D29E77A4-AD78-38BB-C185-225456D261DC}"/>
+                  </a:ext>
+                </a:extLst>
+              </p:cNvPr>
+              <p:cNvSpPr>
+                <a:spLocks noGrp="1"/>
+              </p:cNvSpPr>
+              <p:nvPr>
+                <p:ph idx="1"/>
+              </p:nvPr>
+            </p:nvSpPr>
+            <p:spPr>
+              <a:xfrm>
+                <a:off x="838200" y="1569308"/>
+                <a:ext cx="10515600" cy="1697795"/>
+              </a:xfrm>
+            </p:spPr>
+            <p:txBody>
+              <a:bodyPr>
+                <a:normAutofit/>
+              </a:bodyPr>
+              <a:lstStyle/>
+              <a:p>
+                <a:r>
+                  <a:rPr lang="en-US" sz="2700" dirty="0"/>
+                  <a:t>These systematics test arbitrary “cut-based” choices made (</a:t>
+                </a:r>
+                <a14:m>
+                  <m:oMath xmlns:m="http://schemas.openxmlformats.org/officeDocument/2006/math">
+                    <m:r>
+                      <a:rPr lang="en-US" sz="2700" b="0" i="1" smtClean="0">
+                        <a:latin typeface="Cambria Math" panose="02040503050406030204" pitchFamily="18" charset="0"/>
+                      </a:rPr>
+                      <m:t>𝜇</m:t>
+                    </m:r>
+                    <m:r>
+                      <a:rPr lang="en-US" sz="2700" b="0" i="1" smtClean="0">
+                        <a:latin typeface="Cambria Math" panose="02040503050406030204" pitchFamily="18" charset="0"/>
+                      </a:rPr>
+                      <m:t>±3</m:t>
+                    </m:r>
+                    <m:r>
+                      <a:rPr lang="en-US" sz="2700" b="0" i="1" smtClean="0">
+                        <a:latin typeface="Cambria Math" panose="02040503050406030204" pitchFamily="18" charset="0"/>
+                      </a:rPr>
+                      <m:t>𝜎</m:t>
+                    </m:r>
+                  </m:oMath>
+                </a14:m>
+                <a:r>
+                  <a:rPr lang="en-US" sz="2700" dirty="0"/>
+                  <a:t>).</a:t>
+                </a:r>
+              </a:p>
+              <a:p>
+                <a:r>
+                  <a:rPr lang="en-US" sz="2700" dirty="0"/>
+                  <a:t>The overall impact is well below </a:t>
+                </a:r>
+                <a14:m>
+                  <m:oMath xmlns:m="http://schemas.openxmlformats.org/officeDocument/2006/math">
+                    <m:r>
+                      <a:rPr lang="en-US" sz="2700" b="0" i="1" smtClean="0">
+                        <a:latin typeface="Cambria Math" panose="02040503050406030204" pitchFamily="18" charset="0"/>
+                      </a:rPr>
+                      <m:t>0.1%</m:t>
+                    </m:r>
+                  </m:oMath>
+                </a14:m>
+                <a:r>
+                  <a:rPr lang="it-IT" sz="2700" dirty="0"/>
+                  <a:t> conforming the absence of human bias.</a:t>
+                </a:r>
+              </a:p>
+              <a:p>
+                <a:endParaRPr lang="it-IT" sz="2700" dirty="0"/>
+              </a:p>
+              <a:p>
+                <a:endParaRPr lang="it-IT" sz="2700" dirty="0"/>
+              </a:p>
+            </p:txBody>
+          </p:sp>
+        </mc:Choice>
+        <mc:Fallback>
+          <p:sp>
+            <p:nvSpPr>
+              <p:cNvPr id="7" name="Content Placeholder 6">
+                <a:extLst>
+                  <a:ext uri="{FF2B5EF4-FFF2-40B4-BE49-F238E27FC236}">
+                    <a16:creationId xmlns:a16="http://schemas.microsoft.com/office/drawing/2014/main" id="{D29E77A4-AD78-38BB-C185-225456D261DC}"/>
+                  </a:ext>
+                </a:extLst>
+              </p:cNvPr>
+              <p:cNvSpPr>
+                <a:spLocks noGrp="1" noRot="1" noChangeAspect="1" noMove="1" noResize="1" noEditPoints="1" noAdjustHandles="1" noChangeArrowheads="1" noChangeShapeType="1" noTextEdit="1"/>
+              </p:cNvSpPr>
+              <p:nvPr>
+                <p:ph idx="1"/>
+              </p:nvPr>
+            </p:nvSpPr>
+            <p:spPr>
+              <a:xfrm>
+                <a:off x="838200" y="1569308"/>
+                <a:ext cx="10515600" cy="1697795"/>
+              </a:xfrm>
+              <a:blipFill>
+                <a:blip r:embed="rId3"/>
+                <a:stretch>
+                  <a:fillRect l="-986" t="-5018" r="-638"/>
+                </a:stretch>
+              </a:blipFill>
+            </p:spPr>
+            <p:txBody>
+              <a:bodyPr/>
+              <a:lstStyle/>
+              <a:p>
+                <a:r>
+                  <a:rPr lang="it-IT">
+                    <a:noFill/>
+                  </a:rPr>
+                  <a:t> </a:t>
+                </a:r>
+              </a:p>
+            </p:txBody>
+          </p:sp>
+        </mc:Fallback>
+      </mc:AlternateContent>
+      <p:sp>
+        <p:nvSpPr>
+          <p:cNvPr id="3" name="Rectangle: Rounded Corners 2">
+            <a:extLst>
+              <a:ext uri="{FF2B5EF4-FFF2-40B4-BE49-F238E27FC236}">
+                <a16:creationId xmlns:a16="http://schemas.microsoft.com/office/drawing/2014/main" id="{5BEC2C93-D4EC-17AC-533B-1D7FF7699609}"/>
+              </a:ext>
+            </a:extLst>
+          </p:cNvPr>
+          <p:cNvSpPr/>
+          <p:nvPr/>
+        </p:nvSpPr>
+        <p:spPr>
+          <a:xfrm>
+            <a:off x="469557" y="3613667"/>
+            <a:ext cx="11257005" cy="2231080"/>
+          </a:xfrm>
+          <a:prstGeom prst="roundRect">
+            <a:avLst/>
+          </a:prstGeom>
+          <a:noFill/>
+          <a:ln w="38100">
+            <a:solidFill>
+              <a:srgbClr val="FFC000"/>
+            </a:solidFill>
+          </a:ln>
+        </p:spPr>
+        <p:style>
+          <a:lnRef idx="2">
+            <a:schemeClr val="accent1">
+              <a:shade val="15000"/>
+            </a:schemeClr>
+          </a:lnRef>
+          <a:fillRef idx="1">
+            <a:schemeClr val="accent1"/>
+          </a:fillRef>
+          <a:effectRef idx="0">
+            <a:schemeClr val="accent1"/>
+          </a:effectRef>
+          <a:fontRef idx="minor">
+            <a:schemeClr val="lt1"/>
+          </a:fontRef>
+        </p:style>
+        <p:txBody>
+          <a:bodyPr rtlCol="0" anchor="ctr"/>
+          <a:lstStyle/>
+          <a:p>
+            <a:pPr algn="ctr"/>
+            <a:r>
+              <a:rPr lang="it-IT" sz="2800" i="1" dirty="0">
+                <a:solidFill>
+                  <a:schemeClr val="tx1"/>
+                </a:solidFill>
+              </a:rPr>
+              <a:t>The final calculated value is robust from a data analysis perspective. The only real limitations seems to come from the telescope resolution, not from the software or the assumptions made to extract the torsion map.</a:t>
+            </a:r>
+            <a:endParaRPr lang="it-IT" sz="2800" dirty="0">
+              <a:solidFill>
+                <a:schemeClr val="tx1"/>
+              </a:solidFill>
+            </a:endParaRPr>
+          </a:p>
+        </p:txBody>
+      </p:sp>
+    </p:spTree>
+    <p:extLst>
+      <p:ext uri="{BB962C8B-B14F-4D97-AF65-F5344CB8AC3E}">
+        <p14:creationId xmlns:p14="http://schemas.microsoft.com/office/powerpoint/2010/main" val="732020408"/>
+      </p:ext>
+    </p:extLst>
+  </p:cSld>
+  <p:clrMapOvr>
+    <a:masterClrMapping/>
+  </p:clrMapOvr>
+</p:sld>
+</file>
+
+<file path=ppt/slides/slide9.xml><?xml version="1.0" encoding="utf-8"?>
+<p:sld xmlns:a="http://schemas.openxmlformats.org/drawingml/2006/main" xmlns:r="http://schemas.openxmlformats.org/officeDocument/2006/relationships" xmlns:p="http://schemas.openxmlformats.org/presentationml/2006/main">
+  <p:cSld>
+    <p:spTree>
+      <p:nvGrpSpPr>
+        <p:cNvPr id="1" name="">
+          <a:extLst>
+            <a:ext uri="{FF2B5EF4-FFF2-40B4-BE49-F238E27FC236}">
+              <a16:creationId xmlns:a16="http://schemas.microsoft.com/office/drawing/2014/main" id="{7840B46C-CB04-A669-DCD8-79B27194AB78}"/>
+            </a:ext>
+          </a:extLst>
+        </p:cNvPr>
+        <p:cNvGrpSpPr/>
+        <p:nvPr/>
+      </p:nvGrpSpPr>
+      <p:grpSpPr>
+        <a:xfrm>
+          <a:off x="0" y="0"/>
+          <a:ext cx="0" cy="0"/>
+          <a:chOff x="0" y="0"/>
+          <a:chExt cx="0" cy="0"/>
+        </a:xfrm>
+      </p:grpSpPr>
+      <p:sp>
+        <p:nvSpPr>
+          <p:cNvPr id="2" name="Titolo 1">
+            <a:extLst>
+              <a:ext uri="{FF2B5EF4-FFF2-40B4-BE49-F238E27FC236}">
+                <a16:creationId xmlns:a16="http://schemas.microsoft.com/office/drawing/2014/main" id="{C82B6C87-0667-ACAA-0C5E-705621AD0FBD}"/>
+              </a:ext>
+            </a:extLst>
+          </p:cNvPr>
+          <p:cNvSpPr>
+            <a:spLocks noGrp="1"/>
+          </p:cNvSpPr>
+          <p:nvPr>
+            <p:ph type="title"/>
+          </p:nvPr>
+        </p:nvSpPr>
+        <p:spPr>
+          <a:xfrm>
+            <a:off x="38100" y="69651"/>
+            <a:ext cx="12114000" cy="1153094"/>
+          </a:xfrm>
+          <a:prstGeom prst="roundRect">
+            <a:avLst>
+              <a:gd name="adj" fmla="val 36459"/>
+            </a:avLst>
+          </a:prstGeom>
+          <a:noFill/>
+        </p:spPr>
+        <p:txBody>
+          <a:bodyPr>
+            <a:normAutofit/>
+          </a:bodyPr>
+          <a:lstStyle/>
+          <a:p>
+            <a:r>
+              <a:rPr lang="en-US" b="1" dirty="0">
+                <a:solidFill>
+                  <a:srgbClr val="002060"/>
+                </a:solidFill>
+              </a:rPr>
+              <a:t>	ERROR BUDGET SUMMARY</a:t>
+            </a:r>
+            <a:endParaRPr lang="it-IT" b="1" dirty="0">
+              <a:solidFill>
+                <a:srgbClr val="002060"/>
+              </a:solidFill>
+            </a:endParaRPr>
+          </a:p>
+        </p:txBody>
+      </p:sp>
+      <p:sp>
+        <p:nvSpPr>
+          <p:cNvPr id="4" name="Segnaposto data 3">
+            <a:extLst>
+              <a:ext uri="{FF2B5EF4-FFF2-40B4-BE49-F238E27FC236}">
+                <a16:creationId xmlns:a16="http://schemas.microsoft.com/office/drawing/2014/main" id="{A1DBDCF2-37CB-FAF6-C3FD-5C41CF82B1C5}"/>
+              </a:ext>
+            </a:extLst>
+          </p:cNvPr>
+          <p:cNvSpPr>
+            <a:spLocks noGrp="1"/>
+          </p:cNvSpPr>
+          <p:nvPr>
+            <p:ph type="dt" sz="half" idx="10"/>
+          </p:nvPr>
+        </p:nvSpPr>
+        <p:spPr>
+          <a:xfrm>
+            <a:off x="838200" y="6356349"/>
+            <a:ext cx="2743200" cy="432000"/>
+          </a:xfrm>
+        </p:spPr>
+        <p:txBody>
+          <a:bodyPr/>
+          <a:lstStyle/>
+          <a:p>
+            <a:r>
+              <a:rPr lang="it-IT" sz="1500" b="1" dirty="0">
+                <a:solidFill>
+                  <a:srgbClr val="002060"/>
+                </a:solidFill>
+              </a:rPr>
+              <a:t>August 2026</a:t>
+            </a:r>
+          </a:p>
+        </p:txBody>
+      </p:sp>
+      <p:sp>
+        <p:nvSpPr>
+          <p:cNvPr id="5" name="Segnaposto piè di pagina 4">
+            <a:extLst>
+              <a:ext uri="{FF2B5EF4-FFF2-40B4-BE49-F238E27FC236}">
+                <a16:creationId xmlns:a16="http://schemas.microsoft.com/office/drawing/2014/main" id="{483D81E9-3B04-D7D7-65F8-E57FF8ACC0D0}"/>
+              </a:ext>
+            </a:extLst>
+          </p:cNvPr>
+          <p:cNvSpPr>
+            <a:spLocks noGrp="1"/>
+          </p:cNvSpPr>
+          <p:nvPr>
+            <p:ph type="ftr" sz="quarter" idx="11"/>
+          </p:nvPr>
+        </p:nvSpPr>
+        <p:spPr>
+          <a:xfrm>
+            <a:off x="0" y="6356349"/>
+            <a:ext cx="12192000" cy="432000"/>
+          </a:xfrm>
+        </p:spPr>
+        <p:txBody>
+          <a:bodyPr/>
+          <a:lstStyle/>
+          <a:p>
+            <a:r>
+              <a:rPr lang="it-IT" sz="1500" b="1" dirty="0">
+                <a:solidFill>
+                  <a:srgbClr val="002060"/>
+                </a:solidFill>
+              </a:rPr>
+              <a:t>Anna Sofia Moro</a:t>
+            </a:r>
+          </a:p>
+        </p:txBody>
+      </p:sp>
+      <p:sp>
+        <p:nvSpPr>
+          <p:cNvPr id="6" name="Segnaposto numero diapositiva 5">
+            <a:extLst>
+              <a:ext uri="{FF2B5EF4-FFF2-40B4-BE49-F238E27FC236}">
+                <a16:creationId xmlns:a16="http://schemas.microsoft.com/office/drawing/2014/main" id="{0629A6F0-A6EA-975B-E3FB-7C09AFEAB081}"/>
+              </a:ext>
+            </a:extLst>
+          </p:cNvPr>
+          <p:cNvSpPr>
+            <a:spLocks noGrp="1"/>
+          </p:cNvSpPr>
+          <p:nvPr>
+            <p:ph type="sldNum" sz="quarter" idx="12"/>
+          </p:nvPr>
+        </p:nvSpPr>
+        <p:spPr>
+          <a:xfrm>
+            <a:off x="8610600" y="6356349"/>
+            <a:ext cx="2743200" cy="432000"/>
+          </a:xfrm>
+        </p:spPr>
+        <p:txBody>
+          <a:bodyPr/>
+          <a:lstStyle/>
+          <a:p>
+            <a:fld id="{0A318BD9-CA14-4A83-ACF0-03D5918EB402}" type="slidenum">
+              <a:rPr lang="it-IT" sz="1500" b="1" smtClean="0">
+                <a:solidFill>
+                  <a:srgbClr val="002060"/>
+                </a:solidFill>
+              </a:rPr>
+              <a:t>9</a:t>
+            </a:fld>
+            <a:endParaRPr lang="it-IT" sz="1500" b="1" dirty="0">
+              <a:solidFill>
+                <a:srgbClr val="002060"/>
+              </a:solidFill>
+            </a:endParaRPr>
+          </a:p>
+        </p:txBody>
+      </p:sp>
+      <p:cxnSp>
+        <p:nvCxnSpPr>
+          <p:cNvPr id="10" name="Connettore diritto 9">
+            <a:extLst>
+              <a:ext uri="{FF2B5EF4-FFF2-40B4-BE49-F238E27FC236}">
+                <a16:creationId xmlns:a16="http://schemas.microsoft.com/office/drawing/2014/main" id="{82B3B89A-C5EB-0030-0C66-AD5A9388B1D8}"/>
+              </a:ext>
+            </a:extLst>
+          </p:cNvPr>
+          <p:cNvCxnSpPr>
+            <a:cxnSpLocks/>
+          </p:cNvCxnSpPr>
+          <p:nvPr/>
+        </p:nvCxnSpPr>
+        <p:spPr>
+          <a:xfrm>
+            <a:off x="696000" y="1155368"/>
+            <a:ext cx="10800000" cy="0"/>
+          </a:xfrm>
+          <a:prstGeom prst="line">
+            <a:avLst/>
+          </a:prstGeom>
+          <a:ln w="38100">
+            <a:solidFill>
+              <a:srgbClr val="002060"/>
+            </a:solidFill>
+          </a:ln>
+        </p:spPr>
+        <p:style>
+          <a:lnRef idx="2">
+            <a:schemeClr val="accent1"/>
+          </a:lnRef>
+          <a:fillRef idx="0">
+            <a:schemeClr val="accent1"/>
+          </a:fillRef>
+          <a:effectRef idx="1">
+            <a:schemeClr val="accent1"/>
+          </a:effectRef>
+          <a:fontRef idx="minor">
+            <a:schemeClr val="tx1"/>
+          </a:fontRef>
+        </p:style>
+      </p:cxnSp>
+      <p:sp>
+        <p:nvSpPr>
+          <p:cNvPr id="13" name="CasellaDiTesto 12">
+            <a:extLst>
+              <a:ext uri="{FF2B5EF4-FFF2-40B4-BE49-F238E27FC236}">
+                <a16:creationId xmlns:a16="http://schemas.microsoft.com/office/drawing/2014/main" id="{4CD60147-F30B-15C0-29C5-A4A47A952057}"/>
+              </a:ext>
+            </a:extLst>
+          </p:cNvPr>
+          <p:cNvSpPr txBox="1"/>
+          <p:nvPr/>
+        </p:nvSpPr>
+        <p:spPr>
+          <a:xfrm>
+            <a:off x="3048886" y="3244334"/>
+            <a:ext cx="6097772" cy="369332"/>
+          </a:xfrm>
+          <a:prstGeom prst="rect">
+            <a:avLst/>
+          </a:prstGeom>
+          <a:noFill/>
+        </p:spPr>
+        <p:txBody>
+          <a:bodyPr wrap="square">
+            <a:spAutoFit/>
+          </a:bodyPr>
+          <a:lstStyle/>
+          <a:p>
+            <a:endParaRPr lang="it-IT" dirty="0"/>
+          </a:p>
+        </p:txBody>
+      </p:sp>
+      <p:sp>
+        <p:nvSpPr>
+          <p:cNvPr id="15" name="CasellaDiTesto 14">
+            <a:extLst>
+              <a:ext uri="{FF2B5EF4-FFF2-40B4-BE49-F238E27FC236}">
+                <a16:creationId xmlns:a16="http://schemas.microsoft.com/office/drawing/2014/main" id="{E738A61A-2D9D-384D-F5AC-5D118EF846A9}"/>
+              </a:ext>
+            </a:extLst>
+          </p:cNvPr>
+          <p:cNvSpPr txBox="1"/>
+          <p:nvPr/>
+        </p:nvSpPr>
+        <p:spPr>
+          <a:xfrm>
+            <a:off x="3048886" y="3244334"/>
+            <a:ext cx="6097772" cy="369332"/>
+          </a:xfrm>
+          <a:prstGeom prst="rect">
+            <a:avLst/>
+          </a:prstGeom>
+          <a:noFill/>
+        </p:spPr>
+        <p:txBody>
+          <a:bodyPr wrap="square">
+            <a:spAutoFit/>
+          </a:bodyPr>
+          <a:lstStyle/>
+          <a:p>
+            <a:endParaRPr lang="it-IT" dirty="0"/>
+          </a:p>
+        </p:txBody>
+      </p:sp>
       <p:graphicFrame>
         <p:nvGraphicFramePr>
           <p:cNvPr id="3" name="Content Placeholder 2">
@@ -8127,14 +13405,14 @@
             <p:ph idx="1"/>
             <p:extLst>
               <p:ext uri="{D42A27DB-BD31-4B8C-83A1-F6EECF244321}">
-                <p14:modId xmlns:p14="http://schemas.microsoft.com/office/powerpoint/2010/main" val="3883051050"/>
+                <p14:modId xmlns:p14="http://schemas.microsoft.com/office/powerpoint/2010/main" val="3843595048"/>
               </p:ext>
             </p:extLst>
           </p:nvPr>
         </p:nvGraphicFramePr>
         <p:xfrm>
-          <a:off x="838200" y="1825625"/>
-          <a:ext cx="10515603" cy="2494280"/>
+          <a:off x="838200" y="2059186"/>
+          <a:ext cx="10515603" cy="3108960"/>
         </p:xfrm>
         <a:graphic>
           <a:graphicData uri="http://schemas.openxmlformats.org/drawingml/2006/table">
@@ -8201,10 +13479,10 @@
                     <a:p>
                       <a:pPr algn="ctr"/>
                       <a:r>
-                        <a:rPr lang="en-US" dirty="0"/>
+                        <a:rPr lang="en-US" sz="2400" dirty="0"/>
                         <a:t>run</a:t>
                       </a:r>
-                      <a:endParaRPr lang="it-IT" dirty="0"/>
+                      <a:endParaRPr lang="it-IT" sz="2400" dirty="0"/>
                     </a:p>
                   </a:txBody>
                   <a:tcPr anchor="ctr">
@@ -8253,10 +13531,10 @@
                     <a:p>
                       <a:pPr algn="ctr"/>
                       <a:r>
-                        <a:rPr lang="en-US" dirty="0"/>
+                        <a:rPr lang="en-US" sz="2400" dirty="0"/>
                         <a:t>efficiency</a:t>
                       </a:r>
-                      <a:endParaRPr lang="it-IT" dirty="0"/>
+                      <a:endParaRPr lang="it-IT" sz="2400" dirty="0"/>
                     </a:p>
                   </a:txBody>
                   <a:tcPr anchor="ctr">
@@ -8305,10 +13583,10 @@
                     <a:p>
                       <a:pPr algn="ctr"/>
                       <a:r>
-                        <a:rPr lang="en-US" dirty="0"/>
+                        <a:rPr lang="en-US" sz="2400" dirty="0"/>
                         <a:t>error</a:t>
                       </a:r>
-                      <a:endParaRPr lang="it-IT" dirty="0"/>
+                      <a:endParaRPr lang="it-IT" sz="2400" dirty="0"/>
                     </a:p>
                   </a:txBody>
                   <a:tcPr anchor="ctr">
@@ -8357,10 +13635,10 @@
                     <a:p>
                       <a:pPr algn="ctr"/>
                       <a:r>
-                        <a:rPr lang="en-US" dirty="0"/>
+                        <a:rPr lang="en-US" sz="2400" dirty="0"/>
                         <a:t>stat error</a:t>
                       </a:r>
-                      <a:endParaRPr lang="it-IT" dirty="0"/>
+                      <a:endParaRPr lang="it-IT" sz="2400" dirty="0"/>
                     </a:p>
                   </a:txBody>
                   <a:tcPr anchor="ctr">
@@ -8409,18 +13687,18 @@
                     <a:p>
                       <a:pPr algn="ctr"/>
                       <a:r>
-                        <a:rPr lang="en-US" dirty="0"/>
+                        <a:rPr lang="en-US" sz="2400" dirty="0"/>
                         <a:t>syst err (</a:t>
                       </a:r>
                       <a:r>
-                        <a:rPr lang="en-US" dirty="0" err="1"/>
+                        <a:rPr lang="en-US" sz="2400" dirty="0" err="1"/>
                         <a:t>dom</a:t>
                       </a:r>
                       <a:r>
-                        <a:rPr lang="en-US" dirty="0"/>
+                        <a:rPr lang="en-US" sz="2400" dirty="0"/>
                         <a:t>)</a:t>
                       </a:r>
-                      <a:endParaRPr lang="it-IT" dirty="0"/>
+                      <a:endParaRPr lang="it-IT" sz="2400" dirty="0"/>
                     </a:p>
                   </a:txBody>
                   <a:tcPr anchor="ctr">
@@ -8469,10 +13747,10 @@
                     <a:p>
                       <a:pPr algn="ctr"/>
                       <a:r>
-                        <a:rPr lang="en-US" dirty="0"/>
+                        <a:rPr lang="en-US" sz="2400" dirty="0"/>
                         <a:t>syst err (model)</a:t>
                       </a:r>
-                      <a:endParaRPr lang="it-IT" dirty="0"/>
+                      <a:endParaRPr lang="it-IT" sz="2400" dirty="0"/>
                     </a:p>
                   </a:txBody>
                   <a:tcPr anchor="ctr">
@@ -8521,10 +13799,10 @@
                     <a:p>
                       <a:pPr algn="ctr"/>
                       <a:r>
-                        <a:rPr lang="en-US" dirty="0"/>
+                        <a:rPr lang="en-US" sz="2400" dirty="0"/>
                         <a:t>syst err (select)</a:t>
                       </a:r>
-                      <a:endParaRPr lang="it-IT" dirty="0"/>
+                      <a:endParaRPr lang="it-IT" sz="2400" dirty="0"/>
                     </a:p>
                   </a:txBody>
                   <a:tcPr anchor="ctr">
@@ -8580,10 +13858,10 @@
                     <a:p>
                       <a:pPr algn="ctr"/>
                       <a:r>
-                        <a:rPr lang="en-US" dirty="0"/>
+                        <a:rPr lang="en-US" sz="2400" dirty="0"/>
                         <a:t>crystal 1</a:t>
                       </a:r>
-                      <a:endParaRPr lang="it-IT" dirty="0"/>
+                      <a:endParaRPr lang="it-IT" sz="2400" dirty="0"/>
                     </a:p>
                   </a:txBody>
                   <a:tcPr anchor="ctr">
@@ -8632,10 +13910,10 @@
                     <a:p>
                       <a:pPr algn="ctr"/>
                       <a:r>
-                        <a:rPr lang="en-US" dirty="0"/>
+                        <a:rPr lang="en-US" sz="2400" dirty="0"/>
                         <a:t>19.6%</a:t>
                       </a:r>
-                      <a:endParaRPr lang="it-IT" dirty="0"/>
+                      <a:endParaRPr lang="it-IT" sz="2400" dirty="0"/>
                     </a:p>
                   </a:txBody>
                   <a:tcPr anchor="ctr">
@@ -8684,10 +13962,10 @@
                     <a:p>
                       <a:pPr algn="ctr"/>
                       <a:r>
-                        <a:rPr lang="en-US" dirty="0"/>
+                        <a:rPr lang="en-US" sz="2400" dirty="0"/>
                         <a:t>1.5%</a:t>
                       </a:r>
-                      <a:endParaRPr lang="it-IT" dirty="0"/>
+                      <a:endParaRPr lang="it-IT" sz="2400" dirty="0"/>
                     </a:p>
                   </a:txBody>
                   <a:tcPr anchor="ctr">
@@ -8736,10 +14014,10 @@
                     <a:p>
                       <a:pPr algn="ctr"/>
                       <a:r>
-                        <a:rPr lang="en-US" dirty="0"/>
+                        <a:rPr lang="en-US" sz="2400" dirty="0"/>
                         <a:t>0.1%</a:t>
                       </a:r>
-                      <a:endParaRPr lang="it-IT" dirty="0"/>
+                      <a:endParaRPr lang="it-IT" sz="2400" dirty="0"/>
                     </a:p>
                   </a:txBody>
                   <a:tcPr anchor="ctr">
@@ -8788,10 +14066,10 @@
                     <a:p>
                       <a:pPr algn="ctr"/>
                       <a:r>
-                        <a:rPr lang="en-US" dirty="0"/>
+                        <a:rPr lang="en-US" sz="2400" dirty="0"/>
                         <a:t>1.5%</a:t>
                       </a:r>
-                      <a:endParaRPr lang="it-IT" dirty="0"/>
+                      <a:endParaRPr lang="it-IT" sz="2400" dirty="0"/>
                     </a:p>
                   </a:txBody>
                   <a:tcPr anchor="ctr">
@@ -8840,10 +14118,10 @@
                     <a:p>
                       <a:pPr algn="ctr"/>
                       <a:r>
-                        <a:rPr lang="en-US" dirty="0"/>
+                        <a:rPr lang="en-US" sz="2400" dirty="0"/>
                         <a:t>0.03%</a:t>
                       </a:r>
-                      <a:endParaRPr lang="it-IT" dirty="0"/>
+                      <a:endParaRPr lang="it-IT" sz="2400" dirty="0"/>
                     </a:p>
                   </a:txBody>
                   <a:tcPr anchor="ctr">
@@ -8892,10 +14170,10 @@
                     <a:p>
                       <a:pPr algn="ctr"/>
                       <a:r>
-                        <a:rPr lang="en-US" dirty="0"/>
+                        <a:rPr lang="en-US" sz="2400" dirty="0"/>
                         <a:t>0.1%</a:t>
                       </a:r>
-                      <a:endParaRPr lang="it-IT" dirty="0"/>
+                      <a:endParaRPr lang="it-IT" sz="2400" dirty="0"/>
                     </a:p>
                   </a:txBody>
                   <a:tcPr anchor="ctr">
@@ -8999,10 +14277,10 @@
                     <a:p>
                       <a:pPr algn="ctr"/>
                       <a:r>
-                        <a:rPr lang="en-US" dirty="0"/>
+                        <a:rPr lang="en-US" sz="2400" dirty="0"/>
                         <a:t>19.1%</a:t>
                       </a:r>
-                      <a:endParaRPr lang="it-IT" dirty="0"/>
+                      <a:endParaRPr lang="it-IT" sz="2400" dirty="0"/>
                     </a:p>
                   </a:txBody>
                   <a:tcPr anchor="ctr">
@@ -9051,10 +14329,10 @@
                     <a:p>
                       <a:pPr algn="ctr"/>
                       <a:r>
-                        <a:rPr lang="en-US" dirty="0"/>
+                        <a:rPr lang="en-US" sz="2400" dirty="0"/>
                         <a:t>1.5%</a:t>
                       </a:r>
-                      <a:endParaRPr lang="it-IT" dirty="0"/>
+                      <a:endParaRPr lang="it-IT" sz="2400" dirty="0"/>
                     </a:p>
                   </a:txBody>
                   <a:tcPr anchor="ctr">
@@ -9103,10 +14381,10 @@
                     <a:p>
                       <a:pPr algn="ctr"/>
                       <a:r>
-                        <a:rPr lang="en-US" dirty="0"/>
+                        <a:rPr lang="en-US" sz="2400" dirty="0"/>
                         <a:t>0.1%</a:t>
                       </a:r>
-                      <a:endParaRPr lang="it-IT" dirty="0"/>
+                      <a:endParaRPr lang="it-IT" sz="2400" dirty="0"/>
                     </a:p>
                   </a:txBody>
                   <a:tcPr anchor="ctr">
@@ -9155,10 +14433,10 @@
                     <a:p>
                       <a:pPr algn="ctr"/>
                       <a:r>
-                        <a:rPr lang="en-US" dirty="0"/>
+                        <a:rPr lang="en-US" sz="2400" dirty="0"/>
                         <a:t>1.4%</a:t>
                       </a:r>
-                      <a:endParaRPr lang="it-IT" dirty="0"/>
+                      <a:endParaRPr lang="it-IT" sz="2400" dirty="0"/>
                     </a:p>
                   </a:txBody>
                   <a:tcPr anchor="ctr">
@@ -9207,10 +14485,10 @@
                     <a:p>
                       <a:pPr algn="ctr"/>
                       <a:r>
-                        <a:rPr lang="en-US" dirty="0"/>
+                        <a:rPr lang="en-US" sz="2400" dirty="0"/>
                         <a:t>0.2%</a:t>
                       </a:r>
-                      <a:endParaRPr lang="it-IT" dirty="0"/>
+                      <a:endParaRPr lang="it-IT" sz="2400" dirty="0"/>
                     </a:p>
                   </a:txBody>
                   <a:tcPr anchor="ctr">
@@ -9259,10 +14537,10 @@
                     <a:p>
                       <a:pPr algn="ctr"/>
                       <a:r>
-                        <a:rPr lang="en-US" dirty="0"/>
+                        <a:rPr lang="en-US" sz="2400" dirty="0"/>
                         <a:t>0.1%</a:t>
                       </a:r>
-                      <a:endParaRPr lang="it-IT" dirty="0"/>
+                      <a:endParaRPr lang="it-IT" sz="2400" dirty="0"/>
                     </a:p>
                   </a:txBody>
                   <a:tcPr anchor="ctr">
@@ -9366,10 +14644,10 @@
                     <a:p>
                       <a:pPr algn="ctr"/>
                       <a:r>
-                        <a:rPr lang="en-US" dirty="0"/>
+                        <a:rPr lang="en-US" sz="2400" dirty="0"/>
                         <a:t>17.1%</a:t>
                       </a:r>
-                      <a:endParaRPr lang="it-IT" dirty="0"/>
+                      <a:endParaRPr lang="it-IT" sz="2400" dirty="0"/>
                     </a:p>
                   </a:txBody>
                   <a:tcPr anchor="ctr">
@@ -9418,10 +14696,10 @@
                     <a:p>
                       <a:pPr algn="ctr"/>
                       <a:r>
-                        <a:rPr lang="en-US" dirty="0"/>
+                        <a:rPr lang="en-US" sz="2400" dirty="0"/>
                         <a:t>1.3%</a:t>
                       </a:r>
-                      <a:endParaRPr lang="it-IT" dirty="0"/>
+                      <a:endParaRPr lang="it-IT" sz="2400" dirty="0"/>
                     </a:p>
                   </a:txBody>
                   <a:tcPr anchor="ctr">
@@ -9470,10 +14748,10 @@
                     <a:p>
                       <a:pPr algn="ctr"/>
                       <a:r>
-                        <a:rPr lang="en-US" dirty="0"/>
+                        <a:rPr lang="en-US" sz="2400" dirty="0"/>
                         <a:t>0.1%</a:t>
                       </a:r>
-                      <a:endParaRPr lang="it-IT" dirty="0"/>
+                      <a:endParaRPr lang="it-IT" sz="2400" dirty="0"/>
                     </a:p>
                   </a:txBody>
                   <a:tcPr anchor="ctr">
@@ -9522,10 +14800,10 @@
                     <a:p>
                       <a:pPr algn="ctr"/>
                       <a:r>
-                        <a:rPr lang="en-US" dirty="0"/>
+                        <a:rPr lang="en-US" sz="2400" dirty="0"/>
                         <a:t>1.3%</a:t>
                       </a:r>
-                      <a:endParaRPr lang="it-IT" dirty="0"/>
+                      <a:endParaRPr lang="it-IT" sz="2400" dirty="0"/>
                     </a:p>
                   </a:txBody>
                   <a:tcPr anchor="ctr">
@@ -9574,10 +14852,10 @@
                     <a:p>
                       <a:pPr algn="ctr"/>
                       <a:r>
-                        <a:rPr lang="en-US" dirty="0"/>
+                        <a:rPr lang="en-US" sz="2400" dirty="0"/>
                         <a:t>0.05%</a:t>
                       </a:r>
-                      <a:endParaRPr lang="it-IT" dirty="0"/>
+                      <a:endParaRPr lang="it-IT" sz="2400" dirty="0"/>
                     </a:p>
                   </a:txBody>
                   <a:tcPr anchor="ctr">
@@ -9626,10 +14904,10 @@
                     <a:p>
                       <a:pPr algn="ctr"/>
                       <a:r>
-                        <a:rPr lang="en-US" dirty="0"/>
+                        <a:rPr lang="en-US" sz="2400" dirty="0"/>
                         <a:t>0.07%</a:t>
                       </a:r>
-                      <a:endParaRPr lang="it-IT" dirty="0"/>
+                      <a:endParaRPr lang="it-IT" sz="2400" dirty="0"/>
                     </a:p>
                   </a:txBody>
                   <a:tcPr anchor="ctr">
@@ -9685,10 +14963,10 @@
                     <a:p>
                       <a:pPr algn="ctr"/>
                       <a:r>
-                        <a:rPr lang="en-US" dirty="0"/>
+                        <a:rPr lang="en-US" sz="2400" dirty="0"/>
                         <a:t>crystal 2</a:t>
                       </a:r>
-                      <a:endParaRPr lang="it-IT" dirty="0"/>
+                      <a:endParaRPr lang="it-IT" sz="2400" dirty="0"/>
                     </a:p>
                   </a:txBody>
                   <a:tcPr anchor="ctr">
@@ -9737,10 +15015,10 @@
                     <a:p>
                       <a:pPr algn="ctr"/>
                       <a:r>
-                        <a:rPr lang="en-US" dirty="0"/>
+                        <a:rPr lang="en-US" sz="2400" dirty="0"/>
                         <a:t>18.2%</a:t>
                       </a:r>
-                      <a:endParaRPr lang="it-IT" dirty="0"/>
+                      <a:endParaRPr lang="it-IT" sz="2400" dirty="0"/>
                     </a:p>
                   </a:txBody>
                   <a:tcPr anchor="ctr">
@@ -9789,10 +15067,10 @@
                     <a:p>
                       <a:pPr algn="ctr"/>
                       <a:r>
-                        <a:rPr lang="en-US" dirty="0"/>
+                        <a:rPr lang="en-US" sz="2400" dirty="0"/>
                         <a:t>1.4%</a:t>
                       </a:r>
-                      <a:endParaRPr lang="it-IT" dirty="0"/>
+                      <a:endParaRPr lang="it-IT" sz="2400" dirty="0"/>
                     </a:p>
                   </a:txBody>
                   <a:tcPr anchor="ctr">
@@ -9841,10 +15119,10 @@
                     <a:p>
                       <a:pPr algn="ctr"/>
                       <a:r>
-                        <a:rPr lang="en-US" dirty="0"/>
+                        <a:rPr lang="en-US" sz="2400" dirty="0"/>
                         <a:t>0.1%</a:t>
                       </a:r>
-                      <a:endParaRPr lang="it-IT" dirty="0"/>
+                      <a:endParaRPr lang="it-IT" sz="2400" dirty="0"/>
                     </a:p>
                   </a:txBody>
                   <a:tcPr anchor="ctr">
@@ -9893,10 +15171,10 @@
                     <a:p>
                       <a:pPr algn="ctr"/>
                       <a:r>
-                        <a:rPr lang="en-US" dirty="0"/>
+                        <a:rPr lang="en-US" sz="2400" dirty="0"/>
                         <a:t>1.4%</a:t>
                       </a:r>
-                      <a:endParaRPr lang="it-IT" dirty="0"/>
+                      <a:endParaRPr lang="it-IT" sz="2400" dirty="0"/>
                     </a:p>
                   </a:txBody>
                   <a:tcPr anchor="ctr">
@@ -9945,10 +15223,10 @@
                     <a:p>
                       <a:pPr algn="ctr"/>
                       <a:r>
-                        <a:rPr lang="en-US" dirty="0"/>
+                        <a:rPr lang="en-US" sz="2400" dirty="0"/>
                         <a:t>0.2%</a:t>
                       </a:r>
-                      <a:endParaRPr lang="it-IT" dirty="0"/>
+                      <a:endParaRPr lang="it-IT" sz="2400" dirty="0"/>
                     </a:p>
                   </a:txBody>
                   <a:tcPr anchor="ctr">
@@ -9997,10 +15275,10 @@
                     <a:p>
                       <a:pPr algn="ctr"/>
                       <a:r>
-                        <a:rPr lang="en-US" dirty="0"/>
+                        <a:rPr lang="en-US" sz="2400" dirty="0"/>
                         <a:t>0.2%</a:t>
                       </a:r>
-                      <a:endParaRPr lang="it-IT" dirty="0"/>
+                      <a:endParaRPr lang="it-IT" sz="2400" dirty="0"/>
                     </a:p>
                   </a:txBody>
                   <a:tcPr anchor="ctr">
@@ -10104,10 +15382,10 @@
                     <a:p>
                       <a:pPr algn="ctr"/>
                       <a:r>
-                        <a:rPr lang="en-US" dirty="0"/>
+                        <a:rPr lang="en-US" sz="2400" dirty="0"/>
                         <a:t>18.3%</a:t>
                       </a:r>
-                      <a:endParaRPr lang="it-IT" dirty="0"/>
+                      <a:endParaRPr lang="it-IT" sz="2400" dirty="0"/>
                     </a:p>
                   </a:txBody>
                   <a:tcPr anchor="ctr">
@@ -10156,10 +15434,10 @@
                     <a:p>
                       <a:pPr algn="ctr"/>
                       <a:r>
-                        <a:rPr lang="en-US" dirty="0"/>
+                        <a:rPr lang="en-US" sz="2400" dirty="0"/>
                         <a:t>1.5%</a:t>
                       </a:r>
-                      <a:endParaRPr lang="it-IT" dirty="0"/>
+                      <a:endParaRPr lang="it-IT" sz="2400" dirty="0"/>
                     </a:p>
                   </a:txBody>
                   <a:tcPr anchor="ctr">
@@ -10208,10 +15486,10 @@
                     <a:p>
                       <a:pPr algn="ctr"/>
                       <a:r>
-                        <a:rPr lang="en-US" dirty="0"/>
+                        <a:rPr lang="en-US" sz="2400" dirty="0"/>
                         <a:t>0.1%</a:t>
                       </a:r>
-                      <a:endParaRPr lang="it-IT" dirty="0"/>
+                      <a:endParaRPr lang="it-IT" sz="2400" dirty="0"/>
                     </a:p>
                   </a:txBody>
                   <a:tcPr anchor="ctr">
@@ -10260,10 +15538,10 @@
                     <a:p>
                       <a:pPr algn="ctr"/>
                       <a:r>
-                        <a:rPr lang="en-US" dirty="0"/>
+                        <a:rPr lang="en-US" sz="2400" dirty="0"/>
                         <a:t>1.4%</a:t>
                       </a:r>
-                      <a:endParaRPr lang="it-IT" dirty="0"/>
+                      <a:endParaRPr lang="it-IT" sz="2400" dirty="0"/>
                     </a:p>
                   </a:txBody>
                   <a:tcPr anchor="ctr">
@@ -10312,10 +15590,10 @@
                     <a:p>
                       <a:pPr algn="ctr"/>
                       <a:r>
-                        <a:rPr lang="en-US" dirty="0"/>
+                        <a:rPr lang="en-US" sz="2400" dirty="0"/>
                         <a:t>0.1%</a:t>
                       </a:r>
-                      <a:endParaRPr lang="it-IT" dirty="0"/>
+                      <a:endParaRPr lang="it-IT" sz="2400" dirty="0"/>
                     </a:p>
                   </a:txBody>
                   <a:tcPr anchor="ctr">
@@ -10364,10 +15642,10 @@
                     <a:p>
                       <a:pPr algn="ctr"/>
                       <a:r>
-                        <a:rPr lang="en-US" dirty="0"/>
+                        <a:rPr lang="en-US" sz="2400" dirty="0"/>
                         <a:t>0.2%</a:t>
                       </a:r>
-                      <a:endParaRPr lang="it-IT" dirty="0"/>
+                      <a:endParaRPr lang="it-IT" sz="2400" dirty="0"/>
                     </a:p>
                   </a:txBody>
                   <a:tcPr anchor="ctr">
@@ -10423,644 +15701,6 @@
     <p:extLst>
       <p:ext uri="{BB962C8B-B14F-4D97-AF65-F5344CB8AC3E}">
         <p14:creationId xmlns:p14="http://schemas.microsoft.com/office/powerpoint/2010/main" val="2674986584"/>
-      </p:ext>
-    </p:extLst>
-  </p:cSld>
-  <p:clrMapOvr>
-    <a:masterClrMapping/>
-  </p:clrMapOvr>
-</p:sld>
-</file>
-
-<file path=ppt/slides/slide8.xml><?xml version="1.0" encoding="utf-8"?>
-<p:sld xmlns:a="http://schemas.openxmlformats.org/drawingml/2006/main" xmlns:r="http://schemas.openxmlformats.org/officeDocument/2006/relationships" xmlns:p="http://schemas.openxmlformats.org/presentationml/2006/main">
-  <p:cSld>
-    <p:spTree>
-      <p:nvGrpSpPr>
-        <p:cNvPr id="1" name="">
-          <a:extLst>
-            <a:ext uri="{FF2B5EF4-FFF2-40B4-BE49-F238E27FC236}">
-              <a16:creationId xmlns:a16="http://schemas.microsoft.com/office/drawing/2014/main" id="{5DAC6EFF-B9B4-605B-23DF-EDC01FF419F6}"/>
-            </a:ext>
-          </a:extLst>
-        </p:cNvPr>
-        <p:cNvGrpSpPr/>
-        <p:nvPr/>
-      </p:nvGrpSpPr>
-      <p:grpSpPr>
-        <a:xfrm>
-          <a:off x="0" y="0"/>
-          <a:ext cx="0" cy="0"/>
-          <a:chOff x="0" y="0"/>
-          <a:chExt cx="0" cy="0"/>
-        </a:xfrm>
-      </p:grpSpPr>
-      <p:sp>
-        <p:nvSpPr>
-          <p:cNvPr id="2" name="Titolo 1">
-            <a:extLst>
-              <a:ext uri="{FF2B5EF4-FFF2-40B4-BE49-F238E27FC236}">
-                <a16:creationId xmlns:a16="http://schemas.microsoft.com/office/drawing/2014/main" id="{B5797431-BBE5-CB25-093B-D04D3DF2F194}"/>
-              </a:ext>
-            </a:extLst>
-          </p:cNvPr>
-          <p:cNvSpPr>
-            <a:spLocks noGrp="1"/>
-          </p:cNvSpPr>
-          <p:nvPr>
-            <p:ph type="title"/>
-          </p:nvPr>
-        </p:nvSpPr>
-        <p:spPr>
-          <a:xfrm>
-            <a:off x="38100" y="69651"/>
-            <a:ext cx="12114000" cy="1153094"/>
-          </a:xfrm>
-          <a:prstGeom prst="roundRect">
-            <a:avLst>
-              <a:gd name="adj" fmla="val 36459"/>
-            </a:avLst>
-          </a:prstGeom>
-          <a:noFill/>
-        </p:spPr>
-        <p:txBody>
-          <a:bodyPr>
-            <a:normAutofit/>
-          </a:bodyPr>
-          <a:lstStyle/>
-          <a:p>
-            <a:r>
-              <a:rPr lang="it-IT" b="1" dirty="0">
-                <a:solidFill>
-                  <a:srgbClr val="002060"/>
-                </a:solidFill>
-              </a:rPr>
-              <a:t>	BACKUP SLIDES</a:t>
-            </a:r>
-          </a:p>
-        </p:txBody>
-      </p:sp>
-      <p:sp>
-        <p:nvSpPr>
-          <p:cNvPr id="4" name="Segnaposto data 3">
-            <a:extLst>
-              <a:ext uri="{FF2B5EF4-FFF2-40B4-BE49-F238E27FC236}">
-                <a16:creationId xmlns:a16="http://schemas.microsoft.com/office/drawing/2014/main" id="{EB987156-1AA3-606D-F960-F5521BB0A14D}"/>
-              </a:ext>
-            </a:extLst>
-          </p:cNvPr>
-          <p:cNvSpPr>
-            <a:spLocks noGrp="1"/>
-          </p:cNvSpPr>
-          <p:nvPr>
-            <p:ph type="dt" sz="half" idx="10"/>
-          </p:nvPr>
-        </p:nvSpPr>
-        <p:spPr>
-          <a:xfrm>
-            <a:off x="838200" y="6356349"/>
-            <a:ext cx="2743200" cy="432000"/>
-          </a:xfrm>
-        </p:spPr>
-        <p:txBody>
-          <a:bodyPr/>
-          <a:lstStyle/>
-          <a:p>
-            <a:r>
-              <a:rPr lang="it-IT" sz="1500" b="1" dirty="0">
-                <a:solidFill>
-                  <a:srgbClr val="002060"/>
-                </a:solidFill>
-              </a:rPr>
-              <a:t>August 2026</a:t>
-            </a:r>
-          </a:p>
-        </p:txBody>
-      </p:sp>
-      <p:sp>
-        <p:nvSpPr>
-          <p:cNvPr id="5" name="Segnaposto piè di pagina 4">
-            <a:extLst>
-              <a:ext uri="{FF2B5EF4-FFF2-40B4-BE49-F238E27FC236}">
-                <a16:creationId xmlns:a16="http://schemas.microsoft.com/office/drawing/2014/main" id="{789376CE-2672-8B5F-17F8-C7FABE69F6E5}"/>
-              </a:ext>
-            </a:extLst>
-          </p:cNvPr>
-          <p:cNvSpPr>
-            <a:spLocks noGrp="1"/>
-          </p:cNvSpPr>
-          <p:nvPr>
-            <p:ph type="ftr" sz="quarter" idx="11"/>
-          </p:nvPr>
-        </p:nvSpPr>
-        <p:spPr>
-          <a:xfrm>
-            <a:off x="0" y="6356349"/>
-            <a:ext cx="12192000" cy="432000"/>
-          </a:xfrm>
-        </p:spPr>
-        <p:txBody>
-          <a:bodyPr/>
-          <a:lstStyle/>
-          <a:p>
-            <a:r>
-              <a:rPr lang="it-IT" sz="1500" b="1" dirty="0">
-                <a:solidFill>
-                  <a:srgbClr val="002060"/>
-                </a:solidFill>
-              </a:rPr>
-              <a:t>Anna Sofia Moro</a:t>
-            </a:r>
-          </a:p>
-        </p:txBody>
-      </p:sp>
-      <p:sp>
-        <p:nvSpPr>
-          <p:cNvPr id="6" name="Segnaposto numero diapositiva 5">
-            <a:extLst>
-              <a:ext uri="{FF2B5EF4-FFF2-40B4-BE49-F238E27FC236}">
-                <a16:creationId xmlns:a16="http://schemas.microsoft.com/office/drawing/2014/main" id="{F518D8F0-CFAD-5A22-0C45-35621E72D2EB}"/>
-              </a:ext>
-            </a:extLst>
-          </p:cNvPr>
-          <p:cNvSpPr>
-            <a:spLocks noGrp="1"/>
-          </p:cNvSpPr>
-          <p:nvPr>
-            <p:ph type="sldNum" sz="quarter" idx="12"/>
-          </p:nvPr>
-        </p:nvSpPr>
-        <p:spPr>
-          <a:xfrm>
-            <a:off x="8610600" y="6356349"/>
-            <a:ext cx="2743200" cy="432000"/>
-          </a:xfrm>
-        </p:spPr>
-        <p:txBody>
-          <a:bodyPr/>
-          <a:lstStyle/>
-          <a:p>
-            <a:fld id="{0A318BD9-CA14-4A83-ACF0-03D5918EB402}" type="slidenum">
-              <a:rPr lang="it-IT" sz="1500" b="1" smtClean="0">
-                <a:solidFill>
-                  <a:srgbClr val="002060"/>
-                </a:solidFill>
-              </a:rPr>
-              <a:t>8</a:t>
-            </a:fld>
-            <a:endParaRPr lang="it-IT" sz="1500" b="1" dirty="0">
-              <a:solidFill>
-                <a:srgbClr val="002060"/>
-              </a:solidFill>
-            </a:endParaRPr>
-          </a:p>
-        </p:txBody>
-      </p:sp>
-      <p:cxnSp>
-        <p:nvCxnSpPr>
-          <p:cNvPr id="10" name="Connettore diritto 9">
-            <a:extLst>
-              <a:ext uri="{FF2B5EF4-FFF2-40B4-BE49-F238E27FC236}">
-                <a16:creationId xmlns:a16="http://schemas.microsoft.com/office/drawing/2014/main" id="{19CCD89B-D23E-B601-CB0F-35F735A548A8}"/>
-              </a:ext>
-            </a:extLst>
-          </p:cNvPr>
-          <p:cNvCxnSpPr>
-            <a:cxnSpLocks/>
-          </p:cNvCxnSpPr>
-          <p:nvPr/>
-        </p:nvCxnSpPr>
-        <p:spPr>
-          <a:xfrm>
-            <a:off x="696000" y="1155368"/>
-            <a:ext cx="10800000" cy="0"/>
-          </a:xfrm>
-          <a:prstGeom prst="line">
-            <a:avLst/>
-          </a:prstGeom>
-          <a:ln w="38100">
-            <a:solidFill>
-              <a:srgbClr val="002060"/>
-            </a:solidFill>
-          </a:ln>
-        </p:spPr>
-        <p:style>
-          <a:lnRef idx="2">
-            <a:schemeClr val="accent1"/>
-          </a:lnRef>
-          <a:fillRef idx="0">
-            <a:schemeClr val="accent1"/>
-          </a:fillRef>
-          <a:effectRef idx="1">
-            <a:schemeClr val="accent1"/>
-          </a:effectRef>
-          <a:fontRef idx="minor">
-            <a:schemeClr val="tx1"/>
-          </a:fontRef>
-        </p:style>
-      </p:cxnSp>
-      <p:sp>
-        <p:nvSpPr>
-          <p:cNvPr id="13" name="CasellaDiTesto 12">
-            <a:extLst>
-              <a:ext uri="{FF2B5EF4-FFF2-40B4-BE49-F238E27FC236}">
-                <a16:creationId xmlns:a16="http://schemas.microsoft.com/office/drawing/2014/main" id="{4868D235-E176-E7CA-EEBD-17788382E362}"/>
-              </a:ext>
-            </a:extLst>
-          </p:cNvPr>
-          <p:cNvSpPr txBox="1"/>
-          <p:nvPr/>
-        </p:nvSpPr>
-        <p:spPr>
-          <a:xfrm>
-            <a:off x="3048886" y="3244334"/>
-            <a:ext cx="6097772" cy="369332"/>
-          </a:xfrm>
-          <a:prstGeom prst="rect">
-            <a:avLst/>
-          </a:prstGeom>
-          <a:noFill/>
-        </p:spPr>
-        <p:txBody>
-          <a:bodyPr wrap="square">
-            <a:spAutoFit/>
-          </a:bodyPr>
-          <a:lstStyle/>
-          <a:p>
-            <a:endParaRPr lang="it-IT" dirty="0"/>
-          </a:p>
-        </p:txBody>
-      </p:sp>
-      <p:sp>
-        <p:nvSpPr>
-          <p:cNvPr id="15" name="CasellaDiTesto 14">
-            <a:extLst>
-              <a:ext uri="{FF2B5EF4-FFF2-40B4-BE49-F238E27FC236}">
-                <a16:creationId xmlns:a16="http://schemas.microsoft.com/office/drawing/2014/main" id="{BB2D0B5E-0AD3-1AC2-900A-351764AC43C1}"/>
-              </a:ext>
-            </a:extLst>
-          </p:cNvPr>
-          <p:cNvSpPr txBox="1"/>
-          <p:nvPr/>
-        </p:nvSpPr>
-        <p:spPr>
-          <a:xfrm>
-            <a:off x="3048886" y="3244334"/>
-            <a:ext cx="6097772" cy="369332"/>
-          </a:xfrm>
-          <a:prstGeom prst="rect">
-            <a:avLst/>
-          </a:prstGeom>
-          <a:noFill/>
-        </p:spPr>
-        <p:txBody>
-          <a:bodyPr wrap="square">
-            <a:spAutoFit/>
-          </a:bodyPr>
-          <a:lstStyle/>
-          <a:p>
-            <a:endParaRPr lang="it-IT" dirty="0"/>
-          </a:p>
-        </p:txBody>
-      </p:sp>
-    </p:spTree>
-    <p:extLst>
-      <p:ext uri="{BB962C8B-B14F-4D97-AF65-F5344CB8AC3E}">
-        <p14:creationId xmlns:p14="http://schemas.microsoft.com/office/powerpoint/2010/main" val="463478691"/>
-      </p:ext>
-    </p:extLst>
-  </p:cSld>
-  <p:clrMapOvr>
-    <a:masterClrMapping/>
-  </p:clrMapOvr>
-</p:sld>
-</file>
-
-<file path=ppt/slides/slide9.xml><?xml version="1.0" encoding="utf-8"?>
-<p:sld xmlns:a="http://schemas.openxmlformats.org/drawingml/2006/main" xmlns:r="http://schemas.openxmlformats.org/officeDocument/2006/relationships" xmlns:p="http://schemas.openxmlformats.org/presentationml/2006/main">
-  <p:cSld>
-    <p:spTree>
-      <p:nvGrpSpPr>
-        <p:cNvPr id="1" name="">
-          <a:extLst>
-            <a:ext uri="{FF2B5EF4-FFF2-40B4-BE49-F238E27FC236}">
-              <a16:creationId xmlns:a16="http://schemas.microsoft.com/office/drawing/2014/main" id="{E91418D0-178A-C93A-FF92-79CB238846E6}"/>
-            </a:ext>
-          </a:extLst>
-        </p:cNvPr>
-        <p:cNvGrpSpPr/>
-        <p:nvPr/>
-      </p:nvGrpSpPr>
-      <p:grpSpPr>
-        <a:xfrm>
-          <a:off x="0" y="0"/>
-          <a:ext cx="0" cy="0"/>
-          <a:chOff x="0" y="0"/>
-          <a:chExt cx="0" cy="0"/>
-        </a:xfrm>
-      </p:grpSpPr>
-      <p:sp>
-        <p:nvSpPr>
-          <p:cNvPr id="2" name="Titolo 1">
-            <a:extLst>
-              <a:ext uri="{FF2B5EF4-FFF2-40B4-BE49-F238E27FC236}">
-                <a16:creationId xmlns:a16="http://schemas.microsoft.com/office/drawing/2014/main" id="{F189A4B7-4387-2BB7-3C48-46DB195146ED}"/>
-              </a:ext>
-            </a:extLst>
-          </p:cNvPr>
-          <p:cNvSpPr>
-            <a:spLocks noGrp="1"/>
-          </p:cNvSpPr>
-          <p:nvPr>
-            <p:ph type="title"/>
-          </p:nvPr>
-        </p:nvSpPr>
-        <p:spPr>
-          <a:xfrm>
-            <a:off x="38100" y="69651"/>
-            <a:ext cx="12114000" cy="1153094"/>
-          </a:xfrm>
-          <a:prstGeom prst="roundRect">
-            <a:avLst>
-              <a:gd name="adj" fmla="val 36459"/>
-            </a:avLst>
-          </a:prstGeom>
-          <a:noFill/>
-        </p:spPr>
-        <p:txBody>
-          <a:bodyPr>
-            <a:normAutofit/>
-          </a:bodyPr>
-          <a:lstStyle/>
-          <a:p>
-            <a:r>
-              <a:rPr lang="it-IT" b="1" dirty="0">
-                <a:solidFill>
-                  <a:srgbClr val="002060"/>
-                </a:solidFill>
-              </a:rPr>
-              <a:t>	BACKUP SLIDES: SCHEMATIC LAYOUT</a:t>
-            </a:r>
-          </a:p>
-        </p:txBody>
-      </p:sp>
-      <p:sp>
-        <p:nvSpPr>
-          <p:cNvPr id="4" name="Segnaposto data 3">
-            <a:extLst>
-              <a:ext uri="{FF2B5EF4-FFF2-40B4-BE49-F238E27FC236}">
-                <a16:creationId xmlns:a16="http://schemas.microsoft.com/office/drawing/2014/main" id="{AEDBFB0E-FB82-3C32-FE20-89DEF3428F91}"/>
-              </a:ext>
-            </a:extLst>
-          </p:cNvPr>
-          <p:cNvSpPr>
-            <a:spLocks noGrp="1"/>
-          </p:cNvSpPr>
-          <p:nvPr>
-            <p:ph type="dt" sz="half" idx="10"/>
-          </p:nvPr>
-        </p:nvSpPr>
-        <p:spPr>
-          <a:xfrm>
-            <a:off x="838200" y="6356349"/>
-            <a:ext cx="2743200" cy="432000"/>
-          </a:xfrm>
-        </p:spPr>
-        <p:txBody>
-          <a:bodyPr/>
-          <a:lstStyle/>
-          <a:p>
-            <a:r>
-              <a:rPr lang="it-IT" sz="1500" b="1" dirty="0">
-                <a:solidFill>
-                  <a:srgbClr val="002060"/>
-                </a:solidFill>
-              </a:rPr>
-              <a:t>August 2026</a:t>
-            </a:r>
-          </a:p>
-        </p:txBody>
-      </p:sp>
-      <p:sp>
-        <p:nvSpPr>
-          <p:cNvPr id="5" name="Segnaposto piè di pagina 4">
-            <a:extLst>
-              <a:ext uri="{FF2B5EF4-FFF2-40B4-BE49-F238E27FC236}">
-                <a16:creationId xmlns:a16="http://schemas.microsoft.com/office/drawing/2014/main" id="{2DDDD74D-1EB9-2D22-F8E3-99411AEADCFE}"/>
-              </a:ext>
-            </a:extLst>
-          </p:cNvPr>
-          <p:cNvSpPr>
-            <a:spLocks noGrp="1"/>
-          </p:cNvSpPr>
-          <p:nvPr>
-            <p:ph type="ftr" sz="quarter" idx="11"/>
-          </p:nvPr>
-        </p:nvSpPr>
-        <p:spPr>
-          <a:xfrm>
-            <a:off x="0" y="6356349"/>
-            <a:ext cx="12192000" cy="432000"/>
-          </a:xfrm>
-        </p:spPr>
-        <p:txBody>
-          <a:bodyPr/>
-          <a:lstStyle/>
-          <a:p>
-            <a:r>
-              <a:rPr lang="it-IT" sz="1500" b="1" dirty="0">
-                <a:solidFill>
-                  <a:srgbClr val="002060"/>
-                </a:solidFill>
-              </a:rPr>
-              <a:t>Anna Sofia Moro</a:t>
-            </a:r>
-          </a:p>
-        </p:txBody>
-      </p:sp>
-      <p:sp>
-        <p:nvSpPr>
-          <p:cNvPr id="6" name="Segnaposto numero diapositiva 5">
-            <a:extLst>
-              <a:ext uri="{FF2B5EF4-FFF2-40B4-BE49-F238E27FC236}">
-                <a16:creationId xmlns:a16="http://schemas.microsoft.com/office/drawing/2014/main" id="{97F57EDD-504C-8703-B373-775040D94582}"/>
-              </a:ext>
-            </a:extLst>
-          </p:cNvPr>
-          <p:cNvSpPr>
-            <a:spLocks noGrp="1"/>
-          </p:cNvSpPr>
-          <p:nvPr>
-            <p:ph type="sldNum" sz="quarter" idx="12"/>
-          </p:nvPr>
-        </p:nvSpPr>
-        <p:spPr>
-          <a:xfrm>
-            <a:off x="8610600" y="6356349"/>
-            <a:ext cx="2743200" cy="432000"/>
-          </a:xfrm>
-        </p:spPr>
-        <p:txBody>
-          <a:bodyPr/>
-          <a:lstStyle/>
-          <a:p>
-            <a:fld id="{0A318BD9-CA14-4A83-ACF0-03D5918EB402}" type="slidenum">
-              <a:rPr lang="it-IT" sz="1500" b="1" smtClean="0">
-                <a:solidFill>
-                  <a:srgbClr val="002060"/>
-                </a:solidFill>
-              </a:rPr>
-              <a:t>9</a:t>
-            </a:fld>
-            <a:endParaRPr lang="it-IT" sz="1500" b="1" dirty="0">
-              <a:solidFill>
-                <a:srgbClr val="002060"/>
-              </a:solidFill>
-            </a:endParaRPr>
-          </a:p>
-        </p:txBody>
-      </p:sp>
-      <p:cxnSp>
-        <p:nvCxnSpPr>
-          <p:cNvPr id="10" name="Connettore diritto 9">
-            <a:extLst>
-              <a:ext uri="{FF2B5EF4-FFF2-40B4-BE49-F238E27FC236}">
-                <a16:creationId xmlns:a16="http://schemas.microsoft.com/office/drawing/2014/main" id="{DA8C001C-29B0-3295-646E-77D6416186F8}"/>
-              </a:ext>
-            </a:extLst>
-          </p:cNvPr>
-          <p:cNvCxnSpPr>
-            <a:cxnSpLocks/>
-          </p:cNvCxnSpPr>
-          <p:nvPr/>
-        </p:nvCxnSpPr>
-        <p:spPr>
-          <a:xfrm>
-            <a:off x="696000" y="1155368"/>
-            <a:ext cx="10800000" cy="0"/>
-          </a:xfrm>
-          <a:prstGeom prst="line">
-            <a:avLst/>
-          </a:prstGeom>
-          <a:ln w="38100">
-            <a:solidFill>
-              <a:srgbClr val="002060"/>
-            </a:solidFill>
-          </a:ln>
-        </p:spPr>
-        <p:style>
-          <a:lnRef idx="2">
-            <a:schemeClr val="accent1"/>
-          </a:lnRef>
-          <a:fillRef idx="0">
-            <a:schemeClr val="accent1"/>
-          </a:fillRef>
-          <a:effectRef idx="1">
-            <a:schemeClr val="accent1"/>
-          </a:effectRef>
-          <a:fontRef idx="minor">
-            <a:schemeClr val="tx1"/>
-          </a:fontRef>
-        </p:style>
-      </p:cxnSp>
-      <p:sp>
-        <p:nvSpPr>
-          <p:cNvPr id="13" name="CasellaDiTesto 12">
-            <a:extLst>
-              <a:ext uri="{FF2B5EF4-FFF2-40B4-BE49-F238E27FC236}">
-                <a16:creationId xmlns:a16="http://schemas.microsoft.com/office/drawing/2014/main" id="{FE83A5A8-9F52-79AB-6097-3ED9E0DA104E}"/>
-              </a:ext>
-            </a:extLst>
-          </p:cNvPr>
-          <p:cNvSpPr txBox="1"/>
-          <p:nvPr/>
-        </p:nvSpPr>
-        <p:spPr>
-          <a:xfrm>
-            <a:off x="3048886" y="3244334"/>
-            <a:ext cx="6097772" cy="369332"/>
-          </a:xfrm>
-          <a:prstGeom prst="rect">
-            <a:avLst/>
-          </a:prstGeom>
-          <a:noFill/>
-        </p:spPr>
-        <p:txBody>
-          <a:bodyPr wrap="square">
-            <a:spAutoFit/>
-          </a:bodyPr>
-          <a:lstStyle/>
-          <a:p>
-            <a:endParaRPr lang="it-IT" dirty="0"/>
-          </a:p>
-        </p:txBody>
-      </p:sp>
-      <p:sp>
-        <p:nvSpPr>
-          <p:cNvPr id="15" name="CasellaDiTesto 14">
-            <a:extLst>
-              <a:ext uri="{FF2B5EF4-FFF2-40B4-BE49-F238E27FC236}">
-                <a16:creationId xmlns:a16="http://schemas.microsoft.com/office/drawing/2014/main" id="{D9D0E9B7-7CD4-2769-C5D2-C454E014F2EC}"/>
-              </a:ext>
-            </a:extLst>
-          </p:cNvPr>
-          <p:cNvSpPr txBox="1"/>
-          <p:nvPr/>
-        </p:nvSpPr>
-        <p:spPr>
-          <a:xfrm>
-            <a:off x="3048886" y="3244334"/>
-            <a:ext cx="6097772" cy="369332"/>
-          </a:xfrm>
-          <a:prstGeom prst="rect">
-            <a:avLst/>
-          </a:prstGeom>
-          <a:noFill/>
-        </p:spPr>
-        <p:txBody>
-          <a:bodyPr wrap="square">
-            <a:spAutoFit/>
-          </a:bodyPr>
-          <a:lstStyle/>
-          <a:p>
-            <a:endParaRPr lang="it-IT" dirty="0"/>
-          </a:p>
-        </p:txBody>
-      </p:sp>
-      <p:pic>
-        <p:nvPicPr>
-          <p:cNvPr id="8" name="Immagine 7">
-            <a:extLst>
-              <a:ext uri="{FF2B5EF4-FFF2-40B4-BE49-F238E27FC236}">
-                <a16:creationId xmlns:a16="http://schemas.microsoft.com/office/drawing/2014/main" id="{DD1CB2A6-1166-CF2E-28FE-9AF384B5B3E6}"/>
-              </a:ext>
-            </a:extLst>
-          </p:cNvPr>
-          <p:cNvPicPr>
-            <a:picLocks noChangeAspect="1"/>
-          </p:cNvPicPr>
-          <p:nvPr/>
-        </p:nvPicPr>
-        <p:blipFill>
-          <a:blip r:embed="rId2"/>
-          <a:stretch>
-            <a:fillRect/>
-          </a:stretch>
-        </p:blipFill>
-        <p:spPr>
-          <a:xfrm>
-            <a:off x="443309" y="1545256"/>
-            <a:ext cx="11303581" cy="4705592"/>
-          </a:xfrm>
-          <a:prstGeom prst="rect">
-            <a:avLst/>
-          </a:prstGeom>
-        </p:spPr>
-      </p:pic>
-    </p:spTree>
-    <p:extLst>
-      <p:ext uri="{BB962C8B-B14F-4D97-AF65-F5344CB8AC3E}">
-        <p14:creationId xmlns:p14="http://schemas.microsoft.com/office/powerpoint/2010/main" val="382366125"/>
       </p:ext>
     </p:extLst>
   </p:cSld>

--- a/slides/week6.pptx
+++ b/slides/week6.pptx
@@ -5,7 +5,7 @@
     <p:sldMasterId id="2147483648" r:id="rId1"/>
   </p:sldMasterIdLst>
   <p:notesMasterIdLst>
-    <p:notesMasterId r:id="rId16"/>
+    <p:notesMasterId r:id="rId18"/>
   </p:notesMasterIdLst>
   <p:sldIdLst>
     <p:sldId id="256" r:id="rId2"/>
@@ -17,11 +17,13 @@
     <p:sldId id="328" r:id="rId8"/>
     <p:sldId id="330" r:id="rId9"/>
     <p:sldId id="329" r:id="rId10"/>
-    <p:sldId id="332" r:id="rId11"/>
-    <p:sldId id="333" r:id="rId12"/>
-    <p:sldId id="334" r:id="rId13"/>
-    <p:sldId id="305" r:id="rId14"/>
-    <p:sldId id="320" r:id="rId15"/>
+    <p:sldId id="337" r:id="rId11"/>
+    <p:sldId id="332" r:id="rId12"/>
+    <p:sldId id="333" r:id="rId13"/>
+    <p:sldId id="334" r:id="rId14"/>
+    <p:sldId id="335" r:id="rId15"/>
+    <p:sldId id="336" r:id="rId16"/>
+    <p:sldId id="305" r:id="rId17"/>
   </p:sldIdLst>
   <p:sldSz cx="12192000" cy="6858000"/>
   <p:notesSz cx="6858000" cy="9144000"/>
@@ -593,6 +595,114 @@
         <p:cNvPr id="1" name="">
           <a:extLst>
             <a:ext uri="{FF2B5EF4-FFF2-40B4-BE49-F238E27FC236}">
+              <a16:creationId xmlns:a16="http://schemas.microsoft.com/office/drawing/2014/main" id="{C4540D25-D513-44E6-7201-AA2F52787AEB}"/>
+            </a:ext>
+          </a:extLst>
+        </p:cNvPr>
+        <p:cNvGrpSpPr/>
+        <p:nvPr/>
+      </p:nvGrpSpPr>
+      <p:grpSpPr>
+        <a:xfrm>
+          <a:off x="0" y="0"/>
+          <a:ext cx="0" cy="0"/>
+          <a:chOff x="0" y="0"/>
+          <a:chExt cx="0" cy="0"/>
+        </a:xfrm>
+      </p:grpSpPr>
+      <p:sp>
+        <p:nvSpPr>
+          <p:cNvPr id="2" name="Segnaposto immagine diapositiva 1">
+            <a:extLst>
+              <a:ext uri="{FF2B5EF4-FFF2-40B4-BE49-F238E27FC236}">
+                <a16:creationId xmlns:a16="http://schemas.microsoft.com/office/drawing/2014/main" id="{2D180756-B18C-1C03-AA8B-27F7CABB3CC3}"/>
+              </a:ext>
+            </a:extLst>
+          </p:cNvPr>
+          <p:cNvSpPr>
+            <a:spLocks noGrp="1" noRot="1" noChangeAspect="1"/>
+          </p:cNvSpPr>
+          <p:nvPr>
+            <p:ph type="sldImg"/>
+          </p:nvPr>
+        </p:nvSpPr>
+        <p:spPr/>
+      </p:sp>
+      <p:sp>
+        <p:nvSpPr>
+          <p:cNvPr id="3" name="Segnaposto note 2">
+            <a:extLst>
+              <a:ext uri="{FF2B5EF4-FFF2-40B4-BE49-F238E27FC236}">
+                <a16:creationId xmlns:a16="http://schemas.microsoft.com/office/drawing/2014/main" id="{A1B72458-411A-8938-C76F-621AFCB05808}"/>
+              </a:ext>
+            </a:extLst>
+          </p:cNvPr>
+          <p:cNvSpPr>
+            <a:spLocks noGrp="1"/>
+          </p:cNvSpPr>
+          <p:nvPr>
+            <p:ph type="body" idx="1"/>
+          </p:nvPr>
+        </p:nvSpPr>
+        <p:spPr/>
+        <p:txBody>
+          <a:bodyPr/>
+          <a:lstStyle/>
+          <a:p>
+            <a:endParaRPr lang="it-IT" dirty="0"/>
+          </a:p>
+        </p:txBody>
+      </p:sp>
+      <p:sp>
+        <p:nvSpPr>
+          <p:cNvPr id="4" name="Segnaposto numero diapositiva 3">
+            <a:extLst>
+              <a:ext uri="{FF2B5EF4-FFF2-40B4-BE49-F238E27FC236}">
+                <a16:creationId xmlns:a16="http://schemas.microsoft.com/office/drawing/2014/main" id="{57E5F338-8551-8690-4EB8-39371D39D93A}"/>
+              </a:ext>
+            </a:extLst>
+          </p:cNvPr>
+          <p:cNvSpPr>
+            <a:spLocks noGrp="1"/>
+          </p:cNvSpPr>
+          <p:nvPr>
+            <p:ph type="sldNum" sz="quarter" idx="5"/>
+          </p:nvPr>
+        </p:nvSpPr>
+        <p:spPr/>
+        <p:txBody>
+          <a:bodyPr/>
+          <a:lstStyle/>
+          <a:p>
+            <a:fld id="{C205392F-55BF-4B8E-AF01-45F81C88C286}" type="slidenum">
+              <a:rPr lang="it-IT" smtClean="0"/>
+              <a:t>11</a:t>
+            </a:fld>
+            <a:endParaRPr lang="it-IT"/>
+          </a:p>
+        </p:txBody>
+      </p:sp>
+    </p:spTree>
+    <p:extLst>
+      <p:ext uri="{BB962C8B-B14F-4D97-AF65-F5344CB8AC3E}">
+        <p14:creationId xmlns:p14="http://schemas.microsoft.com/office/powerpoint/2010/main" val="3219570642"/>
+      </p:ext>
+    </p:extLst>
+  </p:cSld>
+  <p:clrMapOvr>
+    <a:masterClrMapping/>
+  </p:clrMapOvr>
+</p:notes>
+</file>
+
+<file path=ppt/notesSlides/notesSlide11.xml><?xml version="1.0" encoding="utf-8"?>
+<p:notes xmlns:a="http://schemas.openxmlformats.org/drawingml/2006/main" xmlns:r="http://schemas.openxmlformats.org/officeDocument/2006/relationships" xmlns:p="http://schemas.openxmlformats.org/presentationml/2006/main">
+  <p:cSld>
+    <p:spTree>
+      <p:nvGrpSpPr>
+        <p:cNvPr id="1" name="">
+          <a:extLst>
+            <a:ext uri="{FF2B5EF4-FFF2-40B4-BE49-F238E27FC236}">
               <a16:creationId xmlns:a16="http://schemas.microsoft.com/office/drawing/2014/main" id="{7EB0E52A-AE9E-EF31-4847-15EA692A5E83}"/>
             </a:ext>
           </a:extLst>
@@ -674,7 +784,7 @@
           <a:p>
             <a:fld id="{C205392F-55BF-4B8E-AF01-45F81C88C286}" type="slidenum">
               <a:rPr lang="it-IT" smtClean="0"/>
-              <a:t>11</a:t>
+              <a:t>12</a:t>
             </a:fld>
             <a:endParaRPr lang="it-IT"/>
           </a:p>
@@ -693,7 +803,7 @@
 </p:notes>
 </file>
 
-<file path=ppt/notesSlides/notesSlide11.xml><?xml version="1.0" encoding="utf-8"?>
+<file path=ppt/notesSlides/notesSlide12.xml><?xml version="1.0" encoding="utf-8"?>
 <p:notes xmlns:a="http://schemas.openxmlformats.org/drawingml/2006/main" xmlns:r="http://schemas.openxmlformats.org/officeDocument/2006/relationships" xmlns:p="http://schemas.openxmlformats.org/presentationml/2006/main">
   <p:cSld>
     <p:spTree>
@@ -755,6 +865,10 @@
           <a:bodyPr/>
           <a:lstStyle/>
           <a:p>
+            <a:r>
+              <a:rPr lang="en-US" dirty="0"/>
+              <a:t>The sharp transition is exactly what I expected.</a:t>
+            </a:r>
             <a:endParaRPr lang="it-IT" dirty="0"/>
           </a:p>
         </p:txBody>
@@ -782,7 +896,7 @@
           <a:p>
             <a:fld id="{C205392F-55BF-4B8E-AF01-45F81C88C286}" type="slidenum">
               <a:rPr lang="it-IT" smtClean="0"/>
-              <a:t>12</a:t>
+              <a:t>13</a:t>
             </a:fld>
             <a:endParaRPr lang="it-IT"/>
           </a:p>
@@ -792,6 +906,222 @@
     <p:extLst>
       <p:ext uri="{BB962C8B-B14F-4D97-AF65-F5344CB8AC3E}">
         <p14:creationId xmlns:p14="http://schemas.microsoft.com/office/powerpoint/2010/main" val="623642223"/>
+      </p:ext>
+    </p:extLst>
+  </p:cSld>
+  <p:clrMapOvr>
+    <a:masterClrMapping/>
+  </p:clrMapOvr>
+</p:notes>
+</file>
+
+<file path=ppt/notesSlides/notesSlide13.xml><?xml version="1.0" encoding="utf-8"?>
+<p:notes xmlns:a="http://schemas.openxmlformats.org/drawingml/2006/main" xmlns:r="http://schemas.openxmlformats.org/officeDocument/2006/relationships" xmlns:p="http://schemas.openxmlformats.org/presentationml/2006/main">
+  <p:cSld>
+    <p:spTree>
+      <p:nvGrpSpPr>
+        <p:cNvPr id="1" name="">
+          <a:extLst>
+            <a:ext uri="{FF2B5EF4-FFF2-40B4-BE49-F238E27FC236}">
+              <a16:creationId xmlns:a16="http://schemas.microsoft.com/office/drawing/2014/main" id="{01E993D9-A4A3-C2EF-F57C-4F8B5FB13468}"/>
+            </a:ext>
+          </a:extLst>
+        </p:cNvPr>
+        <p:cNvGrpSpPr/>
+        <p:nvPr/>
+      </p:nvGrpSpPr>
+      <p:grpSpPr>
+        <a:xfrm>
+          <a:off x="0" y="0"/>
+          <a:ext cx="0" cy="0"/>
+          <a:chOff x="0" y="0"/>
+          <a:chExt cx="0" cy="0"/>
+        </a:xfrm>
+      </p:grpSpPr>
+      <p:sp>
+        <p:nvSpPr>
+          <p:cNvPr id="2" name="Segnaposto immagine diapositiva 1">
+            <a:extLst>
+              <a:ext uri="{FF2B5EF4-FFF2-40B4-BE49-F238E27FC236}">
+                <a16:creationId xmlns:a16="http://schemas.microsoft.com/office/drawing/2014/main" id="{707E042F-0C69-1FE2-492F-508C57FD3DE5}"/>
+              </a:ext>
+            </a:extLst>
+          </p:cNvPr>
+          <p:cNvSpPr>
+            <a:spLocks noGrp="1" noRot="1" noChangeAspect="1"/>
+          </p:cNvSpPr>
+          <p:nvPr>
+            <p:ph type="sldImg"/>
+          </p:nvPr>
+        </p:nvSpPr>
+        <p:spPr/>
+      </p:sp>
+      <p:sp>
+        <p:nvSpPr>
+          <p:cNvPr id="3" name="Segnaposto note 2">
+            <a:extLst>
+              <a:ext uri="{FF2B5EF4-FFF2-40B4-BE49-F238E27FC236}">
+                <a16:creationId xmlns:a16="http://schemas.microsoft.com/office/drawing/2014/main" id="{7E89C93D-EE29-78BB-A33C-C776F30438A3}"/>
+              </a:ext>
+            </a:extLst>
+          </p:cNvPr>
+          <p:cNvSpPr>
+            <a:spLocks noGrp="1"/>
+          </p:cNvSpPr>
+          <p:nvPr>
+            <p:ph type="body" idx="1"/>
+          </p:nvPr>
+        </p:nvSpPr>
+        <p:spPr/>
+        <p:txBody>
+          <a:bodyPr/>
+          <a:lstStyle/>
+          <a:p>
+            <a:endParaRPr lang="it-IT" dirty="0"/>
+          </a:p>
+        </p:txBody>
+      </p:sp>
+      <p:sp>
+        <p:nvSpPr>
+          <p:cNvPr id="4" name="Segnaposto numero diapositiva 3">
+            <a:extLst>
+              <a:ext uri="{FF2B5EF4-FFF2-40B4-BE49-F238E27FC236}">
+                <a16:creationId xmlns:a16="http://schemas.microsoft.com/office/drawing/2014/main" id="{87B2BFB1-BBCE-44F4-0693-18A63EB851CC}"/>
+              </a:ext>
+            </a:extLst>
+          </p:cNvPr>
+          <p:cNvSpPr>
+            <a:spLocks noGrp="1"/>
+          </p:cNvSpPr>
+          <p:nvPr>
+            <p:ph type="sldNum" sz="quarter" idx="5"/>
+          </p:nvPr>
+        </p:nvSpPr>
+        <p:spPr/>
+        <p:txBody>
+          <a:bodyPr/>
+          <a:lstStyle/>
+          <a:p>
+            <a:fld id="{C205392F-55BF-4B8E-AF01-45F81C88C286}" type="slidenum">
+              <a:rPr lang="it-IT" smtClean="0"/>
+              <a:t>14</a:t>
+            </a:fld>
+            <a:endParaRPr lang="it-IT"/>
+          </a:p>
+        </p:txBody>
+      </p:sp>
+    </p:spTree>
+    <p:extLst>
+      <p:ext uri="{BB962C8B-B14F-4D97-AF65-F5344CB8AC3E}">
+        <p14:creationId xmlns:p14="http://schemas.microsoft.com/office/powerpoint/2010/main" val="1521764881"/>
+      </p:ext>
+    </p:extLst>
+  </p:cSld>
+  <p:clrMapOvr>
+    <a:masterClrMapping/>
+  </p:clrMapOvr>
+</p:notes>
+</file>
+
+<file path=ppt/notesSlides/notesSlide14.xml><?xml version="1.0" encoding="utf-8"?>
+<p:notes xmlns:a="http://schemas.openxmlformats.org/drawingml/2006/main" xmlns:r="http://schemas.openxmlformats.org/officeDocument/2006/relationships" xmlns:p="http://schemas.openxmlformats.org/presentationml/2006/main">
+  <p:cSld>
+    <p:spTree>
+      <p:nvGrpSpPr>
+        <p:cNvPr id="1" name="">
+          <a:extLst>
+            <a:ext uri="{FF2B5EF4-FFF2-40B4-BE49-F238E27FC236}">
+              <a16:creationId xmlns:a16="http://schemas.microsoft.com/office/drawing/2014/main" id="{86513A2B-5A11-D823-0904-63EE33C8C4B1}"/>
+            </a:ext>
+          </a:extLst>
+        </p:cNvPr>
+        <p:cNvGrpSpPr/>
+        <p:nvPr/>
+      </p:nvGrpSpPr>
+      <p:grpSpPr>
+        <a:xfrm>
+          <a:off x="0" y="0"/>
+          <a:ext cx="0" cy="0"/>
+          <a:chOff x="0" y="0"/>
+          <a:chExt cx="0" cy="0"/>
+        </a:xfrm>
+      </p:grpSpPr>
+      <p:sp>
+        <p:nvSpPr>
+          <p:cNvPr id="2" name="Segnaposto immagine diapositiva 1">
+            <a:extLst>
+              <a:ext uri="{FF2B5EF4-FFF2-40B4-BE49-F238E27FC236}">
+                <a16:creationId xmlns:a16="http://schemas.microsoft.com/office/drawing/2014/main" id="{9ACEF337-0A99-611D-D9A0-DB251789BB72}"/>
+              </a:ext>
+            </a:extLst>
+          </p:cNvPr>
+          <p:cNvSpPr>
+            <a:spLocks noGrp="1" noRot="1" noChangeAspect="1"/>
+          </p:cNvSpPr>
+          <p:nvPr>
+            <p:ph type="sldImg"/>
+          </p:nvPr>
+        </p:nvSpPr>
+        <p:spPr/>
+      </p:sp>
+      <p:sp>
+        <p:nvSpPr>
+          <p:cNvPr id="3" name="Segnaposto note 2">
+            <a:extLst>
+              <a:ext uri="{FF2B5EF4-FFF2-40B4-BE49-F238E27FC236}">
+                <a16:creationId xmlns:a16="http://schemas.microsoft.com/office/drawing/2014/main" id="{D8A43E95-3040-4EDD-E46B-5EB9C70D7D9B}"/>
+              </a:ext>
+            </a:extLst>
+          </p:cNvPr>
+          <p:cNvSpPr>
+            <a:spLocks noGrp="1"/>
+          </p:cNvSpPr>
+          <p:nvPr>
+            <p:ph type="body" idx="1"/>
+          </p:nvPr>
+        </p:nvSpPr>
+        <p:spPr/>
+        <p:txBody>
+          <a:bodyPr/>
+          <a:lstStyle/>
+          <a:p>
+            <a:endParaRPr lang="it-IT" dirty="0"/>
+          </a:p>
+        </p:txBody>
+      </p:sp>
+      <p:sp>
+        <p:nvSpPr>
+          <p:cNvPr id="4" name="Segnaposto numero diapositiva 3">
+            <a:extLst>
+              <a:ext uri="{FF2B5EF4-FFF2-40B4-BE49-F238E27FC236}">
+                <a16:creationId xmlns:a16="http://schemas.microsoft.com/office/drawing/2014/main" id="{9A13B3DD-2D7B-907C-D8AB-82A4D644950C}"/>
+              </a:ext>
+            </a:extLst>
+          </p:cNvPr>
+          <p:cNvSpPr>
+            <a:spLocks noGrp="1"/>
+          </p:cNvSpPr>
+          <p:nvPr>
+            <p:ph type="sldNum" sz="quarter" idx="5"/>
+          </p:nvPr>
+        </p:nvSpPr>
+        <p:spPr/>
+        <p:txBody>
+          <a:bodyPr/>
+          <a:lstStyle/>
+          <a:p>
+            <a:fld id="{C205392F-55BF-4B8E-AF01-45F81C88C286}" type="slidenum">
+              <a:rPr lang="it-IT" smtClean="0"/>
+              <a:t>15</a:t>
+            </a:fld>
+            <a:endParaRPr lang="it-IT"/>
+          </a:p>
+        </p:txBody>
+      </p:sp>
+    </p:spTree>
+    <p:extLst>
+      <p:ext uri="{BB962C8B-B14F-4D97-AF65-F5344CB8AC3E}">
+        <p14:creationId xmlns:p14="http://schemas.microsoft.com/office/powerpoint/2010/main" val="330904078"/>
       </p:ext>
     </p:extLst>
   </p:cSld>
@@ -1565,7 +1895,7 @@
         <p:cNvPr id="1" name="">
           <a:extLst>
             <a:ext uri="{FF2B5EF4-FFF2-40B4-BE49-F238E27FC236}">
-              <a16:creationId xmlns:a16="http://schemas.microsoft.com/office/drawing/2014/main" id="{C4540D25-D513-44E6-7201-AA2F52787AEB}"/>
+              <a16:creationId xmlns:a16="http://schemas.microsoft.com/office/drawing/2014/main" id="{A316F5DB-6BFB-6C5C-336A-3B431C6EDEC5}"/>
             </a:ext>
           </a:extLst>
         </p:cNvPr>
@@ -1585,7 +1915,7 @@
           <p:cNvPr id="2" name="Segnaposto immagine diapositiva 1">
             <a:extLst>
               <a:ext uri="{FF2B5EF4-FFF2-40B4-BE49-F238E27FC236}">
-                <a16:creationId xmlns:a16="http://schemas.microsoft.com/office/drawing/2014/main" id="{2D180756-B18C-1C03-AA8B-27F7CABB3CC3}"/>
+                <a16:creationId xmlns:a16="http://schemas.microsoft.com/office/drawing/2014/main" id="{308275E5-0B39-7FA2-7BFD-EBE01446ACD4}"/>
               </a:ext>
             </a:extLst>
           </p:cNvPr>
@@ -1603,7 +1933,7 @@
           <p:cNvPr id="3" name="Segnaposto note 2">
             <a:extLst>
               <a:ext uri="{FF2B5EF4-FFF2-40B4-BE49-F238E27FC236}">
-                <a16:creationId xmlns:a16="http://schemas.microsoft.com/office/drawing/2014/main" id="{A1B72458-411A-8938-C76F-621AFCB05808}"/>
+                <a16:creationId xmlns:a16="http://schemas.microsoft.com/office/drawing/2014/main" id="{0BAEE575-51D8-54B2-D4D4-F5D9E0AA9922}"/>
               </a:ext>
             </a:extLst>
           </p:cNvPr>
@@ -1628,7 +1958,7 @@
           <p:cNvPr id="4" name="Segnaposto numero diapositiva 3">
             <a:extLst>
               <a:ext uri="{FF2B5EF4-FFF2-40B4-BE49-F238E27FC236}">
-                <a16:creationId xmlns:a16="http://schemas.microsoft.com/office/drawing/2014/main" id="{57E5F338-8551-8690-4EB8-39371D39D93A}"/>
+                <a16:creationId xmlns:a16="http://schemas.microsoft.com/office/drawing/2014/main" id="{A3DB9C1D-4E4B-8E0C-0EE6-8F2C2959DCED}"/>
               </a:ext>
             </a:extLst>
           </p:cNvPr>
@@ -1655,7 +1985,7 @@
     </p:spTree>
     <p:extLst>
       <p:ext uri="{BB962C8B-B14F-4D97-AF65-F5344CB8AC3E}">
-        <p14:creationId xmlns:p14="http://schemas.microsoft.com/office/powerpoint/2010/main" val="3219570642"/>
+        <p14:creationId xmlns:p14="http://schemas.microsoft.com/office/powerpoint/2010/main" val="1235245124"/>
       </p:ext>
     </p:extLst>
   </p:cSld>
@@ -5024,6 +5354,620 @@
         <p:cNvPr id="1" name="">
           <a:extLst>
             <a:ext uri="{FF2B5EF4-FFF2-40B4-BE49-F238E27FC236}">
+              <a16:creationId xmlns:a16="http://schemas.microsoft.com/office/drawing/2014/main" id="{4D28CD08-537E-6061-EE6B-333D819B71B1}"/>
+            </a:ext>
+          </a:extLst>
+        </p:cNvPr>
+        <p:cNvGrpSpPr/>
+        <p:nvPr/>
+      </p:nvGrpSpPr>
+      <p:grpSpPr>
+        <a:xfrm>
+          <a:off x="0" y="0"/>
+          <a:ext cx="0" cy="0"/>
+          <a:chOff x="0" y="0"/>
+          <a:chExt cx="0" cy="0"/>
+        </a:xfrm>
+      </p:grpSpPr>
+      <p:sp>
+        <p:nvSpPr>
+          <p:cNvPr id="2" name="Titolo 1">
+            <a:extLst>
+              <a:ext uri="{FF2B5EF4-FFF2-40B4-BE49-F238E27FC236}">
+                <a16:creationId xmlns:a16="http://schemas.microsoft.com/office/drawing/2014/main" id="{0D598C48-64FB-49DF-7F0D-36A3F7FE576C}"/>
+              </a:ext>
+            </a:extLst>
+          </p:cNvPr>
+          <p:cNvSpPr>
+            <a:spLocks noGrp="1"/>
+          </p:cNvSpPr>
+          <p:nvPr>
+            <p:ph type="title"/>
+          </p:nvPr>
+        </p:nvSpPr>
+        <p:spPr>
+          <a:xfrm>
+            <a:off x="38100" y="69651"/>
+            <a:ext cx="12114000" cy="1153094"/>
+          </a:xfrm>
+          <a:prstGeom prst="roundRect">
+            <a:avLst>
+              <a:gd name="adj" fmla="val 36459"/>
+            </a:avLst>
+          </a:prstGeom>
+          <a:noFill/>
+        </p:spPr>
+        <p:txBody>
+          <a:bodyPr>
+            <a:normAutofit/>
+          </a:bodyPr>
+          <a:lstStyle/>
+          <a:p>
+            <a:r>
+              <a:rPr lang="en-US" b="1" dirty="0">
+                <a:solidFill>
+                  <a:srgbClr val="002060"/>
+                </a:solidFill>
+              </a:rPr>
+              <a:t>	ERROR BUDGET SUMMARY</a:t>
+            </a:r>
+            <a:endParaRPr lang="it-IT" b="1" dirty="0">
+              <a:solidFill>
+                <a:srgbClr val="002060"/>
+              </a:solidFill>
+            </a:endParaRPr>
+          </a:p>
+        </p:txBody>
+      </p:sp>
+      <p:sp>
+        <p:nvSpPr>
+          <p:cNvPr id="4" name="Segnaposto data 3">
+            <a:extLst>
+              <a:ext uri="{FF2B5EF4-FFF2-40B4-BE49-F238E27FC236}">
+                <a16:creationId xmlns:a16="http://schemas.microsoft.com/office/drawing/2014/main" id="{2B857E75-F7C1-947F-83CD-AD71FC25A25C}"/>
+              </a:ext>
+            </a:extLst>
+          </p:cNvPr>
+          <p:cNvSpPr>
+            <a:spLocks noGrp="1"/>
+          </p:cNvSpPr>
+          <p:nvPr>
+            <p:ph type="dt" sz="half" idx="10"/>
+          </p:nvPr>
+        </p:nvSpPr>
+        <p:spPr>
+          <a:xfrm>
+            <a:off x="838200" y="6356349"/>
+            <a:ext cx="2743200" cy="432000"/>
+          </a:xfrm>
+        </p:spPr>
+        <p:txBody>
+          <a:bodyPr/>
+          <a:lstStyle/>
+          <a:p>
+            <a:r>
+              <a:rPr lang="it-IT" sz="1500" b="1" dirty="0">
+                <a:solidFill>
+                  <a:srgbClr val="002060"/>
+                </a:solidFill>
+              </a:rPr>
+              <a:t>August 2026</a:t>
+            </a:r>
+          </a:p>
+        </p:txBody>
+      </p:sp>
+      <p:sp>
+        <p:nvSpPr>
+          <p:cNvPr id="5" name="Segnaposto piè di pagina 4">
+            <a:extLst>
+              <a:ext uri="{FF2B5EF4-FFF2-40B4-BE49-F238E27FC236}">
+                <a16:creationId xmlns:a16="http://schemas.microsoft.com/office/drawing/2014/main" id="{20C75B25-A3FB-C278-DF48-7DDBF67299A7}"/>
+              </a:ext>
+            </a:extLst>
+          </p:cNvPr>
+          <p:cNvSpPr>
+            <a:spLocks noGrp="1"/>
+          </p:cNvSpPr>
+          <p:nvPr>
+            <p:ph type="ftr" sz="quarter" idx="11"/>
+          </p:nvPr>
+        </p:nvSpPr>
+        <p:spPr>
+          <a:xfrm>
+            <a:off x="0" y="6356349"/>
+            <a:ext cx="12192000" cy="432000"/>
+          </a:xfrm>
+        </p:spPr>
+        <p:txBody>
+          <a:bodyPr/>
+          <a:lstStyle/>
+          <a:p>
+            <a:r>
+              <a:rPr lang="it-IT" sz="1500" b="1" dirty="0">
+                <a:solidFill>
+                  <a:srgbClr val="002060"/>
+                </a:solidFill>
+              </a:rPr>
+              <a:t>Anna Sofia Moro</a:t>
+            </a:r>
+          </a:p>
+        </p:txBody>
+      </p:sp>
+      <p:sp>
+        <p:nvSpPr>
+          <p:cNvPr id="6" name="Segnaposto numero diapositiva 5">
+            <a:extLst>
+              <a:ext uri="{FF2B5EF4-FFF2-40B4-BE49-F238E27FC236}">
+                <a16:creationId xmlns:a16="http://schemas.microsoft.com/office/drawing/2014/main" id="{683C204F-0EBA-71FD-DDE0-6924FE12F29F}"/>
+              </a:ext>
+            </a:extLst>
+          </p:cNvPr>
+          <p:cNvSpPr>
+            <a:spLocks noGrp="1"/>
+          </p:cNvSpPr>
+          <p:nvPr>
+            <p:ph type="sldNum" sz="quarter" idx="12"/>
+          </p:nvPr>
+        </p:nvSpPr>
+        <p:spPr>
+          <a:xfrm>
+            <a:off x="8610600" y="6356349"/>
+            <a:ext cx="2743200" cy="432000"/>
+          </a:xfrm>
+        </p:spPr>
+        <p:txBody>
+          <a:bodyPr/>
+          <a:lstStyle/>
+          <a:p>
+            <a:fld id="{0A318BD9-CA14-4A83-ACF0-03D5918EB402}" type="slidenum">
+              <a:rPr lang="it-IT" sz="1500" b="1" smtClean="0">
+                <a:solidFill>
+                  <a:srgbClr val="002060"/>
+                </a:solidFill>
+              </a:rPr>
+              <a:t>10</a:t>
+            </a:fld>
+            <a:endParaRPr lang="it-IT" sz="1500" b="1" dirty="0">
+              <a:solidFill>
+                <a:srgbClr val="002060"/>
+              </a:solidFill>
+            </a:endParaRPr>
+          </a:p>
+        </p:txBody>
+      </p:sp>
+      <p:cxnSp>
+        <p:nvCxnSpPr>
+          <p:cNvPr id="10" name="Connettore diritto 9">
+            <a:extLst>
+              <a:ext uri="{FF2B5EF4-FFF2-40B4-BE49-F238E27FC236}">
+                <a16:creationId xmlns:a16="http://schemas.microsoft.com/office/drawing/2014/main" id="{AC3EC72D-00E5-51B7-DC04-3C97B61009FB}"/>
+              </a:ext>
+            </a:extLst>
+          </p:cNvPr>
+          <p:cNvCxnSpPr>
+            <a:cxnSpLocks/>
+          </p:cNvCxnSpPr>
+          <p:nvPr/>
+        </p:nvCxnSpPr>
+        <p:spPr>
+          <a:xfrm>
+            <a:off x="696000" y="1155368"/>
+            <a:ext cx="10800000" cy="0"/>
+          </a:xfrm>
+          <a:prstGeom prst="line">
+            <a:avLst/>
+          </a:prstGeom>
+          <a:ln w="38100">
+            <a:solidFill>
+              <a:srgbClr val="002060"/>
+            </a:solidFill>
+          </a:ln>
+        </p:spPr>
+        <p:style>
+          <a:lnRef idx="2">
+            <a:schemeClr val="accent1"/>
+          </a:lnRef>
+          <a:fillRef idx="0">
+            <a:schemeClr val="accent1"/>
+          </a:fillRef>
+          <a:effectRef idx="1">
+            <a:schemeClr val="accent1"/>
+          </a:effectRef>
+          <a:fontRef idx="minor">
+            <a:schemeClr val="tx1"/>
+          </a:fontRef>
+        </p:style>
+      </p:cxnSp>
+      <p:sp>
+        <p:nvSpPr>
+          <p:cNvPr id="13" name="CasellaDiTesto 12">
+            <a:extLst>
+              <a:ext uri="{FF2B5EF4-FFF2-40B4-BE49-F238E27FC236}">
+                <a16:creationId xmlns:a16="http://schemas.microsoft.com/office/drawing/2014/main" id="{8DDB093C-5F0E-9FBA-B75D-9AF97AB6B8B0}"/>
+              </a:ext>
+            </a:extLst>
+          </p:cNvPr>
+          <p:cNvSpPr txBox="1"/>
+          <p:nvPr/>
+        </p:nvSpPr>
+        <p:spPr>
+          <a:xfrm>
+            <a:off x="3048886" y="3244334"/>
+            <a:ext cx="6097772" cy="369332"/>
+          </a:xfrm>
+          <a:prstGeom prst="rect">
+            <a:avLst/>
+          </a:prstGeom>
+          <a:noFill/>
+        </p:spPr>
+        <p:txBody>
+          <a:bodyPr wrap="square">
+            <a:spAutoFit/>
+          </a:bodyPr>
+          <a:lstStyle/>
+          <a:p>
+            <a:endParaRPr lang="it-IT" dirty="0"/>
+          </a:p>
+        </p:txBody>
+      </p:sp>
+      <p:sp>
+        <p:nvSpPr>
+          <p:cNvPr id="15" name="CasellaDiTesto 14">
+            <a:extLst>
+              <a:ext uri="{FF2B5EF4-FFF2-40B4-BE49-F238E27FC236}">
+                <a16:creationId xmlns:a16="http://schemas.microsoft.com/office/drawing/2014/main" id="{F2D60652-0760-17DD-7AA8-57A966133FBC}"/>
+              </a:ext>
+            </a:extLst>
+          </p:cNvPr>
+          <p:cNvSpPr txBox="1"/>
+          <p:nvPr/>
+        </p:nvSpPr>
+        <p:spPr>
+          <a:xfrm>
+            <a:off x="3048886" y="3244334"/>
+            <a:ext cx="6097772" cy="369332"/>
+          </a:xfrm>
+          <a:prstGeom prst="rect">
+            <a:avLst/>
+          </a:prstGeom>
+          <a:noFill/>
+        </p:spPr>
+        <p:txBody>
+          <a:bodyPr wrap="square">
+            <a:spAutoFit/>
+          </a:bodyPr>
+          <a:lstStyle/>
+          <a:p>
+            <a:endParaRPr lang="it-IT" dirty="0"/>
+          </a:p>
+        </p:txBody>
+      </p:sp>
+      <p:graphicFrame>
+        <p:nvGraphicFramePr>
+          <p:cNvPr id="3" name="Content Placeholder 2">
+            <a:extLst>
+              <a:ext uri="{FF2B5EF4-FFF2-40B4-BE49-F238E27FC236}">
+                <a16:creationId xmlns:a16="http://schemas.microsoft.com/office/drawing/2014/main" id="{E183E11D-8901-368C-E3DF-CC67F0B6A47E}"/>
+              </a:ext>
+            </a:extLst>
+          </p:cNvPr>
+          <p:cNvGraphicFramePr>
+            <a:graphicFrameLocks noGrp="1"/>
+          </p:cNvGraphicFramePr>
+          <p:nvPr>
+            <p:ph idx="1"/>
+            <p:extLst>
+              <p:ext uri="{D42A27DB-BD31-4B8C-83A1-F6EECF244321}">
+                <p14:modId xmlns:p14="http://schemas.microsoft.com/office/powerpoint/2010/main" val="3006870531"/>
+              </p:ext>
+            </p:extLst>
+          </p:nvPr>
+        </p:nvGraphicFramePr>
+        <p:xfrm>
+          <a:off x="766200" y="2383343"/>
+          <a:ext cx="10657800" cy="1721982"/>
+        </p:xfrm>
+        <a:graphic>
+          <a:graphicData uri="http://schemas.openxmlformats.org/drawingml/2006/table">
+            <a:tbl>
+              <a:tblPr firstRow="1" bandRow="1">
+                <a:tableStyleId>{5940675A-B579-460E-94D1-54222C63F5DA}</a:tableStyleId>
+              </a:tblPr>
+              <a:tblGrid>
+                <a:gridCol w="2664450">
+                  <a:extLst>
+                    <a:ext uri="{9D8B030D-6E8A-4147-A177-3AD203B41FA5}">
+                      <a16:colId xmlns:a16="http://schemas.microsoft.com/office/drawing/2014/main" val="3093290233"/>
+                    </a:ext>
+                  </a:extLst>
+                </a:gridCol>
+                <a:gridCol w="7993350">
+                  <a:extLst>
+                    <a:ext uri="{9D8B030D-6E8A-4147-A177-3AD203B41FA5}">
+                      <a16:colId xmlns:a16="http://schemas.microsoft.com/office/drawing/2014/main" val="1276260950"/>
+                    </a:ext>
+                  </a:extLst>
+                </a:gridCol>
+              </a:tblGrid>
+              <a:tr h="860991">
+                <a:tc>
+                  <a:txBody>
+                    <a:bodyPr/>
+                    <a:lstStyle/>
+                    <a:p>
+                      <a:pPr algn="ctr"/>
+                      <a:r>
+                        <a:rPr lang="en-US" sz="2800" dirty="0"/>
+                        <a:t>crystal 1</a:t>
+                      </a:r>
+                      <a:endParaRPr lang="it-IT" sz="2800" dirty="0"/>
+                    </a:p>
+                  </a:txBody>
+                  <a:tcPr anchor="ctr">
+                    <a:lnL w="12700" cap="flat" cmpd="sng" algn="ctr">
+                      <a:solidFill>
+                        <a:schemeClr val="tx1"/>
+                      </a:solidFill>
+                      <a:prstDash val="solid"/>
+                      <a:round/>
+                      <a:headEnd type="none" w="med" len="med"/>
+                      <a:tailEnd type="none" w="med" len="med"/>
+                    </a:lnL>
+                    <a:lnR w="12700" cap="flat" cmpd="sng" algn="ctr">
+                      <a:solidFill>
+                        <a:schemeClr val="tx1"/>
+                      </a:solidFill>
+                      <a:prstDash val="solid"/>
+                      <a:round/>
+                      <a:headEnd type="none" w="med" len="med"/>
+                      <a:tailEnd type="none" w="med" len="med"/>
+                    </a:lnR>
+                    <a:lnT w="12700" cap="flat" cmpd="sng" algn="ctr">
+                      <a:solidFill>
+                        <a:schemeClr val="tx1"/>
+                      </a:solidFill>
+                      <a:prstDash val="solid"/>
+                      <a:round/>
+                      <a:headEnd type="none" w="med" len="med"/>
+                      <a:tailEnd type="none" w="med" len="med"/>
+                    </a:lnT>
+                    <a:lnB w="12700" cap="flat" cmpd="sng" algn="ctr">
+                      <a:solidFill>
+                        <a:schemeClr val="tx1"/>
+                      </a:solidFill>
+                      <a:prstDash val="solid"/>
+                      <a:round/>
+                      <a:headEnd type="none" w="med" len="med"/>
+                      <a:tailEnd type="none" w="med" len="med"/>
+                    </a:lnB>
+                  </a:tcPr>
+                </a:tc>
+                <a:tc>
+                  <a:txBody>
+                    <a:bodyPr/>
+                    <a:lstStyle/>
+                    <a:p>
+                      <a:pPr algn="ctr"/>
+                      <a:r>
+                        <a:rPr lang="en-US" sz="2800" dirty="0"/>
+                        <a:t>(19.6 </a:t>
+                      </a:r>
+                      <a:r>
+                        <a:rPr lang="it-IT" sz="2800" dirty="0"/>
+                        <a:t>± </a:t>
+                      </a:r>
+                      <a:r>
+                        <a:rPr lang="en-US" sz="2800" dirty="0"/>
+                        <a:t>0.1 [stat] </a:t>
+                      </a:r>
+                      <a:r>
+                        <a:rPr lang="it-IT" sz="2800" dirty="0"/>
+                        <a:t>± </a:t>
+                      </a:r>
+                      <a:r>
+                        <a:rPr lang="en-US" sz="2800" dirty="0"/>
+                        <a:t>1.5 [syst]) %</a:t>
+                      </a:r>
+                      <a:endParaRPr lang="it-IT" sz="2800" dirty="0"/>
+                    </a:p>
+                  </a:txBody>
+                  <a:tcPr anchor="ctr">
+                    <a:lnL w="12700" cap="flat" cmpd="sng" algn="ctr">
+                      <a:solidFill>
+                        <a:schemeClr val="tx1"/>
+                      </a:solidFill>
+                      <a:prstDash val="solid"/>
+                      <a:round/>
+                      <a:headEnd type="none" w="med" len="med"/>
+                      <a:tailEnd type="none" w="med" len="med"/>
+                    </a:lnL>
+                    <a:lnR w="12700" cap="flat" cmpd="sng" algn="ctr">
+                      <a:solidFill>
+                        <a:schemeClr val="tx1"/>
+                      </a:solidFill>
+                      <a:prstDash val="solid"/>
+                      <a:round/>
+                      <a:headEnd type="none" w="med" len="med"/>
+                      <a:tailEnd type="none" w="med" len="med"/>
+                    </a:lnR>
+                    <a:lnT w="12700" cap="flat" cmpd="sng" algn="ctr">
+                      <a:solidFill>
+                        <a:schemeClr val="tx1"/>
+                      </a:solidFill>
+                      <a:prstDash val="solid"/>
+                      <a:round/>
+                      <a:headEnd type="none" w="med" len="med"/>
+                      <a:tailEnd type="none" w="med" len="med"/>
+                    </a:lnT>
+                    <a:lnB w="12700" cap="flat" cmpd="sng" algn="ctr">
+                      <a:solidFill>
+                        <a:schemeClr val="tx1"/>
+                      </a:solidFill>
+                      <a:prstDash val="solid"/>
+                      <a:round/>
+                      <a:headEnd type="none" w="med" len="med"/>
+                      <a:tailEnd type="none" w="med" len="med"/>
+                    </a:lnB>
+                  </a:tcPr>
+                </a:tc>
+                <a:extLst>
+                  <a:ext uri="{0D108BD9-81ED-4DB2-BD59-A6C34878D82A}">
+                    <a16:rowId xmlns:a16="http://schemas.microsoft.com/office/drawing/2014/main" val="2052178235"/>
+                  </a:ext>
+                </a:extLst>
+              </a:tr>
+              <a:tr h="860991">
+                <a:tc>
+                  <a:txBody>
+                    <a:bodyPr/>
+                    <a:lstStyle/>
+                    <a:p>
+                      <a:pPr algn="ctr"/>
+                      <a:r>
+                        <a:rPr lang="en-US" sz="2800" dirty="0"/>
+                        <a:t>crystal 2</a:t>
+                      </a:r>
+                      <a:endParaRPr lang="it-IT" sz="2800" dirty="0"/>
+                    </a:p>
+                  </a:txBody>
+                  <a:tcPr anchor="ctr">
+                    <a:lnL w="12700" cap="flat" cmpd="sng" algn="ctr">
+                      <a:solidFill>
+                        <a:schemeClr val="tx1"/>
+                      </a:solidFill>
+                      <a:prstDash val="solid"/>
+                      <a:round/>
+                      <a:headEnd type="none" w="med" len="med"/>
+                      <a:tailEnd type="none" w="med" len="med"/>
+                    </a:lnL>
+                    <a:lnR w="12700" cap="flat" cmpd="sng" algn="ctr">
+                      <a:solidFill>
+                        <a:schemeClr val="tx1"/>
+                      </a:solidFill>
+                      <a:prstDash val="solid"/>
+                      <a:round/>
+                      <a:headEnd type="none" w="med" len="med"/>
+                      <a:tailEnd type="none" w="med" len="med"/>
+                    </a:lnR>
+                    <a:lnT w="12700" cap="flat" cmpd="sng" algn="ctr">
+                      <a:solidFill>
+                        <a:schemeClr val="tx1"/>
+                      </a:solidFill>
+                      <a:prstDash val="solid"/>
+                      <a:round/>
+                      <a:headEnd type="none" w="med" len="med"/>
+                      <a:tailEnd type="none" w="med" len="med"/>
+                    </a:lnT>
+                    <a:lnB w="12700" cap="flat" cmpd="sng" algn="ctr">
+                      <a:solidFill>
+                        <a:schemeClr val="tx1"/>
+                      </a:solidFill>
+                      <a:prstDash val="solid"/>
+                      <a:round/>
+                      <a:headEnd type="none" w="med" len="med"/>
+                      <a:tailEnd type="none" w="med" len="med"/>
+                    </a:lnB>
+                  </a:tcPr>
+                </a:tc>
+                <a:tc>
+                  <a:txBody>
+                    <a:bodyPr/>
+                    <a:lstStyle/>
+                    <a:p>
+                      <a:pPr algn="ctr"/>
+                      <a:r>
+                        <a:rPr lang="en-US" sz="2800" dirty="0"/>
+                        <a:t>(18.2 </a:t>
+                      </a:r>
+                      <a:r>
+                        <a:rPr lang="it-IT" sz="2800" dirty="0"/>
+                        <a:t>± </a:t>
+                      </a:r>
+                      <a:r>
+                        <a:rPr lang="en-US" sz="2800" dirty="0"/>
+                        <a:t>0.1 [stat] </a:t>
+                      </a:r>
+                      <a:r>
+                        <a:rPr lang="it-IT" sz="2800" dirty="0"/>
+                        <a:t>± </a:t>
+                      </a:r>
+                      <a:r>
+                        <a:rPr lang="en-US" sz="2800" dirty="0"/>
+                        <a:t>1.4 [syst]) %</a:t>
+                      </a:r>
+                      <a:endParaRPr lang="it-IT" sz="2800" dirty="0"/>
+                    </a:p>
+                  </a:txBody>
+                  <a:tcPr anchor="ctr">
+                    <a:lnL w="12700" cap="flat" cmpd="sng" algn="ctr">
+                      <a:solidFill>
+                        <a:schemeClr val="tx1"/>
+                      </a:solidFill>
+                      <a:prstDash val="solid"/>
+                      <a:round/>
+                      <a:headEnd type="none" w="med" len="med"/>
+                      <a:tailEnd type="none" w="med" len="med"/>
+                    </a:lnL>
+                    <a:lnR w="12700" cap="flat" cmpd="sng" algn="ctr">
+                      <a:solidFill>
+                        <a:schemeClr val="tx1"/>
+                      </a:solidFill>
+                      <a:prstDash val="solid"/>
+                      <a:round/>
+                      <a:headEnd type="none" w="med" len="med"/>
+                      <a:tailEnd type="none" w="med" len="med"/>
+                    </a:lnR>
+                    <a:lnT w="12700" cap="flat" cmpd="sng" algn="ctr">
+                      <a:solidFill>
+                        <a:schemeClr val="tx1"/>
+                      </a:solidFill>
+                      <a:prstDash val="solid"/>
+                      <a:round/>
+                      <a:headEnd type="none" w="med" len="med"/>
+                      <a:tailEnd type="none" w="med" len="med"/>
+                    </a:lnT>
+                    <a:lnB w="12700" cap="flat" cmpd="sng" algn="ctr">
+                      <a:solidFill>
+                        <a:schemeClr val="tx1"/>
+                      </a:solidFill>
+                      <a:prstDash val="solid"/>
+                      <a:round/>
+                      <a:headEnd type="none" w="med" len="med"/>
+                      <a:tailEnd type="none" w="med" len="med"/>
+                    </a:lnB>
+                  </a:tcPr>
+                </a:tc>
+                <a:extLst>
+                  <a:ext uri="{0D108BD9-81ED-4DB2-BD59-A6C34878D82A}">
+                    <a16:rowId xmlns:a16="http://schemas.microsoft.com/office/drawing/2014/main" val="1169580847"/>
+                  </a:ext>
+                </a:extLst>
+              </a:tr>
+            </a:tbl>
+          </a:graphicData>
+        </a:graphic>
+      </p:graphicFrame>
+    </p:spTree>
+    <p:extLst>
+      <p:ext uri="{BB962C8B-B14F-4D97-AF65-F5344CB8AC3E}">
+        <p14:creationId xmlns:p14="http://schemas.microsoft.com/office/powerpoint/2010/main" val="3945638950"/>
+      </p:ext>
+    </p:extLst>
+  </p:cSld>
+  <p:clrMapOvr>
+    <a:masterClrMapping/>
+  </p:clrMapOvr>
+</p:sld>
+</file>
+
+<file path=ppt/slides/slide11.xml><?xml version="1.0" encoding="utf-8"?>
+<p:sld xmlns:a="http://schemas.openxmlformats.org/drawingml/2006/main" xmlns:r="http://schemas.openxmlformats.org/officeDocument/2006/relationships" xmlns:p="http://schemas.openxmlformats.org/presentationml/2006/main">
+  <p:cSld>
+    <p:spTree>
+      <p:nvGrpSpPr>
+        <p:cNvPr id="1" name="">
+          <a:extLst>
+            <a:ext uri="{FF2B5EF4-FFF2-40B4-BE49-F238E27FC236}">
               <a16:creationId xmlns:a16="http://schemas.microsoft.com/office/drawing/2014/main" id="{D5CE3C09-0DC8-3009-33E3-87B2E233BB42}"/>
             </a:ext>
           </a:extLst>
@@ -5195,7 +6139,7 @@
                   <a:srgbClr val="002060"/>
                 </a:solidFill>
               </a:rPr>
-              <a:t>10</a:t>
+              <a:t>11</a:t>
             </a:fld>
             <a:endParaRPr lang="it-IT" sz="1500" b="1" dirty="0">
               <a:solidFill>
@@ -5448,7 +6392,7 @@
 </p:sld>
 </file>
 
-<file path=ppt/slides/slide11.xml><?xml version="1.0" encoding="utf-8"?>
+<file path=ppt/slides/slide12.xml><?xml version="1.0" encoding="utf-8"?>
 <p:sld xmlns:a="http://schemas.openxmlformats.org/drawingml/2006/main" xmlns:r="http://schemas.openxmlformats.org/officeDocument/2006/relationships" xmlns:p="http://schemas.openxmlformats.org/presentationml/2006/main">
   <p:cSld>
     <p:spTree>
@@ -5627,7 +6571,7 @@
                   <a:srgbClr val="002060"/>
                 </a:solidFill>
               </a:rPr>
-              <a:t>11</a:t>
+              <a:t>12</a:t>
             </a:fld>
             <a:endParaRPr lang="it-IT" sz="1500" b="1" dirty="0">
               <a:solidFill>
@@ -6113,7 +7057,7 @@
 </p:sld>
 </file>
 
-<file path=ppt/slides/slide12.xml><?xml version="1.0" encoding="utf-8"?>
+<file path=ppt/slides/slide13.xml><?xml version="1.0" encoding="utf-8"?>
 <p:sld xmlns:a="http://schemas.openxmlformats.org/drawingml/2006/main" xmlns:r="http://schemas.openxmlformats.org/officeDocument/2006/relationships" xmlns:p="http://schemas.openxmlformats.org/presentationml/2006/main">
   <p:cSld>
     <p:spTree>
@@ -6292,7 +7236,7 @@
                   <a:srgbClr val="002060"/>
                 </a:solidFill>
               </a:rPr>
-              <a:t>12</a:t>
+              <a:t>13</a:t>
             </a:fld>
             <a:endParaRPr lang="it-IT" sz="1500" b="1" dirty="0">
               <a:solidFill>
@@ -6751,6 +7695,195 @@
           </a:fontRef>
         </p:style>
       </p:cxnSp>
+      <p:cxnSp>
+        <p:nvCxnSpPr>
+          <p:cNvPr id="21" name="Straight Arrow Connector 20">
+            <a:extLst>
+              <a:ext uri="{FF2B5EF4-FFF2-40B4-BE49-F238E27FC236}">
+                <a16:creationId xmlns:a16="http://schemas.microsoft.com/office/drawing/2014/main" id="{523CB971-15BC-496E-7A1D-BFFBC0FC6EAC}"/>
+              </a:ext>
+            </a:extLst>
+          </p:cNvPr>
+          <p:cNvCxnSpPr>
+            <a:cxnSpLocks/>
+          </p:cNvCxnSpPr>
+          <p:nvPr/>
+        </p:nvCxnSpPr>
+        <p:spPr>
+          <a:xfrm flipH="1">
+            <a:off x="4968076" y="4061172"/>
+            <a:ext cx="1470481" cy="0"/>
+          </a:xfrm>
+          <a:prstGeom prst="straightConnector1">
+            <a:avLst/>
+          </a:prstGeom>
+          <a:ln w="38100">
+            <a:solidFill>
+              <a:srgbClr val="FF0000"/>
+            </a:solidFill>
+            <a:headEnd type="triangle" w="med" len="med"/>
+            <a:tailEnd type="triangle" w="med" len="med"/>
+          </a:ln>
+        </p:spPr>
+        <p:style>
+          <a:lnRef idx="2">
+            <a:schemeClr val="accent1"/>
+          </a:lnRef>
+          <a:fillRef idx="0">
+            <a:schemeClr val="accent1"/>
+          </a:fillRef>
+          <a:effectRef idx="1">
+            <a:schemeClr val="accent1"/>
+          </a:effectRef>
+          <a:fontRef idx="minor">
+            <a:schemeClr val="tx1"/>
+          </a:fontRef>
+        </p:style>
+      </p:cxnSp>
+      <mc:AlternateContent xmlns:mc="http://schemas.openxmlformats.org/markup-compatibility/2006">
+        <mc:Choice xmlns:a14="http://schemas.microsoft.com/office/drawing/2010/main" Requires="a14">
+          <p:sp>
+            <p:nvSpPr>
+              <p:cNvPr id="24" name="Rectangle: Rounded Corners 23">
+                <a:extLst>
+                  <a:ext uri="{FF2B5EF4-FFF2-40B4-BE49-F238E27FC236}">
+                    <a16:creationId xmlns:a16="http://schemas.microsoft.com/office/drawing/2014/main" id="{3B67743A-D519-E4BA-7FDB-C3D494C82764}"/>
+                  </a:ext>
+                </a:extLst>
+              </p:cNvPr>
+              <p:cNvSpPr/>
+              <p:nvPr/>
+            </p:nvSpPr>
+            <p:spPr>
+              <a:xfrm>
+                <a:off x="1669554" y="3793052"/>
+                <a:ext cx="2945930" cy="1153087"/>
+              </a:xfrm>
+              <a:prstGeom prst="roundRect">
+                <a:avLst/>
+              </a:prstGeom>
+              <a:solidFill>
+                <a:schemeClr val="bg1"/>
+              </a:solidFill>
+              <a:ln w="38100">
+                <a:solidFill>
+                  <a:srgbClr val="FF0000"/>
+                </a:solidFill>
+              </a:ln>
+            </p:spPr>
+            <p:style>
+              <a:lnRef idx="2">
+                <a:schemeClr val="accent1">
+                  <a:shade val="15000"/>
+                </a:schemeClr>
+              </a:lnRef>
+              <a:fillRef idx="1">
+                <a:schemeClr val="accent1"/>
+              </a:fillRef>
+              <a:effectRef idx="0">
+                <a:schemeClr val="accent1"/>
+              </a:effectRef>
+              <a:fontRef idx="minor">
+                <a:schemeClr val="lt1"/>
+              </a:fontRef>
+            </p:style>
+            <p:txBody>
+              <a:bodyPr rtlCol="0" anchor="ctr"/>
+              <a:lstStyle/>
+              <a:p>
+                <a:pPr algn="ctr"/>
+                <a:r>
+                  <a:rPr lang="en-US" sz="2000" dirty="0">
+                    <a:solidFill>
+                      <a:schemeClr val="tx1"/>
+                    </a:solidFill>
+                  </a:rPr>
+                  <a:t>The window corresponds to </a:t>
+                </a:r>
+                <a14:m>
+                  <m:oMath xmlns:m="http://schemas.openxmlformats.org/officeDocument/2006/math">
+                    <m:r>
+                      <a:rPr lang="en-US" sz="2000" b="0" i="1" smtClean="0">
+                        <a:solidFill>
+                          <a:schemeClr val="tx1"/>
+                        </a:solidFill>
+                        <a:latin typeface="Cambria Math" panose="02040503050406030204" pitchFamily="18" charset="0"/>
+                      </a:rPr>
+                      <m:t>∼2 </m:t>
+                    </m:r>
+                    <m:r>
+                      <m:rPr>
+                        <m:sty m:val="p"/>
+                      </m:rPr>
+                      <a:rPr lang="en-US" sz="2000" b="0" i="0" smtClean="0">
+                        <a:solidFill>
+                          <a:schemeClr val="tx1"/>
+                        </a:solidFill>
+                        <a:latin typeface="Cambria Math" panose="02040503050406030204" pitchFamily="18" charset="0"/>
+                      </a:rPr>
+                      <m:t>mm</m:t>
+                    </m:r>
+                  </m:oMath>
+                </a14:m>
+                <a:endParaRPr lang="it-IT" sz="2000" dirty="0">
+                  <a:solidFill>
+                    <a:schemeClr val="tx1"/>
+                  </a:solidFill>
+                </a:endParaRPr>
+              </a:p>
+            </p:txBody>
+          </p:sp>
+        </mc:Choice>
+        <mc:Fallback>
+          <p:sp>
+            <p:nvSpPr>
+              <p:cNvPr id="24" name="Rectangle: Rounded Corners 23">
+                <a:extLst>
+                  <a:ext uri="{FF2B5EF4-FFF2-40B4-BE49-F238E27FC236}">
+                    <a16:creationId xmlns:a16="http://schemas.microsoft.com/office/drawing/2014/main" id="{3B67743A-D519-E4BA-7FDB-C3D494C82764}"/>
+                  </a:ext>
+                </a:extLst>
+              </p:cNvPr>
+              <p:cNvSpPr>
+                <a:spLocks noRot="1" noChangeAspect="1" noMove="1" noResize="1" noEditPoints="1" noAdjustHandles="1" noChangeArrowheads="1" noChangeShapeType="1" noTextEdit="1"/>
+              </p:cNvSpPr>
+              <p:nvPr/>
+            </p:nvSpPr>
+            <p:spPr>
+              <a:xfrm>
+                <a:off x="1669554" y="3793052"/>
+                <a:ext cx="2945930" cy="1153087"/>
+              </a:xfrm>
+              <a:prstGeom prst="roundRect">
+                <a:avLst/>
+              </a:prstGeom>
+              <a:blipFill>
+                <a:blip r:embed="rId6"/>
+                <a:stretch>
+                  <a:fillRect/>
+                </a:stretch>
+              </a:blipFill>
+              <a:ln w="38100">
+                <a:solidFill>
+                  <a:srgbClr val="FF0000"/>
+                </a:solidFill>
+              </a:ln>
+            </p:spPr>
+            <p:txBody>
+              <a:bodyPr/>
+              <a:lstStyle/>
+              <a:p>
+                <a:r>
+                  <a:rPr lang="it-IT">
+                    <a:noFill/>
+                  </a:rPr>
+                  <a:t> </a:t>
+                </a:r>
+              </a:p>
+            </p:txBody>
+          </p:sp>
+        </mc:Fallback>
+      </mc:AlternateContent>
     </p:spTree>
     <p:extLst>
       <p:ext uri="{BB962C8B-B14F-4D97-AF65-F5344CB8AC3E}">
@@ -6764,7 +7897,7 @@
 </p:sld>
 </file>
 
-<file path=ppt/slides/slide13.xml><?xml version="1.0" encoding="utf-8"?>
+<file path=ppt/slides/slide14.xml><?xml version="1.0" encoding="utf-8"?>
 <p:sld xmlns:a="http://schemas.openxmlformats.org/drawingml/2006/main" xmlns:r="http://schemas.openxmlformats.org/officeDocument/2006/relationships" xmlns:p="http://schemas.openxmlformats.org/presentationml/2006/main">
   <p:cSld>
     <p:spTree>
@@ -6772,7 +7905,7 @@
         <p:cNvPr id="1" name="">
           <a:extLst>
             <a:ext uri="{FF2B5EF4-FFF2-40B4-BE49-F238E27FC236}">
-              <a16:creationId xmlns:a16="http://schemas.microsoft.com/office/drawing/2014/main" id="{5DAC6EFF-B9B4-605B-23DF-EDC01FF419F6}"/>
+              <a16:creationId xmlns:a16="http://schemas.microsoft.com/office/drawing/2014/main" id="{99A5A86C-FFFB-CE2C-A997-6CDA84EA3E90}"/>
             </a:ext>
           </a:extLst>
         </p:cNvPr>
@@ -6787,12 +7920,49 @@
           <a:chExt cx="0" cy="0"/>
         </a:xfrm>
       </p:grpSpPr>
+      <p:pic>
+        <p:nvPicPr>
+          <p:cNvPr id="3" name="Content Placeholder 8">
+            <a:extLst>
+              <a:ext uri="{FF2B5EF4-FFF2-40B4-BE49-F238E27FC236}">
+                <a16:creationId xmlns:a16="http://schemas.microsoft.com/office/drawing/2014/main" id="{8146DEFF-31B8-C9FD-6EEC-73C96C4FE197}"/>
+              </a:ext>
+            </a:extLst>
+          </p:cNvPr>
+          <p:cNvPicPr>
+            <a:picLocks noChangeAspect="1"/>
+          </p:cNvPicPr>
+          <p:nvPr/>
+        </p:nvPicPr>
+        <p:blipFill>
+          <a:blip r:embed="rId3">
+            <a:extLst>
+              <a:ext uri="{28A0092B-C50C-407E-A947-70E740481C1C}">
+                <a14:useLocalDpi xmlns:a14="http://schemas.microsoft.com/office/drawing/2010/main" val="0"/>
+              </a:ext>
+            </a:extLst>
+          </a:blip>
+          <a:srcRect t="7558"/>
+          <a:stretch>
+            <a:fillRect/>
+          </a:stretch>
+        </p:blipFill>
+        <p:spPr>
+          <a:xfrm>
+            <a:off x="335593" y="3534294"/>
+            <a:ext cx="4495897" cy="2642669"/>
+          </a:xfrm>
+          <a:prstGeom prst="rect">
+            <a:avLst/>
+          </a:prstGeom>
+        </p:spPr>
+      </p:pic>
       <p:sp>
         <p:nvSpPr>
           <p:cNvPr id="2" name="Titolo 1">
             <a:extLst>
               <a:ext uri="{FF2B5EF4-FFF2-40B4-BE49-F238E27FC236}">
-                <a16:creationId xmlns:a16="http://schemas.microsoft.com/office/drawing/2014/main" id="{B5797431-BBE5-CB25-093B-D04D3DF2F194}"/>
+                <a16:creationId xmlns:a16="http://schemas.microsoft.com/office/drawing/2014/main" id="{B438CF04-4E4C-8CA9-93E9-3C9E5AF2E173}"/>
               </a:ext>
             </a:extLst>
           </p:cNvPr>
@@ -6817,18 +7987,23 @@
         </p:spPr>
         <p:txBody>
           <a:bodyPr>
-            <a:normAutofit/>
+            <a:noAutofit/>
           </a:bodyPr>
           <a:lstStyle/>
           <a:p>
             <a:r>
-              <a:rPr lang="it-IT" b="1" dirty="0">
+              <a:rPr lang="en-US" sz="3400" b="1" dirty="0">
                 <a:solidFill>
                   <a:srgbClr val="002060"/>
                 </a:solidFill>
               </a:rPr>
-              <a:t>	BACKUP SLIDES</a:t>
+              <a:t>	FIND THE CRYSTAL FOOTPRINT THROUGH SCATTERING</a:t>
             </a:r>
+            <a:endParaRPr lang="it-IT" sz="3400" b="1" dirty="0">
+              <a:solidFill>
+                <a:srgbClr val="002060"/>
+              </a:solidFill>
+            </a:endParaRPr>
           </a:p>
         </p:txBody>
       </p:sp>
@@ -6837,7 +8012,7 @@
           <p:cNvPr id="4" name="Segnaposto data 3">
             <a:extLst>
               <a:ext uri="{FF2B5EF4-FFF2-40B4-BE49-F238E27FC236}">
-                <a16:creationId xmlns:a16="http://schemas.microsoft.com/office/drawing/2014/main" id="{EB987156-1AA3-606D-F960-F5521BB0A14D}"/>
+                <a16:creationId xmlns:a16="http://schemas.microsoft.com/office/drawing/2014/main" id="{9CAC3703-0773-7984-77F8-CEFB93AD43FB}"/>
               </a:ext>
             </a:extLst>
           </p:cNvPr>
@@ -6874,7 +8049,7 @@
           <p:cNvPr id="5" name="Segnaposto piè di pagina 4">
             <a:extLst>
               <a:ext uri="{FF2B5EF4-FFF2-40B4-BE49-F238E27FC236}">
-                <a16:creationId xmlns:a16="http://schemas.microsoft.com/office/drawing/2014/main" id="{789376CE-2672-8B5F-17F8-C7FABE69F6E5}"/>
+                <a16:creationId xmlns:a16="http://schemas.microsoft.com/office/drawing/2014/main" id="{106F8D96-7A44-2EF6-3ABA-1627B320EFEC}"/>
               </a:ext>
             </a:extLst>
           </p:cNvPr>
@@ -6911,7 +8086,7 @@
           <p:cNvPr id="6" name="Segnaposto numero diapositiva 5">
             <a:extLst>
               <a:ext uri="{FF2B5EF4-FFF2-40B4-BE49-F238E27FC236}">
-                <a16:creationId xmlns:a16="http://schemas.microsoft.com/office/drawing/2014/main" id="{F518D8F0-CFAD-5A22-0C45-35621E72D2EB}"/>
+                <a16:creationId xmlns:a16="http://schemas.microsoft.com/office/drawing/2014/main" id="{6369E283-707A-81F7-52F5-5342647F2E34}"/>
               </a:ext>
             </a:extLst>
           </p:cNvPr>
@@ -6938,7 +8113,7 @@
                   <a:srgbClr val="002060"/>
                 </a:solidFill>
               </a:rPr>
-              <a:t>13</a:t>
+              <a:t>14</a:t>
             </a:fld>
             <a:endParaRPr lang="it-IT" sz="1500" b="1" dirty="0">
               <a:solidFill>
@@ -6953,7 +8128,7 @@
           <p:cNvPr id="10" name="Connettore diritto 9">
             <a:extLst>
               <a:ext uri="{FF2B5EF4-FFF2-40B4-BE49-F238E27FC236}">
-                <a16:creationId xmlns:a16="http://schemas.microsoft.com/office/drawing/2014/main" id="{19CCD89B-D23E-B601-CB0F-35F735A548A8}"/>
+                <a16:creationId xmlns:a16="http://schemas.microsoft.com/office/drawing/2014/main" id="{18758721-40BB-259A-7A9A-861F4026CE6A}"/>
               </a:ext>
             </a:extLst>
           </p:cNvPr>
@@ -6996,7 +8171,7 @@
           <p:cNvPr id="13" name="CasellaDiTesto 12">
             <a:extLst>
               <a:ext uri="{FF2B5EF4-FFF2-40B4-BE49-F238E27FC236}">
-                <a16:creationId xmlns:a16="http://schemas.microsoft.com/office/drawing/2014/main" id="{4868D235-E176-E7CA-EEBD-17788382E362}"/>
+                <a16:creationId xmlns:a16="http://schemas.microsoft.com/office/drawing/2014/main" id="{30A9F725-D121-A8FD-96B1-D9781C4AC649}"/>
               </a:ext>
             </a:extLst>
           </p:cNvPr>
@@ -7028,7 +8203,7 @@
           <p:cNvPr id="15" name="CasellaDiTesto 14">
             <a:extLst>
               <a:ext uri="{FF2B5EF4-FFF2-40B4-BE49-F238E27FC236}">
-                <a16:creationId xmlns:a16="http://schemas.microsoft.com/office/drawing/2014/main" id="{BB2D0B5E-0AD3-1AC2-900A-351764AC43C1}"/>
+                <a16:creationId xmlns:a16="http://schemas.microsoft.com/office/drawing/2014/main" id="{904DD4A2-E32F-EC55-83F2-628AB1E517A1}"/>
               </a:ext>
             </a:extLst>
           </p:cNvPr>
@@ -7055,10 +8230,1200 @@
           </a:p>
         </p:txBody>
       </p:sp>
+      <mc:AlternateContent xmlns:mc="http://schemas.openxmlformats.org/markup-compatibility/2006">
+        <mc:Choice xmlns:a14="http://schemas.microsoft.com/office/drawing/2010/main" Requires="a14">
+          <p:sp>
+            <p:nvSpPr>
+              <p:cNvPr id="8" name="Content Placeholder 7">
+                <a:extLst>
+                  <a:ext uri="{FF2B5EF4-FFF2-40B4-BE49-F238E27FC236}">
+                    <a16:creationId xmlns:a16="http://schemas.microsoft.com/office/drawing/2014/main" id="{166FF68F-F94B-A4B2-E7C3-C52958F87B16}"/>
+                  </a:ext>
+                </a:extLst>
+              </p:cNvPr>
+              <p:cNvSpPr>
+                <a:spLocks noGrp="1"/>
+              </p:cNvSpPr>
+              <p:nvPr>
+                <p:ph idx="1"/>
+              </p:nvPr>
+            </p:nvSpPr>
+            <p:spPr>
+              <a:xfrm>
+                <a:off x="838200" y="1312438"/>
+                <a:ext cx="10515600" cy="4864525"/>
+              </a:xfrm>
+            </p:spPr>
+            <p:txBody>
+              <a:bodyPr>
+                <a:normAutofit/>
+              </a:bodyPr>
+              <a:lstStyle/>
+              <a:p>
+                <a:pPr marL="0" indent="0">
+                  <a:buNone/>
+                </a:pPr>
+                <a14:m>
+                  <m:oMathPara xmlns:m="http://schemas.openxmlformats.org/officeDocument/2006/math">
+                    <m:oMath>
+                      <m:sSub>
+                        <m:sSubPr>
+                          <m:ctrlPr>
+                            <a:rPr lang="en-US" sz="2400" b="0" i="1" smtClean="0">
+                              <a:latin typeface="Cambria Math" panose="02040503050406030204" pitchFamily="18" charset="0"/>
+                            </a:rPr>
+                          </m:ctrlPr>
+                        </m:sSubPr>
+                        <m:e>
+                          <m:r>
+                            <a:rPr lang="en-US" sz="2400" b="0" i="1" smtClean="0">
+                              <a:latin typeface="Cambria Math" panose="02040503050406030204" pitchFamily="18" charset="0"/>
+                            </a:rPr>
+                            <m:t>𝜃</m:t>
+                          </m:r>
+                        </m:e>
+                        <m:sub>
+                          <m:r>
+                            <a:rPr lang="en-US" sz="2400" b="0" i="1" smtClean="0">
+                              <a:latin typeface="Cambria Math" panose="02040503050406030204" pitchFamily="18" charset="0"/>
+                            </a:rPr>
+                            <m:t>0</m:t>
+                          </m:r>
+                        </m:sub>
+                      </m:sSub>
+                      <m:r>
+                        <a:rPr lang="en-US" sz="2400" b="0" i="1" smtClean="0">
+                          <a:latin typeface="Cambria Math" panose="02040503050406030204" pitchFamily="18" charset="0"/>
+                        </a:rPr>
+                        <m:t>=</m:t>
+                      </m:r>
+                      <m:f>
+                        <m:fPr>
+                          <m:ctrlPr>
+                            <a:rPr lang="en-US" sz="2400" b="0" i="1" smtClean="0">
+                              <a:latin typeface="Cambria Math" panose="02040503050406030204" pitchFamily="18" charset="0"/>
+                            </a:rPr>
+                          </m:ctrlPr>
+                        </m:fPr>
+                        <m:num>
+                          <m:r>
+                            <a:rPr lang="en-US" sz="2400" b="0" i="1" smtClean="0">
+                              <a:latin typeface="Cambria Math" panose="02040503050406030204" pitchFamily="18" charset="0"/>
+                            </a:rPr>
+                            <m:t>13.6 </m:t>
+                          </m:r>
+                          <m:r>
+                            <m:rPr>
+                              <m:sty m:val="p"/>
+                            </m:rPr>
+                            <a:rPr lang="en-US" sz="2400" b="0" i="0" smtClean="0">
+                              <a:latin typeface="Cambria Math" panose="02040503050406030204" pitchFamily="18" charset="0"/>
+                            </a:rPr>
+                            <m:t>MeV</m:t>
+                          </m:r>
+                        </m:num>
+                        <m:den>
+                          <m:r>
+                            <a:rPr lang="en-US" sz="2400" b="0" i="1" smtClean="0">
+                              <a:latin typeface="Cambria Math" panose="02040503050406030204" pitchFamily="18" charset="0"/>
+                            </a:rPr>
+                            <m:t>𝛽</m:t>
+                          </m:r>
+                          <m:r>
+                            <a:rPr lang="en-US" sz="2400" b="0" i="1" smtClean="0">
+                              <a:latin typeface="Cambria Math" panose="02040503050406030204" pitchFamily="18" charset="0"/>
+                            </a:rPr>
+                            <m:t>𝑐𝑝</m:t>
+                          </m:r>
+                        </m:den>
+                      </m:f>
+                      <m:r>
+                        <a:rPr lang="en-US" sz="2400" b="0" i="1" smtClean="0">
+                          <a:latin typeface="Cambria Math" panose="02040503050406030204" pitchFamily="18" charset="0"/>
+                        </a:rPr>
+                        <m:t>𝑧</m:t>
+                      </m:r>
+                      <m:rad>
+                        <m:radPr>
+                          <m:degHide m:val="on"/>
+                          <m:ctrlPr>
+                            <a:rPr lang="it-IT" sz="2400" b="0" i="1" smtClean="0">
+                              <a:latin typeface="Cambria Math" panose="02040503050406030204" pitchFamily="18" charset="0"/>
+                            </a:rPr>
+                          </m:ctrlPr>
+                        </m:radPr>
+                        <m:deg/>
+                        <m:e>
+                          <m:f>
+                            <m:fPr>
+                              <m:ctrlPr>
+                                <a:rPr lang="en-US" sz="2400" b="0" i="1" smtClean="0">
+                                  <a:latin typeface="Cambria Math" panose="02040503050406030204" pitchFamily="18" charset="0"/>
+                                </a:rPr>
+                              </m:ctrlPr>
+                            </m:fPr>
+                            <m:num>
+                              <m:r>
+                                <a:rPr lang="en-US" sz="2400" b="0" i="1" smtClean="0">
+                                  <a:latin typeface="Cambria Math" panose="02040503050406030204" pitchFamily="18" charset="0"/>
+                                </a:rPr>
+                                <m:t>𝑥</m:t>
+                              </m:r>
+                            </m:num>
+                            <m:den>
+                              <m:sSub>
+                                <m:sSubPr>
+                                  <m:ctrlPr>
+                                    <a:rPr lang="en-US" sz="2400" b="0" i="1" smtClean="0">
+                                      <a:latin typeface="Cambria Math" panose="02040503050406030204" pitchFamily="18" charset="0"/>
+                                    </a:rPr>
+                                  </m:ctrlPr>
+                                </m:sSubPr>
+                                <m:e>
+                                  <m:r>
+                                    <a:rPr lang="en-US" sz="2400" b="0" i="1" smtClean="0">
+                                      <a:latin typeface="Cambria Math" panose="02040503050406030204" pitchFamily="18" charset="0"/>
+                                    </a:rPr>
+                                    <m:t>𝑋</m:t>
+                                  </m:r>
+                                </m:e>
+                                <m:sub>
+                                  <m:r>
+                                    <a:rPr lang="en-US" sz="2400" b="0" i="1" smtClean="0">
+                                      <a:latin typeface="Cambria Math" panose="02040503050406030204" pitchFamily="18" charset="0"/>
+                                    </a:rPr>
+                                    <m:t>0</m:t>
+                                  </m:r>
+                                </m:sub>
+                              </m:sSub>
+                            </m:den>
+                          </m:f>
+                        </m:e>
+                      </m:rad>
+                      <m:d>
+                        <m:dPr>
+                          <m:begChr m:val="["/>
+                          <m:endChr m:val="]"/>
+                          <m:ctrlPr>
+                            <a:rPr lang="en-US" sz="2400" b="0" i="1" smtClean="0">
+                              <a:latin typeface="Cambria Math" panose="02040503050406030204" pitchFamily="18" charset="0"/>
+                            </a:rPr>
+                          </m:ctrlPr>
+                        </m:dPr>
+                        <m:e>
+                          <m:r>
+                            <a:rPr lang="en-US" sz="2400" b="0" i="1" smtClean="0">
+                              <a:latin typeface="Cambria Math" panose="02040503050406030204" pitchFamily="18" charset="0"/>
+                            </a:rPr>
+                            <m:t>1+0.038 </m:t>
+                          </m:r>
+                          <m:r>
+                            <m:rPr>
+                              <m:sty m:val="p"/>
+                            </m:rPr>
+                            <a:rPr lang="en-US" sz="2400" b="0" i="1" smtClean="0">
+                              <a:latin typeface="Cambria Math" panose="02040503050406030204" pitchFamily="18" charset="0"/>
+                            </a:rPr>
+                            <m:t>ln</m:t>
+                          </m:r>
+                          <m:d>
+                            <m:dPr>
+                              <m:ctrlPr>
+                                <a:rPr lang="en-US" sz="2400" b="0" i="1" smtClean="0">
+                                  <a:latin typeface="Cambria Math" panose="02040503050406030204" pitchFamily="18" charset="0"/>
+                                </a:rPr>
+                              </m:ctrlPr>
+                            </m:dPr>
+                            <m:e>
+                              <m:f>
+                                <m:fPr>
+                                  <m:ctrlPr>
+                                    <a:rPr lang="en-US" sz="2400" b="0" i="1" smtClean="0">
+                                      <a:latin typeface="Cambria Math" panose="02040503050406030204" pitchFamily="18" charset="0"/>
+                                    </a:rPr>
+                                  </m:ctrlPr>
+                                </m:fPr>
+                                <m:num>
+                                  <m:r>
+                                    <a:rPr lang="en-US" sz="2400" b="0" i="1" smtClean="0">
+                                      <a:latin typeface="Cambria Math" panose="02040503050406030204" pitchFamily="18" charset="0"/>
+                                    </a:rPr>
+                                    <m:t>𝑥</m:t>
+                                  </m:r>
+                                  <m:sSup>
+                                    <m:sSupPr>
+                                      <m:ctrlPr>
+                                        <a:rPr lang="en-US" sz="2400" b="0" i="1" smtClean="0">
+                                          <a:latin typeface="Cambria Math" panose="02040503050406030204" pitchFamily="18" charset="0"/>
+                                        </a:rPr>
+                                      </m:ctrlPr>
+                                    </m:sSupPr>
+                                    <m:e>
+                                      <m:r>
+                                        <a:rPr lang="en-US" sz="2400" b="0" i="1" smtClean="0">
+                                          <a:latin typeface="Cambria Math" panose="02040503050406030204" pitchFamily="18" charset="0"/>
+                                        </a:rPr>
+                                        <m:t>𝑧</m:t>
+                                      </m:r>
+                                    </m:e>
+                                    <m:sup>
+                                      <m:r>
+                                        <a:rPr lang="en-US" sz="2400" b="0" i="1" smtClean="0">
+                                          <a:latin typeface="Cambria Math" panose="02040503050406030204" pitchFamily="18" charset="0"/>
+                                        </a:rPr>
+                                        <m:t>2</m:t>
+                                      </m:r>
+                                    </m:sup>
+                                  </m:sSup>
+                                </m:num>
+                                <m:den>
+                                  <m:sSub>
+                                    <m:sSubPr>
+                                      <m:ctrlPr>
+                                        <a:rPr lang="en-US" sz="2400" b="0" i="1" smtClean="0">
+                                          <a:latin typeface="Cambria Math" panose="02040503050406030204" pitchFamily="18" charset="0"/>
+                                        </a:rPr>
+                                      </m:ctrlPr>
+                                    </m:sSubPr>
+                                    <m:e>
+                                      <m:r>
+                                        <a:rPr lang="en-US" sz="2400" b="0" i="1" smtClean="0">
+                                          <a:latin typeface="Cambria Math" panose="02040503050406030204" pitchFamily="18" charset="0"/>
+                                        </a:rPr>
+                                        <m:t>𝑋</m:t>
+                                      </m:r>
+                                    </m:e>
+                                    <m:sub>
+                                      <m:r>
+                                        <a:rPr lang="en-US" sz="2400" b="0" i="1" smtClean="0">
+                                          <a:latin typeface="Cambria Math" panose="02040503050406030204" pitchFamily="18" charset="0"/>
+                                        </a:rPr>
+                                        <m:t>0</m:t>
+                                      </m:r>
+                                    </m:sub>
+                                  </m:sSub>
+                                  <m:sSup>
+                                    <m:sSupPr>
+                                      <m:ctrlPr>
+                                        <a:rPr lang="en-US" sz="2400" b="0" i="1" smtClean="0">
+                                          <a:latin typeface="Cambria Math" panose="02040503050406030204" pitchFamily="18" charset="0"/>
+                                        </a:rPr>
+                                      </m:ctrlPr>
+                                    </m:sSupPr>
+                                    <m:e>
+                                      <m:r>
+                                        <a:rPr lang="en-US" sz="2400" b="0" i="1" smtClean="0">
+                                          <a:latin typeface="Cambria Math" panose="02040503050406030204" pitchFamily="18" charset="0"/>
+                                        </a:rPr>
+                                        <m:t>𝛽</m:t>
+                                      </m:r>
+                                    </m:e>
+                                    <m:sup>
+                                      <m:r>
+                                        <a:rPr lang="en-US" sz="2400" b="0" i="1" smtClean="0">
+                                          <a:latin typeface="Cambria Math" panose="02040503050406030204" pitchFamily="18" charset="0"/>
+                                        </a:rPr>
+                                        <m:t>2</m:t>
+                                      </m:r>
+                                    </m:sup>
+                                  </m:sSup>
+                                </m:den>
+                              </m:f>
+                            </m:e>
+                          </m:d>
+                        </m:e>
+                      </m:d>
+                      <m:r>
+                        <a:rPr lang="en-US" sz="2400" b="0" i="1" smtClean="0">
+                          <a:latin typeface="Cambria Math" panose="02040503050406030204" pitchFamily="18" charset="0"/>
+                        </a:rPr>
+                        <m:t>=66.5 </m:t>
+                      </m:r>
+                      <m:r>
+                        <a:rPr lang="en-US" sz="2400" b="0" i="1" smtClean="0">
+                          <a:latin typeface="Cambria Math" panose="02040503050406030204" pitchFamily="18" charset="0"/>
+                        </a:rPr>
+                        <m:t>𝜇</m:t>
+                      </m:r>
+                      <m:r>
+                        <m:rPr>
+                          <m:sty m:val="p"/>
+                        </m:rPr>
+                        <a:rPr lang="en-US" sz="2400" b="0" i="0" smtClean="0">
+                          <a:latin typeface="Cambria Math" panose="02040503050406030204" pitchFamily="18" charset="0"/>
+                        </a:rPr>
+                        <m:t>rad</m:t>
+                      </m:r>
+                    </m:oMath>
+                  </m:oMathPara>
+                </a14:m>
+                <a:endParaRPr lang="it-IT" sz="2400" dirty="0"/>
+              </a:p>
+              <a:p>
+                <a:pPr marL="0" indent="0">
+                  <a:buNone/>
+                </a:pPr>
+                <a:r>
+                  <a:rPr lang="it-IT" sz="2400" dirty="0"/>
+                  <a:t>The measured angular width in each bin is not purely the scattering form the crystal, but has the detector resolution contribution:</a:t>
+                </a:r>
+              </a:p>
+              <a:p>
+                <a:pPr marL="0" indent="0">
+                  <a:buNone/>
+                </a:pPr>
+                <a14:m>
+                  <m:oMathPara xmlns:m="http://schemas.openxmlformats.org/officeDocument/2006/math">
+                    <m:oMath>
+                      <m:sSub>
+                        <m:sSubPr>
+                          <m:ctrlPr>
+                            <a:rPr lang="en-US" sz="2400" b="0" i="1" smtClean="0">
+                              <a:latin typeface="Cambria Math" panose="02040503050406030204" pitchFamily="18" charset="0"/>
+                            </a:rPr>
+                          </m:ctrlPr>
+                        </m:sSubPr>
+                        <m:e>
+                          <m:r>
+                            <a:rPr lang="en-US" sz="2400" b="0" i="1" smtClean="0">
+                              <a:latin typeface="Cambria Math" panose="02040503050406030204" pitchFamily="18" charset="0"/>
+                            </a:rPr>
+                            <m:t>𝜎</m:t>
+                          </m:r>
+                        </m:e>
+                        <m:sub>
+                          <m:r>
+                            <a:rPr lang="en-US" sz="2400" b="0" i="1" smtClean="0">
+                              <a:latin typeface="Cambria Math" panose="02040503050406030204" pitchFamily="18" charset="0"/>
+                            </a:rPr>
+                            <m:t>𝑚𝑒𝑎𝑠</m:t>
+                          </m:r>
+                        </m:sub>
+                      </m:sSub>
+                      <m:r>
+                        <a:rPr lang="en-US" sz="2400" b="0" i="1" smtClean="0">
+                          <a:latin typeface="Cambria Math" panose="02040503050406030204" pitchFamily="18" charset="0"/>
+                        </a:rPr>
+                        <m:t>=</m:t>
+                      </m:r>
+                      <m:rad>
+                        <m:radPr>
+                          <m:degHide m:val="on"/>
+                          <m:ctrlPr>
+                            <a:rPr lang="it-IT" sz="2400" b="0" i="1" smtClean="0">
+                              <a:latin typeface="Cambria Math" panose="02040503050406030204" pitchFamily="18" charset="0"/>
+                            </a:rPr>
+                          </m:ctrlPr>
+                        </m:radPr>
+                        <m:deg/>
+                        <m:e>
+                          <m:sSubSup>
+                            <m:sSubSupPr>
+                              <m:ctrlPr>
+                                <a:rPr lang="en-US" sz="2400" b="0" i="1" smtClean="0">
+                                  <a:latin typeface="Cambria Math" panose="02040503050406030204" pitchFamily="18" charset="0"/>
+                                </a:rPr>
+                              </m:ctrlPr>
+                            </m:sSubSupPr>
+                            <m:e>
+                              <m:r>
+                                <a:rPr lang="en-US" sz="2400" b="0" i="1" smtClean="0">
+                                  <a:latin typeface="Cambria Math" panose="02040503050406030204" pitchFamily="18" charset="0"/>
+                                </a:rPr>
+                                <m:t>𝜎</m:t>
+                              </m:r>
+                            </m:e>
+                            <m:sub>
+                              <m:r>
+                                <a:rPr lang="en-US" sz="2400" b="0" i="1" smtClean="0">
+                                  <a:latin typeface="Cambria Math" panose="02040503050406030204" pitchFamily="18" charset="0"/>
+                                </a:rPr>
+                                <m:t>𝑚𝑐𝑠</m:t>
+                              </m:r>
+                            </m:sub>
+                            <m:sup>
+                              <m:r>
+                                <a:rPr lang="en-US" sz="2400" b="0" i="1" smtClean="0">
+                                  <a:latin typeface="Cambria Math" panose="02040503050406030204" pitchFamily="18" charset="0"/>
+                                </a:rPr>
+                                <m:t>2</m:t>
+                              </m:r>
+                            </m:sup>
+                          </m:sSubSup>
+                          <m:r>
+                            <a:rPr lang="en-US" sz="2400" b="0" i="1" smtClean="0">
+                              <a:latin typeface="Cambria Math" panose="02040503050406030204" pitchFamily="18" charset="0"/>
+                            </a:rPr>
+                            <m:t>+</m:t>
+                          </m:r>
+                          <m:sSubSup>
+                            <m:sSubSupPr>
+                              <m:ctrlPr>
+                                <a:rPr lang="en-US" sz="2400" b="0" i="1" smtClean="0">
+                                  <a:latin typeface="Cambria Math" panose="02040503050406030204" pitchFamily="18" charset="0"/>
+                                </a:rPr>
+                              </m:ctrlPr>
+                            </m:sSubSupPr>
+                            <m:e>
+                              <m:r>
+                                <a:rPr lang="en-US" sz="2400" b="0" i="1" smtClean="0">
+                                  <a:latin typeface="Cambria Math" panose="02040503050406030204" pitchFamily="18" charset="0"/>
+                                </a:rPr>
+                                <m:t>𝜎</m:t>
+                              </m:r>
+                            </m:e>
+                            <m:sub>
+                              <m:r>
+                                <a:rPr lang="en-US" sz="2400" b="0" i="1" smtClean="0">
+                                  <a:latin typeface="Cambria Math" panose="02040503050406030204" pitchFamily="18" charset="0"/>
+                                </a:rPr>
+                                <m:t>𝑡𝑟𝑎𝑐𝑘</m:t>
+                              </m:r>
+                            </m:sub>
+                            <m:sup>
+                              <m:r>
+                                <a:rPr lang="en-US" sz="2400" b="0" i="1" smtClean="0">
+                                  <a:latin typeface="Cambria Math" panose="02040503050406030204" pitchFamily="18" charset="0"/>
+                                </a:rPr>
+                                <m:t>2</m:t>
+                              </m:r>
+                            </m:sup>
+                          </m:sSubSup>
+                        </m:e>
+                      </m:rad>
+                    </m:oMath>
+                  </m:oMathPara>
+                </a14:m>
+                <a:endParaRPr lang="it-IT" sz="2400" dirty="0"/>
+              </a:p>
+            </p:txBody>
+          </p:sp>
+        </mc:Choice>
+        <mc:Fallback>
+          <p:sp>
+            <p:nvSpPr>
+              <p:cNvPr id="8" name="Content Placeholder 7">
+                <a:extLst>
+                  <a:ext uri="{FF2B5EF4-FFF2-40B4-BE49-F238E27FC236}">
+                    <a16:creationId xmlns:a16="http://schemas.microsoft.com/office/drawing/2014/main" id="{166FF68F-F94B-A4B2-E7C3-C52958F87B16}"/>
+                  </a:ext>
+                </a:extLst>
+              </p:cNvPr>
+              <p:cNvSpPr>
+                <a:spLocks noGrp="1" noRot="1" noChangeAspect="1" noMove="1" noResize="1" noEditPoints="1" noAdjustHandles="1" noChangeArrowheads="1" noChangeShapeType="1" noTextEdit="1"/>
+              </p:cNvSpPr>
+              <p:nvPr>
+                <p:ph idx="1"/>
+              </p:nvPr>
+            </p:nvSpPr>
+            <p:spPr>
+              <a:xfrm>
+                <a:off x="838200" y="1312438"/>
+                <a:ext cx="10515600" cy="4864525"/>
+              </a:xfrm>
+              <a:blipFill>
+                <a:blip r:embed="rId4"/>
+                <a:stretch>
+                  <a:fillRect l="-928"/>
+                </a:stretch>
+              </a:blipFill>
+            </p:spPr>
+            <p:txBody>
+              <a:bodyPr/>
+              <a:lstStyle/>
+              <a:p>
+                <a:r>
+                  <a:rPr lang="it-IT">
+                    <a:noFill/>
+                  </a:rPr>
+                  <a:t> </a:t>
+                </a:r>
+              </a:p>
+            </p:txBody>
+          </p:sp>
+        </mc:Fallback>
+      </mc:AlternateContent>
+      <p:cxnSp>
+        <p:nvCxnSpPr>
+          <p:cNvPr id="9" name="Straight Arrow Connector 8">
+            <a:extLst>
+              <a:ext uri="{FF2B5EF4-FFF2-40B4-BE49-F238E27FC236}">
+                <a16:creationId xmlns:a16="http://schemas.microsoft.com/office/drawing/2014/main" id="{827CD657-7070-260B-A911-797F4F98AA56}"/>
+              </a:ext>
+            </a:extLst>
+          </p:cNvPr>
+          <p:cNvCxnSpPr>
+            <a:cxnSpLocks/>
+          </p:cNvCxnSpPr>
+          <p:nvPr/>
+        </p:nvCxnSpPr>
+        <p:spPr>
+          <a:xfrm>
+            <a:off x="4213654" y="5668429"/>
+            <a:ext cx="2138405" cy="0"/>
+          </a:xfrm>
+          <a:prstGeom prst="straightConnector1">
+            <a:avLst/>
+          </a:prstGeom>
+          <a:ln w="38100">
+            <a:solidFill>
+              <a:srgbClr val="FFC000"/>
+            </a:solidFill>
+            <a:tailEnd type="triangle"/>
+          </a:ln>
+        </p:spPr>
+        <p:style>
+          <a:lnRef idx="2">
+            <a:schemeClr val="accent1"/>
+          </a:lnRef>
+          <a:fillRef idx="0">
+            <a:schemeClr val="accent1"/>
+          </a:fillRef>
+          <a:effectRef idx="1">
+            <a:schemeClr val="accent1"/>
+          </a:effectRef>
+          <a:fontRef idx="minor">
+            <a:schemeClr val="tx1"/>
+          </a:fontRef>
+        </p:style>
+      </p:cxnSp>
+      <mc:AlternateContent xmlns:mc="http://schemas.openxmlformats.org/markup-compatibility/2006">
+        <mc:Choice xmlns:a14="http://schemas.microsoft.com/office/drawing/2010/main" Requires="a14">
+          <p:sp>
+            <p:nvSpPr>
+              <p:cNvPr id="18" name="Rectangle: Rounded Corners 17">
+                <a:extLst>
+                  <a:ext uri="{FF2B5EF4-FFF2-40B4-BE49-F238E27FC236}">
+                    <a16:creationId xmlns:a16="http://schemas.microsoft.com/office/drawing/2014/main" id="{D17E67D5-F236-24D2-710C-C0F4FB47C7B4}"/>
+                  </a:ext>
+                </a:extLst>
+              </p:cNvPr>
+              <p:cNvSpPr/>
+              <p:nvPr/>
+            </p:nvSpPr>
+            <p:spPr>
+              <a:xfrm>
+                <a:off x="6584053" y="4856206"/>
+                <a:ext cx="4339319" cy="1500140"/>
+              </a:xfrm>
+              <a:prstGeom prst="roundRect">
+                <a:avLst/>
+              </a:prstGeom>
+              <a:solidFill>
+                <a:schemeClr val="bg1"/>
+              </a:solidFill>
+              <a:ln w="38100">
+                <a:solidFill>
+                  <a:srgbClr val="FFC000"/>
+                </a:solidFill>
+              </a:ln>
+            </p:spPr>
+            <p:style>
+              <a:lnRef idx="2">
+                <a:schemeClr val="accent1">
+                  <a:shade val="15000"/>
+                </a:schemeClr>
+              </a:lnRef>
+              <a:fillRef idx="1">
+                <a:schemeClr val="accent1"/>
+              </a:fillRef>
+              <a:effectRef idx="0">
+                <a:schemeClr val="accent1"/>
+              </a:effectRef>
+              <a:fontRef idx="minor">
+                <a:schemeClr val="lt1"/>
+              </a:fontRef>
+            </p:style>
+            <p:txBody>
+              <a:bodyPr rtlCol="0" anchor="ctr"/>
+              <a:lstStyle/>
+              <a:p>
+                <a:pPr algn="ctr"/>
+                <a:r>
+                  <a:rPr lang="en-US" sz="2000" dirty="0">
+                    <a:solidFill>
+                      <a:schemeClr val="tx1"/>
+                    </a:solidFill>
+                  </a:rPr>
+                  <a:t>not zero, but </a:t>
+                </a:r>
+                <a14:m>
+                  <m:oMath xmlns:m="http://schemas.openxmlformats.org/officeDocument/2006/math">
+                    <m:r>
+                      <a:rPr lang="en-US" sz="2000" i="1" smtClean="0">
+                        <a:solidFill>
+                          <a:schemeClr val="tx1"/>
+                        </a:solidFill>
+                        <a:latin typeface="Cambria Math" panose="02040503050406030204" pitchFamily="18" charset="0"/>
+                      </a:rPr>
+                      <m:t>∼</m:t>
+                    </m:r>
+                    <m:r>
+                      <a:rPr lang="en-US" sz="2000" b="0" i="1" smtClean="0">
+                        <a:solidFill>
+                          <a:schemeClr val="tx1"/>
+                        </a:solidFill>
+                        <a:latin typeface="Cambria Math" panose="02040503050406030204" pitchFamily="18" charset="0"/>
+                      </a:rPr>
+                      <m:t>12.5 </m:t>
+                    </m:r>
+                    <m:r>
+                      <a:rPr lang="en-US" sz="2000" b="0" i="1" smtClean="0">
+                        <a:solidFill>
+                          <a:schemeClr val="tx1"/>
+                        </a:solidFill>
+                        <a:latin typeface="Cambria Math" panose="02040503050406030204" pitchFamily="18" charset="0"/>
+                      </a:rPr>
+                      <m:t>𝜇</m:t>
+                    </m:r>
+                    <m:r>
+                      <m:rPr>
+                        <m:sty m:val="p"/>
+                      </m:rPr>
+                      <a:rPr lang="en-US" sz="2000" b="0" i="0" smtClean="0">
+                        <a:solidFill>
+                          <a:schemeClr val="tx1"/>
+                        </a:solidFill>
+                        <a:latin typeface="Cambria Math" panose="02040503050406030204" pitchFamily="18" charset="0"/>
+                      </a:rPr>
+                      <m:t>rad</m:t>
+                    </m:r>
+                  </m:oMath>
+                </a14:m>
+                <a:endParaRPr lang="it-IT" sz="2000" dirty="0">
+                  <a:solidFill>
+                    <a:schemeClr val="tx1"/>
+                  </a:solidFill>
+                </a:endParaRPr>
+              </a:p>
+              <a:p>
+                <a:pPr algn="ctr"/>
+                <a:r>
+                  <a:rPr lang="it-IT" sz="2000" dirty="0">
+                    <a:solidFill>
+                      <a:schemeClr val="tx1"/>
+                    </a:solidFill>
+                  </a:rPr>
+                  <a:t>which corresponds to </a:t>
+                </a:r>
+                <a14:m>
+                  <m:oMath xmlns:m="http://schemas.openxmlformats.org/officeDocument/2006/math">
+                    <m:sSub>
+                      <m:sSubPr>
+                        <m:ctrlPr>
+                          <a:rPr lang="en-US" sz="2000" b="0" i="1" smtClean="0">
+                            <a:solidFill>
+                              <a:schemeClr val="tx1"/>
+                            </a:solidFill>
+                            <a:latin typeface="Cambria Math" panose="02040503050406030204" pitchFamily="18" charset="0"/>
+                          </a:rPr>
+                        </m:ctrlPr>
+                      </m:sSubPr>
+                      <m:e>
+                        <m:r>
+                          <a:rPr lang="en-US" sz="2000" b="0" i="1" smtClean="0">
+                            <a:solidFill>
+                              <a:schemeClr val="tx1"/>
+                            </a:solidFill>
+                            <a:latin typeface="Cambria Math" panose="02040503050406030204" pitchFamily="18" charset="0"/>
+                          </a:rPr>
+                          <m:t>𝜎</m:t>
+                        </m:r>
+                      </m:e>
+                      <m:sub>
+                        <m:r>
+                          <a:rPr lang="en-US" sz="2000" b="0" i="1" smtClean="0">
+                            <a:solidFill>
+                              <a:schemeClr val="tx1"/>
+                            </a:solidFill>
+                            <a:latin typeface="Cambria Math" panose="02040503050406030204" pitchFamily="18" charset="0"/>
+                          </a:rPr>
+                          <m:t>𝑡𝑟𝑎𝑐𝑘</m:t>
+                        </m:r>
+                      </m:sub>
+                    </m:sSub>
+                  </m:oMath>
+                </a14:m>
+                <a:endParaRPr lang="en-US" sz="2000" b="0" dirty="0">
+                  <a:solidFill>
+                    <a:schemeClr val="tx1"/>
+                  </a:solidFill>
+                </a:endParaRPr>
+              </a:p>
+              <a:p>
+                <a:pPr algn="ctr"/>
+                <a14:m>
+                  <m:oMathPara xmlns:m="http://schemas.openxmlformats.org/officeDocument/2006/math">
+                    <m:oMath>
+                      <m:sSub>
+                        <m:sSubPr>
+                          <m:ctrlPr>
+                            <a:rPr lang="en-US" sz="2000" b="0" i="1" smtClean="0">
+                              <a:solidFill>
+                                <a:schemeClr val="tx1"/>
+                              </a:solidFill>
+                              <a:latin typeface="Cambria Math" panose="02040503050406030204" pitchFamily="18" charset="0"/>
+                            </a:rPr>
+                          </m:ctrlPr>
+                        </m:sSubPr>
+                        <m:e>
+                          <m:r>
+                            <a:rPr lang="en-US" sz="2000" b="0" i="1" smtClean="0">
+                              <a:solidFill>
+                                <a:schemeClr val="tx1"/>
+                              </a:solidFill>
+                              <a:latin typeface="Cambria Math" panose="02040503050406030204" pitchFamily="18" charset="0"/>
+                            </a:rPr>
+                            <m:t>𝜎</m:t>
+                          </m:r>
+                        </m:e>
+                        <m:sub>
+                          <m:r>
+                            <a:rPr lang="en-US" sz="2000" b="0" i="1" smtClean="0">
+                              <a:solidFill>
+                                <a:schemeClr val="tx1"/>
+                              </a:solidFill>
+                              <a:latin typeface="Cambria Math" panose="02040503050406030204" pitchFamily="18" charset="0"/>
+                            </a:rPr>
+                            <m:t>𝑡𝑟𝑎𝑐𝑘</m:t>
+                          </m:r>
+                        </m:sub>
+                      </m:sSub>
+                      <m:r>
+                        <a:rPr lang="en-US" sz="2000" b="0" i="1" smtClean="0">
+                          <a:solidFill>
+                            <a:schemeClr val="tx1"/>
+                          </a:solidFill>
+                          <a:latin typeface="Cambria Math" panose="02040503050406030204" pitchFamily="18" charset="0"/>
+                        </a:rPr>
+                        <m:t>=</m:t>
+                      </m:r>
+                      <m:rad>
+                        <m:radPr>
+                          <m:degHide m:val="on"/>
+                          <m:ctrlPr>
+                            <a:rPr lang="it-IT" sz="2000" b="0" i="1" smtClean="0">
+                              <a:solidFill>
+                                <a:schemeClr val="tx1"/>
+                              </a:solidFill>
+                              <a:latin typeface="Cambria Math" panose="02040503050406030204" pitchFamily="18" charset="0"/>
+                            </a:rPr>
+                          </m:ctrlPr>
+                        </m:radPr>
+                        <m:deg/>
+                        <m:e>
+                          <m:sSubSup>
+                            <m:sSubSupPr>
+                              <m:ctrlPr>
+                                <a:rPr lang="en-US" sz="2000" b="0" i="1" smtClean="0">
+                                  <a:solidFill>
+                                    <a:schemeClr val="tx1"/>
+                                  </a:solidFill>
+                                  <a:latin typeface="Cambria Math" panose="02040503050406030204" pitchFamily="18" charset="0"/>
+                                </a:rPr>
+                              </m:ctrlPr>
+                            </m:sSubSupPr>
+                            <m:e>
+                              <m:r>
+                                <a:rPr lang="en-US" sz="2000" b="0" i="1" smtClean="0">
+                                  <a:solidFill>
+                                    <a:schemeClr val="tx1"/>
+                                  </a:solidFill>
+                                  <a:latin typeface="Cambria Math" panose="02040503050406030204" pitchFamily="18" charset="0"/>
+                                </a:rPr>
+                                <m:t>𝜎</m:t>
+                              </m:r>
+                            </m:e>
+                            <m:sub>
+                              <m:r>
+                                <a:rPr lang="en-US" sz="2000" b="0" i="1" smtClean="0">
+                                  <a:solidFill>
+                                    <a:schemeClr val="tx1"/>
+                                  </a:solidFill>
+                                  <a:latin typeface="Cambria Math" panose="02040503050406030204" pitchFamily="18" charset="0"/>
+                                </a:rPr>
+                                <m:t>𝑡𝑟𝑎𝑐𝑘</m:t>
+                              </m:r>
+                              <m:r>
+                                <a:rPr lang="en-US" sz="2000" b="0" i="1" smtClean="0">
+                                  <a:solidFill>
+                                    <a:schemeClr val="tx1"/>
+                                  </a:solidFill>
+                                  <a:latin typeface="Cambria Math" panose="02040503050406030204" pitchFamily="18" charset="0"/>
+                                </a:rPr>
+                                <m:t>,</m:t>
+                              </m:r>
+                              <m:r>
+                                <a:rPr lang="en-US" sz="2000" b="0" i="1" smtClean="0">
+                                  <a:solidFill>
+                                    <a:schemeClr val="tx1"/>
+                                  </a:solidFill>
+                                  <a:latin typeface="Cambria Math" panose="02040503050406030204" pitchFamily="18" charset="0"/>
+                                </a:rPr>
+                                <m:t>𝑖𝑛</m:t>
+                              </m:r>
+                            </m:sub>
+                            <m:sup>
+                              <m:r>
+                                <a:rPr lang="en-US" sz="2000" b="0" i="1" smtClean="0">
+                                  <a:solidFill>
+                                    <a:schemeClr val="tx1"/>
+                                  </a:solidFill>
+                                  <a:latin typeface="Cambria Math" panose="02040503050406030204" pitchFamily="18" charset="0"/>
+                                </a:rPr>
+                                <m:t>2</m:t>
+                              </m:r>
+                            </m:sup>
+                          </m:sSubSup>
+                          <m:r>
+                            <a:rPr lang="en-US" sz="2000" b="0" i="1" smtClean="0">
+                              <a:solidFill>
+                                <a:schemeClr val="tx1"/>
+                              </a:solidFill>
+                              <a:latin typeface="Cambria Math" panose="02040503050406030204" pitchFamily="18" charset="0"/>
+                            </a:rPr>
+                            <m:t>+</m:t>
+                          </m:r>
+                          <m:sSubSup>
+                            <m:sSubSupPr>
+                              <m:ctrlPr>
+                                <a:rPr lang="en-US" sz="2000" b="0" i="1" smtClean="0">
+                                  <a:solidFill>
+                                    <a:schemeClr val="tx1"/>
+                                  </a:solidFill>
+                                  <a:latin typeface="Cambria Math" panose="02040503050406030204" pitchFamily="18" charset="0"/>
+                                </a:rPr>
+                              </m:ctrlPr>
+                            </m:sSubSupPr>
+                            <m:e>
+                              <m:r>
+                                <a:rPr lang="en-US" sz="2000" b="0" i="1" smtClean="0">
+                                  <a:solidFill>
+                                    <a:schemeClr val="tx1"/>
+                                  </a:solidFill>
+                                  <a:latin typeface="Cambria Math" panose="02040503050406030204" pitchFamily="18" charset="0"/>
+                                </a:rPr>
+                                <m:t>𝜎</m:t>
+                              </m:r>
+                            </m:e>
+                            <m:sub>
+                              <m:r>
+                                <a:rPr lang="en-US" sz="2000" b="0" i="1" smtClean="0">
+                                  <a:solidFill>
+                                    <a:schemeClr val="tx1"/>
+                                  </a:solidFill>
+                                  <a:latin typeface="Cambria Math" panose="02040503050406030204" pitchFamily="18" charset="0"/>
+                                </a:rPr>
+                                <m:t>𝑡𝑟𝑎𝑐𝑘</m:t>
+                              </m:r>
+                              <m:r>
+                                <a:rPr lang="en-US" sz="2000" b="0" i="1" smtClean="0">
+                                  <a:solidFill>
+                                    <a:schemeClr val="tx1"/>
+                                  </a:solidFill>
+                                  <a:latin typeface="Cambria Math" panose="02040503050406030204" pitchFamily="18" charset="0"/>
+                                </a:rPr>
+                                <m:t>,</m:t>
+                              </m:r>
+                              <m:r>
+                                <a:rPr lang="en-US" sz="2000" b="0" i="1" smtClean="0">
+                                  <a:solidFill>
+                                    <a:schemeClr val="tx1"/>
+                                  </a:solidFill>
+                                  <a:latin typeface="Cambria Math" panose="02040503050406030204" pitchFamily="18" charset="0"/>
+                                </a:rPr>
+                                <m:t>𝑜𝑢𝑡</m:t>
+                              </m:r>
+                            </m:sub>
+                            <m:sup>
+                              <m:r>
+                                <a:rPr lang="en-US" sz="2000" b="0" i="1" smtClean="0">
+                                  <a:solidFill>
+                                    <a:schemeClr val="tx1"/>
+                                  </a:solidFill>
+                                  <a:latin typeface="Cambria Math" panose="02040503050406030204" pitchFamily="18" charset="0"/>
+                                </a:rPr>
+                                <m:t>2</m:t>
+                              </m:r>
+                            </m:sup>
+                          </m:sSubSup>
+                        </m:e>
+                      </m:rad>
+                    </m:oMath>
+                  </m:oMathPara>
+                </a14:m>
+                <a:endParaRPr lang="it-IT" sz="2000" dirty="0">
+                  <a:solidFill>
+                    <a:schemeClr val="tx1"/>
+                  </a:solidFill>
+                </a:endParaRPr>
+              </a:p>
+            </p:txBody>
+          </p:sp>
+        </mc:Choice>
+        <mc:Fallback>
+          <p:sp>
+            <p:nvSpPr>
+              <p:cNvPr id="18" name="Rectangle: Rounded Corners 17">
+                <a:extLst>
+                  <a:ext uri="{FF2B5EF4-FFF2-40B4-BE49-F238E27FC236}">
+                    <a16:creationId xmlns:a16="http://schemas.microsoft.com/office/drawing/2014/main" id="{D17E67D5-F236-24D2-710C-C0F4FB47C7B4}"/>
+                  </a:ext>
+                </a:extLst>
+              </p:cNvPr>
+              <p:cNvSpPr>
+                <a:spLocks noRot="1" noChangeAspect="1" noMove="1" noResize="1" noEditPoints="1" noAdjustHandles="1" noChangeArrowheads="1" noChangeShapeType="1" noTextEdit="1"/>
+              </p:cNvSpPr>
+              <p:nvPr/>
+            </p:nvSpPr>
+            <p:spPr>
+              <a:xfrm>
+                <a:off x="6584053" y="4856206"/>
+                <a:ext cx="4339319" cy="1500140"/>
+              </a:xfrm>
+              <a:prstGeom prst="roundRect">
+                <a:avLst/>
+              </a:prstGeom>
+              <a:blipFill>
+                <a:blip r:embed="rId5"/>
+                <a:stretch>
+                  <a:fillRect/>
+                </a:stretch>
+              </a:blipFill>
+              <a:ln w="38100">
+                <a:solidFill>
+                  <a:srgbClr val="FFC000"/>
+                </a:solidFill>
+              </a:ln>
+            </p:spPr>
+            <p:txBody>
+              <a:bodyPr/>
+              <a:lstStyle/>
+              <a:p>
+                <a:r>
+                  <a:rPr lang="it-IT">
+                    <a:noFill/>
+                  </a:rPr>
+                  <a:t> </a:t>
+                </a:r>
+              </a:p>
+            </p:txBody>
+          </p:sp>
+        </mc:Fallback>
+      </mc:AlternateContent>
+      <p:cxnSp>
+        <p:nvCxnSpPr>
+          <p:cNvPr id="19" name="Straight Arrow Connector 18">
+            <a:extLst>
+              <a:ext uri="{FF2B5EF4-FFF2-40B4-BE49-F238E27FC236}">
+                <a16:creationId xmlns:a16="http://schemas.microsoft.com/office/drawing/2014/main" id="{E62BAF0E-0B50-5F83-434F-C211CFA8C8B0}"/>
+              </a:ext>
+            </a:extLst>
+          </p:cNvPr>
+          <p:cNvCxnSpPr>
+            <a:cxnSpLocks/>
+          </p:cNvCxnSpPr>
+          <p:nvPr/>
+        </p:nvCxnSpPr>
+        <p:spPr>
+          <a:xfrm>
+            <a:off x="2891481" y="3903626"/>
+            <a:ext cx="2446638" cy="483023"/>
+          </a:xfrm>
+          <a:prstGeom prst="straightConnector1">
+            <a:avLst/>
+          </a:prstGeom>
+          <a:ln w="38100">
+            <a:solidFill>
+              <a:srgbClr val="FFC000"/>
+            </a:solidFill>
+            <a:tailEnd type="triangle"/>
+          </a:ln>
+        </p:spPr>
+        <p:style>
+          <a:lnRef idx="2">
+            <a:schemeClr val="accent1"/>
+          </a:lnRef>
+          <a:fillRef idx="0">
+            <a:schemeClr val="accent1"/>
+          </a:fillRef>
+          <a:effectRef idx="1">
+            <a:schemeClr val="accent1"/>
+          </a:effectRef>
+          <a:fontRef idx="minor">
+            <a:schemeClr val="tx1"/>
+          </a:fontRef>
+        </p:style>
+      </p:cxnSp>
+      <mc:AlternateContent xmlns:mc="http://schemas.openxmlformats.org/markup-compatibility/2006">
+        <mc:Choice xmlns:a14="http://schemas.microsoft.com/office/drawing/2010/main" Requires="a14">
+          <p:sp>
+            <p:nvSpPr>
+              <p:cNvPr id="20" name="Rectangle: Rounded Corners 19">
+                <a:extLst>
+                  <a:ext uri="{FF2B5EF4-FFF2-40B4-BE49-F238E27FC236}">
+                    <a16:creationId xmlns:a16="http://schemas.microsoft.com/office/drawing/2014/main" id="{F1899BFA-F5A7-2A02-3EFD-3065E103651B}"/>
+                  </a:ext>
+                </a:extLst>
+              </p:cNvPr>
+              <p:cNvSpPr/>
+              <p:nvPr/>
+            </p:nvSpPr>
+            <p:spPr>
+              <a:xfrm>
+                <a:off x="5451351" y="4073736"/>
+                <a:ext cx="2765892" cy="692777"/>
+              </a:xfrm>
+              <a:prstGeom prst="roundRect">
+                <a:avLst/>
+              </a:prstGeom>
+              <a:solidFill>
+                <a:schemeClr val="bg1"/>
+              </a:solidFill>
+              <a:ln w="38100">
+                <a:solidFill>
+                  <a:srgbClr val="FFC000"/>
+                </a:solidFill>
+              </a:ln>
+            </p:spPr>
+            <p:style>
+              <a:lnRef idx="2">
+                <a:schemeClr val="accent1">
+                  <a:shade val="15000"/>
+                </a:schemeClr>
+              </a:lnRef>
+              <a:fillRef idx="1">
+                <a:schemeClr val="accent1"/>
+              </a:fillRef>
+              <a:effectRef idx="0">
+                <a:schemeClr val="accent1"/>
+              </a:effectRef>
+              <a:fontRef idx="minor">
+                <a:schemeClr val="lt1"/>
+              </a:fontRef>
+            </p:style>
+            <p:txBody>
+              <a:bodyPr rtlCol="0" anchor="ctr"/>
+              <a:lstStyle/>
+              <a:p>
+                <a:pPr algn="ctr"/>
+                <a14:m>
+                  <m:oMathPara xmlns:m="http://schemas.openxmlformats.org/officeDocument/2006/math">
+                    <m:oMath>
+                      <m:r>
+                        <a:rPr lang="en-US" sz="2000" i="1" smtClean="0">
+                          <a:solidFill>
+                            <a:schemeClr val="tx1"/>
+                          </a:solidFill>
+                          <a:latin typeface="Cambria Math" panose="02040503050406030204" pitchFamily="18" charset="0"/>
+                        </a:rPr>
+                        <m:t>∼</m:t>
+                      </m:r>
+                      <m:r>
+                        <a:rPr lang="en-US" sz="2000" b="0" i="1" smtClean="0">
+                          <a:solidFill>
+                            <a:schemeClr val="tx1"/>
+                          </a:solidFill>
+                          <a:latin typeface="Cambria Math" panose="02040503050406030204" pitchFamily="18" charset="0"/>
+                        </a:rPr>
+                        <m:t>79.5</m:t>
+                      </m:r>
+                      <m:r>
+                        <a:rPr lang="en-US" sz="2000" b="0" i="1" smtClean="0">
+                          <a:solidFill>
+                            <a:schemeClr val="tx1"/>
+                          </a:solidFill>
+                          <a:latin typeface="Cambria Math" panose="02040503050406030204" pitchFamily="18" charset="0"/>
+                        </a:rPr>
+                        <m:t> </m:t>
+                      </m:r>
+                      <m:r>
+                        <a:rPr lang="en-US" sz="2000" b="0" i="1" smtClean="0">
+                          <a:solidFill>
+                            <a:schemeClr val="tx1"/>
+                          </a:solidFill>
+                          <a:latin typeface="Cambria Math" panose="02040503050406030204" pitchFamily="18" charset="0"/>
+                        </a:rPr>
+                        <m:t>𝜇</m:t>
+                      </m:r>
+                      <m:r>
+                        <m:rPr>
+                          <m:sty m:val="p"/>
+                        </m:rPr>
+                        <a:rPr lang="en-US" sz="2000" b="0" i="0" smtClean="0">
+                          <a:solidFill>
+                            <a:schemeClr val="tx1"/>
+                          </a:solidFill>
+                          <a:latin typeface="Cambria Math" panose="02040503050406030204" pitchFamily="18" charset="0"/>
+                        </a:rPr>
+                        <m:t>rad</m:t>
+                      </m:r>
+                    </m:oMath>
+                  </m:oMathPara>
+                </a14:m>
+                <a:endParaRPr lang="it-IT" sz="2000" dirty="0">
+                  <a:solidFill>
+                    <a:schemeClr val="tx1"/>
+                  </a:solidFill>
+                </a:endParaRPr>
+              </a:p>
+            </p:txBody>
+          </p:sp>
+        </mc:Choice>
+        <mc:Fallback>
+          <p:sp>
+            <p:nvSpPr>
+              <p:cNvPr id="20" name="Rectangle: Rounded Corners 19">
+                <a:extLst>
+                  <a:ext uri="{FF2B5EF4-FFF2-40B4-BE49-F238E27FC236}">
+                    <a16:creationId xmlns:a16="http://schemas.microsoft.com/office/drawing/2014/main" id="{F1899BFA-F5A7-2A02-3EFD-3065E103651B}"/>
+                  </a:ext>
+                </a:extLst>
+              </p:cNvPr>
+              <p:cNvSpPr>
+                <a:spLocks noRot="1" noChangeAspect="1" noMove="1" noResize="1" noEditPoints="1" noAdjustHandles="1" noChangeArrowheads="1" noChangeShapeType="1" noTextEdit="1"/>
+              </p:cNvSpPr>
+              <p:nvPr/>
+            </p:nvSpPr>
+            <p:spPr>
+              <a:xfrm>
+                <a:off x="5451351" y="4073736"/>
+                <a:ext cx="2765892" cy="692777"/>
+              </a:xfrm>
+              <a:prstGeom prst="roundRect">
+                <a:avLst/>
+              </a:prstGeom>
+              <a:blipFill>
+                <a:blip r:embed="rId6"/>
+                <a:stretch>
+                  <a:fillRect/>
+                </a:stretch>
+              </a:blipFill>
+              <a:ln w="38100">
+                <a:solidFill>
+                  <a:srgbClr val="FFC000"/>
+                </a:solidFill>
+              </a:ln>
+            </p:spPr>
+            <p:txBody>
+              <a:bodyPr/>
+              <a:lstStyle/>
+              <a:p>
+                <a:r>
+                  <a:rPr lang="it-IT">
+                    <a:noFill/>
+                  </a:rPr>
+                  <a:t> </a:t>
+                </a:r>
+              </a:p>
+            </p:txBody>
+          </p:sp>
+        </mc:Fallback>
+      </mc:AlternateContent>
     </p:spTree>
     <p:extLst>
       <p:ext uri="{BB962C8B-B14F-4D97-AF65-F5344CB8AC3E}">
-        <p14:creationId xmlns:p14="http://schemas.microsoft.com/office/powerpoint/2010/main" val="463478691"/>
+        <p14:creationId xmlns:p14="http://schemas.microsoft.com/office/powerpoint/2010/main" val="101813587"/>
       </p:ext>
     </p:extLst>
   </p:cSld>
@@ -7068,7 +9433,7 @@
 </p:sld>
 </file>
 
-<file path=ppt/slides/slide14.xml><?xml version="1.0" encoding="utf-8"?>
+<file path=ppt/slides/slide15.xml><?xml version="1.0" encoding="utf-8"?>
 <p:sld xmlns:a="http://schemas.openxmlformats.org/drawingml/2006/main" xmlns:r="http://schemas.openxmlformats.org/officeDocument/2006/relationships" xmlns:p="http://schemas.openxmlformats.org/presentationml/2006/main">
   <p:cSld>
     <p:spTree>
@@ -7076,7 +9441,7 @@
         <p:cNvPr id="1" name="">
           <a:extLst>
             <a:ext uri="{FF2B5EF4-FFF2-40B4-BE49-F238E27FC236}">
-              <a16:creationId xmlns:a16="http://schemas.microsoft.com/office/drawing/2014/main" id="{E91418D0-178A-C93A-FF92-79CB238846E6}"/>
+              <a16:creationId xmlns:a16="http://schemas.microsoft.com/office/drawing/2014/main" id="{2F4A147E-9583-17A2-C251-DFBD06409B1F}"/>
             </a:ext>
           </a:extLst>
         </p:cNvPr>
@@ -7096,7 +9461,7 @@
           <p:cNvPr id="2" name="Titolo 1">
             <a:extLst>
               <a:ext uri="{FF2B5EF4-FFF2-40B4-BE49-F238E27FC236}">
-                <a16:creationId xmlns:a16="http://schemas.microsoft.com/office/drawing/2014/main" id="{F189A4B7-4387-2BB7-3C48-46DB195146ED}"/>
+                <a16:creationId xmlns:a16="http://schemas.microsoft.com/office/drawing/2014/main" id="{CF230C73-EB01-57B1-6C81-AB0A86448A57}"/>
               </a:ext>
             </a:extLst>
           </p:cNvPr>
@@ -7121,18 +9486,23 @@
         </p:spPr>
         <p:txBody>
           <a:bodyPr>
-            <a:normAutofit/>
+            <a:noAutofit/>
           </a:bodyPr>
           <a:lstStyle/>
           <a:p>
             <a:r>
-              <a:rPr lang="it-IT" b="1" dirty="0">
+              <a:rPr lang="en-US" sz="3400" b="1" dirty="0">
                 <a:solidFill>
                   <a:srgbClr val="002060"/>
                 </a:solidFill>
               </a:rPr>
-              <a:t>	BACKUP SLIDES: SCHEMATIC LAYOUT</a:t>
+              <a:t>	FIND THE CRYSTAL FOOTPRINT THROUGH SCATTERING</a:t>
             </a:r>
+            <a:endParaRPr lang="it-IT" sz="3400" b="1" dirty="0">
+              <a:solidFill>
+                <a:srgbClr val="002060"/>
+              </a:solidFill>
+            </a:endParaRPr>
           </a:p>
         </p:txBody>
       </p:sp>
@@ -7141,7 +9511,7 @@
           <p:cNvPr id="4" name="Segnaposto data 3">
             <a:extLst>
               <a:ext uri="{FF2B5EF4-FFF2-40B4-BE49-F238E27FC236}">
-                <a16:creationId xmlns:a16="http://schemas.microsoft.com/office/drawing/2014/main" id="{AEDBFB0E-FB82-3C32-FE20-89DEF3428F91}"/>
+                <a16:creationId xmlns:a16="http://schemas.microsoft.com/office/drawing/2014/main" id="{312E0B60-1F33-9826-84B7-9FEAB3F57E1F}"/>
               </a:ext>
             </a:extLst>
           </p:cNvPr>
@@ -7178,7 +9548,7 @@
           <p:cNvPr id="5" name="Segnaposto piè di pagina 4">
             <a:extLst>
               <a:ext uri="{FF2B5EF4-FFF2-40B4-BE49-F238E27FC236}">
-                <a16:creationId xmlns:a16="http://schemas.microsoft.com/office/drawing/2014/main" id="{2DDDD74D-1EB9-2D22-F8E3-99411AEADCFE}"/>
+                <a16:creationId xmlns:a16="http://schemas.microsoft.com/office/drawing/2014/main" id="{0DF23F36-3686-07AA-92E1-46A183255FCB}"/>
               </a:ext>
             </a:extLst>
           </p:cNvPr>
@@ -7215,7 +9585,7 @@
           <p:cNvPr id="6" name="Segnaposto numero diapositiva 5">
             <a:extLst>
               <a:ext uri="{FF2B5EF4-FFF2-40B4-BE49-F238E27FC236}">
-                <a16:creationId xmlns:a16="http://schemas.microsoft.com/office/drawing/2014/main" id="{97F57EDD-504C-8703-B373-775040D94582}"/>
+                <a16:creationId xmlns:a16="http://schemas.microsoft.com/office/drawing/2014/main" id="{3CA6A74B-1DD1-4436-C95C-22F8A6AE1908}"/>
               </a:ext>
             </a:extLst>
           </p:cNvPr>
@@ -7242,7 +9612,7 @@
                   <a:srgbClr val="002060"/>
                 </a:solidFill>
               </a:rPr>
-              <a:t>14</a:t>
+              <a:t>15</a:t>
             </a:fld>
             <a:endParaRPr lang="it-IT" sz="1500" b="1" dirty="0">
               <a:solidFill>
@@ -7257,7 +9627,7 @@
           <p:cNvPr id="10" name="Connettore diritto 9">
             <a:extLst>
               <a:ext uri="{FF2B5EF4-FFF2-40B4-BE49-F238E27FC236}">
-                <a16:creationId xmlns:a16="http://schemas.microsoft.com/office/drawing/2014/main" id="{DA8C001C-29B0-3295-646E-77D6416186F8}"/>
+                <a16:creationId xmlns:a16="http://schemas.microsoft.com/office/drawing/2014/main" id="{F26ED73A-6FA4-1E1F-54C4-FC9655F562FF}"/>
               </a:ext>
             </a:extLst>
           </p:cNvPr>
@@ -7300,7 +9670,7 @@
           <p:cNvPr id="13" name="CasellaDiTesto 12">
             <a:extLst>
               <a:ext uri="{FF2B5EF4-FFF2-40B4-BE49-F238E27FC236}">
-                <a16:creationId xmlns:a16="http://schemas.microsoft.com/office/drawing/2014/main" id="{FE83A5A8-9F52-79AB-6097-3ED9E0DA104E}"/>
+                <a16:creationId xmlns:a16="http://schemas.microsoft.com/office/drawing/2014/main" id="{FF0FB334-719D-89E7-A3B2-FC39615E3439}"/>
               </a:ext>
             </a:extLst>
           </p:cNvPr>
@@ -7332,7 +9702,7 @@
           <p:cNvPr id="15" name="CasellaDiTesto 14">
             <a:extLst>
               <a:ext uri="{FF2B5EF4-FFF2-40B4-BE49-F238E27FC236}">
-                <a16:creationId xmlns:a16="http://schemas.microsoft.com/office/drawing/2014/main" id="{D9D0E9B7-7CD4-2769-C5D2-C454E014F2EC}"/>
+                <a16:creationId xmlns:a16="http://schemas.microsoft.com/office/drawing/2014/main" id="{BCB31ED8-F7E7-AF0A-851D-7A5316E8089F}"/>
               </a:ext>
             </a:extLst>
           </p:cNvPr>
@@ -7361,10 +9731,47 @@
       </p:sp>
       <p:pic>
         <p:nvPicPr>
-          <p:cNvPr id="8" name="Immagine 7">
-            <a:extLst>
-              <a:ext uri="{FF2B5EF4-FFF2-40B4-BE49-F238E27FC236}">
-                <a16:creationId xmlns:a16="http://schemas.microsoft.com/office/drawing/2014/main" id="{DD1CB2A6-1166-CF2E-28FE-9AF384B5B3E6}"/>
+          <p:cNvPr id="9" name="Content Placeholder 8">
+            <a:extLst>
+              <a:ext uri="{FF2B5EF4-FFF2-40B4-BE49-F238E27FC236}">
+                <a16:creationId xmlns:a16="http://schemas.microsoft.com/office/drawing/2014/main" id="{B326585B-7D73-44ED-F6C1-C4711CA58AE8}"/>
+              </a:ext>
+            </a:extLst>
+          </p:cNvPr>
+          <p:cNvPicPr>
+            <a:picLocks noGrp="1" noChangeAspect="1"/>
+          </p:cNvPicPr>
+          <p:nvPr>
+            <p:ph idx="1"/>
+          </p:nvPr>
+        </p:nvPicPr>
+        <p:blipFill>
+          <a:blip r:embed="rId3">
+            <a:extLst>
+              <a:ext uri="{28A0092B-C50C-407E-A947-70E740481C1C}">
+                <a14:useLocalDpi xmlns:a14="http://schemas.microsoft.com/office/drawing/2010/main" val="0"/>
+              </a:ext>
+            </a:extLst>
+          </a:blip>
+          <a:srcRect/>
+          <a:stretch/>
+        </p:blipFill>
+        <p:spPr>
+          <a:xfrm>
+            <a:off x="2271165" y="1312863"/>
+            <a:ext cx="7649670" cy="4864100"/>
+          </a:xfrm>
+          <a:prstGeom prst="rect">
+            <a:avLst/>
+          </a:prstGeom>
+        </p:spPr>
+      </p:pic>
+      <p:pic>
+        <p:nvPicPr>
+          <p:cNvPr id="7" name="Picture 6">
+            <a:extLst>
+              <a:ext uri="{FF2B5EF4-FFF2-40B4-BE49-F238E27FC236}">
+                <a16:creationId xmlns:a16="http://schemas.microsoft.com/office/drawing/2014/main" id="{ED9F59BF-1E53-7001-C3D7-32D2FE353A18}"/>
               </a:ext>
             </a:extLst>
           </p:cNvPr>
@@ -7374,25 +9781,852 @@
           <p:nvPr/>
         </p:nvPicPr>
         <p:blipFill>
-          <a:blip r:embed="rId2"/>
-          <a:stretch>
-            <a:fillRect/>
-          </a:stretch>
+          <a:blip r:embed="rId4">
+            <a:extLst>
+              <a:ext uri="{28A0092B-C50C-407E-A947-70E740481C1C}">
+                <a14:useLocalDpi xmlns:a14="http://schemas.microsoft.com/office/drawing/2010/main" val="0"/>
+              </a:ext>
+            </a:extLst>
+          </a:blip>
+          <a:srcRect t="3273" b="3273"/>
+          <a:stretch/>
         </p:blipFill>
         <p:spPr>
           <a:xfrm>
-            <a:off x="443309" y="1545256"/>
-            <a:ext cx="11303581" cy="4705592"/>
+            <a:off x="7928946" y="1451083"/>
+            <a:ext cx="2687477" cy="1800000"/>
           </a:xfrm>
           <a:prstGeom prst="rect">
             <a:avLst/>
           </a:prstGeom>
+          <a:ln w="38100">
+            <a:solidFill>
+              <a:srgbClr val="FFC000"/>
+            </a:solidFill>
+          </a:ln>
         </p:spPr>
       </p:pic>
+      <p:pic>
+        <p:nvPicPr>
+          <p:cNvPr id="11" name="Picture 10">
+            <a:extLst>
+              <a:ext uri="{FF2B5EF4-FFF2-40B4-BE49-F238E27FC236}">
+                <a16:creationId xmlns:a16="http://schemas.microsoft.com/office/drawing/2014/main" id="{C05F8B1C-DA2A-E818-14A1-4D26F4BCBD7B}"/>
+              </a:ext>
+            </a:extLst>
+          </p:cNvPr>
+          <p:cNvPicPr>
+            <a:picLocks noChangeAspect="1"/>
+          </p:cNvPicPr>
+          <p:nvPr/>
+        </p:nvPicPr>
+        <p:blipFill>
+          <a:blip r:embed="rId5">
+            <a:extLst>
+              <a:ext uri="{28A0092B-C50C-407E-A947-70E740481C1C}">
+                <a14:useLocalDpi xmlns:a14="http://schemas.microsoft.com/office/drawing/2010/main" val="0"/>
+              </a:ext>
+            </a:extLst>
+          </a:blip>
+          <a:srcRect t="2754" b="2754"/>
+          <a:stretch/>
+        </p:blipFill>
+        <p:spPr>
+          <a:xfrm>
+            <a:off x="9272684" y="4466656"/>
+            <a:ext cx="2657940" cy="1800000"/>
+          </a:xfrm>
+          <a:prstGeom prst="rect">
+            <a:avLst/>
+          </a:prstGeom>
+          <a:ln w="38100">
+            <a:solidFill>
+              <a:srgbClr val="FFC000"/>
+            </a:solidFill>
+          </a:ln>
+        </p:spPr>
+      </p:pic>
+      <p:sp>
+        <p:nvSpPr>
+          <p:cNvPr id="12" name="Rectangle: Rounded Corners 11">
+            <a:extLst>
+              <a:ext uri="{FF2B5EF4-FFF2-40B4-BE49-F238E27FC236}">
+                <a16:creationId xmlns:a16="http://schemas.microsoft.com/office/drawing/2014/main" id="{283D1D24-3363-6BE1-CCD2-CF448535CB23}"/>
+              </a:ext>
+            </a:extLst>
+          </p:cNvPr>
+          <p:cNvSpPr/>
+          <p:nvPr/>
+        </p:nvSpPr>
+        <p:spPr>
+          <a:xfrm>
+            <a:off x="10601306" y="3873532"/>
+            <a:ext cx="1504987" cy="593124"/>
+          </a:xfrm>
+          <a:prstGeom prst="roundRect">
+            <a:avLst/>
+          </a:prstGeom>
+          <a:solidFill>
+            <a:schemeClr val="bg1"/>
+          </a:solidFill>
+          <a:ln w="38100">
+            <a:solidFill>
+              <a:srgbClr val="FFC000"/>
+            </a:solidFill>
+          </a:ln>
+        </p:spPr>
+        <p:style>
+          <a:lnRef idx="2">
+            <a:schemeClr val="accent1">
+              <a:shade val="15000"/>
+            </a:schemeClr>
+          </a:lnRef>
+          <a:fillRef idx="1">
+            <a:schemeClr val="accent1"/>
+          </a:fillRef>
+          <a:effectRef idx="0">
+            <a:schemeClr val="accent1"/>
+          </a:effectRef>
+          <a:fontRef idx="minor">
+            <a:schemeClr val="lt1"/>
+          </a:fontRef>
+        </p:style>
+        <p:txBody>
+          <a:bodyPr rtlCol="0" anchor="ctr"/>
+          <a:lstStyle/>
+          <a:p>
+            <a:pPr algn="ctr"/>
+            <a:r>
+              <a:rPr lang="en-US" sz="2000" dirty="0">
+                <a:solidFill>
+                  <a:schemeClr val="tx1"/>
+                </a:solidFill>
+              </a:rPr>
+              <a:t>INSIDE</a:t>
+            </a:r>
+            <a:endParaRPr lang="it-IT" sz="2000" dirty="0">
+              <a:solidFill>
+                <a:schemeClr val="tx1"/>
+              </a:solidFill>
+            </a:endParaRPr>
+          </a:p>
+        </p:txBody>
+      </p:sp>
+      <p:sp>
+        <p:nvSpPr>
+          <p:cNvPr id="16" name="Rectangle: Rounded Corners 15">
+            <a:extLst>
+              <a:ext uri="{FF2B5EF4-FFF2-40B4-BE49-F238E27FC236}">
+                <a16:creationId xmlns:a16="http://schemas.microsoft.com/office/drawing/2014/main" id="{76BE05DE-0BBC-D16E-75BE-8162E9A8E7AA}"/>
+              </a:ext>
+            </a:extLst>
+          </p:cNvPr>
+          <p:cNvSpPr/>
+          <p:nvPr/>
+        </p:nvSpPr>
+        <p:spPr>
+          <a:xfrm>
+            <a:off x="9875624" y="1845194"/>
+            <a:ext cx="1504987" cy="593124"/>
+          </a:xfrm>
+          <a:prstGeom prst="roundRect">
+            <a:avLst/>
+          </a:prstGeom>
+          <a:solidFill>
+            <a:schemeClr val="bg1"/>
+          </a:solidFill>
+          <a:ln w="38100">
+            <a:solidFill>
+              <a:srgbClr val="FFC000"/>
+            </a:solidFill>
+          </a:ln>
+        </p:spPr>
+        <p:style>
+          <a:lnRef idx="2">
+            <a:schemeClr val="accent1">
+              <a:shade val="15000"/>
+            </a:schemeClr>
+          </a:lnRef>
+          <a:fillRef idx="1">
+            <a:schemeClr val="accent1"/>
+          </a:fillRef>
+          <a:effectRef idx="0">
+            <a:schemeClr val="accent1"/>
+          </a:effectRef>
+          <a:fontRef idx="minor">
+            <a:schemeClr val="lt1"/>
+          </a:fontRef>
+        </p:style>
+        <p:txBody>
+          <a:bodyPr rtlCol="0" anchor="ctr"/>
+          <a:lstStyle/>
+          <a:p>
+            <a:pPr algn="ctr"/>
+            <a:r>
+              <a:rPr lang="en-US" sz="2000" dirty="0">
+                <a:solidFill>
+                  <a:schemeClr val="tx1"/>
+                </a:solidFill>
+              </a:rPr>
+              <a:t>OUTSIDE</a:t>
+            </a:r>
+            <a:endParaRPr lang="it-IT" sz="2000" dirty="0">
+              <a:solidFill>
+                <a:schemeClr val="tx1"/>
+              </a:solidFill>
+            </a:endParaRPr>
+          </a:p>
+        </p:txBody>
+      </p:sp>
+      <p:cxnSp>
+        <p:nvCxnSpPr>
+          <p:cNvPr id="17" name="Straight Arrow Connector 16">
+            <a:extLst>
+              <a:ext uri="{FF2B5EF4-FFF2-40B4-BE49-F238E27FC236}">
+                <a16:creationId xmlns:a16="http://schemas.microsoft.com/office/drawing/2014/main" id="{35EABA61-82F1-D53E-9065-2ED3206D0D58}"/>
+              </a:ext>
+            </a:extLst>
+          </p:cNvPr>
+          <p:cNvCxnSpPr>
+            <a:cxnSpLocks/>
+          </p:cNvCxnSpPr>
+          <p:nvPr/>
+        </p:nvCxnSpPr>
+        <p:spPr>
+          <a:xfrm flipH="1">
+            <a:off x="4473146" y="2438318"/>
+            <a:ext cx="3455800" cy="1100162"/>
+          </a:xfrm>
+          <a:prstGeom prst="straightConnector1">
+            <a:avLst/>
+          </a:prstGeom>
+          <a:ln w="38100">
+            <a:solidFill>
+              <a:srgbClr val="FFC000"/>
+            </a:solidFill>
+            <a:tailEnd type="triangle"/>
+          </a:ln>
+        </p:spPr>
+        <p:style>
+          <a:lnRef idx="2">
+            <a:schemeClr val="accent1"/>
+          </a:lnRef>
+          <a:fillRef idx="0">
+            <a:schemeClr val="accent1"/>
+          </a:fillRef>
+          <a:effectRef idx="1">
+            <a:schemeClr val="accent1"/>
+          </a:effectRef>
+          <a:fontRef idx="minor">
+            <a:schemeClr val="tx1"/>
+          </a:fontRef>
+        </p:style>
+      </p:cxnSp>
+      <p:cxnSp>
+        <p:nvCxnSpPr>
+          <p:cNvPr id="19" name="Straight Arrow Connector 18">
+            <a:extLst>
+              <a:ext uri="{FF2B5EF4-FFF2-40B4-BE49-F238E27FC236}">
+                <a16:creationId xmlns:a16="http://schemas.microsoft.com/office/drawing/2014/main" id="{F6E8A367-C685-925C-E04D-0FD772300057}"/>
+              </a:ext>
+            </a:extLst>
+          </p:cNvPr>
+          <p:cNvCxnSpPr>
+            <a:cxnSpLocks/>
+          </p:cNvCxnSpPr>
+          <p:nvPr/>
+        </p:nvCxnSpPr>
+        <p:spPr>
+          <a:xfrm flipH="1" flipV="1">
+            <a:off x="7806088" y="5406917"/>
+            <a:ext cx="1466596" cy="279591"/>
+          </a:xfrm>
+          <a:prstGeom prst="straightConnector1">
+            <a:avLst/>
+          </a:prstGeom>
+          <a:ln w="38100">
+            <a:solidFill>
+              <a:srgbClr val="FFC000"/>
+            </a:solidFill>
+            <a:tailEnd type="triangle"/>
+          </a:ln>
+        </p:spPr>
+        <p:style>
+          <a:lnRef idx="2">
+            <a:schemeClr val="accent1"/>
+          </a:lnRef>
+          <a:fillRef idx="0">
+            <a:schemeClr val="accent1"/>
+          </a:fillRef>
+          <a:effectRef idx="1">
+            <a:schemeClr val="accent1"/>
+          </a:effectRef>
+          <a:fontRef idx="minor">
+            <a:schemeClr val="tx1"/>
+          </a:fontRef>
+        </p:style>
+      </p:cxnSp>
+      <p:cxnSp>
+        <p:nvCxnSpPr>
+          <p:cNvPr id="21" name="Straight Arrow Connector 20">
+            <a:extLst>
+              <a:ext uri="{FF2B5EF4-FFF2-40B4-BE49-F238E27FC236}">
+                <a16:creationId xmlns:a16="http://schemas.microsoft.com/office/drawing/2014/main" id="{D222D206-5695-8B93-6C3F-8DF0E82DA48E}"/>
+              </a:ext>
+            </a:extLst>
+          </p:cNvPr>
+          <p:cNvCxnSpPr>
+            <a:cxnSpLocks/>
+          </p:cNvCxnSpPr>
+          <p:nvPr/>
+        </p:nvCxnSpPr>
+        <p:spPr>
+          <a:xfrm flipH="1">
+            <a:off x="4473146" y="4061172"/>
+            <a:ext cx="3345299" cy="0"/>
+          </a:xfrm>
+          <a:prstGeom prst="straightConnector1">
+            <a:avLst/>
+          </a:prstGeom>
+          <a:ln w="38100">
+            <a:solidFill>
+              <a:srgbClr val="FF0000"/>
+            </a:solidFill>
+            <a:headEnd type="triangle" w="med" len="med"/>
+            <a:tailEnd type="triangle" w="med" len="med"/>
+          </a:ln>
+        </p:spPr>
+        <p:style>
+          <a:lnRef idx="2">
+            <a:schemeClr val="accent1"/>
+          </a:lnRef>
+          <a:fillRef idx="0">
+            <a:schemeClr val="accent1"/>
+          </a:fillRef>
+          <a:effectRef idx="1">
+            <a:schemeClr val="accent1"/>
+          </a:effectRef>
+          <a:fontRef idx="minor">
+            <a:schemeClr val="tx1"/>
+          </a:fontRef>
+        </p:style>
+      </p:cxnSp>
+      <mc:AlternateContent xmlns:mc="http://schemas.openxmlformats.org/markup-compatibility/2006">
+        <mc:Choice xmlns:a14="http://schemas.microsoft.com/office/drawing/2010/main" Requires="a14">
+          <p:sp>
+            <p:nvSpPr>
+              <p:cNvPr id="24" name="Rectangle: Rounded Corners 23">
+                <a:extLst>
+                  <a:ext uri="{FF2B5EF4-FFF2-40B4-BE49-F238E27FC236}">
+                    <a16:creationId xmlns:a16="http://schemas.microsoft.com/office/drawing/2014/main" id="{D12E9DD2-C9DA-58D9-0E6D-2505DB2C12FF}"/>
+                  </a:ext>
+                </a:extLst>
+              </p:cNvPr>
+              <p:cNvSpPr/>
+              <p:nvPr/>
+            </p:nvSpPr>
+            <p:spPr>
+              <a:xfrm>
+                <a:off x="457200" y="2889547"/>
+                <a:ext cx="2202825" cy="2655590"/>
+              </a:xfrm>
+              <a:prstGeom prst="roundRect">
+                <a:avLst/>
+              </a:prstGeom>
+              <a:solidFill>
+                <a:schemeClr val="bg1"/>
+              </a:solidFill>
+              <a:ln w="38100">
+                <a:solidFill>
+                  <a:srgbClr val="FF0000"/>
+                </a:solidFill>
+              </a:ln>
+            </p:spPr>
+            <p:style>
+              <a:lnRef idx="2">
+                <a:schemeClr val="accent1">
+                  <a:shade val="15000"/>
+                </a:schemeClr>
+              </a:lnRef>
+              <a:fillRef idx="1">
+                <a:schemeClr val="accent1"/>
+              </a:fillRef>
+              <a:effectRef idx="0">
+                <a:schemeClr val="accent1"/>
+              </a:effectRef>
+              <a:fontRef idx="minor">
+                <a:schemeClr val="lt1"/>
+              </a:fontRef>
+            </p:style>
+            <p:txBody>
+              <a:bodyPr rtlCol="0" anchor="ctr"/>
+              <a:lstStyle/>
+              <a:p>
+                <a:pPr algn="ctr"/>
+                <a:r>
+                  <a:rPr lang="en-US" sz="2000" dirty="0">
+                    <a:solidFill>
+                      <a:schemeClr val="tx1"/>
+                    </a:solidFill>
+                  </a:rPr>
+                  <a:t>The window corresponds to </a:t>
+                </a:r>
+                <a14:m>
+                  <m:oMath xmlns:m="http://schemas.openxmlformats.org/officeDocument/2006/math">
+                    <m:r>
+                      <a:rPr lang="en-US" sz="2000" b="0" i="1" smtClean="0">
+                        <a:solidFill>
+                          <a:schemeClr val="tx1"/>
+                        </a:solidFill>
+                        <a:latin typeface="Cambria Math" panose="02040503050406030204" pitchFamily="18" charset="0"/>
+                      </a:rPr>
+                      <m:t>∼</m:t>
+                    </m:r>
+                    <m:r>
+                      <a:rPr lang="en-US" sz="2000" b="0" i="1" smtClean="0">
+                        <a:solidFill>
+                          <a:schemeClr val="tx1"/>
+                        </a:solidFill>
+                        <a:latin typeface="Cambria Math" panose="02040503050406030204" pitchFamily="18" charset="0"/>
+                      </a:rPr>
+                      <m:t>8</m:t>
+                    </m:r>
+                    <m:r>
+                      <a:rPr lang="en-US" sz="2000" b="0" i="1" smtClean="0">
+                        <a:solidFill>
+                          <a:schemeClr val="tx1"/>
+                        </a:solidFill>
+                        <a:latin typeface="Cambria Math" panose="02040503050406030204" pitchFamily="18" charset="0"/>
+                      </a:rPr>
+                      <m:t> </m:t>
+                    </m:r>
+                    <m:r>
+                      <m:rPr>
+                        <m:sty m:val="p"/>
+                      </m:rPr>
+                      <a:rPr lang="en-US" sz="2000" b="0" i="0" smtClean="0">
+                        <a:solidFill>
+                          <a:schemeClr val="tx1"/>
+                        </a:solidFill>
+                        <a:latin typeface="Cambria Math" panose="02040503050406030204" pitchFamily="18" charset="0"/>
+                      </a:rPr>
+                      <m:t>mm</m:t>
+                    </m:r>
+                  </m:oMath>
+                </a14:m>
+                <a:endParaRPr lang="it-IT" sz="2000" dirty="0">
+                  <a:solidFill>
+                    <a:schemeClr val="tx1"/>
+                  </a:solidFill>
+                </a:endParaRPr>
+              </a:p>
+              <a:p>
+                <a:pPr algn="ctr"/>
+                <a:r>
+                  <a:rPr lang="it-IT" sz="2000" dirty="0">
+                    <a:solidFill>
+                      <a:schemeClr val="tx1"/>
+                    </a:solidFill>
+                  </a:rPr>
+                  <a:t>while crystal measures </a:t>
+                </a:r>
+              </a:p>
+              <a:p>
+                <a:pPr algn="ctr"/>
+                <a14:m>
+                  <m:oMathPara xmlns:m="http://schemas.openxmlformats.org/officeDocument/2006/math">
+                    <m:oMath>
+                      <m:r>
+                        <a:rPr lang="en-US" sz="2000" b="0" i="1" smtClean="0">
+                          <a:solidFill>
+                            <a:schemeClr val="tx1"/>
+                          </a:solidFill>
+                          <a:latin typeface="Cambria Math" panose="02040503050406030204" pitchFamily="18" charset="0"/>
+                        </a:rPr>
+                        <m:t>12.8 </m:t>
+                      </m:r>
+                      <m:r>
+                        <m:rPr>
+                          <m:sty m:val="p"/>
+                        </m:rPr>
+                        <a:rPr lang="en-US" sz="2000" b="0" i="0" smtClean="0">
+                          <a:solidFill>
+                            <a:schemeClr val="tx1"/>
+                          </a:solidFill>
+                          <a:latin typeface="Cambria Math" panose="02040503050406030204" pitchFamily="18" charset="0"/>
+                        </a:rPr>
+                        <m:t>mm</m:t>
+                      </m:r>
+                    </m:oMath>
+                  </m:oMathPara>
+                </a14:m>
+                <a:endParaRPr lang="it-IT" sz="2000" dirty="0">
+                  <a:solidFill>
+                    <a:schemeClr val="tx1"/>
+                  </a:solidFill>
+                </a:endParaRPr>
+              </a:p>
+            </p:txBody>
+          </p:sp>
+        </mc:Choice>
+        <mc:Fallback>
+          <p:sp>
+            <p:nvSpPr>
+              <p:cNvPr id="24" name="Rectangle: Rounded Corners 23">
+                <a:extLst>
+                  <a:ext uri="{FF2B5EF4-FFF2-40B4-BE49-F238E27FC236}">
+                    <a16:creationId xmlns:a16="http://schemas.microsoft.com/office/drawing/2014/main" id="{D12E9DD2-C9DA-58D9-0E6D-2505DB2C12FF}"/>
+                  </a:ext>
+                </a:extLst>
+              </p:cNvPr>
+              <p:cNvSpPr>
+                <a:spLocks noRot="1" noChangeAspect="1" noMove="1" noResize="1" noEditPoints="1" noAdjustHandles="1" noChangeArrowheads="1" noChangeShapeType="1" noTextEdit="1"/>
+              </p:cNvSpPr>
+              <p:nvPr/>
+            </p:nvSpPr>
+            <p:spPr>
+              <a:xfrm>
+                <a:off x="457200" y="2889547"/>
+                <a:ext cx="2202825" cy="2655590"/>
+              </a:xfrm>
+              <a:prstGeom prst="roundRect">
+                <a:avLst/>
+              </a:prstGeom>
+              <a:blipFill>
+                <a:blip r:embed="rId6"/>
+                <a:stretch>
+                  <a:fillRect/>
+                </a:stretch>
+              </a:blipFill>
+              <a:ln w="38100">
+                <a:solidFill>
+                  <a:srgbClr val="FF0000"/>
+                </a:solidFill>
+              </a:ln>
+            </p:spPr>
+            <p:txBody>
+              <a:bodyPr/>
+              <a:lstStyle/>
+              <a:p>
+                <a:r>
+                  <a:rPr lang="it-IT">
+                    <a:noFill/>
+                  </a:rPr>
+                  <a:t> </a:t>
+                </a:r>
+              </a:p>
+            </p:txBody>
+          </p:sp>
+        </mc:Fallback>
+      </mc:AlternateContent>
     </p:spTree>
     <p:extLst>
       <p:ext uri="{BB962C8B-B14F-4D97-AF65-F5344CB8AC3E}">
-        <p14:creationId xmlns:p14="http://schemas.microsoft.com/office/powerpoint/2010/main" val="382366125"/>
+        <p14:creationId xmlns:p14="http://schemas.microsoft.com/office/powerpoint/2010/main" val="1431524410"/>
+      </p:ext>
+    </p:extLst>
+  </p:cSld>
+  <p:clrMapOvr>
+    <a:masterClrMapping/>
+  </p:clrMapOvr>
+</p:sld>
+</file>
+
+<file path=ppt/slides/slide16.xml><?xml version="1.0" encoding="utf-8"?>
+<p:sld xmlns:a="http://schemas.openxmlformats.org/drawingml/2006/main" xmlns:r="http://schemas.openxmlformats.org/officeDocument/2006/relationships" xmlns:p="http://schemas.openxmlformats.org/presentationml/2006/main">
+  <p:cSld>
+    <p:spTree>
+      <p:nvGrpSpPr>
+        <p:cNvPr id="1" name="">
+          <a:extLst>
+            <a:ext uri="{FF2B5EF4-FFF2-40B4-BE49-F238E27FC236}">
+              <a16:creationId xmlns:a16="http://schemas.microsoft.com/office/drawing/2014/main" id="{5DAC6EFF-B9B4-605B-23DF-EDC01FF419F6}"/>
+            </a:ext>
+          </a:extLst>
+        </p:cNvPr>
+        <p:cNvGrpSpPr/>
+        <p:nvPr/>
+      </p:nvGrpSpPr>
+      <p:grpSpPr>
+        <a:xfrm>
+          <a:off x="0" y="0"/>
+          <a:ext cx="0" cy="0"/>
+          <a:chOff x="0" y="0"/>
+          <a:chExt cx="0" cy="0"/>
+        </a:xfrm>
+      </p:grpSpPr>
+      <p:sp>
+        <p:nvSpPr>
+          <p:cNvPr id="2" name="Titolo 1">
+            <a:extLst>
+              <a:ext uri="{FF2B5EF4-FFF2-40B4-BE49-F238E27FC236}">
+                <a16:creationId xmlns:a16="http://schemas.microsoft.com/office/drawing/2014/main" id="{B5797431-BBE5-CB25-093B-D04D3DF2F194}"/>
+              </a:ext>
+            </a:extLst>
+          </p:cNvPr>
+          <p:cNvSpPr>
+            <a:spLocks noGrp="1"/>
+          </p:cNvSpPr>
+          <p:nvPr>
+            <p:ph type="title"/>
+          </p:nvPr>
+        </p:nvSpPr>
+        <p:spPr>
+          <a:xfrm>
+            <a:off x="38100" y="69651"/>
+            <a:ext cx="12114000" cy="1153094"/>
+          </a:xfrm>
+          <a:prstGeom prst="roundRect">
+            <a:avLst>
+              <a:gd name="adj" fmla="val 36459"/>
+            </a:avLst>
+          </a:prstGeom>
+          <a:noFill/>
+        </p:spPr>
+        <p:txBody>
+          <a:bodyPr>
+            <a:normAutofit/>
+          </a:bodyPr>
+          <a:lstStyle/>
+          <a:p>
+            <a:r>
+              <a:rPr lang="it-IT" b="1" dirty="0">
+                <a:solidFill>
+                  <a:srgbClr val="002060"/>
+                </a:solidFill>
+              </a:rPr>
+              <a:t>	BACKUP SLIDES</a:t>
+            </a:r>
+          </a:p>
+        </p:txBody>
+      </p:sp>
+      <p:sp>
+        <p:nvSpPr>
+          <p:cNvPr id="4" name="Segnaposto data 3">
+            <a:extLst>
+              <a:ext uri="{FF2B5EF4-FFF2-40B4-BE49-F238E27FC236}">
+                <a16:creationId xmlns:a16="http://schemas.microsoft.com/office/drawing/2014/main" id="{EB987156-1AA3-606D-F960-F5521BB0A14D}"/>
+              </a:ext>
+            </a:extLst>
+          </p:cNvPr>
+          <p:cNvSpPr>
+            <a:spLocks noGrp="1"/>
+          </p:cNvSpPr>
+          <p:nvPr>
+            <p:ph type="dt" sz="half" idx="10"/>
+          </p:nvPr>
+        </p:nvSpPr>
+        <p:spPr>
+          <a:xfrm>
+            <a:off x="838200" y="6356349"/>
+            <a:ext cx="2743200" cy="432000"/>
+          </a:xfrm>
+        </p:spPr>
+        <p:txBody>
+          <a:bodyPr/>
+          <a:lstStyle/>
+          <a:p>
+            <a:r>
+              <a:rPr lang="it-IT" sz="1500" b="1" dirty="0">
+                <a:solidFill>
+                  <a:srgbClr val="002060"/>
+                </a:solidFill>
+              </a:rPr>
+              <a:t>August 2026</a:t>
+            </a:r>
+          </a:p>
+        </p:txBody>
+      </p:sp>
+      <p:sp>
+        <p:nvSpPr>
+          <p:cNvPr id="5" name="Segnaposto piè di pagina 4">
+            <a:extLst>
+              <a:ext uri="{FF2B5EF4-FFF2-40B4-BE49-F238E27FC236}">
+                <a16:creationId xmlns:a16="http://schemas.microsoft.com/office/drawing/2014/main" id="{789376CE-2672-8B5F-17F8-C7FABE69F6E5}"/>
+              </a:ext>
+            </a:extLst>
+          </p:cNvPr>
+          <p:cNvSpPr>
+            <a:spLocks noGrp="1"/>
+          </p:cNvSpPr>
+          <p:nvPr>
+            <p:ph type="ftr" sz="quarter" idx="11"/>
+          </p:nvPr>
+        </p:nvSpPr>
+        <p:spPr>
+          <a:xfrm>
+            <a:off x="0" y="6356349"/>
+            <a:ext cx="12192000" cy="432000"/>
+          </a:xfrm>
+        </p:spPr>
+        <p:txBody>
+          <a:bodyPr/>
+          <a:lstStyle/>
+          <a:p>
+            <a:r>
+              <a:rPr lang="it-IT" sz="1500" b="1" dirty="0">
+                <a:solidFill>
+                  <a:srgbClr val="002060"/>
+                </a:solidFill>
+              </a:rPr>
+              <a:t>Anna Sofia Moro</a:t>
+            </a:r>
+          </a:p>
+        </p:txBody>
+      </p:sp>
+      <p:sp>
+        <p:nvSpPr>
+          <p:cNvPr id="6" name="Segnaposto numero diapositiva 5">
+            <a:extLst>
+              <a:ext uri="{FF2B5EF4-FFF2-40B4-BE49-F238E27FC236}">
+                <a16:creationId xmlns:a16="http://schemas.microsoft.com/office/drawing/2014/main" id="{F518D8F0-CFAD-5A22-0C45-35621E72D2EB}"/>
+              </a:ext>
+            </a:extLst>
+          </p:cNvPr>
+          <p:cNvSpPr>
+            <a:spLocks noGrp="1"/>
+          </p:cNvSpPr>
+          <p:nvPr>
+            <p:ph type="sldNum" sz="quarter" idx="12"/>
+          </p:nvPr>
+        </p:nvSpPr>
+        <p:spPr>
+          <a:xfrm>
+            <a:off x="8610600" y="6356349"/>
+            <a:ext cx="2743200" cy="432000"/>
+          </a:xfrm>
+        </p:spPr>
+        <p:txBody>
+          <a:bodyPr/>
+          <a:lstStyle/>
+          <a:p>
+            <a:fld id="{0A318BD9-CA14-4A83-ACF0-03D5918EB402}" type="slidenum">
+              <a:rPr lang="it-IT" sz="1500" b="1" smtClean="0">
+                <a:solidFill>
+                  <a:srgbClr val="002060"/>
+                </a:solidFill>
+              </a:rPr>
+              <a:t>16</a:t>
+            </a:fld>
+            <a:endParaRPr lang="it-IT" sz="1500" b="1" dirty="0">
+              <a:solidFill>
+                <a:srgbClr val="002060"/>
+              </a:solidFill>
+            </a:endParaRPr>
+          </a:p>
+        </p:txBody>
+      </p:sp>
+      <p:cxnSp>
+        <p:nvCxnSpPr>
+          <p:cNvPr id="10" name="Connettore diritto 9">
+            <a:extLst>
+              <a:ext uri="{FF2B5EF4-FFF2-40B4-BE49-F238E27FC236}">
+                <a16:creationId xmlns:a16="http://schemas.microsoft.com/office/drawing/2014/main" id="{19CCD89B-D23E-B601-CB0F-35F735A548A8}"/>
+              </a:ext>
+            </a:extLst>
+          </p:cNvPr>
+          <p:cNvCxnSpPr>
+            <a:cxnSpLocks/>
+          </p:cNvCxnSpPr>
+          <p:nvPr/>
+        </p:nvCxnSpPr>
+        <p:spPr>
+          <a:xfrm>
+            <a:off x="696000" y="1155368"/>
+            <a:ext cx="10800000" cy="0"/>
+          </a:xfrm>
+          <a:prstGeom prst="line">
+            <a:avLst/>
+          </a:prstGeom>
+          <a:ln w="38100">
+            <a:solidFill>
+              <a:srgbClr val="002060"/>
+            </a:solidFill>
+          </a:ln>
+        </p:spPr>
+        <p:style>
+          <a:lnRef idx="2">
+            <a:schemeClr val="accent1"/>
+          </a:lnRef>
+          <a:fillRef idx="0">
+            <a:schemeClr val="accent1"/>
+          </a:fillRef>
+          <a:effectRef idx="1">
+            <a:schemeClr val="accent1"/>
+          </a:effectRef>
+          <a:fontRef idx="minor">
+            <a:schemeClr val="tx1"/>
+          </a:fontRef>
+        </p:style>
+      </p:cxnSp>
+      <p:sp>
+        <p:nvSpPr>
+          <p:cNvPr id="13" name="CasellaDiTesto 12">
+            <a:extLst>
+              <a:ext uri="{FF2B5EF4-FFF2-40B4-BE49-F238E27FC236}">
+                <a16:creationId xmlns:a16="http://schemas.microsoft.com/office/drawing/2014/main" id="{4868D235-E176-E7CA-EEBD-17788382E362}"/>
+              </a:ext>
+            </a:extLst>
+          </p:cNvPr>
+          <p:cNvSpPr txBox="1"/>
+          <p:nvPr/>
+        </p:nvSpPr>
+        <p:spPr>
+          <a:xfrm>
+            <a:off x="3048886" y="3244334"/>
+            <a:ext cx="6097772" cy="369332"/>
+          </a:xfrm>
+          <a:prstGeom prst="rect">
+            <a:avLst/>
+          </a:prstGeom>
+          <a:noFill/>
+        </p:spPr>
+        <p:txBody>
+          <a:bodyPr wrap="square">
+            <a:spAutoFit/>
+          </a:bodyPr>
+          <a:lstStyle/>
+          <a:p>
+            <a:endParaRPr lang="it-IT" dirty="0"/>
+          </a:p>
+        </p:txBody>
+      </p:sp>
+      <p:sp>
+        <p:nvSpPr>
+          <p:cNvPr id="15" name="CasellaDiTesto 14">
+            <a:extLst>
+              <a:ext uri="{FF2B5EF4-FFF2-40B4-BE49-F238E27FC236}">
+                <a16:creationId xmlns:a16="http://schemas.microsoft.com/office/drawing/2014/main" id="{BB2D0B5E-0AD3-1AC2-900A-351764AC43C1}"/>
+              </a:ext>
+            </a:extLst>
+          </p:cNvPr>
+          <p:cNvSpPr txBox="1"/>
+          <p:nvPr/>
+        </p:nvSpPr>
+        <p:spPr>
+          <a:xfrm>
+            <a:off x="3048886" y="3244334"/>
+            <a:ext cx="6097772" cy="369332"/>
+          </a:xfrm>
+          <a:prstGeom prst="rect">
+            <a:avLst/>
+          </a:prstGeom>
+          <a:noFill/>
+        </p:spPr>
+        <p:txBody>
+          <a:bodyPr wrap="square">
+            <a:spAutoFit/>
+          </a:bodyPr>
+          <a:lstStyle/>
+          <a:p>
+            <a:endParaRPr lang="it-IT" dirty="0"/>
+          </a:p>
+        </p:txBody>
+      </p:sp>
+    </p:spTree>
+    <p:extLst>
+      <p:ext uri="{BB962C8B-B14F-4D97-AF65-F5344CB8AC3E}">
+        <p14:creationId xmlns:p14="http://schemas.microsoft.com/office/powerpoint/2010/main" val="463478691"/>
       </p:ext>
     </p:extLst>
   </p:cSld>
@@ -9585,6 +12819,13 @@
                 <a:r>
                   <a:rPr lang="en-US" dirty="0"/>
                   <a:t>Binomial fluctuation of the particle count</a:t>
+                </a:r>
+              </a:p>
+              <a:p>
+                <a:pPr lvl="1"/>
+                <a:r>
+                  <a:rPr lang="en-US" dirty="0"/>
+                  <a:t>Fit errors</a:t>
                 </a:r>
                 <a:endParaRPr lang="it-IT" dirty="0"/>
               </a:p>

--- a/slides/week6.pptx
+++ b/slides/week6.pptx
@@ -212,7 +212,7 @@
           <a:p>
             <a:fld id="{D7A422DF-4847-4D6E-BB97-9B75D56F5D74}" type="datetimeFigureOut">
               <a:rPr lang="it-IT" smtClean="0"/>
-              <a:t>12/08/2026</a:t>
+              <a:t>13/08/2026</a:t>
             </a:fld>
             <a:endParaRPr lang="it-IT"/>
           </a:p>
@@ -2142,7 +2142,7 @@
           <a:p>
             <a:fld id="{4B734174-4AE7-4BE8-A29D-97641C0FB41A}" type="datetimeFigureOut">
               <a:rPr lang="it-IT" smtClean="0"/>
-              <a:t>12/08/2026</a:t>
+              <a:t>13/08/2026</a:t>
             </a:fld>
             <a:endParaRPr lang="it-IT"/>
           </a:p>
@@ -2340,7 +2340,7 @@
           <a:p>
             <a:fld id="{4B734174-4AE7-4BE8-A29D-97641C0FB41A}" type="datetimeFigureOut">
               <a:rPr lang="it-IT" smtClean="0"/>
-              <a:t>12/08/2026</a:t>
+              <a:t>13/08/2026</a:t>
             </a:fld>
             <a:endParaRPr lang="it-IT"/>
           </a:p>
@@ -2548,7 +2548,7 @@
           <a:p>
             <a:fld id="{4B734174-4AE7-4BE8-A29D-97641C0FB41A}" type="datetimeFigureOut">
               <a:rPr lang="it-IT" smtClean="0"/>
-              <a:t>12/08/2026</a:t>
+              <a:t>13/08/2026</a:t>
             </a:fld>
             <a:endParaRPr lang="it-IT"/>
           </a:p>
@@ -2746,7 +2746,7 @@
           <a:p>
             <a:fld id="{4B734174-4AE7-4BE8-A29D-97641C0FB41A}" type="datetimeFigureOut">
               <a:rPr lang="it-IT" smtClean="0"/>
-              <a:t>12/08/2026</a:t>
+              <a:t>13/08/2026</a:t>
             </a:fld>
             <a:endParaRPr lang="it-IT"/>
           </a:p>
@@ -3021,7 +3021,7 @@
           <a:p>
             <a:fld id="{4B734174-4AE7-4BE8-A29D-97641C0FB41A}" type="datetimeFigureOut">
               <a:rPr lang="it-IT" smtClean="0"/>
-              <a:t>12/08/2026</a:t>
+              <a:t>13/08/2026</a:t>
             </a:fld>
             <a:endParaRPr lang="it-IT"/>
           </a:p>
@@ -3286,7 +3286,7 @@
           <a:p>
             <a:fld id="{4B734174-4AE7-4BE8-A29D-97641C0FB41A}" type="datetimeFigureOut">
               <a:rPr lang="it-IT" smtClean="0"/>
-              <a:t>12/08/2026</a:t>
+              <a:t>13/08/2026</a:t>
             </a:fld>
             <a:endParaRPr lang="it-IT"/>
           </a:p>
@@ -3698,7 +3698,7 @@
           <a:p>
             <a:fld id="{4B734174-4AE7-4BE8-A29D-97641C0FB41A}" type="datetimeFigureOut">
               <a:rPr lang="it-IT" smtClean="0"/>
-              <a:t>12/08/2026</a:t>
+              <a:t>13/08/2026</a:t>
             </a:fld>
             <a:endParaRPr lang="it-IT"/>
           </a:p>
@@ -3839,7 +3839,7 @@
           <a:p>
             <a:fld id="{4B734174-4AE7-4BE8-A29D-97641C0FB41A}" type="datetimeFigureOut">
               <a:rPr lang="it-IT" smtClean="0"/>
-              <a:t>12/08/2026</a:t>
+              <a:t>13/08/2026</a:t>
             </a:fld>
             <a:endParaRPr lang="it-IT"/>
           </a:p>
@@ -3952,7 +3952,7 @@
           <a:p>
             <a:fld id="{4B734174-4AE7-4BE8-A29D-97641C0FB41A}" type="datetimeFigureOut">
               <a:rPr lang="it-IT" smtClean="0"/>
-              <a:t>12/08/2026</a:t>
+              <a:t>13/08/2026</a:t>
             </a:fld>
             <a:endParaRPr lang="it-IT"/>
           </a:p>
@@ -4263,7 +4263,7 @@
           <a:p>
             <a:fld id="{4B734174-4AE7-4BE8-A29D-97641C0FB41A}" type="datetimeFigureOut">
               <a:rPr lang="it-IT" smtClean="0"/>
-              <a:t>12/08/2026</a:t>
+              <a:t>13/08/2026</a:t>
             </a:fld>
             <a:endParaRPr lang="it-IT"/>
           </a:p>
@@ -4551,7 +4551,7 @@
           <a:p>
             <a:fld id="{4B734174-4AE7-4BE8-A29D-97641C0FB41A}" type="datetimeFigureOut">
               <a:rPr lang="it-IT" smtClean="0"/>
-              <a:t>12/08/2026</a:t>
+              <a:t>13/08/2026</a:t>
             </a:fld>
             <a:endParaRPr lang="it-IT"/>
           </a:p>
@@ -4792,7 +4792,7 @@
           <a:p>
             <a:fld id="{4B734174-4AE7-4BE8-A29D-97641C0FB41A}" type="datetimeFigureOut">
               <a:rPr lang="it-IT" smtClean="0"/>
-              <a:t>12/08/2026</a:t>
+              <a:t>13/08/2026</a:t>
             </a:fld>
             <a:endParaRPr lang="it-IT"/>
           </a:p>
@@ -6256,8 +6256,8 @@
           </a:p>
         </p:txBody>
       </p:sp>
-      <mc:AlternateContent xmlns:mc="http://schemas.openxmlformats.org/markup-compatibility/2006">
-        <mc:Choice xmlns:a14="http://schemas.microsoft.com/office/drawing/2010/main" Requires="a14">
+      <mc:AlternateContent xmlns:mc="http://schemas.openxmlformats.org/markup-compatibility/2006" xmlns:a14="http://schemas.microsoft.com/office/drawing/2010/main">
+        <mc:Choice Requires="a14">
           <p:sp>
             <p:nvSpPr>
               <p:cNvPr id="8" name="Content Placeholder 7">
@@ -6339,7 +6339,7 @@
             </p:txBody>
           </p:sp>
         </mc:Choice>
-        <mc:Fallback>
+        <mc:Fallback xmlns="">
           <p:sp>
             <p:nvSpPr>
               <p:cNvPr id="8" name="Content Placeholder 7">
@@ -6688,8 +6688,8 @@
           </a:p>
         </p:txBody>
       </p:sp>
-      <mc:AlternateContent xmlns:mc="http://schemas.openxmlformats.org/markup-compatibility/2006">
-        <mc:Choice xmlns:a14="http://schemas.microsoft.com/office/drawing/2010/main" Requires="a14">
+      <mc:AlternateContent xmlns:mc="http://schemas.openxmlformats.org/markup-compatibility/2006" xmlns:a14="http://schemas.microsoft.com/office/drawing/2010/main">
+        <mc:Choice Requires="a14">
           <p:sp>
             <p:nvSpPr>
               <p:cNvPr id="8" name="Content Placeholder 7">
@@ -6794,7 +6794,7 @@
             </p:txBody>
           </p:sp>
         </mc:Choice>
-        <mc:Fallback>
+        <mc:Fallback xmlns="">
           <p:sp>
             <p:nvSpPr>
               <p:cNvPr id="8" name="Content Placeholder 7">
@@ -7740,8 +7740,8 @@
           </a:fontRef>
         </p:style>
       </p:cxnSp>
-      <mc:AlternateContent xmlns:mc="http://schemas.openxmlformats.org/markup-compatibility/2006">
-        <mc:Choice xmlns:a14="http://schemas.microsoft.com/office/drawing/2010/main" Requires="a14">
+      <mc:AlternateContent xmlns:mc="http://schemas.openxmlformats.org/markup-compatibility/2006" xmlns:a14="http://schemas.microsoft.com/office/drawing/2010/main">
+        <mc:Choice Requires="a14">
           <p:sp>
             <p:nvSpPr>
               <p:cNvPr id="24" name="Rectangle: Rounded Corners 23">
@@ -7834,7 +7834,7 @@
             </p:txBody>
           </p:sp>
         </mc:Choice>
-        <mc:Fallback>
+        <mc:Fallback xmlns="">
           <p:sp>
             <p:nvSpPr>
               <p:cNvPr id="24" name="Rectangle: Rounded Corners 23">
@@ -8230,8 +8230,8 @@
           </a:p>
         </p:txBody>
       </p:sp>
-      <mc:AlternateContent xmlns:mc="http://schemas.openxmlformats.org/markup-compatibility/2006">
-        <mc:Choice xmlns:a14="http://schemas.microsoft.com/office/drawing/2010/main" Requires="a14">
+      <mc:AlternateContent xmlns:mc="http://schemas.openxmlformats.org/markup-compatibility/2006" xmlns:a14="http://schemas.microsoft.com/office/drawing/2010/main">
+        <mc:Choice Requires="a14">
           <p:sp>
             <p:nvSpPr>
               <p:cNvPr id="8" name="Content Placeholder 7">
@@ -8699,7 +8699,7 @@
             </p:txBody>
           </p:sp>
         </mc:Choice>
-        <mc:Fallback>
+        <mc:Fallback xmlns="">
           <p:sp>
             <p:nvSpPr>
               <p:cNvPr id="8" name="Content Placeholder 7">
@@ -8787,8 +8787,8 @@
           </a:fontRef>
         </p:style>
       </p:cxnSp>
-      <mc:AlternateContent xmlns:mc="http://schemas.openxmlformats.org/markup-compatibility/2006">
-        <mc:Choice xmlns:a14="http://schemas.microsoft.com/office/drawing/2010/main" Requires="a14">
+      <mc:AlternateContent xmlns:mc="http://schemas.openxmlformats.org/markup-compatibility/2006" xmlns:a14="http://schemas.microsoft.com/office/drawing/2010/main">
+        <mc:Choice Requires="a14">
           <p:sp>
             <p:nvSpPr>
               <p:cNvPr id="18" name="Rectangle: Rounded Corners 17">
@@ -9161,7 +9161,7 @@
             </p:txBody>
           </p:sp>
         </mc:Choice>
-        <mc:Fallback>
+        <mc:Fallback xmlns="">
           <p:sp>
             <p:nvSpPr>
               <p:cNvPr id="18" name="Rectangle: Rounded Corners 17">
@@ -9255,8 +9255,8 @@
           </a:fontRef>
         </p:style>
       </p:cxnSp>
-      <mc:AlternateContent xmlns:mc="http://schemas.openxmlformats.org/markup-compatibility/2006">
-        <mc:Choice xmlns:a14="http://schemas.microsoft.com/office/drawing/2010/main" Requires="a14">
+      <mc:AlternateContent xmlns:mc="http://schemas.openxmlformats.org/markup-compatibility/2006" xmlns:a14="http://schemas.microsoft.com/office/drawing/2010/main">
+        <mc:Choice Requires="a14">
           <p:sp>
             <p:nvSpPr>
               <p:cNvPr id="20" name="Rectangle: Rounded Corners 19">
@@ -9326,16 +9326,7 @@
                           </a:solidFill>
                           <a:latin typeface="Cambria Math" panose="02040503050406030204" pitchFamily="18" charset="0"/>
                         </a:rPr>
-                        <m:t>79.5</m:t>
-                      </m:r>
-                      <m:r>
-                        <a:rPr lang="en-US" sz="2000" b="0" i="1" smtClean="0">
-                          <a:solidFill>
-                            <a:schemeClr val="tx1"/>
-                          </a:solidFill>
-                          <a:latin typeface="Cambria Math" panose="02040503050406030204" pitchFamily="18" charset="0"/>
-                        </a:rPr>
-                        <m:t> </m:t>
+                        <m:t>79.5 </m:t>
                       </m:r>
                       <m:r>
                         <a:rPr lang="en-US" sz="2000" b="0" i="1" smtClean="0">
@@ -9370,7 +9361,7 @@
             </p:txBody>
           </p:sp>
         </mc:Choice>
-        <mc:Fallback>
+        <mc:Fallback xmlns="">
           <p:sp>
             <p:nvSpPr>
               <p:cNvPr id="20" name="Rectangle: Rounded Corners 19">
@@ -10111,8 +10102,8 @@
           </a:fontRef>
         </p:style>
       </p:cxnSp>
-      <mc:AlternateContent xmlns:mc="http://schemas.openxmlformats.org/markup-compatibility/2006">
-        <mc:Choice xmlns:a14="http://schemas.microsoft.com/office/drawing/2010/main" Requires="a14">
+      <mc:AlternateContent xmlns:mc="http://schemas.openxmlformats.org/markup-compatibility/2006" xmlns:a14="http://schemas.microsoft.com/office/drawing/2010/main">
+        <mc:Choice Requires="a14">
           <p:sp>
             <p:nvSpPr>
               <p:cNvPr id="24" name="Rectangle: Rounded Corners 23">
@@ -10180,25 +10171,7 @@
                         </a:solidFill>
                         <a:latin typeface="Cambria Math" panose="02040503050406030204" pitchFamily="18" charset="0"/>
                       </a:rPr>
-                      <m:t>∼</m:t>
-                    </m:r>
-                    <m:r>
-                      <a:rPr lang="en-US" sz="2000" b="0" i="1" smtClean="0">
-                        <a:solidFill>
-                          <a:schemeClr val="tx1"/>
-                        </a:solidFill>
-                        <a:latin typeface="Cambria Math" panose="02040503050406030204" pitchFamily="18" charset="0"/>
-                      </a:rPr>
-                      <m:t>8</m:t>
-                    </m:r>
-                    <m:r>
-                      <a:rPr lang="en-US" sz="2000" b="0" i="1" smtClean="0">
-                        <a:solidFill>
-                          <a:schemeClr val="tx1"/>
-                        </a:solidFill>
-                        <a:latin typeface="Cambria Math" panose="02040503050406030204" pitchFamily="18" charset="0"/>
-                      </a:rPr>
-                      <m:t> </m:t>
+                      <m:t>∼8 </m:t>
                     </m:r>
                     <m:r>
                       <m:rPr>
@@ -10269,7 +10242,7 @@
             </p:txBody>
           </p:sp>
         </mc:Choice>
-        <mc:Fallback>
+        <mc:Fallback xmlns="">
           <p:sp>
             <p:nvSpPr>
               <p:cNvPr id="24" name="Rectangle: Rounded Corners 23">
@@ -10927,8 +10900,8 @@
           </a:p>
         </p:txBody>
       </p:sp>
-      <mc:AlternateContent xmlns:mc="http://schemas.openxmlformats.org/markup-compatibility/2006">
-        <mc:Choice xmlns:a14="http://schemas.microsoft.com/office/drawing/2010/main" Requires="a14">
+      <mc:AlternateContent xmlns:mc="http://schemas.openxmlformats.org/markup-compatibility/2006" xmlns:a14="http://schemas.microsoft.com/office/drawing/2010/main">
+        <mc:Choice Requires="a14">
           <p:graphicFrame>
             <p:nvGraphicFramePr>
               <p:cNvPr id="11" name="Segnaposto contenuto 10">
@@ -11864,7 +11837,7 @@
             </a:graphic>
           </p:graphicFrame>
         </mc:Choice>
-        <mc:Fallback>
+        <mc:Fallback xmlns="">
           <p:graphicFrame>
             <p:nvGraphicFramePr>
               <p:cNvPr id="11" name="Segnaposto contenuto 10">
@@ -12825,7 +12798,28 @@
                 <a:pPr lvl="1"/>
                 <a:r>
                   <a:rPr lang="en-US" dirty="0"/>
-                  <a:t>Fit errors</a:t>
+                  <a:t>Fit errors (</a:t>
+                </a:r>
+                <a14:m>
+                  <m:oMath xmlns:m="http://schemas.openxmlformats.org/officeDocument/2006/math">
+                    <m:r>
+                      <a:rPr lang="en-US" b="0" i="1" smtClean="0">
+                        <a:latin typeface="Cambria Math" panose="02040503050406030204" pitchFamily="18" charset="0"/>
+                      </a:rPr>
+                      <m:t>&lt;0.001%</m:t>
+                    </m:r>
+                  </m:oMath>
+                </a14:m>
+                <a:r>
+                  <a:rPr lang="en-US" dirty="0"/>
+                  <a:t>)</a:t>
+                </a:r>
+              </a:p>
+              <a:p>
+                <a:pPr lvl="1"/>
+                <a:r>
+                  <a:rPr lang="en-US" dirty="0"/>
+                  <a:t>Stability of the results during the whole run</a:t>
                 </a:r>
                 <a:endParaRPr lang="it-IT" dirty="0"/>
               </a:p>
@@ -13313,8 +13307,8 @@
           </a:p>
         </p:txBody>
       </p:sp>
-      <mc:AlternateContent xmlns:mc="http://schemas.openxmlformats.org/markup-compatibility/2006">
-        <mc:Choice xmlns:a14="http://schemas.microsoft.com/office/drawing/2010/main" Requires="a14">
+      <mc:AlternateContent xmlns:mc="http://schemas.openxmlformats.org/markup-compatibility/2006" xmlns:a14="http://schemas.microsoft.com/office/drawing/2010/main">
+        <mc:Choice Requires="a14">
           <p:sp>
             <p:nvSpPr>
               <p:cNvPr id="7" name="Content Placeholder 6">
@@ -13429,7 +13423,7 @@
             </p:txBody>
           </p:sp>
         </mc:Choice>
-        <mc:Fallback>
+        <mc:Fallback xmlns="">
           <p:sp>
             <p:nvSpPr>
               <p:cNvPr id="7" name="Content Placeholder 6">
@@ -13473,8 +13467,8 @@
           </p:sp>
         </mc:Fallback>
       </mc:AlternateContent>
-      <mc:AlternateContent xmlns:mc="http://schemas.openxmlformats.org/markup-compatibility/2006">
-        <mc:Choice xmlns:a14="http://schemas.microsoft.com/office/drawing/2010/main" Requires="a14">
+      <mc:AlternateContent xmlns:mc="http://schemas.openxmlformats.org/markup-compatibility/2006" xmlns:a14="http://schemas.microsoft.com/office/drawing/2010/main">
+        <mc:Choice Requires="a14">
           <p:sp>
             <p:nvSpPr>
               <p:cNvPr id="8" name="Oval 7">
@@ -13550,7 +13544,7 @@
             </p:txBody>
           </p:sp>
         </mc:Choice>
-        <mc:Fallback>
+        <mc:Fallback xmlns="">
           <p:sp>
             <p:nvSpPr>
               <p:cNvPr id="8" name="Oval 7">
@@ -13600,8 +13594,8 @@
           </p:sp>
         </mc:Fallback>
       </mc:AlternateContent>
-      <mc:AlternateContent xmlns:mc="http://schemas.openxmlformats.org/markup-compatibility/2006">
-        <mc:Choice xmlns:a14="http://schemas.microsoft.com/office/drawing/2010/main" Requires="a14">
+      <mc:AlternateContent xmlns:mc="http://schemas.openxmlformats.org/markup-compatibility/2006" xmlns:a14="http://schemas.microsoft.com/office/drawing/2010/main">
+        <mc:Choice Requires="a14">
           <p:sp>
             <p:nvSpPr>
               <p:cNvPr id="12" name="Oval 11">
@@ -13672,16 +13666,7 @@
                           </a:solidFill>
                           <a:latin typeface="Cambria Math" panose="02040503050406030204" pitchFamily="18" charset="0"/>
                         </a:rPr>
-                        <m:t>.03</m:t>
-                      </m:r>
-                      <m:r>
-                        <a:rPr lang="en-US" sz="2800" b="0" i="1" smtClean="0">
-                          <a:solidFill>
-                            <a:schemeClr val="tx1"/>
-                          </a:solidFill>
-                          <a:latin typeface="Cambria Math" panose="02040503050406030204" pitchFamily="18" charset="0"/>
-                        </a:rPr>
-                        <m:t>%</m:t>
+                        <m:t>.03%</m:t>
                       </m:r>
                     </m:oMath>
                   </m:oMathPara>
@@ -13695,7 +13680,7 @@
             </p:txBody>
           </p:sp>
         </mc:Choice>
-        <mc:Fallback>
+        <mc:Fallback xmlns="">
           <p:sp>
             <p:nvSpPr>
               <p:cNvPr id="12" name="Oval 11">
@@ -13745,8 +13730,8 @@
           </p:sp>
         </mc:Fallback>
       </mc:AlternateContent>
-      <mc:AlternateContent xmlns:mc="http://schemas.openxmlformats.org/markup-compatibility/2006">
-        <mc:Choice xmlns:a14="http://schemas.microsoft.com/office/drawing/2010/main" Requires="a14">
+      <mc:AlternateContent xmlns:mc="http://schemas.openxmlformats.org/markup-compatibility/2006" xmlns:a14="http://schemas.microsoft.com/office/drawing/2010/main">
+        <mc:Choice Requires="a14">
           <p:sp>
             <p:nvSpPr>
               <p:cNvPr id="16" name="Oval 15">
@@ -13817,16 +13802,7 @@
                           </a:solidFill>
                           <a:latin typeface="Cambria Math" panose="02040503050406030204" pitchFamily="18" charset="0"/>
                         </a:rPr>
-                        <m:t>.01</m:t>
-                      </m:r>
-                      <m:r>
-                        <a:rPr lang="en-US" sz="2800" b="0" i="1" smtClean="0">
-                          <a:solidFill>
-                            <a:schemeClr val="tx1"/>
-                          </a:solidFill>
-                          <a:latin typeface="Cambria Math" panose="02040503050406030204" pitchFamily="18" charset="0"/>
-                        </a:rPr>
-                        <m:t>%</m:t>
+                        <m:t>.01%</m:t>
                       </m:r>
                     </m:oMath>
                   </m:oMathPara>
@@ -13840,7 +13816,7 @@
             </p:txBody>
           </p:sp>
         </mc:Choice>
-        <mc:Fallback>
+        <mc:Fallback xmlns="">
           <p:sp>
             <p:nvSpPr>
               <p:cNvPr id="16" name="Oval 15">
@@ -13890,8 +13866,8 @@
           </p:sp>
         </mc:Fallback>
       </mc:AlternateContent>
-      <mc:AlternateContent xmlns:mc="http://schemas.openxmlformats.org/markup-compatibility/2006">
-        <mc:Choice xmlns:a14="http://schemas.microsoft.com/office/drawing/2010/main" Requires="a14">
+      <mc:AlternateContent xmlns:mc="http://schemas.openxmlformats.org/markup-compatibility/2006" xmlns:a14="http://schemas.microsoft.com/office/drawing/2010/main">
+        <mc:Choice Requires="a14">
           <p:sp>
             <p:nvSpPr>
               <p:cNvPr id="18" name="Oval 17">
@@ -14006,7 +13982,7 @@
             </p:txBody>
           </p:sp>
         </mc:Choice>
-        <mc:Fallback>
+        <mc:Fallback xmlns="">
           <p:sp>
             <p:nvSpPr>
               <p:cNvPr id="18" name="Oval 17">
@@ -14500,8 +14476,8 @@
           </a:p>
         </p:txBody>
       </p:sp>
-      <mc:AlternateContent xmlns:mc="http://schemas.openxmlformats.org/markup-compatibility/2006">
-        <mc:Choice xmlns:a14="http://schemas.microsoft.com/office/drawing/2010/main" Requires="a14">
+      <mc:AlternateContent xmlns:mc="http://schemas.openxmlformats.org/markup-compatibility/2006" xmlns:a14="http://schemas.microsoft.com/office/drawing/2010/main">
+        <mc:Choice Requires="a14">
           <p:sp>
             <p:nvSpPr>
               <p:cNvPr id="7" name="Content Placeholder 6">
@@ -14768,19 +14744,7 @@
                       <a:rPr lang="en-US" i="1">
                         <a:latin typeface="Cambria Math" panose="02040503050406030204" pitchFamily="18" charset="0"/>
                       </a:rPr>
-                      <m:t>∼</m:t>
-                    </m:r>
-                    <m:r>
-                      <a:rPr lang="en-US" i="1">
-                        <a:latin typeface="Cambria Math" panose="02040503050406030204" pitchFamily="18" charset="0"/>
-                      </a:rPr>
-                      <m:t>6.5</m:t>
-                    </m:r>
-                    <m:r>
-                      <a:rPr lang="en-US" i="1">
-                        <a:latin typeface="Cambria Math" panose="02040503050406030204" pitchFamily="18" charset="0"/>
-                      </a:rPr>
-                      <m:t> </m:t>
+                      <m:t>∼6.5 </m:t>
                     </m:r>
                     <m:r>
                       <a:rPr lang="en-US" i="1">
@@ -14847,7 +14811,7 @@
             </p:txBody>
           </p:sp>
         </mc:Choice>
-        <mc:Fallback>
+        <mc:Fallback xmlns="">
           <p:sp>
             <p:nvSpPr>
               <p:cNvPr id="7" name="Content Placeholder 6">
@@ -15200,8 +15164,8 @@
           </a:p>
         </p:txBody>
       </p:sp>
-      <mc:AlternateContent xmlns:mc="http://schemas.openxmlformats.org/markup-compatibility/2006">
-        <mc:Choice xmlns:a14="http://schemas.microsoft.com/office/drawing/2010/main" Requires="a14">
+      <mc:AlternateContent xmlns:mc="http://schemas.openxmlformats.org/markup-compatibility/2006" xmlns:a14="http://schemas.microsoft.com/office/drawing/2010/main">
+        <mc:Choice Requires="a14">
           <p:sp>
             <p:nvSpPr>
               <p:cNvPr id="7" name="Content Placeholder 6">
@@ -15327,7 +15291,7 @@
             </p:txBody>
           </p:sp>
         </mc:Choice>
-        <mc:Fallback>
+        <mc:Fallback xmlns="">
           <p:sp>
             <p:nvSpPr>
               <p:cNvPr id="7" name="Content Placeholder 6">
@@ -15680,8 +15644,8 @@
           </a:p>
         </p:txBody>
       </p:sp>
-      <mc:AlternateContent xmlns:mc="http://schemas.openxmlformats.org/markup-compatibility/2006">
-        <mc:Choice xmlns:a14="http://schemas.microsoft.com/office/drawing/2010/main" Requires="a14">
+      <mc:AlternateContent xmlns:mc="http://schemas.openxmlformats.org/markup-compatibility/2006" xmlns:a14="http://schemas.microsoft.com/office/drawing/2010/main">
+        <mc:Choice Requires="a14">
           <p:sp>
             <p:nvSpPr>
               <p:cNvPr id="7" name="Content Placeholder 6">
@@ -15770,7 +15734,7 @@
             </p:txBody>
           </p:sp>
         </mc:Choice>
-        <mc:Fallback>
+        <mc:Fallback xmlns="">
           <p:sp>
             <p:nvSpPr>
               <p:cNvPr id="7" name="Content Placeholder 6">
@@ -16123,8 +16087,8 @@
           </a:p>
         </p:txBody>
       </p:sp>
-      <mc:AlternateContent xmlns:mc="http://schemas.openxmlformats.org/markup-compatibility/2006">
-        <mc:Choice xmlns:a14="http://schemas.microsoft.com/office/drawing/2010/main" Requires="a14">
+      <mc:AlternateContent xmlns:mc="http://schemas.openxmlformats.org/markup-compatibility/2006" xmlns:a14="http://schemas.microsoft.com/office/drawing/2010/main">
+        <mc:Choice Requires="a14">
           <p:sp>
             <p:nvSpPr>
               <p:cNvPr id="7" name="Content Placeholder 6">
@@ -16213,7 +16177,7 @@
             </p:txBody>
           </p:sp>
         </mc:Choice>
-        <mc:Fallback>
+        <mc:Fallback xmlns="">
           <p:sp>
             <p:nvSpPr>
               <p:cNvPr id="7" name="Content Placeholder 6">

--- a/slides/week6.pptx
+++ b/slides/week6.pptx
@@ -212,7 +212,7 @@
           <a:p>
             <a:fld id="{D7A422DF-4847-4D6E-BB97-9B75D56F5D74}" type="datetimeFigureOut">
               <a:rPr lang="it-IT" smtClean="0"/>
-              <a:t>13/08/2026</a:t>
+              <a:t>23/08/2026</a:t>
             </a:fld>
             <a:endParaRPr lang="it-IT"/>
           </a:p>
@@ -2142,7 +2142,7 @@
           <a:p>
             <a:fld id="{4B734174-4AE7-4BE8-A29D-97641C0FB41A}" type="datetimeFigureOut">
               <a:rPr lang="it-IT" smtClean="0"/>
-              <a:t>13/08/2026</a:t>
+              <a:t>23/08/2026</a:t>
             </a:fld>
             <a:endParaRPr lang="it-IT"/>
           </a:p>
@@ -2340,7 +2340,7 @@
           <a:p>
             <a:fld id="{4B734174-4AE7-4BE8-A29D-97641C0FB41A}" type="datetimeFigureOut">
               <a:rPr lang="it-IT" smtClean="0"/>
-              <a:t>13/08/2026</a:t>
+              <a:t>23/08/2026</a:t>
             </a:fld>
             <a:endParaRPr lang="it-IT"/>
           </a:p>
@@ -2548,7 +2548,7 @@
           <a:p>
             <a:fld id="{4B734174-4AE7-4BE8-A29D-97641C0FB41A}" type="datetimeFigureOut">
               <a:rPr lang="it-IT" smtClean="0"/>
-              <a:t>13/08/2026</a:t>
+              <a:t>23/08/2026</a:t>
             </a:fld>
             <a:endParaRPr lang="it-IT"/>
           </a:p>
@@ -2746,7 +2746,7 @@
           <a:p>
             <a:fld id="{4B734174-4AE7-4BE8-A29D-97641C0FB41A}" type="datetimeFigureOut">
               <a:rPr lang="it-IT" smtClean="0"/>
-              <a:t>13/08/2026</a:t>
+              <a:t>23/08/2026</a:t>
             </a:fld>
             <a:endParaRPr lang="it-IT"/>
           </a:p>
@@ -3021,7 +3021,7 @@
           <a:p>
             <a:fld id="{4B734174-4AE7-4BE8-A29D-97641C0FB41A}" type="datetimeFigureOut">
               <a:rPr lang="it-IT" smtClean="0"/>
-              <a:t>13/08/2026</a:t>
+              <a:t>23/08/2026</a:t>
             </a:fld>
             <a:endParaRPr lang="it-IT"/>
           </a:p>
@@ -3286,7 +3286,7 @@
           <a:p>
             <a:fld id="{4B734174-4AE7-4BE8-A29D-97641C0FB41A}" type="datetimeFigureOut">
               <a:rPr lang="it-IT" smtClean="0"/>
-              <a:t>13/08/2026</a:t>
+              <a:t>23/08/2026</a:t>
             </a:fld>
             <a:endParaRPr lang="it-IT"/>
           </a:p>
@@ -3698,7 +3698,7 @@
           <a:p>
             <a:fld id="{4B734174-4AE7-4BE8-A29D-97641C0FB41A}" type="datetimeFigureOut">
               <a:rPr lang="it-IT" smtClean="0"/>
-              <a:t>13/08/2026</a:t>
+              <a:t>23/08/2026</a:t>
             </a:fld>
             <a:endParaRPr lang="it-IT"/>
           </a:p>
@@ -3839,7 +3839,7 @@
           <a:p>
             <a:fld id="{4B734174-4AE7-4BE8-A29D-97641C0FB41A}" type="datetimeFigureOut">
               <a:rPr lang="it-IT" smtClean="0"/>
-              <a:t>13/08/2026</a:t>
+              <a:t>23/08/2026</a:t>
             </a:fld>
             <a:endParaRPr lang="it-IT"/>
           </a:p>
@@ -3952,7 +3952,7 @@
           <a:p>
             <a:fld id="{4B734174-4AE7-4BE8-A29D-97641C0FB41A}" type="datetimeFigureOut">
               <a:rPr lang="it-IT" smtClean="0"/>
-              <a:t>13/08/2026</a:t>
+              <a:t>23/08/2026</a:t>
             </a:fld>
             <a:endParaRPr lang="it-IT"/>
           </a:p>
@@ -4263,7 +4263,7 @@
           <a:p>
             <a:fld id="{4B734174-4AE7-4BE8-A29D-97641C0FB41A}" type="datetimeFigureOut">
               <a:rPr lang="it-IT" smtClean="0"/>
-              <a:t>13/08/2026</a:t>
+              <a:t>23/08/2026</a:t>
             </a:fld>
             <a:endParaRPr lang="it-IT"/>
           </a:p>
@@ -4551,7 +4551,7 @@
           <a:p>
             <a:fld id="{4B734174-4AE7-4BE8-A29D-97641C0FB41A}" type="datetimeFigureOut">
               <a:rPr lang="it-IT" smtClean="0"/>
-              <a:t>13/08/2026</a:t>
+              <a:t>23/08/2026</a:t>
             </a:fld>
             <a:endParaRPr lang="it-IT"/>
           </a:p>
@@ -4792,7 +4792,7 @@
           <a:p>
             <a:fld id="{4B734174-4AE7-4BE8-A29D-97641C0FB41A}" type="datetimeFigureOut">
               <a:rPr lang="it-IT" smtClean="0"/>
-              <a:t>13/08/2026</a:t>
+              <a:t>23/08/2026</a:t>
             </a:fld>
             <a:endParaRPr lang="it-IT"/>
           </a:p>
@@ -7391,310 +7391,352 @@
           </a:prstGeom>
         </p:spPr>
       </p:pic>
-      <p:pic>
-        <p:nvPicPr>
-          <p:cNvPr id="7" name="Picture 6">
-            <a:extLst>
-              <a:ext uri="{FF2B5EF4-FFF2-40B4-BE49-F238E27FC236}">
-                <a16:creationId xmlns:a16="http://schemas.microsoft.com/office/drawing/2014/main" id="{75056139-0729-303B-C7A2-C103BD4EB36F}"/>
-              </a:ext>
-            </a:extLst>
-          </p:cNvPr>
-          <p:cNvPicPr>
-            <a:picLocks noChangeAspect="1"/>
-          </p:cNvPicPr>
+      <p:grpSp>
+        <p:nvGrpSpPr>
+          <p:cNvPr id="3" name="Group 2">
+            <a:extLst>
+              <a:ext uri="{FF2B5EF4-FFF2-40B4-BE49-F238E27FC236}">
+                <a16:creationId xmlns:a16="http://schemas.microsoft.com/office/drawing/2014/main" id="{F98BA6A9-F03D-3E04-EB7E-5999CCA31CF5}"/>
+              </a:ext>
+            </a:extLst>
+          </p:cNvPr>
+          <p:cNvGrpSpPr/>
           <p:nvPr/>
-        </p:nvPicPr>
-        <p:blipFill>
-          <a:blip r:embed="rId4">
-            <a:extLst>
-              <a:ext uri="{28A0092B-C50C-407E-A947-70E740481C1C}">
-                <a14:useLocalDpi xmlns:a14="http://schemas.microsoft.com/office/drawing/2010/main" val="0"/>
-              </a:ext>
-            </a:extLst>
-          </a:blip>
-          <a:srcRect t="6396"/>
-          <a:stretch>
-            <a:fillRect/>
-          </a:stretch>
-        </p:blipFill>
-        <p:spPr>
+        </p:nvGrpSpPr>
+        <p:grpSpPr>
           <a:xfrm>
-            <a:off x="7928946" y="1451083"/>
-            <a:ext cx="2687477" cy="1800000"/>
+            <a:off x="6426200" y="1451083"/>
+            <a:ext cx="4954411" cy="1800000"/>
+            <a:chOff x="6426200" y="1451083"/>
+            <a:chExt cx="4954411" cy="1800000"/>
           </a:xfrm>
-          <a:prstGeom prst="rect">
-            <a:avLst/>
-          </a:prstGeom>
-          <a:ln w="38100">
+        </p:grpSpPr>
+        <p:pic>
+          <p:nvPicPr>
+            <p:cNvPr id="7" name="Picture 6">
+              <a:extLst>
+                <a:ext uri="{FF2B5EF4-FFF2-40B4-BE49-F238E27FC236}">
+                  <a16:creationId xmlns:a16="http://schemas.microsoft.com/office/drawing/2014/main" id="{75056139-0729-303B-C7A2-C103BD4EB36F}"/>
+                </a:ext>
+              </a:extLst>
+            </p:cNvPr>
+            <p:cNvPicPr>
+              <a:picLocks noChangeAspect="1"/>
+            </p:cNvPicPr>
+            <p:nvPr/>
+          </p:nvPicPr>
+          <p:blipFill>
+            <a:blip r:embed="rId4">
+              <a:extLst>
+                <a:ext uri="{28A0092B-C50C-407E-A947-70E740481C1C}">
+                  <a14:useLocalDpi xmlns:a14="http://schemas.microsoft.com/office/drawing/2010/main" val="0"/>
+                </a:ext>
+              </a:extLst>
+            </a:blip>
+            <a:srcRect t="6396"/>
+            <a:stretch>
+              <a:fillRect/>
+            </a:stretch>
+          </p:blipFill>
+          <p:spPr>
+            <a:xfrm>
+              <a:off x="7928946" y="1451083"/>
+              <a:ext cx="2687477" cy="1800000"/>
+            </a:xfrm>
+            <a:prstGeom prst="rect">
+              <a:avLst/>
+            </a:prstGeom>
+            <a:ln w="38100">
+              <a:solidFill>
+                <a:srgbClr val="FFC000"/>
+              </a:solidFill>
+            </a:ln>
+          </p:spPr>
+        </p:pic>
+        <p:sp>
+          <p:nvSpPr>
+            <p:cNvPr id="16" name="Rectangle: Rounded Corners 15">
+              <a:extLst>
+                <a:ext uri="{FF2B5EF4-FFF2-40B4-BE49-F238E27FC236}">
+                  <a16:creationId xmlns:a16="http://schemas.microsoft.com/office/drawing/2014/main" id="{2522C0AE-61F4-F6C4-A902-7D9FEAE91874}"/>
+                </a:ext>
+              </a:extLst>
+            </p:cNvPr>
+            <p:cNvSpPr/>
+            <p:nvPr/>
+          </p:nvSpPr>
+          <p:spPr>
+            <a:xfrm>
+              <a:off x="9875624" y="1845194"/>
+              <a:ext cx="1504987" cy="593124"/>
+            </a:xfrm>
+            <a:prstGeom prst="roundRect">
+              <a:avLst/>
+            </a:prstGeom>
             <a:solidFill>
-              <a:srgbClr val="FFC000"/>
+              <a:schemeClr val="bg1"/>
             </a:solidFill>
-          </a:ln>
-        </p:spPr>
-      </p:pic>
-      <p:pic>
-        <p:nvPicPr>
-          <p:cNvPr id="11" name="Picture 10">
-            <a:extLst>
-              <a:ext uri="{FF2B5EF4-FFF2-40B4-BE49-F238E27FC236}">
-                <a16:creationId xmlns:a16="http://schemas.microsoft.com/office/drawing/2014/main" id="{6CB6A3EB-6E0A-3054-C38C-F7C527E94C7A}"/>
-              </a:ext>
-            </a:extLst>
-          </p:cNvPr>
-          <p:cNvPicPr>
-            <a:picLocks noChangeAspect="1"/>
-          </p:cNvPicPr>
-          <p:nvPr/>
-        </p:nvPicPr>
-        <p:blipFill>
-          <a:blip r:embed="rId5">
-            <a:extLst>
-              <a:ext uri="{28A0092B-C50C-407E-A947-70E740481C1C}">
-                <a14:useLocalDpi xmlns:a14="http://schemas.microsoft.com/office/drawing/2010/main" val="0"/>
-              </a:ext>
-            </a:extLst>
-          </a:blip>
-          <a:srcRect t="5355"/>
-          <a:stretch>
-            <a:fillRect/>
-          </a:stretch>
-        </p:blipFill>
-        <p:spPr>
-          <a:xfrm>
-            <a:off x="9272684" y="4466656"/>
-            <a:ext cx="2657940" cy="1800000"/>
-          </a:xfrm>
-          <a:prstGeom prst="rect">
-            <a:avLst/>
-          </a:prstGeom>
-          <a:ln w="38100">
-            <a:solidFill>
-              <a:srgbClr val="FFC000"/>
-            </a:solidFill>
-          </a:ln>
-        </p:spPr>
-      </p:pic>
-      <p:sp>
-        <p:nvSpPr>
-          <p:cNvPr id="12" name="Rectangle: Rounded Corners 11">
-            <a:extLst>
-              <a:ext uri="{FF2B5EF4-FFF2-40B4-BE49-F238E27FC236}">
-                <a16:creationId xmlns:a16="http://schemas.microsoft.com/office/drawing/2014/main" id="{10C0185F-512B-741C-9B82-3151193FC7CF}"/>
-              </a:ext>
-            </a:extLst>
-          </p:cNvPr>
-          <p:cNvSpPr/>
-          <p:nvPr/>
-        </p:nvSpPr>
-        <p:spPr>
-          <a:xfrm>
-            <a:off x="10601306" y="3873532"/>
-            <a:ext cx="1504987" cy="593124"/>
-          </a:xfrm>
-          <a:prstGeom prst="roundRect">
-            <a:avLst/>
-          </a:prstGeom>
-          <a:solidFill>
-            <a:schemeClr val="bg1"/>
-          </a:solidFill>
-          <a:ln w="38100">
-            <a:solidFill>
-              <a:srgbClr val="FFC000"/>
-            </a:solidFill>
-          </a:ln>
-        </p:spPr>
-        <p:style>
-          <a:lnRef idx="2">
-            <a:schemeClr val="accent1">
-              <a:shade val="15000"/>
-            </a:schemeClr>
-          </a:lnRef>
-          <a:fillRef idx="1">
-            <a:schemeClr val="accent1"/>
-          </a:fillRef>
-          <a:effectRef idx="0">
-            <a:schemeClr val="accent1"/>
-          </a:effectRef>
-          <a:fontRef idx="minor">
-            <a:schemeClr val="lt1"/>
-          </a:fontRef>
-        </p:style>
-        <p:txBody>
-          <a:bodyPr rtlCol="0" anchor="ctr"/>
-          <a:lstStyle/>
-          <a:p>
-            <a:pPr algn="ctr"/>
-            <a:r>
-              <a:rPr lang="en-US" sz="2000" dirty="0">
+            <a:ln w="38100">
+              <a:solidFill>
+                <a:srgbClr val="FFC000"/>
+              </a:solidFill>
+            </a:ln>
+          </p:spPr>
+          <p:style>
+            <a:lnRef idx="2">
+              <a:schemeClr val="accent1">
+                <a:shade val="15000"/>
+              </a:schemeClr>
+            </a:lnRef>
+            <a:fillRef idx="1">
+              <a:schemeClr val="accent1"/>
+            </a:fillRef>
+            <a:effectRef idx="0">
+              <a:schemeClr val="accent1"/>
+            </a:effectRef>
+            <a:fontRef idx="minor">
+              <a:schemeClr val="lt1"/>
+            </a:fontRef>
+          </p:style>
+          <p:txBody>
+            <a:bodyPr rtlCol="0" anchor="ctr"/>
+            <a:lstStyle/>
+            <a:p>
+              <a:pPr algn="ctr"/>
+              <a:r>
+                <a:rPr lang="en-US" sz="2000" dirty="0">
+                  <a:solidFill>
+                    <a:schemeClr val="tx1"/>
+                  </a:solidFill>
+                </a:rPr>
+                <a:t>INSIDE</a:t>
+              </a:r>
+              <a:endParaRPr lang="it-IT" sz="2000" dirty="0">
                 <a:solidFill>
                   <a:schemeClr val="tx1"/>
                 </a:solidFill>
-              </a:rPr>
-              <a:t>OUTSIDE</a:t>
-            </a:r>
-            <a:endParaRPr lang="it-IT" sz="2000" dirty="0">
+              </a:endParaRPr>
+            </a:p>
+          </p:txBody>
+        </p:sp>
+        <p:cxnSp>
+          <p:nvCxnSpPr>
+            <p:cNvPr id="17" name="Straight Arrow Connector 16">
+              <a:extLst>
+                <a:ext uri="{FF2B5EF4-FFF2-40B4-BE49-F238E27FC236}">
+                  <a16:creationId xmlns:a16="http://schemas.microsoft.com/office/drawing/2014/main" id="{33A8177B-3AB5-4C1C-E0D3-2DFD72119160}"/>
+                </a:ext>
+              </a:extLst>
+            </p:cNvPr>
+            <p:cNvCxnSpPr>
+              <a:cxnSpLocks/>
+            </p:cNvCxnSpPr>
+            <p:nvPr/>
+          </p:nvCxnSpPr>
+          <p:spPr>
+            <a:xfrm flipH="1" flipV="1">
+              <a:off x="6426200" y="2282677"/>
+              <a:ext cx="1502746" cy="155641"/>
+            </a:xfrm>
+            <a:prstGeom prst="straightConnector1">
+              <a:avLst/>
+            </a:prstGeom>
+            <a:ln w="38100">
               <a:solidFill>
-                <a:schemeClr val="tx1"/>
+                <a:srgbClr val="FFC000"/>
               </a:solidFill>
-            </a:endParaRPr>
-          </a:p>
-        </p:txBody>
-      </p:sp>
-      <p:sp>
-        <p:nvSpPr>
-          <p:cNvPr id="16" name="Rectangle: Rounded Corners 15">
-            <a:extLst>
-              <a:ext uri="{FF2B5EF4-FFF2-40B4-BE49-F238E27FC236}">
-                <a16:creationId xmlns:a16="http://schemas.microsoft.com/office/drawing/2014/main" id="{2522C0AE-61F4-F6C4-A902-7D9FEAE91874}"/>
-              </a:ext>
-            </a:extLst>
-          </p:cNvPr>
-          <p:cNvSpPr/>
+              <a:tailEnd type="triangle"/>
+            </a:ln>
+          </p:spPr>
+          <p:style>
+            <a:lnRef idx="2">
+              <a:schemeClr val="accent1"/>
+            </a:lnRef>
+            <a:fillRef idx="0">
+              <a:schemeClr val="accent1"/>
+            </a:fillRef>
+            <a:effectRef idx="1">
+              <a:schemeClr val="accent1"/>
+            </a:effectRef>
+            <a:fontRef idx="minor">
+              <a:schemeClr val="tx1"/>
+            </a:fontRef>
+          </p:style>
+        </p:cxnSp>
+      </p:grpSp>
+      <p:grpSp>
+        <p:nvGrpSpPr>
+          <p:cNvPr id="8" name="Group 7">
+            <a:extLst>
+              <a:ext uri="{FF2B5EF4-FFF2-40B4-BE49-F238E27FC236}">
+                <a16:creationId xmlns:a16="http://schemas.microsoft.com/office/drawing/2014/main" id="{7D1BE663-98D0-A4D6-C2C7-9DA50F806FFE}"/>
+              </a:ext>
+            </a:extLst>
+          </p:cNvPr>
+          <p:cNvGrpSpPr/>
           <p:nvPr/>
-        </p:nvSpPr>
-        <p:spPr>
+        </p:nvGrpSpPr>
+        <p:grpSpPr>
           <a:xfrm>
-            <a:off x="9875624" y="1845194"/>
-            <a:ext cx="1504987" cy="593124"/>
+            <a:off x="7806088" y="3873532"/>
+            <a:ext cx="4300205" cy="2393124"/>
+            <a:chOff x="7806088" y="3873532"/>
+            <a:chExt cx="4300205" cy="2393124"/>
           </a:xfrm>
-          <a:prstGeom prst="roundRect">
-            <a:avLst/>
-          </a:prstGeom>
-          <a:solidFill>
-            <a:schemeClr val="bg1"/>
-          </a:solidFill>
-          <a:ln w="38100">
+        </p:grpSpPr>
+        <p:pic>
+          <p:nvPicPr>
+            <p:cNvPr id="11" name="Picture 10">
+              <a:extLst>
+                <a:ext uri="{FF2B5EF4-FFF2-40B4-BE49-F238E27FC236}">
+                  <a16:creationId xmlns:a16="http://schemas.microsoft.com/office/drawing/2014/main" id="{6CB6A3EB-6E0A-3054-C38C-F7C527E94C7A}"/>
+                </a:ext>
+              </a:extLst>
+            </p:cNvPr>
+            <p:cNvPicPr>
+              <a:picLocks noChangeAspect="1"/>
+            </p:cNvPicPr>
+            <p:nvPr/>
+          </p:nvPicPr>
+          <p:blipFill>
+            <a:blip r:embed="rId5">
+              <a:extLst>
+                <a:ext uri="{28A0092B-C50C-407E-A947-70E740481C1C}">
+                  <a14:useLocalDpi xmlns:a14="http://schemas.microsoft.com/office/drawing/2010/main" val="0"/>
+                </a:ext>
+              </a:extLst>
+            </a:blip>
+            <a:srcRect t="5355"/>
+            <a:stretch>
+              <a:fillRect/>
+            </a:stretch>
+          </p:blipFill>
+          <p:spPr>
+            <a:xfrm>
+              <a:off x="9272684" y="4466656"/>
+              <a:ext cx="2657940" cy="1800000"/>
+            </a:xfrm>
+            <a:prstGeom prst="rect">
+              <a:avLst/>
+            </a:prstGeom>
+            <a:ln w="38100">
+              <a:solidFill>
+                <a:srgbClr val="FFC000"/>
+              </a:solidFill>
+            </a:ln>
+          </p:spPr>
+        </p:pic>
+        <p:sp>
+          <p:nvSpPr>
+            <p:cNvPr id="12" name="Rectangle: Rounded Corners 11">
+              <a:extLst>
+                <a:ext uri="{FF2B5EF4-FFF2-40B4-BE49-F238E27FC236}">
+                  <a16:creationId xmlns:a16="http://schemas.microsoft.com/office/drawing/2014/main" id="{10C0185F-512B-741C-9B82-3151193FC7CF}"/>
+                </a:ext>
+              </a:extLst>
+            </p:cNvPr>
+            <p:cNvSpPr/>
+            <p:nvPr/>
+          </p:nvSpPr>
+          <p:spPr>
+            <a:xfrm>
+              <a:off x="10601306" y="3873532"/>
+              <a:ext cx="1504987" cy="593124"/>
+            </a:xfrm>
+            <a:prstGeom prst="roundRect">
+              <a:avLst/>
+            </a:prstGeom>
             <a:solidFill>
-              <a:srgbClr val="FFC000"/>
+              <a:schemeClr val="bg1"/>
             </a:solidFill>
-          </a:ln>
-        </p:spPr>
-        <p:style>
-          <a:lnRef idx="2">
-            <a:schemeClr val="accent1">
-              <a:shade val="15000"/>
-            </a:schemeClr>
-          </a:lnRef>
-          <a:fillRef idx="1">
-            <a:schemeClr val="accent1"/>
-          </a:fillRef>
-          <a:effectRef idx="0">
-            <a:schemeClr val="accent1"/>
-          </a:effectRef>
-          <a:fontRef idx="minor">
-            <a:schemeClr val="lt1"/>
-          </a:fontRef>
-        </p:style>
-        <p:txBody>
-          <a:bodyPr rtlCol="0" anchor="ctr"/>
-          <a:lstStyle/>
-          <a:p>
-            <a:pPr algn="ctr"/>
-            <a:r>
-              <a:rPr lang="en-US" sz="2000" dirty="0">
+            <a:ln w="38100">
+              <a:solidFill>
+                <a:srgbClr val="FFC000"/>
+              </a:solidFill>
+            </a:ln>
+          </p:spPr>
+          <p:style>
+            <a:lnRef idx="2">
+              <a:schemeClr val="accent1">
+                <a:shade val="15000"/>
+              </a:schemeClr>
+            </a:lnRef>
+            <a:fillRef idx="1">
+              <a:schemeClr val="accent1"/>
+            </a:fillRef>
+            <a:effectRef idx="0">
+              <a:schemeClr val="accent1"/>
+            </a:effectRef>
+            <a:fontRef idx="minor">
+              <a:schemeClr val="lt1"/>
+            </a:fontRef>
+          </p:style>
+          <p:txBody>
+            <a:bodyPr rtlCol="0" anchor="ctr"/>
+            <a:lstStyle/>
+            <a:p>
+              <a:pPr algn="ctr"/>
+              <a:r>
+                <a:rPr lang="en-US" sz="2000" dirty="0">
+                  <a:solidFill>
+                    <a:schemeClr val="tx1"/>
+                  </a:solidFill>
+                </a:rPr>
+                <a:t>OUTSIDE</a:t>
+              </a:r>
+              <a:endParaRPr lang="it-IT" sz="2000" dirty="0">
                 <a:solidFill>
                   <a:schemeClr val="tx1"/>
                 </a:solidFill>
-              </a:rPr>
-              <a:t>INSIDE</a:t>
-            </a:r>
-            <a:endParaRPr lang="it-IT" sz="2000" dirty="0">
+              </a:endParaRPr>
+            </a:p>
+          </p:txBody>
+        </p:sp>
+        <p:cxnSp>
+          <p:nvCxnSpPr>
+            <p:cNvPr id="19" name="Straight Arrow Connector 18">
+              <a:extLst>
+                <a:ext uri="{FF2B5EF4-FFF2-40B4-BE49-F238E27FC236}">
+                  <a16:creationId xmlns:a16="http://schemas.microsoft.com/office/drawing/2014/main" id="{1F1607AC-B76D-07BC-F0E7-528BBEAFDA51}"/>
+                </a:ext>
+              </a:extLst>
+            </p:cNvPr>
+            <p:cNvCxnSpPr>
+              <a:cxnSpLocks/>
+            </p:cNvCxnSpPr>
+            <p:nvPr/>
+          </p:nvCxnSpPr>
+          <p:spPr>
+            <a:xfrm flipH="1" flipV="1">
+              <a:off x="7806088" y="5406917"/>
+              <a:ext cx="1466596" cy="279591"/>
+            </a:xfrm>
+            <a:prstGeom prst="straightConnector1">
+              <a:avLst/>
+            </a:prstGeom>
+            <a:ln w="38100">
               <a:solidFill>
-                <a:schemeClr val="tx1"/>
+                <a:srgbClr val="FFC000"/>
               </a:solidFill>
-            </a:endParaRPr>
-          </a:p>
-        </p:txBody>
-      </p:sp>
-      <p:cxnSp>
-        <p:nvCxnSpPr>
-          <p:cNvPr id="17" name="Straight Arrow Connector 16">
-            <a:extLst>
-              <a:ext uri="{FF2B5EF4-FFF2-40B4-BE49-F238E27FC236}">
-                <a16:creationId xmlns:a16="http://schemas.microsoft.com/office/drawing/2014/main" id="{33A8177B-3AB5-4C1C-E0D3-2DFD72119160}"/>
-              </a:ext>
-            </a:extLst>
-          </p:cNvPr>
-          <p:cNvCxnSpPr>
-            <a:cxnSpLocks/>
-          </p:cNvCxnSpPr>
-          <p:nvPr/>
-        </p:nvCxnSpPr>
-        <p:spPr>
-          <a:xfrm flipH="1" flipV="1">
-            <a:off x="6426200" y="2282677"/>
-            <a:ext cx="1502746" cy="155641"/>
-          </a:xfrm>
-          <a:prstGeom prst="straightConnector1">
-            <a:avLst/>
-          </a:prstGeom>
-          <a:ln w="38100">
-            <a:solidFill>
-              <a:srgbClr val="FFC000"/>
-            </a:solidFill>
-            <a:tailEnd type="triangle"/>
-          </a:ln>
-        </p:spPr>
-        <p:style>
-          <a:lnRef idx="2">
-            <a:schemeClr val="accent1"/>
-          </a:lnRef>
-          <a:fillRef idx="0">
-            <a:schemeClr val="accent1"/>
-          </a:fillRef>
-          <a:effectRef idx="1">
-            <a:schemeClr val="accent1"/>
-          </a:effectRef>
-          <a:fontRef idx="minor">
-            <a:schemeClr val="tx1"/>
-          </a:fontRef>
-        </p:style>
-      </p:cxnSp>
-      <p:cxnSp>
-        <p:nvCxnSpPr>
-          <p:cNvPr id="19" name="Straight Arrow Connector 18">
-            <a:extLst>
-              <a:ext uri="{FF2B5EF4-FFF2-40B4-BE49-F238E27FC236}">
-                <a16:creationId xmlns:a16="http://schemas.microsoft.com/office/drawing/2014/main" id="{1F1607AC-B76D-07BC-F0E7-528BBEAFDA51}"/>
-              </a:ext>
-            </a:extLst>
-          </p:cNvPr>
-          <p:cNvCxnSpPr>
-            <a:cxnSpLocks/>
-          </p:cNvCxnSpPr>
-          <p:nvPr/>
-        </p:nvCxnSpPr>
-        <p:spPr>
-          <a:xfrm flipH="1" flipV="1">
-            <a:off x="7806088" y="5406917"/>
-            <a:ext cx="1466596" cy="279591"/>
-          </a:xfrm>
-          <a:prstGeom prst="straightConnector1">
-            <a:avLst/>
-          </a:prstGeom>
-          <a:ln w="38100">
-            <a:solidFill>
-              <a:srgbClr val="FFC000"/>
-            </a:solidFill>
-            <a:tailEnd type="triangle"/>
-          </a:ln>
-        </p:spPr>
-        <p:style>
-          <a:lnRef idx="2">
-            <a:schemeClr val="accent1"/>
-          </a:lnRef>
-          <a:fillRef idx="0">
-            <a:schemeClr val="accent1"/>
-          </a:fillRef>
-          <a:effectRef idx="1">
-            <a:schemeClr val="accent1"/>
-          </a:effectRef>
-          <a:fontRef idx="minor">
-            <a:schemeClr val="tx1"/>
-          </a:fontRef>
-        </p:style>
-      </p:cxnSp>
+              <a:tailEnd type="triangle"/>
+            </a:ln>
+          </p:spPr>
+          <p:style>
+            <a:lnRef idx="2">
+              <a:schemeClr val="accent1"/>
+            </a:lnRef>
+            <a:fillRef idx="0">
+              <a:schemeClr val="accent1"/>
+            </a:fillRef>
+            <a:effectRef idx="1">
+              <a:schemeClr val="accent1"/>
+            </a:effectRef>
+            <a:fontRef idx="minor">
+              <a:schemeClr val="tx1"/>
+            </a:fontRef>
+          </p:style>
+        </p:cxnSp>
+      </p:grpSp>
       <p:cxnSp>
         <p:nvCxnSpPr>
           <p:cNvPr id="21" name="Straight Arrow Connector 20">
@@ -12745,8 +12787,8 @@
           </a:p>
         </p:txBody>
       </p:sp>
-      <mc:AlternateContent xmlns:mc="http://schemas.openxmlformats.org/markup-compatibility/2006">
-        <mc:Choice xmlns:a14="http://schemas.microsoft.com/office/drawing/2010/main" Requires="a14">
+      <mc:AlternateContent xmlns:mc="http://schemas.openxmlformats.org/markup-compatibility/2006" xmlns:a14="http://schemas.microsoft.com/office/drawing/2010/main">
+        <mc:Choice Requires="a14">
           <p:sp>
             <p:nvSpPr>
               <p:cNvPr id="7" name="Content Placeholder 6">
@@ -12958,7 +13000,7 @@
             </p:txBody>
           </p:sp>
         </mc:Choice>
-        <mc:Fallback>
+        <mc:Fallback xmlns="">
           <p:sp>
             <p:nvSpPr>
               <p:cNvPr id="7" name="Content Placeholder 6">
